--- a/slide/L6_validation_supply.pptx
+++ b/slide/L6_validation_supply.pptx
@@ -3116,7 +3116,7 @@
             <a:avLst/>
           </a:prstGeom>
           <a:solidFill>
-            <a:srgbClr val="0F2D52"/>
+            <a:srgbClr val="081B33"/>
           </a:solidFill>
           <a:ln>
             <a:noFill/>
@@ -3152,8 +3152,8 @@
         </p:nvSpPr>
         <p:spPr>
           <a:xfrm>
-            <a:off x="0" y="914400"/>
-            <a:ext cx="365760" cy="2286000"/>
+            <a:off x="0" y="0"/>
+            <a:ext cx="12191695" cy="137160"/>
           </a:xfrm>
           <a:prstGeom prst="rect">
             <a:avLst/>
@@ -3189,14 +3189,186 @@
       </p:sp>
       <p:sp>
         <p:nvSpPr>
-          <p:cNvPr id="4" name="TextBox 3"/>
+          <p:cNvPr id="4" name="Oval 3"/>
+          <p:cNvSpPr/>
+          <p:nvPr/>
+        </p:nvSpPr>
+        <p:spPr>
+          <a:xfrm>
+            <a:off x="8686800" y="-914400"/>
+            <a:ext cx="2743200" cy="2743200"/>
+          </a:xfrm>
+          <a:prstGeom prst="ellipse">
+            <a:avLst/>
+          </a:prstGeom>
+          <a:noFill/>
+          <a:ln w="25400">
+            <a:solidFill>
+              <a:srgbClr val="00A0B0"/>
+            </a:solidFill>
+          </a:ln>
+        </p:spPr>
+        <p:style>
+          <a:lnRef idx="1">
+            <a:schemeClr val="accent1"/>
+          </a:lnRef>
+          <a:fillRef idx="3">
+            <a:schemeClr val="accent1"/>
+          </a:fillRef>
+          <a:effectRef idx="2">
+            <a:schemeClr val="accent1"/>
+          </a:effectRef>
+          <a:fontRef idx="minor">
+            <a:schemeClr val="lt1"/>
+          </a:fontRef>
+        </p:style>
+        <p:txBody>
+          <a:bodyPr rtlCol="0" anchor="ctr"/>
+          <a:lstStyle/>
+          <a:p>
+            <a:pPr algn="ctr"/>
+          </a:p>
+        </p:txBody>
+      </p:sp>
+      <p:sp>
+        <p:nvSpPr>
+          <p:cNvPr id="5" name="Oval 4"/>
+          <p:cNvSpPr/>
+          <p:nvPr/>
+        </p:nvSpPr>
+        <p:spPr>
+          <a:xfrm>
+            <a:off x="10515600" y="1371600"/>
+            <a:ext cx="1828800" cy="1828800"/>
+          </a:xfrm>
+          <a:prstGeom prst="ellipse">
+            <a:avLst/>
+          </a:prstGeom>
+          <a:noFill/>
+          <a:ln w="25400">
+            <a:solidFill>
+              <a:srgbClr val="00A0B0"/>
+            </a:solidFill>
+          </a:ln>
+        </p:spPr>
+        <p:style>
+          <a:lnRef idx="1">
+            <a:schemeClr val="accent1"/>
+          </a:lnRef>
+          <a:fillRef idx="3">
+            <a:schemeClr val="accent1"/>
+          </a:fillRef>
+          <a:effectRef idx="2">
+            <a:schemeClr val="accent1"/>
+          </a:effectRef>
+          <a:fontRef idx="minor">
+            <a:schemeClr val="lt1"/>
+          </a:fontRef>
+        </p:style>
+        <p:txBody>
+          <a:bodyPr rtlCol="0" anchor="ctr"/>
+          <a:lstStyle/>
+          <a:p>
+            <a:pPr algn="ctr"/>
+          </a:p>
+        </p:txBody>
+      </p:sp>
+      <p:sp>
+        <p:nvSpPr>
+          <p:cNvPr id="6" name="Oval 5"/>
+          <p:cNvSpPr/>
+          <p:nvPr/>
+        </p:nvSpPr>
+        <p:spPr>
+          <a:xfrm>
+            <a:off x="8458200" y="3429000"/>
+            <a:ext cx="2286000" cy="2286000"/>
+          </a:xfrm>
+          <a:prstGeom prst="ellipse">
+            <a:avLst/>
+          </a:prstGeom>
+          <a:noFill/>
+          <a:ln w="25400">
+            <a:solidFill>
+              <a:srgbClr val="00A0B0"/>
+            </a:solidFill>
+          </a:ln>
+        </p:spPr>
+        <p:style>
+          <a:lnRef idx="1">
+            <a:schemeClr val="accent1"/>
+          </a:lnRef>
+          <a:fillRef idx="3">
+            <a:schemeClr val="accent1"/>
+          </a:fillRef>
+          <a:effectRef idx="2">
+            <a:schemeClr val="accent1"/>
+          </a:effectRef>
+          <a:fontRef idx="minor">
+            <a:schemeClr val="lt1"/>
+          </a:fontRef>
+        </p:style>
+        <p:txBody>
+          <a:bodyPr rtlCol="0" anchor="ctr"/>
+          <a:lstStyle/>
+          <a:p>
+            <a:pPr algn="ctr"/>
+          </a:p>
+        </p:txBody>
+      </p:sp>
+      <p:sp>
+        <p:nvSpPr>
+          <p:cNvPr id="7" name="Rectangle 6"/>
+          <p:cNvSpPr/>
+          <p:nvPr/>
+        </p:nvSpPr>
+        <p:spPr>
+          <a:xfrm>
+            <a:off x="0" y="2286000"/>
+            <a:ext cx="228600" cy="2743200"/>
+          </a:xfrm>
+          <a:prstGeom prst="rect">
+            <a:avLst/>
+          </a:prstGeom>
+          <a:solidFill>
+            <a:srgbClr val="00A0B0"/>
+          </a:solidFill>
+          <a:ln>
+            <a:noFill/>
+          </a:ln>
+        </p:spPr>
+        <p:style>
+          <a:lnRef idx="1">
+            <a:schemeClr val="accent1"/>
+          </a:lnRef>
+          <a:fillRef idx="3">
+            <a:schemeClr val="accent1"/>
+          </a:fillRef>
+          <a:effectRef idx="2">
+            <a:schemeClr val="accent1"/>
+          </a:effectRef>
+          <a:fontRef idx="minor">
+            <a:schemeClr val="lt1"/>
+          </a:fontRef>
+        </p:style>
+        <p:txBody>
+          <a:bodyPr rtlCol="0" anchor="ctr"/>
+          <a:lstStyle/>
+          <a:p>
+            <a:pPr algn="ctr"/>
+          </a:p>
+        </p:txBody>
+      </p:sp>
+      <p:sp>
+        <p:nvSpPr>
+          <p:cNvPr id="8" name="TextBox 7"/>
           <p:cNvSpPr txBox="1"/>
           <p:nvPr/>
         </p:nvSpPr>
         <p:spPr>
           <a:xfrm>
-            <a:off x="731520" y="914400"/>
-            <a:ext cx="10058400" cy="548640"/>
+            <a:off x="548640" y="2286000"/>
+            <a:ext cx="7315200" cy="457200"/>
           </a:xfrm>
           <a:prstGeom prst="rect">
             <a:avLst/>
@@ -3211,7 +3383,7 @@
           <a:p>
             <a:pPr algn="l"/>
             <a:r>
-              <a:rPr sz="1800" b="1" i="0">
+              <a:rPr sz="1600" b="1" i="0">
                 <a:solidFill>
                   <a:srgbClr val="00A0B0"/>
                 </a:solidFill>
@@ -3224,14 +3396,14 @@
       </p:sp>
       <p:sp>
         <p:nvSpPr>
-          <p:cNvPr id="5" name="TextBox 4"/>
+          <p:cNvPr id="9" name="TextBox 8"/>
           <p:cNvSpPr txBox="1"/>
           <p:nvPr/>
         </p:nvSpPr>
         <p:spPr>
           <a:xfrm>
-            <a:off x="731520" y="1554480"/>
-            <a:ext cx="10058400" cy="1828800"/>
+            <a:off x="548640" y="2743200"/>
+            <a:ext cx="10515600" cy="2011680"/>
           </a:xfrm>
           <a:prstGeom prst="rect">
             <a:avLst/>
@@ -3246,7 +3418,7 @@
           <a:p>
             <a:pPr algn="l"/>
             <a:r>
-              <a:rPr sz="5400" b="1" i="0">
+              <a:rPr sz="5600" b="1" i="0">
                 <a:solidFill>
                   <a:srgbClr val="FFFFFF"/>
                 </a:solidFill>
@@ -3259,14 +3431,14 @@
       </p:sp>
       <p:sp>
         <p:nvSpPr>
-          <p:cNvPr id="6" name="TextBox 5"/>
+          <p:cNvPr id="10" name="TextBox 9"/>
           <p:cNvSpPr txBox="1"/>
           <p:nvPr/>
         </p:nvSpPr>
         <p:spPr>
           <a:xfrm>
-            <a:off x="731520" y="3566160"/>
-            <a:ext cx="10058400" cy="1097280"/>
+            <a:off x="548640" y="4572000"/>
+            <a:ext cx="10058400" cy="914400"/>
           </a:xfrm>
           <a:prstGeom prst="rect">
             <a:avLst/>
@@ -3281,27 +3453,107 @@
           <a:p>
             <a:pPr algn="l"/>
             <a:r>
-              <a:rPr sz="2400" b="0" i="1">
+              <a:rPr sz="2200" b="0" i="1">
+                <a:solidFill>
+                  <a:srgbClr val="6FD8E0"/>
+                </a:solidFill>
+                <a:latin typeface="Calibri"/>
+              </a:rPr>
+              <a:t>Pydantic, path traversal, il rischio delle dipendenze</a:t>
+            </a:r>
+          </a:p>
+        </p:txBody>
+      </p:sp>
+      <p:sp>
+        <p:nvSpPr>
+          <p:cNvPr id="11" name="Rounded Rectangle 10"/>
+          <p:cNvSpPr/>
+          <p:nvPr/>
+        </p:nvSpPr>
+        <p:spPr>
+          <a:xfrm>
+            <a:off x="548640" y="5669280"/>
+            <a:ext cx="2011680" cy="411480"/>
+          </a:xfrm>
+          <a:prstGeom prst="roundRect">
+            <a:avLst>
+              <a:gd name="adj" fmla="val 8000"/>
+            </a:avLst>
+          </a:prstGeom>
+          <a:solidFill>
+            <a:srgbClr val="00A0B0"/>
+          </a:solidFill>
+          <a:ln>
+            <a:noFill/>
+          </a:ln>
+        </p:spPr>
+        <p:style>
+          <a:lnRef idx="1">
+            <a:schemeClr val="accent1"/>
+          </a:lnRef>
+          <a:fillRef idx="3">
+            <a:schemeClr val="accent1"/>
+          </a:fillRef>
+          <a:effectRef idx="2">
+            <a:schemeClr val="accent1"/>
+          </a:effectRef>
+          <a:fontRef idx="minor">
+            <a:schemeClr val="lt1"/>
+          </a:fontRef>
+        </p:style>
+        <p:txBody>
+          <a:bodyPr rtlCol="0" anchor="ctr"/>
+          <a:lstStyle/>
+          <a:p>
+            <a:pPr algn="ctr"/>
+          </a:p>
+        </p:txBody>
+      </p:sp>
+      <p:sp>
+        <p:nvSpPr>
+          <p:cNvPr id="12" name="TextBox 11"/>
+          <p:cNvSpPr txBox="1"/>
+          <p:nvPr/>
+        </p:nvSpPr>
+        <p:spPr>
+          <a:xfrm>
+            <a:off x="548640" y="5669280"/>
+            <a:ext cx="2011680" cy="411480"/>
+          </a:xfrm>
+          <a:prstGeom prst="rect">
+            <a:avLst/>
+          </a:prstGeom>
+          <a:noFill/>
+        </p:spPr>
+        <p:txBody>
+          <a:bodyPr wrap="square" lIns="45720" rIns="45720" tIns="18288" bIns="18288" anchor="ctr">
+            <a:spAutoFit/>
+          </a:bodyPr>
+          <a:lstStyle/>
+          <a:p>
+            <a:pPr algn="ctr"/>
+            <a:r>
+              <a:rPr sz="1200" b="1" i="0">
                 <a:solidFill>
                   <a:srgbClr val="FFFFFF"/>
                 </a:solidFill>
                 <a:latin typeface="Calibri"/>
               </a:rPr>
-              <a:t>Pydantic, path traversal, e il rischio delle dipendenze</a:t>
-            </a:r>
-          </a:p>
-        </p:txBody>
-      </p:sp>
-      <p:sp>
-        <p:nvSpPr>
-          <p:cNvPr id="7" name="TextBox 6"/>
+              <a:t>⏱  Lezione 6 · 2 ore</a:t>
+            </a:r>
+          </a:p>
+        </p:txBody>
+      </p:sp>
+      <p:sp>
+        <p:nvSpPr>
+          <p:cNvPr id="13" name="TextBox 12"/>
           <p:cNvSpPr txBox="1"/>
           <p:nvPr/>
         </p:nvSpPr>
         <p:spPr>
           <a:xfrm>
-            <a:off x="731520" y="5029200"/>
-            <a:ext cx="10058400" cy="457200"/>
+            <a:off x="548640" y="6263640"/>
+            <a:ext cx="10972800" cy="365760"/>
           </a:xfrm>
           <a:prstGeom prst="rect">
             <a:avLst/>
@@ -3316,83 +3568,13 @@
           <a:p>
             <a:pPr algn="l"/>
             <a:r>
-              <a:rPr sz="1800" b="1" i="0">
-                <a:solidFill>
-                  <a:srgbClr val="00A0B0"/>
-                </a:solidFill>
-                <a:latin typeface="Calibri"/>
-              </a:rPr>
-              <a:t>⏱  Lezione 6 · 2 ore</a:t>
-            </a:r>
-          </a:p>
-        </p:txBody>
-      </p:sp>
-      <p:sp>
-        <p:nvSpPr>
-          <p:cNvPr id="8" name="TextBox 7"/>
-          <p:cNvSpPr txBox="1"/>
-          <p:nvPr/>
-        </p:nvSpPr>
-        <p:spPr>
-          <a:xfrm>
-            <a:off x="731520" y="5943600"/>
-            <a:ext cx="10058400" cy="457200"/>
-          </a:xfrm>
-          <a:prstGeom prst="rect">
-            <a:avLst/>
-          </a:prstGeom>
-          <a:noFill/>
-        </p:spPr>
-        <p:txBody>
-          <a:bodyPr wrap="square" lIns="45720" rIns="45720" tIns="18288" bIns="18288" anchor="t">
-            <a:spAutoFit/>
-          </a:bodyPr>
-          <a:lstStyle/>
-          <a:p>
-            <a:pPr algn="l"/>
-            <a:r>
-              <a:rPr sz="1200" b="0" i="0">
-                <a:solidFill>
-                  <a:srgbClr val="FFFFFF"/>
-                </a:solidFill>
-                <a:latin typeface="Calibri"/>
-              </a:rPr>
-              <a:t>Corso IFTS STEM · Specialista nelle Tecniche di Evoluzione e Manutenzione del Software</a:t>
-            </a:r>
-          </a:p>
-        </p:txBody>
-      </p:sp>
-      <p:sp>
-        <p:nvSpPr>
-          <p:cNvPr id="9" name="TextBox 8"/>
-          <p:cNvSpPr txBox="1"/>
-          <p:nvPr/>
-        </p:nvSpPr>
-        <p:spPr>
-          <a:xfrm>
-            <a:off x="731520" y="6263640"/>
-            <a:ext cx="10058400" cy="365760"/>
-          </a:xfrm>
-          <a:prstGeom prst="rect">
-            <a:avLst/>
-          </a:prstGeom>
-          <a:noFill/>
-        </p:spPr>
-        <p:txBody>
-          <a:bodyPr wrap="square" lIns="45720" rIns="45720" tIns="18288" bIns="18288" anchor="t">
-            <a:spAutoFit/>
-          </a:bodyPr>
-          <a:lstStyle/>
-          <a:p>
-            <a:pPr algn="l"/>
-            <a:r>
-              <a:rPr sz="1100" b="0" i="1">
-                <a:solidFill>
-                  <a:srgbClr val="FFFFFF"/>
-                </a:solidFill>
-                <a:latin typeface="Calibri"/>
-              </a:rPr>
-              <a:t>Ing. Alessandro Manneschi · Anno formativo 2024/2025</a:t>
+              <a:rPr sz="1000" b="0" i="0">
+                <a:solidFill>
+                  <a:srgbClr val="CBD0D8"/>
+                </a:solidFill>
+                <a:latin typeface="Calibri"/>
+              </a:rPr>
+              <a:t>Corso IFTS STEM · Ing. Alessandro Manneschi · 2024/2025</a:t>
             </a:r>
           </a:p>
         </p:txBody>
@@ -3424,13 +3606,13 @@
         <p:spPr>
           <a:xfrm>
             <a:off x="0" y="0"/>
-            <a:ext cx="12191695" cy="777240"/>
+            <a:ext cx="4114800" cy="6858000"/>
           </a:xfrm>
           <a:prstGeom prst="rect">
             <a:avLst/>
           </a:prstGeom>
           <a:solidFill>
-            <a:srgbClr val="0F2D52"/>
+            <a:srgbClr val="081B33"/>
           </a:solidFill>
           <a:ln>
             <a:noFill/>
@@ -3460,55 +3642,20 @@
       </p:sp>
       <p:sp>
         <p:nvSpPr>
-          <p:cNvPr id="3" name="TextBox 2"/>
-          <p:cNvSpPr txBox="1"/>
-          <p:nvPr/>
-        </p:nvSpPr>
-        <p:spPr>
-          <a:xfrm>
-            <a:off x="457200" y="164592"/>
-            <a:ext cx="10058400" cy="502920"/>
-          </a:xfrm>
-          <a:prstGeom prst="rect">
-            <a:avLst/>
-          </a:prstGeom>
-          <a:noFill/>
-        </p:spPr>
-        <p:txBody>
-          <a:bodyPr wrap="square" lIns="45720" rIns="45720" tIns="18288" bIns="18288" anchor="ctr">
-            <a:spAutoFit/>
-          </a:bodyPr>
-          <a:lstStyle/>
-          <a:p>
-            <a:pPr algn="l"/>
-            <a:r>
-              <a:rPr sz="2400" b="1" i="0">
-                <a:solidFill>
-                  <a:srgbClr val="FFFFFF"/>
-                </a:solidFill>
-                <a:latin typeface="Calibri"/>
-              </a:rPr>
-              <a:t>La correzione: 3 controlli obbligatori</a:t>
-            </a:r>
-          </a:p>
-        </p:txBody>
-      </p:sp>
-      <p:sp>
-        <p:nvSpPr>
-          <p:cNvPr id="4" name="Rectangle 3"/>
+          <p:cNvPr id="3" name="Rectangle 2"/>
           <p:cNvSpPr/>
           <p:nvPr/>
         </p:nvSpPr>
         <p:spPr>
           <a:xfrm>
-            <a:off x="9875520" y="164592"/>
-            <a:ext cx="2103120" cy="457200"/>
+            <a:off x="4114800" y="0"/>
+            <a:ext cx="8046720" cy="6858000"/>
           </a:xfrm>
           <a:prstGeom prst="rect">
             <a:avLst/>
           </a:prstGeom>
           <a:solidFill>
-            <a:srgbClr val="06A77D"/>
+            <a:srgbClr val="F1F4F8"/>
           </a:solidFill>
           <a:ln>
             <a:noFill/>
@@ -3538,60 +3685,23 @@
       </p:sp>
       <p:sp>
         <p:nvSpPr>
-          <p:cNvPr id="5" name="TextBox 4"/>
-          <p:cNvSpPr txBox="1"/>
-          <p:nvPr/>
-        </p:nvSpPr>
-        <p:spPr>
-          <a:xfrm>
-            <a:off x="9875520" y="182880"/>
-            <a:ext cx="2103120" cy="457200"/>
-          </a:xfrm>
-          <a:prstGeom prst="rect">
-            <a:avLst/>
-          </a:prstGeom>
-          <a:noFill/>
-        </p:spPr>
-        <p:txBody>
-          <a:bodyPr wrap="square" lIns="45720" rIns="45720" tIns="18288" bIns="18288" anchor="ctr">
-            <a:spAutoFit/>
-          </a:bodyPr>
-          <a:lstStyle/>
-          <a:p>
-            <a:pPr algn="ctr"/>
-            <a:r>
-              <a:rPr sz="1200" b="1" i="0">
-                <a:solidFill>
-                  <a:srgbClr val="FFFFFF"/>
-                </a:solidFill>
-                <a:latin typeface="Calibri"/>
-              </a:rPr>
-              <a:t>✅ PYTHON</a:t>
-            </a:r>
-          </a:p>
-        </p:txBody>
-      </p:sp>
-      <p:sp>
-        <p:nvSpPr>
-          <p:cNvPr id="6" name="Rectangle 5"/>
+          <p:cNvPr id="4" name="Rectangle 3"/>
           <p:cNvSpPr/>
           <p:nvPr/>
         </p:nvSpPr>
         <p:spPr>
           <a:xfrm>
-            <a:off x="457200" y="1097280"/>
-            <a:ext cx="11247120" cy="4572000"/>
+            <a:off x="4114800" y="0"/>
+            <a:ext cx="137160" cy="6858000"/>
           </a:xfrm>
           <a:prstGeom prst="rect">
             <a:avLst/>
           </a:prstGeom>
           <a:solidFill>
-            <a:srgbClr val="F1F4F8"/>
+            <a:srgbClr val="00A0B0"/>
           </a:solidFill>
           <a:ln>
-            <a:solidFill>
-              <a:srgbClr val="06A77D"/>
-            </a:solidFill>
+            <a:noFill/>
           </a:ln>
         </p:spPr>
         <p:style>
@@ -3618,14 +3728,14 @@
       </p:sp>
       <p:sp>
         <p:nvSpPr>
-          <p:cNvPr id="7" name="TextBox 6"/>
+          <p:cNvPr id="5" name="TextBox 4"/>
           <p:cNvSpPr txBox="1"/>
           <p:nvPr/>
         </p:nvSpPr>
         <p:spPr>
           <a:xfrm>
-            <a:off x="640080" y="1280160"/>
-            <a:ext cx="10972800" cy="4206240"/>
+            <a:off x="274320" y="2103120"/>
+            <a:ext cx="3657600" cy="2286000"/>
           </a:xfrm>
           <a:prstGeom prst="rect">
             <a:avLst/>
@@ -3638,269 +3748,29 @@
           </a:bodyPr>
           <a:lstStyle/>
           <a:p>
-            <a:pPr algn="l"/>
-            <a:r>
-              <a:rPr sz="1400" b="0" i="0">
-                <a:solidFill>
-                  <a:srgbClr val="1A1A2E"/>
-                </a:solidFill>
-                <a:latin typeface="Consolas"/>
-              </a:rPr>
-              <a:t>import os</a:t>
-            </a:r>
-          </a:p>
-          <a:p>
-            <a:pPr algn="l"/>
-            <a:r>
-              <a:rPr sz="1400" b="0" i="0">
-                <a:solidFill>
-                  <a:srgbClr val="1A1A2E"/>
-                </a:solidFill>
-                <a:latin typeface="Consolas"/>
-              </a:rPr>
-              <a:t>from flask import abort, send_from_directory</a:t>
-            </a:r>
-          </a:p>
-          <a:p>
-            <a:pPr algn="l"/>
-            <a:r>
-              <a:rPr sz="1400" b="0" i="0">
-                <a:solidFill>
-                  <a:srgbClr val="1A1A2E"/>
-                </a:solidFill>
-                <a:latin typeface="Consolas"/>
-              </a:rPr>
-              <a:t/>
-            </a:r>
-          </a:p>
-          <a:p>
-            <a:pPr algn="l"/>
-            <a:r>
-              <a:rPr sz="1400" b="0" i="0">
-                <a:solidFill>
-                  <a:srgbClr val="1A1A2E"/>
-                </a:solidFill>
-                <a:latin typeface="Consolas"/>
-              </a:rPr>
-              <a:t>UPLOAD_DIR = os.path.realpath("./uploads")</a:t>
-            </a:r>
-          </a:p>
-          <a:p>
-            <a:pPr algn="l"/>
-            <a:r>
-              <a:rPr sz="1400" b="0" i="0">
-                <a:solidFill>
-                  <a:srgbClr val="1A1A2E"/>
-                </a:solidFill>
-                <a:latin typeface="Consolas"/>
-              </a:rPr>
-              <a:t>ALLOWED_EXTS = {".pdf", ".png", ".jpg"}</a:t>
-            </a:r>
-          </a:p>
-          <a:p>
-            <a:pPr algn="l"/>
-            <a:r>
-              <a:rPr sz="1400" b="0" i="0">
-                <a:solidFill>
-                  <a:srgbClr val="1A1A2E"/>
-                </a:solidFill>
-                <a:latin typeface="Consolas"/>
-              </a:rPr>
-              <a:t/>
-            </a:r>
-          </a:p>
-          <a:p>
-            <a:pPr algn="l"/>
-            <a:r>
-              <a:rPr sz="1400" b="0" i="0">
-                <a:solidFill>
-                  <a:srgbClr val="1A1A2E"/>
-                </a:solidFill>
-                <a:latin typeface="Consolas"/>
-              </a:rPr>
-              <a:t>@app.route("/download")</a:t>
-            </a:r>
-          </a:p>
-          <a:p>
-            <a:pPr algn="l"/>
-            <a:r>
-              <a:rPr sz="1400" b="0" i="0">
-                <a:solidFill>
-                  <a:srgbClr val="1A1A2E"/>
-                </a:solidFill>
-                <a:latin typeface="Consolas"/>
-              </a:rPr>
-              <a:t>@login_required</a:t>
-            </a:r>
-          </a:p>
-          <a:p>
-            <a:pPr algn="l"/>
-            <a:r>
-              <a:rPr sz="1400" b="0" i="0">
-                <a:solidFill>
-                  <a:srgbClr val="1A1A2E"/>
-                </a:solidFill>
-                <a:latin typeface="Consolas"/>
-              </a:rPr>
-              <a:t>def download():</a:t>
-            </a:r>
-          </a:p>
-          <a:p>
-            <a:pPr algn="l"/>
-            <a:r>
-              <a:rPr sz="1400" b="0" i="0">
-                <a:solidFill>
-                  <a:srgbClr val="1A1A2E"/>
-                </a:solidFill>
-                <a:latin typeface="Consolas"/>
-              </a:rPr>
-              <a:t>    filename = request.args.get("file", "")</a:t>
-            </a:r>
-          </a:p>
-          <a:p>
-            <a:pPr algn="l"/>
-            <a:r>
-              <a:rPr sz="1400" b="0" i="0">
-                <a:solidFill>
-                  <a:srgbClr val="1A1A2E"/>
-                </a:solidFill>
-                <a:latin typeface="Consolas"/>
-              </a:rPr>
-              <a:t>    # 1) Whitelist: solo nome file, NO separatori</a:t>
-            </a:r>
-          </a:p>
-          <a:p>
-            <a:pPr algn="l"/>
-            <a:r>
-              <a:rPr sz="1400" b="0" i="0">
-                <a:solidFill>
-                  <a:srgbClr val="1A1A2E"/>
-                </a:solidFill>
-                <a:latin typeface="Consolas"/>
-              </a:rPr>
-              <a:t>    if "/" in filename or "\\" in filename or filename.startswith("."):</a:t>
-            </a:r>
-          </a:p>
-          <a:p>
-            <a:pPr algn="l"/>
-            <a:r>
-              <a:rPr sz="1400" b="0" i="0">
-                <a:solidFill>
-                  <a:srgbClr val="1A1A2E"/>
-                </a:solidFill>
-                <a:latin typeface="Consolas"/>
-              </a:rPr>
-              <a:t>        abort(400)</a:t>
-            </a:r>
-          </a:p>
-          <a:p>
-            <a:pPr algn="l"/>
-            <a:r>
-              <a:rPr sz="1400" b="0" i="0">
-                <a:solidFill>
-                  <a:srgbClr val="1A1A2E"/>
-                </a:solidFill>
-                <a:latin typeface="Consolas"/>
-              </a:rPr>
-              <a:t>    # 2) Whitelist estensione</a:t>
-            </a:r>
-          </a:p>
-          <a:p>
-            <a:pPr algn="l"/>
-            <a:r>
-              <a:rPr sz="1400" b="0" i="0">
-                <a:solidFill>
-                  <a:srgbClr val="1A1A2E"/>
-                </a:solidFill>
-                <a:latin typeface="Consolas"/>
-              </a:rPr>
-              <a:t>    if os.path.splitext(filename)[1].lower() not in ALLOWED_EXTS:</a:t>
-            </a:r>
-          </a:p>
-          <a:p>
-            <a:pPr algn="l"/>
-            <a:r>
-              <a:rPr sz="1400" b="0" i="0">
-                <a:solidFill>
-                  <a:srgbClr val="1A1A2E"/>
-                </a:solidFill>
-                <a:latin typeface="Consolas"/>
-              </a:rPr>
-              <a:t>        abort(400)</a:t>
-            </a:r>
-          </a:p>
-          <a:p>
-            <a:pPr algn="l"/>
-            <a:r>
-              <a:rPr sz="1400" b="0" i="0">
-                <a:solidFill>
-                  <a:srgbClr val="1A1A2E"/>
-                </a:solidFill>
-                <a:latin typeface="Consolas"/>
-              </a:rPr>
-              <a:t>    # 3) realpath + startswith</a:t>
-            </a:r>
-          </a:p>
-          <a:p>
-            <a:pPr algn="l"/>
-            <a:r>
-              <a:rPr sz="1400" b="0" i="0">
-                <a:solidFill>
-                  <a:srgbClr val="1A1A2E"/>
-                </a:solidFill>
-                <a:latin typeface="Consolas"/>
-              </a:rPr>
-              <a:t>    full = os.path.realpath(os.path.join(UPLOAD_DIR, filename))</a:t>
-            </a:r>
-          </a:p>
-          <a:p>
-            <a:pPr algn="l"/>
-            <a:r>
-              <a:rPr sz="1400" b="0" i="0">
-                <a:solidFill>
-                  <a:srgbClr val="1A1A2E"/>
-                </a:solidFill>
-                <a:latin typeface="Consolas"/>
-              </a:rPr>
-              <a:t>    if not full.startswith(UPLOAD_DIR + os.sep):</a:t>
-            </a:r>
-          </a:p>
-          <a:p>
-            <a:pPr algn="l"/>
-            <a:r>
-              <a:rPr sz="1400" b="0" i="0">
-                <a:solidFill>
-                  <a:srgbClr val="1A1A2E"/>
-                </a:solidFill>
-                <a:latin typeface="Consolas"/>
-              </a:rPr>
-              <a:t>        abort(403)</a:t>
-            </a:r>
-          </a:p>
-          <a:p>
-            <a:pPr algn="l"/>
-            <a:r>
-              <a:rPr sz="1400" b="0" i="0">
-                <a:solidFill>
-                  <a:srgbClr val="1A1A2E"/>
-                </a:solidFill>
-                <a:latin typeface="Consolas"/>
-              </a:rPr>
-              <a:t>    return send_from_directory(UPLOAD_DIR, filename, as_attachment=True)</a:t>
-            </a:r>
-          </a:p>
-        </p:txBody>
-      </p:sp>
-      <p:sp>
-        <p:nvSpPr>
-          <p:cNvPr id="8" name="TextBox 7"/>
+            <a:pPr algn="ctr"/>
+            <a:r>
+              <a:rPr sz="17000" b="1" i="0">
+                <a:solidFill>
+                  <a:srgbClr val="00A0B0"/>
+                </a:solidFill>
+                <a:latin typeface="Calibri"/>
+              </a:rPr>
+              <a:t>03</a:t>
+            </a:r>
+          </a:p>
+        </p:txBody>
+      </p:sp>
+      <p:sp>
+        <p:nvSpPr>
+          <p:cNvPr id="6" name="TextBox 5"/>
           <p:cNvSpPr txBox="1"/>
           <p:nvPr/>
         </p:nvSpPr>
         <p:spPr>
           <a:xfrm>
-            <a:off x="457200" y="5852160"/>
-            <a:ext cx="11247120" cy="457200"/>
+            <a:off x="274320" y="4572000"/>
+            <a:ext cx="3657600" cy="457200"/>
           </a:xfrm>
           <a:prstGeom prst="rect">
             <a:avLst/>
@@ -3913,15 +3783,85 @@
           </a:bodyPr>
           <a:lstStyle/>
           <a:p>
+            <a:pPr algn="ctr"/>
+            <a:r>
+              <a:rPr sz="2000" b="1" i="0">
+                <a:solidFill>
+                  <a:srgbClr val="6FD8E0"/>
+                </a:solidFill>
+                <a:latin typeface="Calibri"/>
+              </a:rPr>
+              <a:t>PARTE</a:t>
+            </a:r>
+          </a:p>
+        </p:txBody>
+      </p:sp>
+      <p:sp>
+        <p:nvSpPr>
+          <p:cNvPr id="7" name="TextBox 6"/>
+          <p:cNvSpPr txBox="1"/>
+          <p:nvPr/>
+        </p:nvSpPr>
+        <p:spPr>
+          <a:xfrm>
+            <a:off x="4572000" y="2286000"/>
+            <a:ext cx="7315200" cy="1645920"/>
+          </a:xfrm>
+          <a:prstGeom prst="rect">
+            <a:avLst/>
+          </a:prstGeom>
+          <a:noFill/>
+        </p:spPr>
+        <p:txBody>
+          <a:bodyPr wrap="square" lIns="45720" rIns="45720" tIns="18288" bIns="18288" anchor="t">
+            <a:spAutoFit/>
+          </a:bodyPr>
+          <a:lstStyle/>
+          <a:p>
             <a:pPr algn="l"/>
             <a:r>
-              <a:rPr sz="1400" b="1" i="1">
-                <a:solidFill>
-                  <a:srgbClr val="06A77D"/>
-                </a:solidFill>
-                <a:latin typeface="Calibri"/>
-              </a:rPr>
-              <a:t>✓  Quattro righe di controllo, tre attacchi neutralizzati</a:t>
+              <a:rPr sz="4400" b="1" i="0">
+                <a:solidFill>
+                  <a:srgbClr val="0F2D52"/>
+                </a:solidFill>
+                <a:latin typeface="Calibri"/>
+              </a:rPr>
+              <a:t>Supply chain</a:t>
+            </a:r>
+          </a:p>
+        </p:txBody>
+      </p:sp>
+      <p:sp>
+        <p:nvSpPr>
+          <p:cNvPr id="8" name="TextBox 7"/>
+          <p:cNvSpPr txBox="1"/>
+          <p:nvPr/>
+        </p:nvSpPr>
+        <p:spPr>
+          <a:xfrm>
+            <a:off x="4572000" y="3931920"/>
+            <a:ext cx="7315200" cy="1828800"/>
+          </a:xfrm>
+          <a:prstGeom prst="rect">
+            <a:avLst/>
+          </a:prstGeom>
+          <a:noFill/>
+        </p:spPr>
+        <p:txBody>
+          <a:bodyPr wrap="square" lIns="45720" rIns="45720" tIns="18288" bIns="18288" anchor="t">
+            <a:spAutoFit/>
+          </a:bodyPr>
+          <a:lstStyle/>
+          <a:p>
+            <a:pPr algn="l"/>
+            <a:r>
+              <a:rPr sz="1800" b="0" i="1">
+                <a:solidFill>
+                  <a:srgbClr val="6B7280"/>
+                </a:solidFill>
+                <a:latin typeface="Calibri"/>
+              </a:rPr>
+              <a:t>Il tuo codice è il 5%. Il resto sono dipendenze.</a:t>
             </a:r>
           </a:p>
         </p:txBody>
@@ -3970,7 +3910,7 @@
         <p:spPr>
           <a:xfrm>
             <a:off x="457200" y="6473952"/>
-            <a:ext cx="7315200" cy="320040"/>
+            <a:ext cx="7315200" cy="292608"/>
           </a:xfrm>
           <a:prstGeom prst="rect">
             <a:avLst/>
@@ -3991,7 +3931,7 @@
                 </a:solidFill>
                 <a:latin typeface="Calibri"/>
               </a:rPr>
-              <a:t>Secure Coding · Corso IFTS STEM · A. Manneschi</a:t>
+              <a:t>Secure Coding · Corso IFTS STEM · A. Manneschi · 2024/2025</a:t>
             </a:r>
           </a:p>
         </p:txBody>
@@ -4005,7 +3945,7 @@
         <p:spPr>
           <a:xfrm>
             <a:off x="10515600" y="6473952"/>
-            <a:ext cx="1188720" cy="320040"/>
+            <a:ext cx="1188720" cy="292608"/>
           </a:xfrm>
           <a:prstGeom prst="rect">
             <a:avLst/>
@@ -4058,7 +3998,7 @@
         <p:spPr>
           <a:xfrm>
             <a:off x="0" y="0"/>
-            <a:ext cx="2286000" cy="6858000"/>
+            <a:ext cx="12191695" cy="777240"/>
           </a:xfrm>
           <a:prstGeom prst="rect">
             <a:avLst/>
@@ -4100,8 +4040,8 @@
         </p:nvSpPr>
         <p:spPr>
           <a:xfrm>
-            <a:off x="274320" y="2286000"/>
-            <a:ext cx="1828800" cy="1828800"/>
+            <a:off x="457200" y="164592"/>
+            <a:ext cx="10972800" cy="502920"/>
           </a:xfrm>
           <a:prstGeom prst="rect">
             <a:avLst/>
@@ -4109,20 +4049,20 @@
           <a:noFill/>
         </p:spPr>
         <p:txBody>
-          <a:bodyPr wrap="square" lIns="45720" rIns="45720" tIns="18288" bIns="18288" anchor="t">
+          <a:bodyPr wrap="square" lIns="45720" rIns="45720" tIns="18288" bIns="18288" anchor="ctr">
             <a:spAutoFit/>
           </a:bodyPr>
           <a:lstStyle/>
           <a:p>
-            <a:pPr algn="ctr"/>
-            <a:r>
-              <a:rPr sz="12000" b="1" i="0">
-                <a:solidFill>
-                  <a:srgbClr val="00A0B0"/>
-                </a:solidFill>
-                <a:latin typeface="Calibri"/>
-              </a:rPr>
-              <a:t>03</a:t>
+            <a:pPr algn="l"/>
+            <a:r>
+              <a:rPr sz="2400" b="1" i="0">
+                <a:solidFill>
+                  <a:srgbClr val="FFFFFF"/>
+                </a:solidFill>
+                <a:latin typeface="Calibri"/>
+              </a:rPr>
+              <a:t>📦  Caso reale: Log4Shell (dicembre 2021)</a:t>
             </a:r>
           </a:p>
         </p:txBody>
@@ -4135,8 +4075,8 @@
         </p:nvSpPr>
         <p:spPr>
           <a:xfrm>
-            <a:off x="2743200" y="2560320"/>
-            <a:ext cx="8961120" cy="1371600"/>
+            <a:off x="640080" y="1097280"/>
+            <a:ext cx="10972800" cy="5029200"/>
           </a:xfrm>
           <a:prstGeom prst="rect">
             <a:avLst/>
@@ -4144,62 +4084,239 @@
           <a:noFill/>
         </p:spPr>
         <p:txBody>
-          <a:bodyPr wrap="square" lIns="45720" rIns="45720" tIns="18288" bIns="18288" anchor="t">
+          <a:bodyPr wrap="square">
             <a:spAutoFit/>
           </a:bodyPr>
           <a:lstStyle/>
           <a:p>
-            <a:pPr algn="l"/>
-            <a:r>
-              <a:rPr sz="4200" b="1" i="0">
-                <a:solidFill>
-                  <a:srgbClr val="0F2D52"/>
-                </a:solidFill>
-                <a:latin typeface="Calibri"/>
-              </a:rPr>
-              <a:t>Supply chain</a:t>
-            </a:r>
-          </a:p>
-        </p:txBody>
-      </p:sp>
-      <p:sp>
-        <p:nvSpPr>
-          <p:cNvPr id="5" name="TextBox 4"/>
-          <p:cNvSpPr txBox="1"/>
-          <p:nvPr/>
-        </p:nvSpPr>
-        <p:spPr>
-          <a:xfrm>
-            <a:off x="2743200" y="3931920"/>
-            <a:ext cx="8961120" cy="1828800"/>
-          </a:xfrm>
-          <a:prstGeom prst="rect">
-            <a:avLst/>
-          </a:prstGeom>
-          <a:noFill/>
-        </p:spPr>
-        <p:txBody>
-          <a:bodyPr wrap="square" lIns="45720" rIns="45720" tIns="18288" bIns="18288" anchor="t">
-            <a:spAutoFit/>
-          </a:bodyPr>
-          <a:lstStyle/>
-          <a:p>
-            <a:pPr algn="l"/>
-            <a:r>
-              <a:rPr sz="1800" b="0" i="1">
-                <a:solidFill>
-                  <a:srgbClr val="6B7280"/>
-                </a:solidFill>
-                <a:latin typeface="Calibri"/>
-              </a:rPr>
-              <a:t>Il tuo codice è il 5% del tuo software. Il resto sono dipendenze.</a:t>
+            <a:pPr>
+              <a:lnSpc>
+                <a:spcPct val="150000"/>
+              </a:lnSpc>
+              <a:spcAft>
+                <a:spcPts val="400"/>
+              </a:spcAft>
+            </a:pPr>
+            <a:r>
+              <a:rPr sz="2000" b="1">
+                <a:solidFill>
+                  <a:srgbClr val="00A0B0"/>
+                </a:solidFill>
+                <a:latin typeface="Calibri"/>
+              </a:rPr>
+              <a:t>▸  </a:t>
+            </a:r>
+            <a:r>
+              <a:rPr sz="2000">
+                <a:solidFill>
+                  <a:srgbClr val="1A1A2E"/>
+                </a:solidFill>
+                <a:latin typeface="Calibri"/>
+              </a:rPr>
+              <a:t>CVE-2021-44228 — Log4j (libreria logging Java)</a:t>
+            </a:r>
+          </a:p>
+          <a:p>
+            <a:pPr>
+              <a:lnSpc>
+                <a:spcPct val="150000"/>
+              </a:lnSpc>
+              <a:spcAft>
+                <a:spcPts val="400"/>
+              </a:spcAft>
+            </a:pPr>
+            <a:r>
+              <a:rPr sz="2000" b="1">
+                <a:solidFill>
+                  <a:srgbClr val="00A0B0"/>
+                </a:solidFill>
+                <a:latin typeface="Calibri"/>
+              </a:rPr>
+              <a:t>▸  </a:t>
+            </a:r>
+            <a:r>
+              <a:rPr sz="2000">
+                <a:solidFill>
+                  <a:srgbClr val="1A1A2E"/>
+                </a:solidFill>
+                <a:latin typeface="Calibri"/>
+              </a:rPr>
+              <a:t>CVSS: 10.0 (massimo)</a:t>
+            </a:r>
+          </a:p>
+          <a:p>
+            <a:pPr>
+              <a:lnSpc>
+                <a:spcPct val="150000"/>
+              </a:lnSpc>
+              <a:spcAft>
+                <a:spcPts val="400"/>
+              </a:spcAft>
+            </a:pPr>
+            <a:r>
+              <a:rPr sz="2000" b="1">
+                <a:solidFill>
+                  <a:srgbClr val="00A0B0"/>
+                </a:solidFill>
+                <a:latin typeface="Calibri"/>
+              </a:rPr>
+              <a:t>▸  </a:t>
+            </a:r>
+            <a:r>
+              <a:rPr sz="2000">
+                <a:solidFill>
+                  <a:srgbClr val="1A1A2E"/>
+                </a:solidFill>
+                <a:latin typeface="Calibri"/>
+              </a:rPr>
+              <a:t>Stringa nel User-Agent → RCE sul server</a:t>
+            </a:r>
+          </a:p>
+          <a:p>
+            <a:pPr>
+              <a:lnSpc>
+                <a:spcPct val="150000"/>
+              </a:lnSpc>
+              <a:spcAft>
+                <a:spcPts val="400"/>
+              </a:spcAft>
+            </a:pPr>
+            <a:r>
+              <a:rPr sz="2000" b="1">
+                <a:solidFill>
+                  <a:srgbClr val="00A0B0"/>
+                </a:solidFill>
+                <a:latin typeface="Calibri"/>
+              </a:rPr>
+              <a:t>▸  </a:t>
+            </a:r>
+            <a:r>
+              <a:rPr sz="2000">
+                <a:solidFill>
+                  <a:srgbClr val="1A1A2E"/>
+                </a:solidFill>
+                <a:latin typeface="Calibri"/>
+              </a:rPr>
+              <a:t/>
+            </a:r>
+          </a:p>
+          <a:p>
+            <a:pPr>
+              <a:lnSpc>
+                <a:spcPct val="150000"/>
+              </a:lnSpc>
+              <a:spcAft>
+                <a:spcPts val="400"/>
+              </a:spcAft>
+            </a:pPr>
+            <a:r>
+              <a:rPr sz="2000" b="1">
+                <a:solidFill>
+                  <a:srgbClr val="00A0B0"/>
+                </a:solidFill>
+                <a:latin typeface="Calibri"/>
+              </a:rPr>
+              <a:t>▸  </a:t>
+            </a:r>
+            <a:r>
+              <a:rPr sz="2000">
+                <a:solidFill>
+                  <a:srgbClr val="1A1A2E"/>
+                </a:solidFill>
+                <a:latin typeface="Calibri"/>
+              </a:rPr>
+              <a:t>Impatto: ~10% dei server enterprise al mondo</a:t>
+            </a:r>
+          </a:p>
+          <a:p>
+            <a:pPr>
+              <a:lnSpc>
+                <a:spcPct val="150000"/>
+              </a:lnSpc>
+              <a:spcAft>
+                <a:spcPts val="400"/>
+              </a:spcAft>
+            </a:pPr>
+            <a:r>
+              <a:rPr sz="2000" b="1">
+                <a:solidFill>
+                  <a:srgbClr val="00A0B0"/>
+                </a:solidFill>
+                <a:latin typeface="Calibri"/>
+              </a:rPr>
+              <a:t>▸  </a:t>
+            </a:r>
+            <a:r>
+              <a:rPr sz="2000">
+                <a:solidFill>
+                  <a:srgbClr val="1A1A2E"/>
+                </a:solidFill>
+                <a:latin typeface="Calibri"/>
+              </a:rPr>
+              <a:t>Mezza Internet ha patchato in emergenza per 2 settimane</a:t>
+            </a:r>
+          </a:p>
+          <a:p>
+            <a:pPr>
+              <a:lnSpc>
+                <a:spcPct val="150000"/>
+              </a:lnSpc>
+              <a:spcAft>
+                <a:spcPts val="400"/>
+              </a:spcAft>
+            </a:pPr>
+            <a:r>
+              <a:rPr sz="2000" b="1">
+                <a:solidFill>
+                  <a:srgbClr val="00A0B0"/>
+                </a:solidFill>
+                <a:latin typeface="Calibri"/>
+              </a:rPr>
+              <a:t>▸  </a:t>
+            </a:r>
+            <a:r>
+              <a:rPr sz="2000">
+                <a:solidFill>
+                  <a:srgbClr val="1A1A2E"/>
+                </a:solidFill>
+                <a:latin typeface="Calibri"/>
+              </a:rPr>
+              <a:t/>
+            </a:r>
+          </a:p>
+          <a:p>
+            <a:pPr>
+              <a:lnSpc>
+                <a:spcPct val="150000"/>
+              </a:lnSpc>
+              <a:spcAft>
+                <a:spcPts val="400"/>
+              </a:spcAft>
+            </a:pPr>
+            <a:r>
+              <a:rPr sz="2000" b="1">
+                <a:solidFill>
+                  <a:srgbClr val="00A0B0"/>
+                </a:solidFill>
+                <a:latin typeface="Calibri"/>
+              </a:rPr>
+              <a:t>▸  </a:t>
+            </a:r>
+            <a:r>
+              <a:rPr sz="2000">
+                <a:solidFill>
+                  <a:srgbClr val="1A1A2E"/>
+                </a:solidFill>
+                <a:latin typeface="Calibri"/>
+              </a:rPr>
+              <a:t>Chi aveva SBOM: identificato in 5 minuti dove era vulnerabile</a:t>
             </a:r>
           </a:p>
         </p:txBody>
       </p:sp>
       <p:cxnSp>
         <p:nvCxnSpPr>
-          <p:cNvPr id="6" name="Connector 5"/>
+          <p:cNvPr id="5" name="Connector 4"/>
           <p:cNvCxnSpPr/>
           <p:nvPr/>
         </p:nvCxnSpPr>
@@ -4234,14 +4351,14 @@
       </p:cxnSp>
       <p:sp>
         <p:nvSpPr>
-          <p:cNvPr id="7" name="TextBox 6"/>
+          <p:cNvPr id="6" name="TextBox 5"/>
           <p:cNvSpPr txBox="1"/>
           <p:nvPr/>
         </p:nvSpPr>
         <p:spPr>
           <a:xfrm>
             <a:off x="457200" y="6473952"/>
-            <a:ext cx="7315200" cy="320040"/>
+            <a:ext cx="7315200" cy="292608"/>
           </a:xfrm>
           <a:prstGeom prst="rect">
             <a:avLst/>
@@ -4262,21 +4379,21 @@
                 </a:solidFill>
                 <a:latin typeface="Calibri"/>
               </a:rPr>
-              <a:t>Secure Coding · Corso IFTS STEM · A. Manneschi</a:t>
-            </a:r>
-          </a:p>
-        </p:txBody>
-      </p:sp>
-      <p:sp>
-        <p:nvSpPr>
-          <p:cNvPr id="8" name="TextBox 7"/>
+              <a:t>Secure Coding · Corso IFTS STEM · A. Manneschi · 2024/2025</a:t>
+            </a:r>
+          </a:p>
+        </p:txBody>
+      </p:sp>
+      <p:sp>
+        <p:nvSpPr>
+          <p:cNvPr id="7" name="TextBox 6"/>
           <p:cNvSpPr txBox="1"/>
           <p:nvPr/>
         </p:nvSpPr>
         <p:spPr>
           <a:xfrm>
             <a:off x="10515600" y="6473952"/>
-            <a:ext cx="1188720" cy="320040"/>
+            <a:ext cx="1188720" cy="292608"/>
           </a:xfrm>
           <a:prstGeom prst="rect">
             <a:avLst/>
@@ -4393,21 +4510,45 @@
                 </a:solidFill>
                 <a:latin typeface="Calibri"/>
               </a:rPr>
-              <a:t>Caso reale: Log4Shell (dicembre 2021)</a:t>
-            </a:r>
-          </a:p>
-        </p:txBody>
-      </p:sp>
-      <p:sp>
-        <p:nvSpPr>
-          <p:cNvPr id="4" name="TextBox 3"/>
+              <a:t>pip-audit in azione</a:t>
+            </a:r>
+          </a:p>
+        </p:txBody>
+      </p:sp>
+      <p:pic>
+        <p:nvPicPr>
+          <p:cNvPr id="4" name="Picture 3" descr="cap6_pip_audit.png"/>
+          <p:cNvPicPr>
+            <a:picLocks noChangeAspect="1"/>
+          </p:cNvPicPr>
+          <p:nvPr/>
+        </p:nvPicPr>
+        <p:blipFill>
+          <a:blip r:embed="rId2"/>
+          <a:stretch>
+            <a:fillRect/>
+          </a:stretch>
+        </p:blipFill>
+        <p:spPr>
+          <a:xfrm>
+            <a:off x="640080" y="1097280"/>
+            <a:ext cx="10881360" cy="4572000"/>
+          </a:xfrm>
+          <a:prstGeom prst="rect">
+            <a:avLst/>
+          </a:prstGeom>
+        </p:spPr>
+      </p:pic>
+      <p:sp>
+        <p:nvSpPr>
+          <p:cNvPr id="5" name="TextBox 4"/>
           <p:cNvSpPr txBox="1"/>
           <p:nvPr/>
         </p:nvSpPr>
         <p:spPr>
           <a:xfrm>
-            <a:off x="640080" y="1005840"/>
-            <a:ext cx="10972800" cy="5029200"/>
+            <a:off x="457200" y="5852160"/>
+            <a:ext cx="11247120" cy="365760"/>
           </a:xfrm>
           <a:prstGeom prst="rect">
             <a:avLst/>
@@ -4415,240 +4556,27 @@
           <a:noFill/>
         </p:spPr>
         <p:txBody>
-          <a:bodyPr wrap="square">
+          <a:bodyPr wrap="square" lIns="45720" rIns="45720" tIns="18288" bIns="18288" anchor="t">
             <a:spAutoFit/>
           </a:bodyPr>
           <a:lstStyle/>
           <a:p>
-            <a:pPr>
-              <a:lnSpc>
-                <a:spcPct val="150000"/>
-              </a:lnSpc>
-            </a:pPr>
-            <a:r>
-              <a:rPr sz="2000" b="1">
-                <a:solidFill>
-                  <a:srgbClr val="00A0B0"/>
-                </a:solidFill>
-                <a:latin typeface="Calibri"/>
-              </a:rPr>
-              <a:t>▸  </a:t>
-            </a:r>
-            <a:r>
-              <a:rPr sz="2000">
-                <a:solidFill>
-                  <a:srgbClr val="1A1A2E"/>
-                </a:solidFill>
-                <a:latin typeface="Calibri"/>
-              </a:rPr>
-              <a:t>CVE-2021-44228 — Log4j (libreria di logging Java)</a:t>
-            </a:r>
-          </a:p>
-          <a:p>
-            <a:pPr>
-              <a:lnSpc>
-                <a:spcPct val="150000"/>
-              </a:lnSpc>
-            </a:pPr>
-            <a:r>
-              <a:rPr sz="2000" b="1">
-                <a:solidFill>
-                  <a:srgbClr val="00A0B0"/>
-                </a:solidFill>
-                <a:latin typeface="Calibri"/>
-              </a:rPr>
-              <a:t>▸  </a:t>
-            </a:r>
-            <a:r>
-              <a:rPr sz="2000">
-                <a:solidFill>
-                  <a:srgbClr val="1A1A2E"/>
-                </a:solidFill>
-                <a:latin typeface="Calibri"/>
-              </a:rPr>
-              <a:t>CVSS: 10.0 (massimo)</a:t>
-            </a:r>
-          </a:p>
-          <a:p>
-            <a:pPr>
-              <a:lnSpc>
-                <a:spcPct val="150000"/>
-              </a:lnSpc>
-            </a:pPr>
-            <a:r>
-              <a:rPr sz="2000" b="1">
-                <a:solidFill>
-                  <a:srgbClr val="00A0B0"/>
-                </a:solidFill>
-                <a:latin typeface="Calibri"/>
-              </a:rPr>
-              <a:t>▸  </a:t>
-            </a:r>
-            <a:r>
-              <a:rPr sz="2000">
-                <a:solidFill>
-                  <a:srgbClr val="1A1A2E"/>
-                </a:solidFill>
-                <a:latin typeface="Calibri"/>
-              </a:rPr>
-              <a:t>Stringa nel User-Agent → RCE sul server</a:t>
-            </a:r>
-          </a:p>
-          <a:p>
-            <a:pPr>
-              <a:lnSpc>
-                <a:spcPct val="150000"/>
-              </a:lnSpc>
-            </a:pPr>
-            <a:r>
-              <a:rPr sz="2000" b="1">
-                <a:solidFill>
-                  <a:srgbClr val="00A0B0"/>
-                </a:solidFill>
-                <a:latin typeface="Calibri"/>
-              </a:rPr>
-              <a:t>▸  </a:t>
-            </a:r>
-            <a:r>
-              <a:rPr sz="2000">
-                <a:solidFill>
-                  <a:srgbClr val="1A1A2E"/>
-                </a:solidFill>
-                <a:latin typeface="Calibri"/>
-              </a:rPr>
-              <a:t/>
-            </a:r>
-          </a:p>
-          <a:p>
-            <a:pPr>
-              <a:lnSpc>
-                <a:spcPct val="150000"/>
-              </a:lnSpc>
-            </a:pPr>
-            <a:r>
-              <a:rPr sz="2000" b="1">
-                <a:solidFill>
-                  <a:srgbClr val="00A0B0"/>
-                </a:solidFill>
-                <a:latin typeface="Calibri"/>
-              </a:rPr>
-              <a:t>▸  </a:t>
-            </a:r>
-            <a:r>
-              <a:rPr sz="2000">
-                <a:solidFill>
-                  <a:srgbClr val="1A1A2E"/>
-                </a:solidFill>
-                <a:latin typeface="Calibri"/>
-              </a:rPr>
-              <a:t>Impatto: ~10% di tutti i server enterprise al mondo</a:t>
-            </a:r>
-          </a:p>
-          <a:p>
-            <a:pPr>
-              <a:lnSpc>
-                <a:spcPct val="150000"/>
-              </a:lnSpc>
-            </a:pPr>
-            <a:r>
-              <a:rPr sz="2000" b="1">
-                <a:solidFill>
-                  <a:srgbClr val="00A0B0"/>
-                </a:solidFill>
-                <a:latin typeface="Calibri"/>
-              </a:rPr>
-              <a:t>▸  </a:t>
-            </a:r>
-            <a:r>
-              <a:rPr sz="2000">
-                <a:solidFill>
-                  <a:srgbClr val="1A1A2E"/>
-                </a:solidFill>
-                <a:latin typeface="Calibri"/>
-              </a:rPr>
-              <a:t>Mezza Internet ha patchato in emergenza per 2 settimane</a:t>
-            </a:r>
-          </a:p>
-          <a:p>
-            <a:pPr>
-              <a:lnSpc>
-                <a:spcPct val="150000"/>
-              </a:lnSpc>
-            </a:pPr>
-            <a:r>
-              <a:rPr sz="2000" b="1">
-                <a:solidFill>
-                  <a:srgbClr val="00A0B0"/>
-                </a:solidFill>
-                <a:latin typeface="Calibri"/>
-              </a:rPr>
-              <a:t>▸  </a:t>
-            </a:r>
-            <a:r>
-              <a:rPr sz="2000">
-                <a:solidFill>
-                  <a:srgbClr val="1A1A2E"/>
-                </a:solidFill>
-                <a:latin typeface="Calibri"/>
-              </a:rPr>
-              <a:t/>
-            </a:r>
-          </a:p>
-          <a:p>
-            <a:pPr>
-              <a:lnSpc>
-                <a:spcPct val="150000"/>
-              </a:lnSpc>
-            </a:pPr>
-            <a:r>
-              <a:rPr sz="2000" b="1">
-                <a:solidFill>
-                  <a:srgbClr val="00A0B0"/>
-                </a:solidFill>
-                <a:latin typeface="Calibri"/>
-              </a:rPr>
-              <a:t>▸  </a:t>
-            </a:r>
-            <a:r>
-              <a:rPr sz="2000">
-                <a:solidFill>
-                  <a:srgbClr val="1A1A2E"/>
-                </a:solidFill>
-                <a:latin typeface="Calibri"/>
-              </a:rPr>
-              <a:t>Chi aveva un SBOM: identificato in 5 minuti dove era vulnerabile</a:t>
-            </a:r>
-          </a:p>
-          <a:p>
-            <a:pPr>
-              <a:lnSpc>
-                <a:spcPct val="150000"/>
-              </a:lnSpc>
-            </a:pPr>
-            <a:r>
-              <a:rPr sz="2000" b="1">
-                <a:solidFill>
-                  <a:srgbClr val="00A0B0"/>
-                </a:solidFill>
-                <a:latin typeface="Calibri"/>
-              </a:rPr>
-              <a:t>▸  </a:t>
-            </a:r>
-            <a:r>
-              <a:rPr sz="2000">
-                <a:solidFill>
-                  <a:srgbClr val="1A1A2E"/>
-                </a:solidFill>
-                <a:latin typeface="Calibri"/>
-              </a:rPr>
-              <a:t>Chi non l'aveva: cercato per settimane</a:t>
+            <a:pPr algn="ctr"/>
+            <a:r>
+              <a:rPr sz="1300" b="0" i="1">
+                <a:solidFill>
+                  <a:srgbClr val="6B7280"/>
+                </a:solidFill>
+                <a:latin typeface="Calibri"/>
+              </a:rPr>
+              <a:t>Trovi le CVE → aggiorni → zero vulnerabilità</a:t>
             </a:r>
           </a:p>
         </p:txBody>
       </p:sp>
       <p:cxnSp>
         <p:nvCxnSpPr>
-          <p:cNvPr id="5" name="Connector 4"/>
+          <p:cNvPr id="6" name="Connector 5"/>
           <p:cNvCxnSpPr/>
           <p:nvPr/>
         </p:nvCxnSpPr>
@@ -4683,14 +4611,14 @@
       </p:cxnSp>
       <p:sp>
         <p:nvSpPr>
-          <p:cNvPr id="6" name="TextBox 5"/>
+          <p:cNvPr id="7" name="TextBox 6"/>
           <p:cNvSpPr txBox="1"/>
           <p:nvPr/>
         </p:nvSpPr>
         <p:spPr>
           <a:xfrm>
             <a:off x="457200" y="6473952"/>
-            <a:ext cx="7315200" cy="320040"/>
+            <a:ext cx="7315200" cy="292608"/>
           </a:xfrm>
           <a:prstGeom prst="rect">
             <a:avLst/>
@@ -4711,21 +4639,21 @@
                 </a:solidFill>
                 <a:latin typeface="Calibri"/>
               </a:rPr>
-              <a:t>Secure Coding · Corso IFTS STEM · A. Manneschi</a:t>
-            </a:r>
-          </a:p>
-        </p:txBody>
-      </p:sp>
-      <p:sp>
-        <p:nvSpPr>
-          <p:cNvPr id="7" name="TextBox 6"/>
+              <a:t>Secure Coding · Corso IFTS STEM · A. Manneschi · 2024/2025</a:t>
+            </a:r>
+          </a:p>
+        </p:txBody>
+      </p:sp>
+      <p:sp>
+        <p:nvSpPr>
+          <p:cNvPr id="8" name="TextBox 7"/>
           <p:cNvSpPr txBox="1"/>
           <p:nvPr/>
         </p:nvSpPr>
         <p:spPr>
           <a:xfrm>
             <a:off x="10515600" y="6473952"/>
-            <a:ext cx="1188720" cy="320040"/>
+            <a:ext cx="1188720" cy="292608"/>
           </a:xfrm>
           <a:prstGeom prst="rect">
             <a:avLst/>
@@ -4821,7 +4749,7 @@
         <p:spPr>
           <a:xfrm>
             <a:off x="457200" y="164592"/>
-            <a:ext cx="10058400" cy="502920"/>
+            <a:ext cx="10972800" cy="502920"/>
           </a:xfrm>
           <a:prstGeom prst="rect">
             <a:avLst/>
@@ -4842,27 +4770,27 @@
                 </a:solidFill>
                 <a:latin typeface="Calibri"/>
               </a:rPr>
-              <a:t>pip-audit — scoprire CVE nelle dipendenze</a:t>
-            </a:r>
-          </a:p>
-        </p:txBody>
-      </p:sp>
-      <p:sp>
-        <p:nvSpPr>
-          <p:cNvPr id="4" name="Rectangle 3"/>
+              <a:t>📌  Cosa portare a casa</a:t>
+            </a:r>
+          </a:p>
+        </p:txBody>
+      </p:sp>
+      <p:sp>
+        <p:nvSpPr>
+          <p:cNvPr id="4" name="Oval 3"/>
           <p:cNvSpPr/>
           <p:nvPr/>
         </p:nvSpPr>
         <p:spPr>
           <a:xfrm>
-            <a:off x="9875520" y="164592"/>
-            <a:ext cx="2103120" cy="457200"/>
-          </a:xfrm>
-          <a:prstGeom prst="rect">
+            <a:off x="914400" y="1440180"/>
+            <a:ext cx="777240" cy="777240"/>
+          </a:xfrm>
+          <a:prstGeom prst="ellipse">
             <a:avLst/>
           </a:prstGeom>
           <a:solidFill>
-            <a:srgbClr val="06A77D"/>
+            <a:srgbClr val="00A0B0"/>
           </a:solidFill>
           <a:ln>
             <a:noFill/>
@@ -4898,8 +4826,8 @@
         </p:nvSpPr>
         <p:spPr>
           <a:xfrm>
-            <a:off x="9875520" y="182880"/>
-            <a:ext cx="2103120" cy="457200"/>
+            <a:off x="914400" y="1440180"/>
+            <a:ext cx="777240" cy="777240"/>
           </a:xfrm>
           <a:prstGeom prst="rect">
             <a:avLst/>
@@ -4914,37 +4842,39 @@
           <a:p>
             <a:pPr algn="ctr"/>
             <a:r>
-              <a:rPr sz="1200" b="1" i="0">
+              <a:rPr sz="2800" b="1" i="0">
                 <a:solidFill>
                   <a:srgbClr val="FFFFFF"/>
                 </a:solidFill>
                 <a:latin typeface="Calibri"/>
               </a:rPr>
-              <a:t>✅ BASH</a:t>
-            </a:r>
-          </a:p>
-        </p:txBody>
-      </p:sp>
-      <p:sp>
-        <p:nvSpPr>
-          <p:cNvPr id="6" name="Rectangle 5"/>
+              <a:t>1</a:t>
+            </a:r>
+          </a:p>
+        </p:txBody>
+      </p:sp>
+      <p:sp>
+        <p:nvSpPr>
+          <p:cNvPr id="6" name="Rounded Rectangle 5"/>
           <p:cNvSpPr/>
           <p:nvPr/>
         </p:nvSpPr>
         <p:spPr>
           <a:xfrm>
-            <a:off x="457200" y="1097280"/>
-            <a:ext cx="11247120" cy="4572000"/>
-          </a:xfrm>
-          <a:prstGeom prst="rect">
-            <a:avLst/>
+            <a:off x="2011680" y="1440180"/>
+            <a:ext cx="9144000" cy="777240"/>
+          </a:xfrm>
+          <a:prstGeom prst="roundRect">
+            <a:avLst>
+              <a:gd name="adj" fmla="val 8000"/>
+            </a:avLst>
           </a:prstGeom>
           <a:solidFill>
-            <a:srgbClr val="F1F4F8"/>
+            <a:srgbClr val="FBFBFD"/>
           </a:solidFill>
-          <a:ln>
+          <a:ln w="19050">
             <a:solidFill>
-              <a:srgbClr val="06A77D"/>
+              <a:srgbClr val="00A0B0"/>
             </a:solidFill>
           </a:ln>
         </p:spPr>
@@ -4978,8 +4908,8 @@
         </p:nvSpPr>
         <p:spPr>
           <a:xfrm>
-            <a:off x="640080" y="1280160"/>
-            <a:ext cx="10972800" cy="4206240"/>
+            <a:off x="2286000" y="1440180"/>
+            <a:ext cx="8686800" cy="777240"/>
           </a:xfrm>
           <a:prstGeom prst="rect">
             <a:avLst/>
@@ -4987,226 +4917,77 @@
           <a:noFill/>
         </p:spPr>
         <p:txBody>
-          <a:bodyPr wrap="square" lIns="45720" rIns="45720" tIns="18288" bIns="18288" anchor="t">
+          <a:bodyPr wrap="square" lIns="45720" rIns="45720" tIns="18288" bIns="18288" anchor="ctr">
             <a:spAutoFit/>
           </a:bodyPr>
           <a:lstStyle/>
           <a:p>
             <a:pPr algn="l"/>
             <a:r>
-              <a:rPr sz="1400" b="0" i="0">
+              <a:rPr sz="1800" b="0" i="0">
                 <a:solidFill>
                   <a:srgbClr val="1A1A2E"/>
                 </a:solidFill>
-                <a:latin typeface="Consolas"/>
-              </a:rPr>
-              <a:t>$ pip install pip-audit</a:t>
-            </a:r>
-          </a:p>
-          <a:p>
-            <a:pPr algn="l"/>
-            <a:r>
-              <a:rPr sz="1400" b="0" i="0">
-                <a:solidFill>
-                  <a:srgbClr val="1A1A2E"/>
-                </a:solidFill>
-                <a:latin typeface="Consolas"/>
-              </a:rPr>
-              <a:t>$ pip-audit</a:t>
-            </a:r>
-          </a:p>
-          <a:p>
-            <a:pPr algn="l"/>
-            <a:r>
-              <a:rPr sz="1400" b="0" i="0">
-                <a:solidFill>
-                  <a:srgbClr val="1A1A2E"/>
-                </a:solidFill>
-                <a:latin typeface="Consolas"/>
-              </a:rPr>
-              <a:t/>
-            </a:r>
-          </a:p>
-          <a:p>
-            <a:pPr algn="l"/>
-            <a:r>
-              <a:rPr sz="1400" b="0" i="0">
-                <a:solidFill>
-                  <a:srgbClr val="1A1A2E"/>
-                </a:solidFill>
-                <a:latin typeface="Consolas"/>
-              </a:rPr>
-              <a:t>Found 2 known vulnerabilities in 1 package</a:t>
-            </a:r>
-          </a:p>
-          <a:p>
-            <a:pPr algn="l"/>
-            <a:r>
-              <a:rPr sz="1400" b="0" i="0">
-                <a:solidFill>
-                  <a:srgbClr val="1A1A2E"/>
-                </a:solidFill>
-                <a:latin typeface="Consolas"/>
-              </a:rPr>
-              <a:t>Name   Version  ID                  Fix Versions</a:t>
-            </a:r>
-          </a:p>
-          <a:p>
-            <a:pPr algn="l"/>
-            <a:r>
-              <a:rPr sz="1400" b="0" i="0">
-                <a:solidFill>
-                  <a:srgbClr val="1A1A2E"/>
-                </a:solidFill>
-                <a:latin typeface="Consolas"/>
-              </a:rPr>
-              <a:t>flask  2.0.0    GHSA-m2qf-hxjv-5gpq  2.2.5</a:t>
-            </a:r>
-          </a:p>
-          <a:p>
-            <a:pPr algn="l"/>
-            <a:r>
-              <a:rPr sz="1400" b="0" i="0">
-                <a:solidFill>
-                  <a:srgbClr val="1A1A2E"/>
-                </a:solidFill>
-                <a:latin typeface="Consolas"/>
-              </a:rPr>
-              <a:t>flask  2.0.0    GHSA-4j93-pq9p-vpc2  2.3.2</a:t>
-            </a:r>
-          </a:p>
-          <a:p>
-            <a:pPr algn="l"/>
-            <a:r>
-              <a:rPr sz="1400" b="0" i="0">
-                <a:solidFill>
-                  <a:srgbClr val="1A1A2E"/>
-                </a:solidFill>
-                <a:latin typeface="Consolas"/>
-              </a:rPr>
-              <a:t/>
-            </a:r>
-          </a:p>
-          <a:p>
-            <a:pPr algn="l"/>
-            <a:r>
-              <a:rPr sz="1400" b="0" i="0">
-                <a:solidFill>
-                  <a:srgbClr val="1A1A2E"/>
-                </a:solidFill>
-                <a:latin typeface="Consolas"/>
-              </a:rPr>
-              <a:t># Aggiorna:</a:t>
-            </a:r>
-          </a:p>
-          <a:p>
-            <a:pPr algn="l"/>
-            <a:r>
-              <a:rPr sz="1400" b="0" i="0">
-                <a:solidFill>
-                  <a:srgbClr val="1A1A2E"/>
-                </a:solidFill>
-                <a:latin typeface="Consolas"/>
-              </a:rPr>
-              <a:t>$ pip install --upgrade flask</a:t>
-            </a:r>
-          </a:p>
-          <a:p>
-            <a:pPr algn="l"/>
-            <a:r>
-              <a:rPr sz="1400" b="0" i="0">
-                <a:solidFill>
-                  <a:srgbClr val="1A1A2E"/>
-                </a:solidFill>
-                <a:latin typeface="Consolas"/>
-              </a:rPr>
-              <a:t>$ pip-audit</a:t>
-            </a:r>
-          </a:p>
-          <a:p>
-            <a:pPr algn="l"/>
-            <a:r>
-              <a:rPr sz="1400" b="0" i="0">
-                <a:solidFill>
-                  <a:srgbClr val="1A1A2E"/>
-                </a:solidFill>
-                <a:latin typeface="Consolas"/>
-              </a:rPr>
-              <a:t>No known vulnerabilities found ✓</a:t>
-            </a:r>
-          </a:p>
-          <a:p>
-            <a:pPr algn="l"/>
-            <a:r>
-              <a:rPr sz="1400" b="0" i="0">
-                <a:solidFill>
-                  <a:srgbClr val="1A1A2E"/>
-                </a:solidFill>
-                <a:latin typeface="Consolas"/>
-              </a:rPr>
-              <a:t/>
-            </a:r>
-          </a:p>
-          <a:p>
-            <a:pPr algn="l"/>
-            <a:r>
-              <a:rPr sz="1400" b="0" i="0">
-                <a:solidFill>
-                  <a:srgbClr val="1A1A2E"/>
-                </a:solidFill>
-                <a:latin typeface="Consolas"/>
-              </a:rPr>
-              <a:t># Equivalenti per altri linguaggi:</a:t>
-            </a:r>
-          </a:p>
-          <a:p>
-            <a:pPr algn="l"/>
-            <a:r>
-              <a:rPr sz="1400" b="0" i="0">
-                <a:solidFill>
-                  <a:srgbClr val="1A1A2E"/>
-                </a:solidFill>
-                <a:latin typeface="Consolas"/>
-              </a:rPr>
-              <a:t>#   npm audit (Node.js)</a:t>
-            </a:r>
-          </a:p>
-          <a:p>
-            <a:pPr algn="l"/>
-            <a:r>
-              <a:rPr sz="1400" b="0" i="0">
-                <a:solidFill>
-                  <a:srgbClr val="1A1A2E"/>
-                </a:solidFill>
-                <a:latin typeface="Consolas"/>
-              </a:rPr>
-              <a:t>#   OWASP Dependency-Check (Java/Maven)</a:t>
-            </a:r>
-          </a:p>
-          <a:p>
-            <a:pPr algn="l"/>
-            <a:r>
-              <a:rPr sz="1400" b="0" i="0">
-                <a:solidFill>
-                  <a:srgbClr val="1A1A2E"/>
-                </a:solidFill>
-                <a:latin typeface="Consolas"/>
-              </a:rPr>
-              <a:t>#   Snyk (commerciale, multi-linguaggio)</a:t>
-            </a:r>
-          </a:p>
-        </p:txBody>
-      </p:sp>
-      <p:sp>
-        <p:nvSpPr>
-          <p:cNvPr id="8" name="TextBox 7"/>
+                <a:latin typeface="Calibri"/>
+              </a:rPr>
+              <a:t>Validation, sanitization, encoding: cose DIVERSE</a:t>
+            </a:r>
+          </a:p>
+        </p:txBody>
+      </p:sp>
+      <p:sp>
+        <p:nvSpPr>
+          <p:cNvPr id="8" name="Oval 7"/>
+          <p:cNvSpPr/>
+          <p:nvPr/>
+        </p:nvSpPr>
+        <p:spPr>
+          <a:xfrm>
+            <a:off x="914400" y="2354580"/>
+            <a:ext cx="777240" cy="777240"/>
+          </a:xfrm>
+          <a:prstGeom prst="ellipse">
+            <a:avLst/>
+          </a:prstGeom>
+          <a:solidFill>
+            <a:srgbClr val="00A0B0"/>
+          </a:solidFill>
+          <a:ln>
+            <a:noFill/>
+          </a:ln>
+        </p:spPr>
+        <p:style>
+          <a:lnRef idx="1">
+            <a:schemeClr val="accent1"/>
+          </a:lnRef>
+          <a:fillRef idx="3">
+            <a:schemeClr val="accent1"/>
+          </a:fillRef>
+          <a:effectRef idx="2">
+            <a:schemeClr val="accent1"/>
+          </a:effectRef>
+          <a:fontRef idx="minor">
+            <a:schemeClr val="lt1"/>
+          </a:fontRef>
+        </p:style>
+        <p:txBody>
+          <a:bodyPr rtlCol="0" anchor="ctr"/>
+          <a:lstStyle/>
+          <a:p>
+            <a:pPr algn="ctr"/>
+          </a:p>
+        </p:txBody>
+      </p:sp>
+      <p:sp>
+        <p:nvSpPr>
+          <p:cNvPr id="9" name="TextBox 8"/>
           <p:cNvSpPr txBox="1"/>
           <p:nvPr/>
         </p:nvSpPr>
         <p:spPr>
           <a:xfrm>
-            <a:off x="457200" y="5852160"/>
-            <a:ext cx="11247120" cy="457200"/>
+            <a:off x="914400" y="2354580"/>
+            <a:ext cx="777240" cy="777240"/>
           </a:xfrm>
           <a:prstGeom prst="rect">
             <a:avLst/>
@@ -5214,27 +4995,589 @@
           <a:noFill/>
         </p:spPr>
         <p:txBody>
-          <a:bodyPr wrap="square" lIns="45720" rIns="45720" tIns="18288" bIns="18288" anchor="t">
+          <a:bodyPr wrap="square" lIns="45720" rIns="45720" tIns="18288" bIns="18288" anchor="ctr">
             <a:spAutoFit/>
           </a:bodyPr>
           <a:lstStyle/>
           <a:p>
+            <a:pPr algn="ctr"/>
+            <a:r>
+              <a:rPr sz="2800" b="1" i="0">
+                <a:solidFill>
+                  <a:srgbClr val="FFFFFF"/>
+                </a:solidFill>
+                <a:latin typeface="Calibri"/>
+              </a:rPr>
+              <a:t>2</a:t>
+            </a:r>
+          </a:p>
+        </p:txBody>
+      </p:sp>
+      <p:sp>
+        <p:nvSpPr>
+          <p:cNvPr id="10" name="Rounded Rectangle 9"/>
+          <p:cNvSpPr/>
+          <p:nvPr/>
+        </p:nvSpPr>
+        <p:spPr>
+          <a:xfrm>
+            <a:off x="2011680" y="2354580"/>
+            <a:ext cx="9144000" cy="777240"/>
+          </a:xfrm>
+          <a:prstGeom prst="roundRect">
+            <a:avLst>
+              <a:gd name="adj" fmla="val 8000"/>
+            </a:avLst>
+          </a:prstGeom>
+          <a:solidFill>
+            <a:srgbClr val="FBFBFD"/>
+          </a:solidFill>
+          <a:ln w="19050">
+            <a:solidFill>
+              <a:srgbClr val="00A0B0"/>
+            </a:solidFill>
+          </a:ln>
+        </p:spPr>
+        <p:style>
+          <a:lnRef idx="1">
+            <a:schemeClr val="accent1"/>
+          </a:lnRef>
+          <a:fillRef idx="3">
+            <a:schemeClr val="accent1"/>
+          </a:fillRef>
+          <a:effectRef idx="2">
+            <a:schemeClr val="accent1"/>
+          </a:effectRef>
+          <a:fontRef idx="minor">
+            <a:schemeClr val="lt1"/>
+          </a:fontRef>
+        </p:style>
+        <p:txBody>
+          <a:bodyPr rtlCol="0" anchor="ctr"/>
+          <a:lstStyle/>
+          <a:p>
+            <a:pPr algn="ctr"/>
+          </a:p>
+        </p:txBody>
+      </p:sp>
+      <p:sp>
+        <p:nvSpPr>
+          <p:cNvPr id="11" name="TextBox 10"/>
+          <p:cNvSpPr txBox="1"/>
+          <p:nvPr/>
+        </p:nvSpPr>
+        <p:spPr>
+          <a:xfrm>
+            <a:off x="2286000" y="2354580"/>
+            <a:ext cx="8686800" cy="777240"/>
+          </a:xfrm>
+          <a:prstGeom prst="rect">
+            <a:avLst/>
+          </a:prstGeom>
+          <a:noFill/>
+        </p:spPr>
+        <p:txBody>
+          <a:bodyPr wrap="square" lIns="45720" rIns="45720" tIns="18288" bIns="18288" anchor="ctr">
+            <a:spAutoFit/>
+          </a:bodyPr>
+          <a:lstStyle/>
+          <a:p>
             <a:pPr algn="l"/>
             <a:r>
-              <a:rPr sz="1400" b="1" i="1">
-                <a:solidFill>
-                  <a:srgbClr val="06A77D"/>
-                </a:solidFill>
-                <a:latin typeface="Calibri"/>
-              </a:rPr>
-              <a:t>✓  Da fare in CI: blocca il deploy se ci sono CVE Critical/High</a:t>
+              <a:rPr sz="1800" b="0" i="0">
+                <a:solidFill>
+                  <a:srgbClr val="1A1A2E"/>
+                </a:solidFill>
+                <a:latin typeface="Calibri"/>
+              </a:rPr>
+              <a:t>Whitelist sempre. Blacklist mai.</a:t>
+            </a:r>
+          </a:p>
+        </p:txBody>
+      </p:sp>
+      <p:sp>
+        <p:nvSpPr>
+          <p:cNvPr id="12" name="Oval 11"/>
+          <p:cNvSpPr/>
+          <p:nvPr/>
+        </p:nvSpPr>
+        <p:spPr>
+          <a:xfrm>
+            <a:off x="914400" y="3268980"/>
+            <a:ext cx="777240" cy="777240"/>
+          </a:xfrm>
+          <a:prstGeom prst="ellipse">
+            <a:avLst/>
+          </a:prstGeom>
+          <a:solidFill>
+            <a:srgbClr val="00A0B0"/>
+          </a:solidFill>
+          <a:ln>
+            <a:noFill/>
+          </a:ln>
+        </p:spPr>
+        <p:style>
+          <a:lnRef idx="1">
+            <a:schemeClr val="accent1"/>
+          </a:lnRef>
+          <a:fillRef idx="3">
+            <a:schemeClr val="accent1"/>
+          </a:fillRef>
+          <a:effectRef idx="2">
+            <a:schemeClr val="accent1"/>
+          </a:effectRef>
+          <a:fontRef idx="minor">
+            <a:schemeClr val="lt1"/>
+          </a:fontRef>
+        </p:style>
+        <p:txBody>
+          <a:bodyPr rtlCol="0" anchor="ctr"/>
+          <a:lstStyle/>
+          <a:p>
+            <a:pPr algn="ctr"/>
+          </a:p>
+        </p:txBody>
+      </p:sp>
+      <p:sp>
+        <p:nvSpPr>
+          <p:cNvPr id="13" name="TextBox 12"/>
+          <p:cNvSpPr txBox="1"/>
+          <p:nvPr/>
+        </p:nvSpPr>
+        <p:spPr>
+          <a:xfrm>
+            <a:off x="914400" y="3268980"/>
+            <a:ext cx="777240" cy="777240"/>
+          </a:xfrm>
+          <a:prstGeom prst="rect">
+            <a:avLst/>
+          </a:prstGeom>
+          <a:noFill/>
+        </p:spPr>
+        <p:txBody>
+          <a:bodyPr wrap="square" lIns="45720" rIns="45720" tIns="18288" bIns="18288" anchor="ctr">
+            <a:spAutoFit/>
+          </a:bodyPr>
+          <a:lstStyle/>
+          <a:p>
+            <a:pPr algn="ctr"/>
+            <a:r>
+              <a:rPr sz="2800" b="1" i="0">
+                <a:solidFill>
+                  <a:srgbClr val="FFFFFF"/>
+                </a:solidFill>
+                <a:latin typeface="Calibri"/>
+              </a:rPr>
+              <a:t>3</a:t>
+            </a:r>
+          </a:p>
+        </p:txBody>
+      </p:sp>
+      <p:sp>
+        <p:nvSpPr>
+          <p:cNvPr id="14" name="Rounded Rectangle 13"/>
+          <p:cNvSpPr/>
+          <p:nvPr/>
+        </p:nvSpPr>
+        <p:spPr>
+          <a:xfrm>
+            <a:off x="2011680" y="3268980"/>
+            <a:ext cx="9144000" cy="777240"/>
+          </a:xfrm>
+          <a:prstGeom prst="roundRect">
+            <a:avLst>
+              <a:gd name="adj" fmla="val 8000"/>
+            </a:avLst>
+          </a:prstGeom>
+          <a:solidFill>
+            <a:srgbClr val="FBFBFD"/>
+          </a:solidFill>
+          <a:ln w="19050">
+            <a:solidFill>
+              <a:srgbClr val="00A0B0"/>
+            </a:solidFill>
+          </a:ln>
+        </p:spPr>
+        <p:style>
+          <a:lnRef idx="1">
+            <a:schemeClr val="accent1"/>
+          </a:lnRef>
+          <a:fillRef idx="3">
+            <a:schemeClr val="accent1"/>
+          </a:fillRef>
+          <a:effectRef idx="2">
+            <a:schemeClr val="accent1"/>
+          </a:effectRef>
+          <a:fontRef idx="minor">
+            <a:schemeClr val="lt1"/>
+          </a:fontRef>
+        </p:style>
+        <p:txBody>
+          <a:bodyPr rtlCol="0" anchor="ctr"/>
+          <a:lstStyle/>
+          <a:p>
+            <a:pPr algn="ctr"/>
+          </a:p>
+        </p:txBody>
+      </p:sp>
+      <p:sp>
+        <p:nvSpPr>
+          <p:cNvPr id="15" name="TextBox 14"/>
+          <p:cNvSpPr txBox="1"/>
+          <p:nvPr/>
+        </p:nvSpPr>
+        <p:spPr>
+          <a:xfrm>
+            <a:off x="2286000" y="3268980"/>
+            <a:ext cx="8686800" cy="777240"/>
+          </a:xfrm>
+          <a:prstGeom prst="rect">
+            <a:avLst/>
+          </a:prstGeom>
+          <a:noFill/>
+        </p:spPr>
+        <p:txBody>
+          <a:bodyPr wrap="square" lIns="45720" rIns="45720" tIns="18288" bIns="18288" anchor="ctr">
+            <a:spAutoFit/>
+          </a:bodyPr>
+          <a:lstStyle/>
+          <a:p>
+            <a:pPr algn="l"/>
+            <a:r>
+              <a:rPr sz="1800" b="0" i="0">
+                <a:solidFill>
+                  <a:srgbClr val="1A1A2E"/>
+                </a:solidFill>
+                <a:latin typeface="Calibri"/>
+              </a:rPr>
+              <a:t>Pydantic per validation strutturata in Python</a:t>
+            </a:r>
+          </a:p>
+        </p:txBody>
+      </p:sp>
+      <p:sp>
+        <p:nvSpPr>
+          <p:cNvPr id="16" name="Oval 15"/>
+          <p:cNvSpPr/>
+          <p:nvPr/>
+        </p:nvSpPr>
+        <p:spPr>
+          <a:xfrm>
+            <a:off x="914400" y="4183380"/>
+            <a:ext cx="777240" cy="777240"/>
+          </a:xfrm>
+          <a:prstGeom prst="ellipse">
+            <a:avLst/>
+          </a:prstGeom>
+          <a:solidFill>
+            <a:srgbClr val="00A0B0"/>
+          </a:solidFill>
+          <a:ln>
+            <a:noFill/>
+          </a:ln>
+        </p:spPr>
+        <p:style>
+          <a:lnRef idx="1">
+            <a:schemeClr val="accent1"/>
+          </a:lnRef>
+          <a:fillRef idx="3">
+            <a:schemeClr val="accent1"/>
+          </a:fillRef>
+          <a:effectRef idx="2">
+            <a:schemeClr val="accent1"/>
+          </a:effectRef>
+          <a:fontRef idx="minor">
+            <a:schemeClr val="lt1"/>
+          </a:fontRef>
+        </p:style>
+        <p:txBody>
+          <a:bodyPr rtlCol="0" anchor="ctr"/>
+          <a:lstStyle/>
+          <a:p>
+            <a:pPr algn="ctr"/>
+          </a:p>
+        </p:txBody>
+      </p:sp>
+      <p:sp>
+        <p:nvSpPr>
+          <p:cNvPr id="17" name="TextBox 16"/>
+          <p:cNvSpPr txBox="1"/>
+          <p:nvPr/>
+        </p:nvSpPr>
+        <p:spPr>
+          <a:xfrm>
+            <a:off x="914400" y="4183380"/>
+            <a:ext cx="777240" cy="777240"/>
+          </a:xfrm>
+          <a:prstGeom prst="rect">
+            <a:avLst/>
+          </a:prstGeom>
+          <a:noFill/>
+        </p:spPr>
+        <p:txBody>
+          <a:bodyPr wrap="square" lIns="45720" rIns="45720" tIns="18288" bIns="18288" anchor="ctr">
+            <a:spAutoFit/>
+          </a:bodyPr>
+          <a:lstStyle/>
+          <a:p>
+            <a:pPr algn="ctr"/>
+            <a:r>
+              <a:rPr sz="2800" b="1" i="0">
+                <a:solidFill>
+                  <a:srgbClr val="FFFFFF"/>
+                </a:solidFill>
+                <a:latin typeface="Calibri"/>
+              </a:rPr>
+              <a:t>4</a:t>
+            </a:r>
+          </a:p>
+        </p:txBody>
+      </p:sp>
+      <p:sp>
+        <p:nvSpPr>
+          <p:cNvPr id="18" name="Rounded Rectangle 17"/>
+          <p:cNvSpPr/>
+          <p:nvPr/>
+        </p:nvSpPr>
+        <p:spPr>
+          <a:xfrm>
+            <a:off x="2011680" y="4183380"/>
+            <a:ext cx="9144000" cy="777240"/>
+          </a:xfrm>
+          <a:prstGeom prst="roundRect">
+            <a:avLst>
+              <a:gd name="adj" fmla="val 8000"/>
+            </a:avLst>
+          </a:prstGeom>
+          <a:solidFill>
+            <a:srgbClr val="FBFBFD"/>
+          </a:solidFill>
+          <a:ln w="19050">
+            <a:solidFill>
+              <a:srgbClr val="00A0B0"/>
+            </a:solidFill>
+          </a:ln>
+        </p:spPr>
+        <p:style>
+          <a:lnRef idx="1">
+            <a:schemeClr val="accent1"/>
+          </a:lnRef>
+          <a:fillRef idx="3">
+            <a:schemeClr val="accent1"/>
+          </a:fillRef>
+          <a:effectRef idx="2">
+            <a:schemeClr val="accent1"/>
+          </a:effectRef>
+          <a:fontRef idx="minor">
+            <a:schemeClr val="lt1"/>
+          </a:fontRef>
+        </p:style>
+        <p:txBody>
+          <a:bodyPr rtlCol="0" anchor="ctr"/>
+          <a:lstStyle/>
+          <a:p>
+            <a:pPr algn="ctr"/>
+          </a:p>
+        </p:txBody>
+      </p:sp>
+      <p:sp>
+        <p:nvSpPr>
+          <p:cNvPr id="19" name="TextBox 18"/>
+          <p:cNvSpPr txBox="1"/>
+          <p:nvPr/>
+        </p:nvSpPr>
+        <p:spPr>
+          <a:xfrm>
+            <a:off x="2286000" y="4183380"/>
+            <a:ext cx="8686800" cy="777240"/>
+          </a:xfrm>
+          <a:prstGeom prst="rect">
+            <a:avLst/>
+          </a:prstGeom>
+          <a:noFill/>
+        </p:spPr>
+        <p:txBody>
+          <a:bodyPr wrap="square" lIns="45720" rIns="45720" tIns="18288" bIns="18288" anchor="ctr">
+            <a:spAutoFit/>
+          </a:bodyPr>
+          <a:lstStyle/>
+          <a:p>
+            <a:pPr algn="l"/>
+            <a:r>
+              <a:rPr sz="1800" b="0" i="0">
+                <a:solidFill>
+                  <a:srgbClr val="1A1A2E"/>
+                </a:solidFill>
+                <a:latin typeface="Calibri"/>
+              </a:rPr>
+              <a:t>Path traversal: 3 controlli obbligatori (whitelist, ext, realpath)</a:t>
+            </a:r>
+          </a:p>
+        </p:txBody>
+      </p:sp>
+      <p:sp>
+        <p:nvSpPr>
+          <p:cNvPr id="20" name="Oval 19"/>
+          <p:cNvSpPr/>
+          <p:nvPr/>
+        </p:nvSpPr>
+        <p:spPr>
+          <a:xfrm>
+            <a:off x="914400" y="5097780"/>
+            <a:ext cx="777240" cy="777240"/>
+          </a:xfrm>
+          <a:prstGeom prst="ellipse">
+            <a:avLst/>
+          </a:prstGeom>
+          <a:solidFill>
+            <a:srgbClr val="00A0B0"/>
+          </a:solidFill>
+          <a:ln>
+            <a:noFill/>
+          </a:ln>
+        </p:spPr>
+        <p:style>
+          <a:lnRef idx="1">
+            <a:schemeClr val="accent1"/>
+          </a:lnRef>
+          <a:fillRef idx="3">
+            <a:schemeClr val="accent1"/>
+          </a:fillRef>
+          <a:effectRef idx="2">
+            <a:schemeClr val="accent1"/>
+          </a:effectRef>
+          <a:fontRef idx="minor">
+            <a:schemeClr val="lt1"/>
+          </a:fontRef>
+        </p:style>
+        <p:txBody>
+          <a:bodyPr rtlCol="0" anchor="ctr"/>
+          <a:lstStyle/>
+          <a:p>
+            <a:pPr algn="ctr"/>
+          </a:p>
+        </p:txBody>
+      </p:sp>
+      <p:sp>
+        <p:nvSpPr>
+          <p:cNvPr id="21" name="TextBox 20"/>
+          <p:cNvSpPr txBox="1"/>
+          <p:nvPr/>
+        </p:nvSpPr>
+        <p:spPr>
+          <a:xfrm>
+            <a:off x="914400" y="5097780"/>
+            <a:ext cx="777240" cy="777240"/>
+          </a:xfrm>
+          <a:prstGeom prst="rect">
+            <a:avLst/>
+          </a:prstGeom>
+          <a:noFill/>
+        </p:spPr>
+        <p:txBody>
+          <a:bodyPr wrap="square" lIns="45720" rIns="45720" tIns="18288" bIns="18288" anchor="ctr">
+            <a:spAutoFit/>
+          </a:bodyPr>
+          <a:lstStyle/>
+          <a:p>
+            <a:pPr algn="ctr"/>
+            <a:r>
+              <a:rPr sz="2800" b="1" i="0">
+                <a:solidFill>
+                  <a:srgbClr val="FFFFFF"/>
+                </a:solidFill>
+                <a:latin typeface="Calibri"/>
+              </a:rPr>
+              <a:t>5</a:t>
+            </a:r>
+          </a:p>
+        </p:txBody>
+      </p:sp>
+      <p:sp>
+        <p:nvSpPr>
+          <p:cNvPr id="22" name="Rounded Rectangle 21"/>
+          <p:cNvSpPr/>
+          <p:nvPr/>
+        </p:nvSpPr>
+        <p:spPr>
+          <a:xfrm>
+            <a:off x="2011680" y="5097780"/>
+            <a:ext cx="9144000" cy="777240"/>
+          </a:xfrm>
+          <a:prstGeom prst="roundRect">
+            <a:avLst>
+              <a:gd name="adj" fmla="val 8000"/>
+            </a:avLst>
+          </a:prstGeom>
+          <a:solidFill>
+            <a:srgbClr val="FBFBFD"/>
+          </a:solidFill>
+          <a:ln w="19050">
+            <a:solidFill>
+              <a:srgbClr val="00A0B0"/>
+            </a:solidFill>
+          </a:ln>
+        </p:spPr>
+        <p:style>
+          <a:lnRef idx="1">
+            <a:schemeClr val="accent1"/>
+          </a:lnRef>
+          <a:fillRef idx="3">
+            <a:schemeClr val="accent1"/>
+          </a:fillRef>
+          <a:effectRef idx="2">
+            <a:schemeClr val="accent1"/>
+          </a:effectRef>
+          <a:fontRef idx="minor">
+            <a:schemeClr val="lt1"/>
+          </a:fontRef>
+        </p:style>
+        <p:txBody>
+          <a:bodyPr rtlCol="0" anchor="ctr"/>
+          <a:lstStyle/>
+          <a:p>
+            <a:pPr algn="ctr"/>
+          </a:p>
+        </p:txBody>
+      </p:sp>
+      <p:sp>
+        <p:nvSpPr>
+          <p:cNvPr id="23" name="TextBox 22"/>
+          <p:cNvSpPr txBox="1"/>
+          <p:nvPr/>
+        </p:nvSpPr>
+        <p:spPr>
+          <a:xfrm>
+            <a:off x="2286000" y="5097780"/>
+            <a:ext cx="8686800" cy="777240"/>
+          </a:xfrm>
+          <a:prstGeom prst="rect">
+            <a:avLst/>
+          </a:prstGeom>
+          <a:noFill/>
+        </p:spPr>
+        <p:txBody>
+          <a:bodyPr wrap="square" lIns="45720" rIns="45720" tIns="18288" bIns="18288" anchor="ctr">
+            <a:spAutoFit/>
+          </a:bodyPr>
+          <a:lstStyle/>
+          <a:p>
+            <a:pPr algn="l"/>
+            <a:r>
+              <a:rPr sz="1800" b="0" i="0">
+                <a:solidFill>
+                  <a:srgbClr val="1A1A2E"/>
+                </a:solidFill>
+                <a:latin typeface="Calibri"/>
+              </a:rPr>
+              <a:t>pip-audit in CI: blocca il deploy con CVE Critical</a:t>
             </a:r>
           </a:p>
         </p:txBody>
       </p:sp>
       <p:cxnSp>
         <p:nvCxnSpPr>
-          <p:cNvPr id="9" name="Connector 8"/>
+          <p:cNvPr id="24" name="Connector 23"/>
           <p:cNvCxnSpPr/>
           <p:nvPr/>
         </p:nvCxnSpPr>
@@ -5269,14 +5612,14 @@
       </p:cxnSp>
       <p:sp>
         <p:nvSpPr>
-          <p:cNvPr id="10" name="TextBox 9"/>
+          <p:cNvPr id="25" name="TextBox 24"/>
           <p:cNvSpPr txBox="1"/>
           <p:nvPr/>
         </p:nvSpPr>
         <p:spPr>
           <a:xfrm>
             <a:off x="457200" y="6473952"/>
-            <a:ext cx="7315200" cy="320040"/>
+            <a:ext cx="7315200" cy="292608"/>
           </a:xfrm>
           <a:prstGeom prst="rect">
             <a:avLst/>
@@ -5297,21 +5640,21 @@
                 </a:solidFill>
                 <a:latin typeface="Calibri"/>
               </a:rPr>
-              <a:t>Secure Coding · Corso IFTS STEM · A. Manneschi</a:t>
-            </a:r>
-          </a:p>
-        </p:txBody>
-      </p:sp>
-      <p:sp>
-        <p:nvSpPr>
-          <p:cNvPr id="11" name="TextBox 10"/>
+              <a:t>Secure Coding · Corso IFTS STEM · A. Manneschi · 2024/2025</a:t>
+            </a:r>
+          </a:p>
+        </p:txBody>
+      </p:sp>
+      <p:sp>
+        <p:nvSpPr>
+          <p:cNvPr id="26" name="TextBox 25"/>
           <p:cNvSpPr txBox="1"/>
           <p:nvPr/>
         </p:nvSpPr>
         <p:spPr>
           <a:xfrm>
             <a:off x="10515600" y="6473952"/>
-            <a:ext cx="1188720" cy="320040"/>
+            <a:ext cx="1188720" cy="292608"/>
           </a:xfrm>
           <a:prstGeom prst="rect">
             <a:avLst/>
@@ -5370,7 +5713,7 @@
             <a:avLst/>
           </a:prstGeom>
           <a:solidFill>
-            <a:srgbClr val="0F2D52"/>
+            <a:srgbClr val="081B33"/>
           </a:solidFill>
           <a:ln>
             <a:noFill/>
@@ -5406,11 +5749,247 @@
         </p:nvSpPr>
         <p:spPr>
           <a:xfrm>
-            <a:off x="8686800" y="457200"/>
-            <a:ext cx="3200400" cy="3200400"/>
+            <a:off x="8915400" y="228600"/>
+            <a:ext cx="2286000" cy="2286000"/>
           </a:xfrm>
           <a:prstGeom prst="ellipse">
             <a:avLst/>
+          </a:prstGeom>
+          <a:noFill/>
+          <a:ln w="25400">
+            <a:solidFill>
+              <a:srgbClr val="00A0B0"/>
+            </a:solidFill>
+          </a:ln>
+        </p:spPr>
+        <p:style>
+          <a:lnRef idx="1">
+            <a:schemeClr val="accent1"/>
+          </a:lnRef>
+          <a:fillRef idx="3">
+            <a:schemeClr val="accent1"/>
+          </a:fillRef>
+          <a:effectRef idx="2">
+            <a:schemeClr val="accent1"/>
+          </a:effectRef>
+          <a:fontRef idx="minor">
+            <a:schemeClr val="lt1"/>
+          </a:fontRef>
+        </p:style>
+        <p:txBody>
+          <a:bodyPr rtlCol="0" anchor="ctr"/>
+          <a:lstStyle/>
+          <a:p>
+            <a:pPr algn="ctr"/>
+          </a:p>
+        </p:txBody>
+      </p:sp>
+      <p:sp>
+        <p:nvSpPr>
+          <p:cNvPr id="4" name="Oval 3"/>
+          <p:cNvSpPr/>
+          <p:nvPr/>
+        </p:nvSpPr>
+        <p:spPr>
+          <a:xfrm>
+            <a:off x="10149840" y="3749040"/>
+            <a:ext cx="1645920" cy="1645920"/>
+          </a:xfrm>
+          <a:prstGeom prst="ellipse">
+            <a:avLst/>
+          </a:prstGeom>
+          <a:noFill/>
+          <a:ln w="25400">
+            <a:solidFill>
+              <a:srgbClr val="00A0B0"/>
+            </a:solidFill>
+          </a:ln>
+        </p:spPr>
+        <p:style>
+          <a:lnRef idx="1">
+            <a:schemeClr val="accent1"/>
+          </a:lnRef>
+          <a:fillRef idx="3">
+            <a:schemeClr val="accent1"/>
+          </a:fillRef>
+          <a:effectRef idx="2">
+            <a:schemeClr val="accent1"/>
+          </a:effectRef>
+          <a:fontRef idx="minor">
+            <a:schemeClr val="lt1"/>
+          </a:fontRef>
+        </p:style>
+        <p:txBody>
+          <a:bodyPr rtlCol="0" anchor="ctr"/>
+          <a:lstStyle/>
+          <a:p>
+            <a:pPr algn="ctr"/>
+          </a:p>
+        </p:txBody>
+      </p:sp>
+      <p:sp>
+        <p:nvSpPr>
+          <p:cNvPr id="5" name="Oval 4"/>
+          <p:cNvSpPr/>
+          <p:nvPr/>
+        </p:nvSpPr>
+        <p:spPr>
+          <a:xfrm>
+            <a:off x="685800" y="4800600"/>
+            <a:ext cx="1371600" cy="1371600"/>
+          </a:xfrm>
+          <a:prstGeom prst="ellipse">
+            <a:avLst/>
+          </a:prstGeom>
+          <a:noFill/>
+          <a:ln w="25400">
+            <a:solidFill>
+              <a:srgbClr val="00A0B0"/>
+            </a:solidFill>
+          </a:ln>
+        </p:spPr>
+        <p:style>
+          <a:lnRef idx="1">
+            <a:schemeClr val="accent1"/>
+          </a:lnRef>
+          <a:fillRef idx="3">
+            <a:schemeClr val="accent1"/>
+          </a:fillRef>
+          <a:effectRef idx="2">
+            <a:schemeClr val="accent1"/>
+          </a:effectRef>
+          <a:fontRef idx="minor">
+            <a:schemeClr val="lt1"/>
+          </a:fontRef>
+        </p:style>
+        <p:txBody>
+          <a:bodyPr rtlCol="0" anchor="ctr"/>
+          <a:lstStyle/>
+          <a:p>
+            <a:pPr algn="ctr"/>
+          </a:p>
+        </p:txBody>
+      </p:sp>
+      <p:sp>
+        <p:nvSpPr>
+          <p:cNvPr id="6" name="TextBox 5"/>
+          <p:cNvSpPr txBox="1"/>
+          <p:nvPr/>
+        </p:nvSpPr>
+        <p:spPr>
+          <a:xfrm>
+            <a:off x="731520" y="1371600"/>
+            <a:ext cx="10058400" cy="2286000"/>
+          </a:xfrm>
+          <a:prstGeom prst="rect">
+            <a:avLst/>
+          </a:prstGeom>
+          <a:noFill/>
+        </p:spPr>
+        <p:txBody>
+          <a:bodyPr wrap="square" lIns="45720" rIns="45720" tIns="18288" bIns="18288" anchor="t">
+            <a:spAutoFit/>
+          </a:bodyPr>
+          <a:lstStyle/>
+          <a:p>
+            <a:pPr algn="l"/>
+            <a:r>
+              <a:rPr sz="11000" b="1" i="0">
+                <a:solidFill>
+                  <a:srgbClr val="FFFFFF"/>
+                </a:solidFill>
+                <a:latin typeface="Calibri"/>
+              </a:rPr>
+              <a:t>Domande?</a:t>
+            </a:r>
+          </a:p>
+        </p:txBody>
+      </p:sp>
+      <p:cxnSp>
+        <p:nvCxnSpPr>
+          <p:cNvPr id="7" name="Connector 6"/>
+          <p:cNvCxnSpPr/>
+          <p:nvPr/>
+        </p:nvCxnSpPr>
+        <p:spPr>
+          <a:xfrm>
+            <a:off x="731520" y="3840480"/>
+            <a:ext cx="2926080" cy="0"/>
+          </a:xfrm>
+          <a:prstGeom prst="line">
+            <a:avLst/>
+          </a:prstGeom>
+          <a:ln w="50800">
+            <a:solidFill>
+              <a:srgbClr val="00A0B0"/>
+            </a:solidFill>
+          </a:ln>
+        </p:spPr>
+        <p:style>
+          <a:lnRef idx="2">
+            <a:schemeClr val="accent1"/>
+          </a:lnRef>
+          <a:fillRef idx="0">
+            <a:schemeClr val="accent1"/>
+          </a:fillRef>
+          <a:effectRef idx="1">
+            <a:schemeClr val="accent1"/>
+          </a:effectRef>
+          <a:fontRef idx="minor">
+            <a:schemeClr val="tx1"/>
+          </a:fontRef>
+        </p:style>
+      </p:cxnSp>
+      <p:sp>
+        <p:nvSpPr>
+          <p:cNvPr id="8" name="TextBox 7"/>
+          <p:cNvSpPr txBox="1"/>
+          <p:nvPr/>
+        </p:nvSpPr>
+        <p:spPr>
+          <a:xfrm>
+            <a:off x="731520" y="4114800"/>
+            <a:ext cx="10058400" cy="457200"/>
+          </a:xfrm>
+          <a:prstGeom prst="rect">
+            <a:avLst/>
+          </a:prstGeom>
+          <a:noFill/>
+        </p:spPr>
+        <p:txBody>
+          <a:bodyPr wrap="square" lIns="45720" rIns="45720" tIns="18288" bIns="18288" anchor="t">
+            <a:spAutoFit/>
+          </a:bodyPr>
+          <a:lstStyle/>
+          <a:p>
+            <a:pPr algn="l"/>
+            <a:r>
+              <a:rPr sz="2000" b="1" i="0">
+                <a:solidFill>
+                  <a:srgbClr val="00A0B0"/>
+                </a:solidFill>
+                <a:latin typeface="Calibri"/>
+              </a:rPr>
+              <a:t>Riepilogo · Q&amp;A · Discussione</a:t>
+            </a:r>
+          </a:p>
+        </p:txBody>
+      </p:sp>
+      <p:sp>
+        <p:nvSpPr>
+          <p:cNvPr id="9" name="Rounded Rectangle 8"/>
+          <p:cNvSpPr/>
+          <p:nvPr/>
+        </p:nvSpPr>
+        <p:spPr>
+          <a:xfrm>
+            <a:off x="731520" y="5029200"/>
+            <a:ext cx="10058400" cy="914400"/>
+          </a:xfrm>
+          <a:prstGeom prst="roundRect">
+            <a:avLst>
+              <a:gd name="adj" fmla="val 8000"/>
+            </a:avLst>
           </a:prstGeom>
           <a:solidFill>
             <a:srgbClr val="00A0B0"/>
@@ -5443,49 +6022,14 @@
       </p:sp>
       <p:sp>
         <p:nvSpPr>
-          <p:cNvPr id="4" name="TextBox 3"/>
+          <p:cNvPr id="10" name="TextBox 9"/>
           <p:cNvSpPr txBox="1"/>
           <p:nvPr/>
         </p:nvSpPr>
         <p:spPr>
           <a:xfrm>
-            <a:off x="731520" y="1645920"/>
-            <a:ext cx="7315200" cy="2286000"/>
-          </a:xfrm>
-          <a:prstGeom prst="rect">
-            <a:avLst/>
-          </a:prstGeom>
-          <a:noFill/>
-        </p:spPr>
-        <p:txBody>
-          <a:bodyPr wrap="square" lIns="45720" rIns="45720" tIns="18288" bIns="18288" anchor="t">
-            <a:spAutoFit/>
-          </a:bodyPr>
-          <a:lstStyle/>
-          <a:p>
-            <a:pPr algn="l"/>
-            <a:r>
-              <a:rPr sz="8800" b="1" i="0">
-                <a:solidFill>
-                  <a:srgbClr val="FFFFFF"/>
-                </a:solidFill>
-                <a:latin typeface="Calibri"/>
-              </a:rPr>
-              <a:t>Domande?</a:t>
-            </a:r>
-          </a:p>
-        </p:txBody>
-      </p:sp>
-      <p:sp>
-        <p:nvSpPr>
-          <p:cNvPr id="5" name="TextBox 4"/>
-          <p:cNvSpPr txBox="1"/>
-          <p:nvPr/>
-        </p:nvSpPr>
-        <p:spPr>
-          <a:xfrm>
-            <a:off x="8686800" y="457200"/>
-            <a:ext cx="3200400" cy="3200400"/>
+            <a:off x="1005840" y="5029200"/>
+            <a:ext cx="9784080" cy="914400"/>
           </a:xfrm>
           <a:prstGeom prst="rect">
             <a:avLst/>
@@ -5498,79 +6042,9 @@
           </a:bodyPr>
           <a:lstStyle/>
           <a:p>
-            <a:pPr algn="ctr"/>
-            <a:r>
-              <a:rPr sz="18000" b="1" i="0">
-                <a:solidFill>
-                  <a:srgbClr val="FFFFFF"/>
-                </a:solidFill>
-                <a:latin typeface="Calibri"/>
-              </a:rPr>
-              <a:t>?</a:t>
-            </a:r>
-          </a:p>
-        </p:txBody>
-      </p:sp>
-      <p:sp>
-        <p:nvSpPr>
-          <p:cNvPr id="6" name="TextBox 5"/>
-          <p:cNvSpPr txBox="1"/>
-          <p:nvPr/>
-        </p:nvSpPr>
-        <p:spPr>
-          <a:xfrm>
-            <a:off x="731520" y="4114800"/>
-            <a:ext cx="10058400" cy="457200"/>
-          </a:xfrm>
-          <a:prstGeom prst="rect">
-            <a:avLst/>
-          </a:prstGeom>
-          <a:noFill/>
-        </p:spPr>
-        <p:txBody>
-          <a:bodyPr wrap="square" lIns="45720" rIns="45720" tIns="18288" bIns="18288" anchor="t">
-            <a:spAutoFit/>
-          </a:bodyPr>
-          <a:lstStyle/>
-          <a:p>
             <a:pPr algn="l"/>
             <a:r>
-              <a:rPr sz="2200" b="1" i="0">
-                <a:solidFill>
-                  <a:srgbClr val="00A0B0"/>
-                </a:solidFill>
-                <a:latin typeface="Calibri"/>
-              </a:rPr>
-              <a:t>Cosa portarti via:</a:t>
-            </a:r>
-          </a:p>
-        </p:txBody>
-      </p:sp>
-      <p:sp>
-        <p:nvSpPr>
-          <p:cNvPr id="7" name="TextBox 6"/>
-          <p:cNvSpPr txBox="1"/>
-          <p:nvPr/>
-        </p:nvSpPr>
-        <p:spPr>
-          <a:xfrm>
-            <a:off x="731520" y="5303520"/>
-            <a:ext cx="10058400" cy="548640"/>
-          </a:xfrm>
-          <a:prstGeom prst="rect">
-            <a:avLst/>
-          </a:prstGeom>
-          <a:noFill/>
-        </p:spPr>
-        <p:txBody>
-          <a:bodyPr wrap="square" lIns="45720" rIns="45720" tIns="18288" bIns="18288" anchor="t">
-            <a:spAutoFit/>
-          </a:bodyPr>
-          <a:lstStyle/>
-          <a:p>
-            <a:pPr algn="l"/>
-            <a:r>
-              <a:rPr sz="1800" b="0" i="1">
+              <a:rPr sz="1800" b="1" i="1">
                 <a:solidFill>
                   <a:srgbClr val="FFFFFF"/>
                 </a:solidFill>
@@ -5583,7 +6057,7 @@
       </p:sp>
       <p:cxnSp>
         <p:nvCxnSpPr>
-          <p:cNvPr id="8" name="Connector 7"/>
+          <p:cNvPr id="11" name="Connector 10"/>
           <p:cNvCxnSpPr/>
           <p:nvPr/>
         </p:nvCxnSpPr>
@@ -5618,14 +6092,14 @@
       </p:cxnSp>
       <p:sp>
         <p:nvSpPr>
-          <p:cNvPr id="9" name="TextBox 8"/>
+          <p:cNvPr id="12" name="TextBox 11"/>
           <p:cNvSpPr txBox="1"/>
           <p:nvPr/>
         </p:nvSpPr>
         <p:spPr>
           <a:xfrm>
             <a:off x="457200" y="6473952"/>
-            <a:ext cx="7315200" cy="320040"/>
+            <a:ext cx="7315200" cy="292608"/>
           </a:xfrm>
           <a:prstGeom prst="rect">
             <a:avLst/>
@@ -5646,21 +6120,21 @@
                 </a:solidFill>
                 <a:latin typeface="Calibri"/>
               </a:rPr>
-              <a:t>Secure Coding · Corso IFTS STEM · A. Manneschi</a:t>
-            </a:r>
-          </a:p>
-        </p:txBody>
-      </p:sp>
-      <p:sp>
-        <p:nvSpPr>
-          <p:cNvPr id="10" name="TextBox 9"/>
+              <a:t>Secure Coding · Corso IFTS STEM · A. Manneschi · 2024/2025</a:t>
+            </a:r>
+          </a:p>
+        </p:txBody>
+      </p:sp>
+      <p:sp>
+        <p:nvSpPr>
+          <p:cNvPr id="13" name="TextBox 12"/>
           <p:cNvSpPr txBox="1"/>
           <p:nvPr/>
         </p:nvSpPr>
         <p:spPr>
           <a:xfrm>
             <a:off x="10515600" y="6473952"/>
-            <a:ext cx="1188720" cy="320040"/>
+            <a:ext cx="1188720" cy="292608"/>
           </a:xfrm>
           <a:prstGeom prst="rect">
             <a:avLst/>
@@ -5777,7 +6251,7 @@
                 </a:solidFill>
                 <a:latin typeface="Calibri"/>
               </a:rPr>
-              <a:t>Obiettivi</a:t>
+              <a:t>🎯  Obiettivi della lezione</a:t>
             </a:r>
           </a:p>
         </p:txBody>
@@ -5790,8 +6264,8 @@
         </p:nvSpPr>
         <p:spPr>
           <a:xfrm>
-            <a:off x="640080" y="1005840"/>
-            <a:ext cx="10972800" cy="5029200"/>
+            <a:off x="457200" y="914400"/>
+            <a:ext cx="2286000" cy="2286000"/>
           </a:xfrm>
           <a:prstGeom prst="rect">
             <a:avLst/>
@@ -5799,27 +6273,162 @@
           <a:noFill/>
         </p:spPr>
         <p:txBody>
-          <a:bodyPr wrap="square">
+          <a:bodyPr wrap="square" lIns="45720" rIns="45720" tIns="18288" bIns="18288" anchor="t">
             <a:spAutoFit/>
           </a:bodyPr>
           <a:lstStyle/>
           <a:p>
-            <a:pPr>
-              <a:lnSpc>
-                <a:spcPct val="150000"/>
-              </a:lnSpc>
-            </a:pPr>
-            <a:r>
-              <a:rPr sz="2000" b="1">
+            <a:pPr algn="l"/>
+            <a:r>
+              <a:rPr sz="18000" b="1" i="0">
+                <a:solidFill>
+                  <a:srgbClr val="F1F4F8"/>
+                </a:solidFill>
+                <a:latin typeface="Calibri"/>
+              </a:rPr>
+              <a:t>06</a:t>
+            </a:r>
+          </a:p>
+        </p:txBody>
+      </p:sp>
+      <p:sp>
+        <p:nvSpPr>
+          <p:cNvPr id="5" name="TextBox 4"/>
+          <p:cNvSpPr txBox="1"/>
+          <p:nvPr/>
+        </p:nvSpPr>
+        <p:spPr>
+          <a:xfrm>
+            <a:off x="457200" y="3200400"/>
+            <a:ext cx="2286000" cy="457200"/>
+          </a:xfrm>
+          <a:prstGeom prst="rect">
+            <a:avLst/>
+          </a:prstGeom>
+          <a:noFill/>
+        </p:spPr>
+        <p:txBody>
+          <a:bodyPr wrap="square" lIns="45720" rIns="45720" tIns="18288" bIns="18288" anchor="t">
+            <a:spAutoFit/>
+          </a:bodyPr>
+          <a:lstStyle/>
+          <a:p>
+            <a:pPr algn="l"/>
+            <a:r>
+              <a:rPr sz="1800" b="1" i="1">
                 <a:solidFill>
                   <a:srgbClr val="00A0B0"/>
                 </a:solidFill>
                 <a:latin typeface="Calibri"/>
               </a:rPr>
-              <a:t>▸  </a:t>
-            </a:r>
-            <a:r>
-              <a:rPr sz="2000">
+              <a:t>obiettivi</a:t>
+            </a:r>
+          </a:p>
+        </p:txBody>
+      </p:sp>
+      <p:sp>
+        <p:nvSpPr>
+          <p:cNvPr id="6" name="Oval 5"/>
+          <p:cNvSpPr/>
+          <p:nvPr/>
+        </p:nvSpPr>
+        <p:spPr>
+          <a:xfrm>
+            <a:off x="3200400" y="1188720"/>
+            <a:ext cx="548640" cy="548640"/>
+          </a:xfrm>
+          <a:prstGeom prst="ellipse">
+            <a:avLst/>
+          </a:prstGeom>
+          <a:solidFill>
+            <a:srgbClr val="00A0B0"/>
+          </a:solidFill>
+          <a:ln>
+            <a:noFill/>
+          </a:ln>
+        </p:spPr>
+        <p:style>
+          <a:lnRef idx="1">
+            <a:schemeClr val="accent1"/>
+          </a:lnRef>
+          <a:fillRef idx="3">
+            <a:schemeClr val="accent1"/>
+          </a:fillRef>
+          <a:effectRef idx="2">
+            <a:schemeClr val="accent1"/>
+          </a:effectRef>
+          <a:fontRef idx="minor">
+            <a:schemeClr val="lt1"/>
+          </a:fontRef>
+        </p:style>
+        <p:txBody>
+          <a:bodyPr rtlCol="0" anchor="ctr"/>
+          <a:lstStyle/>
+          <a:p>
+            <a:pPr algn="ctr"/>
+          </a:p>
+        </p:txBody>
+      </p:sp>
+      <p:sp>
+        <p:nvSpPr>
+          <p:cNvPr id="7" name="TextBox 6"/>
+          <p:cNvSpPr txBox="1"/>
+          <p:nvPr/>
+        </p:nvSpPr>
+        <p:spPr>
+          <a:xfrm>
+            <a:off x="3200400" y="1188720"/>
+            <a:ext cx="548640" cy="548640"/>
+          </a:xfrm>
+          <a:prstGeom prst="rect">
+            <a:avLst/>
+          </a:prstGeom>
+          <a:noFill/>
+        </p:spPr>
+        <p:txBody>
+          <a:bodyPr wrap="square" lIns="45720" rIns="45720" tIns="18288" bIns="18288" anchor="ctr">
+            <a:spAutoFit/>
+          </a:bodyPr>
+          <a:lstStyle/>
+          <a:p>
+            <a:pPr algn="ctr"/>
+            <a:r>
+              <a:rPr sz="1600" b="1" i="0">
+                <a:solidFill>
+                  <a:srgbClr val="FFFFFF"/>
+                </a:solidFill>
+                <a:latin typeface="Calibri"/>
+              </a:rPr>
+              <a:t>1</a:t>
+            </a:r>
+          </a:p>
+        </p:txBody>
+      </p:sp>
+      <p:sp>
+        <p:nvSpPr>
+          <p:cNvPr id="8" name="TextBox 7"/>
+          <p:cNvSpPr txBox="1"/>
+          <p:nvPr/>
+        </p:nvSpPr>
+        <p:spPr>
+          <a:xfrm>
+            <a:off x="4023360" y="1261872"/>
+            <a:ext cx="7772400" cy="548640"/>
+          </a:xfrm>
+          <a:prstGeom prst="rect">
+            <a:avLst/>
+          </a:prstGeom>
+          <a:noFill/>
+        </p:spPr>
+        <p:txBody>
+          <a:bodyPr wrap="square" lIns="45720" rIns="45720" tIns="18288" bIns="18288" anchor="ctr">
+            <a:spAutoFit/>
+          </a:bodyPr>
+          <a:lstStyle/>
+          <a:p>
+            <a:pPr algn="l"/>
+            <a:r>
+              <a:rPr sz="1600" b="0" i="0">
                 <a:solidFill>
                   <a:srgbClr val="1A1A2E"/>
                 </a:solidFill>
@@ -5828,23 +6437,111 @@
               <a:t>Distinguere validation, sanitization e encoding</a:t>
             </a:r>
           </a:p>
-          <a:p>
-            <a:pPr>
-              <a:lnSpc>
-                <a:spcPct val="150000"/>
-              </a:lnSpc>
-            </a:pPr>
-            <a:r>
-              <a:rPr sz="2000" b="1">
-                <a:solidFill>
-                  <a:srgbClr val="00A0B0"/>
-                </a:solidFill>
-                <a:latin typeface="Calibri"/>
-              </a:rPr>
-              <a:t>▸  </a:t>
-            </a:r>
-            <a:r>
-              <a:rPr sz="2000">
+        </p:txBody>
+      </p:sp>
+      <p:sp>
+        <p:nvSpPr>
+          <p:cNvPr id="9" name="Oval 8"/>
+          <p:cNvSpPr/>
+          <p:nvPr/>
+        </p:nvSpPr>
+        <p:spPr>
+          <a:xfrm>
+            <a:off x="3200400" y="1965960"/>
+            <a:ext cx="548640" cy="548640"/>
+          </a:xfrm>
+          <a:prstGeom prst="ellipse">
+            <a:avLst/>
+          </a:prstGeom>
+          <a:solidFill>
+            <a:srgbClr val="00A0B0"/>
+          </a:solidFill>
+          <a:ln>
+            <a:noFill/>
+          </a:ln>
+        </p:spPr>
+        <p:style>
+          <a:lnRef idx="1">
+            <a:schemeClr val="accent1"/>
+          </a:lnRef>
+          <a:fillRef idx="3">
+            <a:schemeClr val="accent1"/>
+          </a:fillRef>
+          <a:effectRef idx="2">
+            <a:schemeClr val="accent1"/>
+          </a:effectRef>
+          <a:fontRef idx="minor">
+            <a:schemeClr val="lt1"/>
+          </a:fontRef>
+        </p:style>
+        <p:txBody>
+          <a:bodyPr rtlCol="0" anchor="ctr"/>
+          <a:lstStyle/>
+          <a:p>
+            <a:pPr algn="ctr"/>
+          </a:p>
+        </p:txBody>
+      </p:sp>
+      <p:sp>
+        <p:nvSpPr>
+          <p:cNvPr id="10" name="TextBox 9"/>
+          <p:cNvSpPr txBox="1"/>
+          <p:nvPr/>
+        </p:nvSpPr>
+        <p:spPr>
+          <a:xfrm>
+            <a:off x="3200400" y="1965960"/>
+            <a:ext cx="548640" cy="548640"/>
+          </a:xfrm>
+          <a:prstGeom prst="rect">
+            <a:avLst/>
+          </a:prstGeom>
+          <a:noFill/>
+        </p:spPr>
+        <p:txBody>
+          <a:bodyPr wrap="square" lIns="45720" rIns="45720" tIns="18288" bIns="18288" anchor="ctr">
+            <a:spAutoFit/>
+          </a:bodyPr>
+          <a:lstStyle/>
+          <a:p>
+            <a:pPr algn="ctr"/>
+            <a:r>
+              <a:rPr sz="1600" b="1" i="0">
+                <a:solidFill>
+                  <a:srgbClr val="FFFFFF"/>
+                </a:solidFill>
+                <a:latin typeface="Calibri"/>
+              </a:rPr>
+              <a:t>2</a:t>
+            </a:r>
+          </a:p>
+        </p:txBody>
+      </p:sp>
+      <p:sp>
+        <p:nvSpPr>
+          <p:cNvPr id="11" name="TextBox 10"/>
+          <p:cNvSpPr txBox="1"/>
+          <p:nvPr/>
+        </p:nvSpPr>
+        <p:spPr>
+          <a:xfrm>
+            <a:off x="4023360" y="2039112"/>
+            <a:ext cx="7772400" cy="548640"/>
+          </a:xfrm>
+          <a:prstGeom prst="rect">
+            <a:avLst/>
+          </a:prstGeom>
+          <a:noFill/>
+        </p:spPr>
+        <p:txBody>
+          <a:bodyPr wrap="square" lIns="45720" rIns="45720" tIns="18288" bIns="18288" anchor="ctr">
+            <a:spAutoFit/>
+          </a:bodyPr>
+          <a:lstStyle/>
+          <a:p>
+            <a:pPr algn="l"/>
+            <a:r>
+              <a:rPr sz="1600" b="0" i="0">
                 <a:solidFill>
                   <a:srgbClr val="1A1A2E"/>
                 </a:solidFill>
@@ -5853,23 +6550,111 @@
               <a:t>Capire perché whitelist &gt; blacklist</a:t>
             </a:r>
           </a:p>
-          <a:p>
-            <a:pPr>
-              <a:lnSpc>
-                <a:spcPct val="150000"/>
-              </a:lnSpc>
-            </a:pPr>
-            <a:r>
-              <a:rPr sz="2000" b="1">
-                <a:solidFill>
-                  <a:srgbClr val="00A0B0"/>
-                </a:solidFill>
-                <a:latin typeface="Calibri"/>
-              </a:rPr>
-              <a:t>▸  </a:t>
-            </a:r>
-            <a:r>
-              <a:rPr sz="2000">
+        </p:txBody>
+      </p:sp>
+      <p:sp>
+        <p:nvSpPr>
+          <p:cNvPr id="12" name="Oval 11"/>
+          <p:cNvSpPr/>
+          <p:nvPr/>
+        </p:nvSpPr>
+        <p:spPr>
+          <a:xfrm>
+            <a:off x="3200400" y="2743200"/>
+            <a:ext cx="548640" cy="548640"/>
+          </a:xfrm>
+          <a:prstGeom prst="ellipse">
+            <a:avLst/>
+          </a:prstGeom>
+          <a:solidFill>
+            <a:srgbClr val="00A0B0"/>
+          </a:solidFill>
+          <a:ln>
+            <a:noFill/>
+          </a:ln>
+        </p:spPr>
+        <p:style>
+          <a:lnRef idx="1">
+            <a:schemeClr val="accent1"/>
+          </a:lnRef>
+          <a:fillRef idx="3">
+            <a:schemeClr val="accent1"/>
+          </a:fillRef>
+          <a:effectRef idx="2">
+            <a:schemeClr val="accent1"/>
+          </a:effectRef>
+          <a:fontRef idx="minor">
+            <a:schemeClr val="lt1"/>
+          </a:fontRef>
+        </p:style>
+        <p:txBody>
+          <a:bodyPr rtlCol="0" anchor="ctr"/>
+          <a:lstStyle/>
+          <a:p>
+            <a:pPr algn="ctr"/>
+          </a:p>
+        </p:txBody>
+      </p:sp>
+      <p:sp>
+        <p:nvSpPr>
+          <p:cNvPr id="13" name="TextBox 12"/>
+          <p:cNvSpPr txBox="1"/>
+          <p:nvPr/>
+        </p:nvSpPr>
+        <p:spPr>
+          <a:xfrm>
+            <a:off x="3200400" y="2743200"/>
+            <a:ext cx="548640" cy="548640"/>
+          </a:xfrm>
+          <a:prstGeom prst="rect">
+            <a:avLst/>
+          </a:prstGeom>
+          <a:noFill/>
+        </p:spPr>
+        <p:txBody>
+          <a:bodyPr wrap="square" lIns="45720" rIns="45720" tIns="18288" bIns="18288" anchor="ctr">
+            <a:spAutoFit/>
+          </a:bodyPr>
+          <a:lstStyle/>
+          <a:p>
+            <a:pPr algn="ctr"/>
+            <a:r>
+              <a:rPr sz="1600" b="1" i="0">
+                <a:solidFill>
+                  <a:srgbClr val="FFFFFF"/>
+                </a:solidFill>
+                <a:latin typeface="Calibri"/>
+              </a:rPr>
+              <a:t>3</a:t>
+            </a:r>
+          </a:p>
+        </p:txBody>
+      </p:sp>
+      <p:sp>
+        <p:nvSpPr>
+          <p:cNvPr id="14" name="TextBox 13"/>
+          <p:cNvSpPr txBox="1"/>
+          <p:nvPr/>
+        </p:nvSpPr>
+        <p:spPr>
+          <a:xfrm>
+            <a:off x="4023360" y="2816352"/>
+            <a:ext cx="7772400" cy="548640"/>
+          </a:xfrm>
+          <a:prstGeom prst="rect">
+            <a:avLst/>
+          </a:prstGeom>
+          <a:noFill/>
+        </p:spPr>
+        <p:txBody>
+          <a:bodyPr wrap="square" lIns="45720" rIns="45720" tIns="18288" bIns="18288" anchor="ctr">
+            <a:spAutoFit/>
+          </a:bodyPr>
+          <a:lstStyle/>
+          <a:p>
+            <a:pPr algn="l"/>
+            <a:r>
+              <a:rPr sz="1600" b="0" i="0">
                 <a:solidFill>
                   <a:srgbClr val="1A1A2E"/>
                 </a:solidFill>
@@ -5878,23 +6663,111 @@
               <a:t>Usare Pydantic per validation strutturata in Python</a:t>
             </a:r>
           </a:p>
-          <a:p>
-            <a:pPr>
-              <a:lnSpc>
-                <a:spcPct val="150000"/>
-              </a:lnSpc>
-            </a:pPr>
-            <a:r>
-              <a:rPr sz="2000" b="1">
-                <a:solidFill>
-                  <a:srgbClr val="00A0B0"/>
-                </a:solidFill>
-                <a:latin typeface="Calibri"/>
-              </a:rPr>
-              <a:t>▸  </a:t>
-            </a:r>
-            <a:r>
-              <a:rPr sz="2000">
+        </p:txBody>
+      </p:sp>
+      <p:sp>
+        <p:nvSpPr>
+          <p:cNvPr id="15" name="Oval 14"/>
+          <p:cNvSpPr/>
+          <p:nvPr/>
+        </p:nvSpPr>
+        <p:spPr>
+          <a:xfrm>
+            <a:off x="3200400" y="3520440"/>
+            <a:ext cx="548640" cy="548640"/>
+          </a:xfrm>
+          <a:prstGeom prst="ellipse">
+            <a:avLst/>
+          </a:prstGeom>
+          <a:solidFill>
+            <a:srgbClr val="00A0B0"/>
+          </a:solidFill>
+          <a:ln>
+            <a:noFill/>
+          </a:ln>
+        </p:spPr>
+        <p:style>
+          <a:lnRef idx="1">
+            <a:schemeClr val="accent1"/>
+          </a:lnRef>
+          <a:fillRef idx="3">
+            <a:schemeClr val="accent1"/>
+          </a:fillRef>
+          <a:effectRef idx="2">
+            <a:schemeClr val="accent1"/>
+          </a:effectRef>
+          <a:fontRef idx="minor">
+            <a:schemeClr val="lt1"/>
+          </a:fontRef>
+        </p:style>
+        <p:txBody>
+          <a:bodyPr rtlCol="0" anchor="ctr"/>
+          <a:lstStyle/>
+          <a:p>
+            <a:pPr algn="ctr"/>
+          </a:p>
+        </p:txBody>
+      </p:sp>
+      <p:sp>
+        <p:nvSpPr>
+          <p:cNvPr id="16" name="TextBox 15"/>
+          <p:cNvSpPr txBox="1"/>
+          <p:nvPr/>
+        </p:nvSpPr>
+        <p:spPr>
+          <a:xfrm>
+            <a:off x="3200400" y="3520440"/>
+            <a:ext cx="548640" cy="548640"/>
+          </a:xfrm>
+          <a:prstGeom prst="rect">
+            <a:avLst/>
+          </a:prstGeom>
+          <a:noFill/>
+        </p:spPr>
+        <p:txBody>
+          <a:bodyPr wrap="square" lIns="45720" rIns="45720" tIns="18288" bIns="18288" anchor="ctr">
+            <a:spAutoFit/>
+          </a:bodyPr>
+          <a:lstStyle/>
+          <a:p>
+            <a:pPr algn="ctr"/>
+            <a:r>
+              <a:rPr sz="1600" b="1" i="0">
+                <a:solidFill>
+                  <a:srgbClr val="FFFFFF"/>
+                </a:solidFill>
+                <a:latin typeface="Calibri"/>
+              </a:rPr>
+              <a:t>4</a:t>
+            </a:r>
+          </a:p>
+        </p:txBody>
+      </p:sp>
+      <p:sp>
+        <p:nvSpPr>
+          <p:cNvPr id="17" name="TextBox 16"/>
+          <p:cNvSpPr txBox="1"/>
+          <p:nvPr/>
+        </p:nvSpPr>
+        <p:spPr>
+          <a:xfrm>
+            <a:off x="4023360" y="3593592"/>
+            <a:ext cx="7772400" cy="548640"/>
+          </a:xfrm>
+          <a:prstGeom prst="rect">
+            <a:avLst/>
+          </a:prstGeom>
+          <a:noFill/>
+        </p:spPr>
+        <p:txBody>
+          <a:bodyPr wrap="square" lIns="45720" rIns="45720" tIns="18288" bIns="18288" anchor="ctr">
+            <a:spAutoFit/>
+          </a:bodyPr>
+          <a:lstStyle/>
+          <a:p>
+            <a:pPr algn="l"/>
+            <a:r>
+              <a:rPr sz="1600" b="0" i="0">
                 <a:solidFill>
                   <a:srgbClr val="1A1A2E"/>
                 </a:solidFill>
@@ -5903,23 +6776,111 @@
               <a:t>Riconoscere e correggere il path traversal</a:t>
             </a:r>
           </a:p>
-          <a:p>
-            <a:pPr>
-              <a:lnSpc>
-                <a:spcPct val="150000"/>
-              </a:lnSpc>
-            </a:pPr>
-            <a:r>
-              <a:rPr sz="2000" b="1">
-                <a:solidFill>
-                  <a:srgbClr val="00A0B0"/>
-                </a:solidFill>
-                <a:latin typeface="Calibri"/>
-              </a:rPr>
-              <a:t>▸  </a:t>
-            </a:r>
-            <a:r>
-              <a:rPr sz="2000">
+        </p:txBody>
+      </p:sp>
+      <p:sp>
+        <p:nvSpPr>
+          <p:cNvPr id="18" name="Oval 17"/>
+          <p:cNvSpPr/>
+          <p:nvPr/>
+        </p:nvSpPr>
+        <p:spPr>
+          <a:xfrm>
+            <a:off x="3200400" y="4297680"/>
+            <a:ext cx="548640" cy="548640"/>
+          </a:xfrm>
+          <a:prstGeom prst="ellipse">
+            <a:avLst/>
+          </a:prstGeom>
+          <a:solidFill>
+            <a:srgbClr val="00A0B0"/>
+          </a:solidFill>
+          <a:ln>
+            <a:noFill/>
+          </a:ln>
+        </p:spPr>
+        <p:style>
+          <a:lnRef idx="1">
+            <a:schemeClr val="accent1"/>
+          </a:lnRef>
+          <a:fillRef idx="3">
+            <a:schemeClr val="accent1"/>
+          </a:fillRef>
+          <a:effectRef idx="2">
+            <a:schemeClr val="accent1"/>
+          </a:effectRef>
+          <a:fontRef idx="minor">
+            <a:schemeClr val="lt1"/>
+          </a:fontRef>
+        </p:style>
+        <p:txBody>
+          <a:bodyPr rtlCol="0" anchor="ctr"/>
+          <a:lstStyle/>
+          <a:p>
+            <a:pPr algn="ctr"/>
+          </a:p>
+        </p:txBody>
+      </p:sp>
+      <p:sp>
+        <p:nvSpPr>
+          <p:cNvPr id="19" name="TextBox 18"/>
+          <p:cNvSpPr txBox="1"/>
+          <p:nvPr/>
+        </p:nvSpPr>
+        <p:spPr>
+          <a:xfrm>
+            <a:off x="3200400" y="4297680"/>
+            <a:ext cx="548640" cy="548640"/>
+          </a:xfrm>
+          <a:prstGeom prst="rect">
+            <a:avLst/>
+          </a:prstGeom>
+          <a:noFill/>
+        </p:spPr>
+        <p:txBody>
+          <a:bodyPr wrap="square" lIns="45720" rIns="45720" tIns="18288" bIns="18288" anchor="ctr">
+            <a:spAutoFit/>
+          </a:bodyPr>
+          <a:lstStyle/>
+          <a:p>
+            <a:pPr algn="ctr"/>
+            <a:r>
+              <a:rPr sz="1600" b="1" i="0">
+                <a:solidFill>
+                  <a:srgbClr val="FFFFFF"/>
+                </a:solidFill>
+                <a:latin typeface="Calibri"/>
+              </a:rPr>
+              <a:t>5</a:t>
+            </a:r>
+          </a:p>
+        </p:txBody>
+      </p:sp>
+      <p:sp>
+        <p:nvSpPr>
+          <p:cNvPr id="20" name="TextBox 19"/>
+          <p:cNvSpPr txBox="1"/>
+          <p:nvPr/>
+        </p:nvSpPr>
+        <p:spPr>
+          <a:xfrm>
+            <a:off x="4023360" y="4370832"/>
+            <a:ext cx="7772400" cy="548640"/>
+          </a:xfrm>
+          <a:prstGeom prst="rect">
+            <a:avLst/>
+          </a:prstGeom>
+          <a:noFill/>
+        </p:spPr>
+        <p:txBody>
+          <a:bodyPr wrap="square" lIns="45720" rIns="45720" tIns="18288" bIns="18288" anchor="ctr">
+            <a:spAutoFit/>
+          </a:bodyPr>
+          <a:lstStyle/>
+          <a:p>
+            <a:pPr algn="l"/>
+            <a:r>
+              <a:rPr sz="1600" b="0" i="0">
                 <a:solidFill>
                   <a:srgbClr val="1A1A2E"/>
                 </a:solidFill>
@@ -5928,23 +6889,111 @@
               <a:t>Scoprire CVE nelle dipendenze con pip-audit</a:t>
             </a:r>
           </a:p>
-          <a:p>
-            <a:pPr>
-              <a:lnSpc>
-                <a:spcPct val="150000"/>
-              </a:lnSpc>
-            </a:pPr>
-            <a:r>
-              <a:rPr sz="2000" b="1">
-                <a:solidFill>
-                  <a:srgbClr val="00A0B0"/>
-                </a:solidFill>
-                <a:latin typeface="Calibri"/>
-              </a:rPr>
-              <a:t>▸  </a:t>
-            </a:r>
-            <a:r>
-              <a:rPr sz="2000">
+        </p:txBody>
+      </p:sp>
+      <p:sp>
+        <p:nvSpPr>
+          <p:cNvPr id="21" name="Oval 20"/>
+          <p:cNvSpPr/>
+          <p:nvPr/>
+        </p:nvSpPr>
+        <p:spPr>
+          <a:xfrm>
+            <a:off x="3200400" y="5074920"/>
+            <a:ext cx="548640" cy="548640"/>
+          </a:xfrm>
+          <a:prstGeom prst="ellipse">
+            <a:avLst/>
+          </a:prstGeom>
+          <a:solidFill>
+            <a:srgbClr val="00A0B0"/>
+          </a:solidFill>
+          <a:ln>
+            <a:noFill/>
+          </a:ln>
+        </p:spPr>
+        <p:style>
+          <a:lnRef idx="1">
+            <a:schemeClr val="accent1"/>
+          </a:lnRef>
+          <a:fillRef idx="3">
+            <a:schemeClr val="accent1"/>
+          </a:fillRef>
+          <a:effectRef idx="2">
+            <a:schemeClr val="accent1"/>
+          </a:effectRef>
+          <a:fontRef idx="minor">
+            <a:schemeClr val="lt1"/>
+          </a:fontRef>
+        </p:style>
+        <p:txBody>
+          <a:bodyPr rtlCol="0" anchor="ctr"/>
+          <a:lstStyle/>
+          <a:p>
+            <a:pPr algn="ctr"/>
+          </a:p>
+        </p:txBody>
+      </p:sp>
+      <p:sp>
+        <p:nvSpPr>
+          <p:cNvPr id="22" name="TextBox 21"/>
+          <p:cNvSpPr txBox="1"/>
+          <p:nvPr/>
+        </p:nvSpPr>
+        <p:spPr>
+          <a:xfrm>
+            <a:off x="3200400" y="5074920"/>
+            <a:ext cx="548640" cy="548640"/>
+          </a:xfrm>
+          <a:prstGeom prst="rect">
+            <a:avLst/>
+          </a:prstGeom>
+          <a:noFill/>
+        </p:spPr>
+        <p:txBody>
+          <a:bodyPr wrap="square" lIns="45720" rIns="45720" tIns="18288" bIns="18288" anchor="ctr">
+            <a:spAutoFit/>
+          </a:bodyPr>
+          <a:lstStyle/>
+          <a:p>
+            <a:pPr algn="ctr"/>
+            <a:r>
+              <a:rPr sz="1600" b="1" i="0">
+                <a:solidFill>
+                  <a:srgbClr val="FFFFFF"/>
+                </a:solidFill>
+                <a:latin typeface="Calibri"/>
+              </a:rPr>
+              <a:t>6</a:t>
+            </a:r>
+          </a:p>
+        </p:txBody>
+      </p:sp>
+      <p:sp>
+        <p:nvSpPr>
+          <p:cNvPr id="23" name="TextBox 22"/>
+          <p:cNvSpPr txBox="1"/>
+          <p:nvPr/>
+        </p:nvSpPr>
+        <p:spPr>
+          <a:xfrm>
+            <a:off x="4023360" y="5148072"/>
+            <a:ext cx="7772400" cy="548640"/>
+          </a:xfrm>
+          <a:prstGeom prst="rect">
+            <a:avLst/>
+          </a:prstGeom>
+          <a:noFill/>
+        </p:spPr>
+        <p:txBody>
+          <a:bodyPr wrap="square" lIns="45720" rIns="45720" tIns="18288" bIns="18288" anchor="ctr">
+            <a:spAutoFit/>
+          </a:bodyPr>
+          <a:lstStyle/>
+          <a:p>
+            <a:pPr algn="l"/>
+            <a:r>
+              <a:rPr sz="1600" b="0" i="0">
                 <a:solidFill>
                   <a:srgbClr val="1A1A2E"/>
                 </a:solidFill>
@@ -5957,7 +7006,7 @@
       </p:sp>
       <p:cxnSp>
         <p:nvCxnSpPr>
-          <p:cNvPr id="5" name="Connector 4"/>
+          <p:cNvPr id="24" name="Connector 23"/>
           <p:cNvCxnSpPr/>
           <p:nvPr/>
         </p:nvCxnSpPr>
@@ -5992,14 +7041,14 @@
       </p:cxnSp>
       <p:sp>
         <p:nvSpPr>
-          <p:cNvPr id="6" name="TextBox 5"/>
+          <p:cNvPr id="25" name="TextBox 24"/>
           <p:cNvSpPr txBox="1"/>
           <p:nvPr/>
         </p:nvSpPr>
         <p:spPr>
           <a:xfrm>
             <a:off x="457200" y="6473952"/>
-            <a:ext cx="7315200" cy="320040"/>
+            <a:ext cx="7315200" cy="292608"/>
           </a:xfrm>
           <a:prstGeom prst="rect">
             <a:avLst/>
@@ -6020,21 +7069,21 @@
                 </a:solidFill>
                 <a:latin typeface="Calibri"/>
               </a:rPr>
-              <a:t>Secure Coding · Corso IFTS STEM · A. Manneschi</a:t>
-            </a:r>
-          </a:p>
-        </p:txBody>
-      </p:sp>
-      <p:sp>
-        <p:nvSpPr>
-          <p:cNvPr id="7" name="TextBox 6"/>
+              <a:t>Secure Coding · Corso IFTS STEM · A. Manneschi · 2024/2025</a:t>
+            </a:r>
+          </a:p>
+        </p:txBody>
+      </p:sp>
+      <p:sp>
+        <p:nvSpPr>
+          <p:cNvPr id="26" name="TextBox 25"/>
           <p:cNvSpPr txBox="1"/>
           <p:nvPr/>
         </p:nvSpPr>
         <p:spPr>
           <a:xfrm>
             <a:off x="10515600" y="6473952"/>
-            <a:ext cx="1188720" cy="320040"/>
+            <a:ext cx="1188720" cy="292608"/>
           </a:xfrm>
           <a:prstGeom prst="rect">
             <a:avLst/>
@@ -6151,706 +7200,316 @@
                 </a:solidFill>
                 <a:latin typeface="Calibri"/>
               </a:rPr>
-              <a:t>Tre operazioni DIVERSE</a:t>
-            </a:r>
-          </a:p>
-        </p:txBody>
-      </p:sp>
-      <p:sp>
-        <p:nvSpPr>
-          <p:cNvPr id="4" name="Rectangle 3"/>
-          <p:cNvSpPr/>
-          <p:nvPr/>
-        </p:nvSpPr>
-        <p:spPr>
-          <a:xfrm>
-            <a:off x="457200" y="1097280"/>
-            <a:ext cx="5486400" cy="640080"/>
-          </a:xfrm>
-          <a:prstGeom prst="rect">
-            <a:avLst/>
-          </a:prstGeom>
-          <a:solidFill>
-            <a:srgbClr val="00A0B0"/>
-          </a:solidFill>
-          <a:ln>
-            <a:noFill/>
-          </a:ln>
-        </p:spPr>
-        <p:style>
-          <a:lnRef idx="1">
-            <a:schemeClr val="accent1"/>
-          </a:lnRef>
-          <a:fillRef idx="3">
-            <a:schemeClr val="accent1"/>
-          </a:fillRef>
-          <a:effectRef idx="2">
-            <a:schemeClr val="accent1"/>
-          </a:effectRef>
-          <a:fontRef idx="minor">
-            <a:schemeClr val="lt1"/>
-          </a:fontRef>
-        </p:style>
-        <p:txBody>
-          <a:bodyPr rtlCol="0" anchor="ctr"/>
-          <a:lstStyle/>
-          <a:p>
-            <a:pPr algn="ctr"/>
-          </a:p>
-        </p:txBody>
-      </p:sp>
-      <p:sp>
-        <p:nvSpPr>
-          <p:cNvPr id="5" name="TextBox 4"/>
-          <p:cNvSpPr txBox="1"/>
-          <p:nvPr/>
-        </p:nvSpPr>
-        <p:spPr>
-          <a:xfrm>
-            <a:off x="457200" y="1097280"/>
-            <a:ext cx="5486400" cy="640080"/>
-          </a:xfrm>
-          <a:prstGeom prst="rect">
-            <a:avLst/>
-          </a:prstGeom>
-          <a:noFill/>
-        </p:spPr>
-        <p:txBody>
-          <a:bodyPr wrap="square" lIns="45720" rIns="45720" tIns="18288" bIns="18288" anchor="ctr">
-            <a:spAutoFit/>
-          </a:bodyPr>
-          <a:lstStyle/>
-          <a:p>
-            <a:pPr algn="ctr"/>
-            <a:r>
-              <a:rPr sz="1800" b="1" i="0">
-                <a:solidFill>
-                  <a:srgbClr val="FFFFFF"/>
-                </a:solidFill>
-                <a:latin typeface="Calibri"/>
-              </a:rPr>
-              <a:t>Cosa fanno (in 3 parole)</a:t>
-            </a:r>
-          </a:p>
-        </p:txBody>
-      </p:sp>
-      <p:sp>
-        <p:nvSpPr>
-          <p:cNvPr id="6" name="Rectangle 5"/>
-          <p:cNvSpPr/>
-          <p:nvPr/>
-        </p:nvSpPr>
-        <p:spPr>
-          <a:xfrm>
-            <a:off x="457200" y="1737360"/>
-            <a:ext cx="5486400" cy="4937760"/>
-          </a:xfrm>
-          <a:prstGeom prst="rect">
-            <a:avLst/>
-          </a:prstGeom>
-          <a:solidFill>
-            <a:srgbClr val="F1F4F8"/>
-          </a:solidFill>
-          <a:ln>
-            <a:solidFill>
-              <a:srgbClr val="00A0B0"/>
-            </a:solidFill>
-          </a:ln>
-        </p:spPr>
-        <p:style>
-          <a:lnRef idx="1">
-            <a:schemeClr val="accent1"/>
-          </a:lnRef>
-          <a:fillRef idx="3">
-            <a:schemeClr val="accent1"/>
-          </a:fillRef>
-          <a:effectRef idx="2">
-            <a:schemeClr val="accent1"/>
-          </a:effectRef>
-          <a:fontRef idx="minor">
-            <a:schemeClr val="lt1"/>
-          </a:fontRef>
-        </p:style>
-        <p:txBody>
-          <a:bodyPr rtlCol="0" anchor="ctr"/>
-          <a:lstStyle/>
-          <a:p>
-            <a:pPr algn="ctr"/>
-          </a:p>
-        </p:txBody>
-      </p:sp>
-      <p:sp>
-        <p:nvSpPr>
-          <p:cNvPr id="7" name="TextBox 6"/>
-          <p:cNvSpPr txBox="1"/>
-          <p:nvPr/>
-        </p:nvSpPr>
-        <p:spPr>
-          <a:xfrm>
-            <a:off x="640080" y="1874519"/>
-            <a:ext cx="5120640" cy="4937760"/>
-          </a:xfrm>
-          <a:prstGeom prst="rect">
-            <a:avLst/>
-          </a:prstGeom>
-          <a:noFill/>
-        </p:spPr>
-        <p:txBody>
-          <a:bodyPr wrap="square">
-            <a:spAutoFit/>
-          </a:bodyPr>
-          <a:lstStyle/>
-          <a:p>
-            <a:pPr>
-              <a:lnSpc>
-                <a:spcPct val="140000"/>
-              </a:lnSpc>
-            </a:pPr>
-            <a:r>
-              <a:rPr sz="1500" b="1">
-                <a:solidFill>
-                  <a:srgbClr val="00A0B0"/>
-                </a:solidFill>
-                <a:latin typeface="Calibri"/>
-              </a:rPr>
-              <a:t>▸  </a:t>
-            </a:r>
-            <a:r>
-              <a:rPr sz="1500">
-                <a:solidFill>
-                  <a:srgbClr val="1A1A2E"/>
-                </a:solidFill>
-                <a:latin typeface="Calibri"/>
-              </a:rPr>
-              <a:t>VALIDATION:</a:t>
-            </a:r>
-          </a:p>
-          <a:p>
-            <a:pPr>
-              <a:lnSpc>
-                <a:spcPct val="140000"/>
-              </a:lnSpc>
-            </a:pPr>
-            <a:r>
-              <a:rPr sz="1500" b="1">
-                <a:solidFill>
-                  <a:srgbClr val="00A0B0"/>
-                </a:solidFill>
-                <a:latin typeface="Calibri"/>
-              </a:rPr>
-              <a:t>▸  </a:t>
-            </a:r>
-            <a:r>
-              <a:rPr sz="1500">
-                <a:solidFill>
-                  <a:srgbClr val="1A1A2E"/>
-                </a:solidFill>
-                <a:latin typeface="Calibri"/>
-              </a:rPr>
-              <a:t>  verifica + rifiuta</a:t>
-            </a:r>
-          </a:p>
-          <a:p>
-            <a:pPr>
-              <a:lnSpc>
-                <a:spcPct val="140000"/>
-              </a:lnSpc>
-            </a:pPr>
-            <a:r>
-              <a:rPr sz="1500" b="1">
-                <a:solidFill>
-                  <a:srgbClr val="00A0B0"/>
-                </a:solidFill>
-                <a:latin typeface="Calibri"/>
-              </a:rPr>
-              <a:t>▸  </a:t>
-            </a:r>
-            <a:r>
-              <a:rPr sz="1500">
-                <a:solidFill>
-                  <a:srgbClr val="1A1A2E"/>
-                </a:solidFill>
-                <a:latin typeface="Calibri"/>
-              </a:rPr>
-              <a:t/>
-            </a:r>
-          </a:p>
-          <a:p>
-            <a:pPr>
-              <a:lnSpc>
-                <a:spcPct val="140000"/>
-              </a:lnSpc>
-            </a:pPr>
-            <a:r>
-              <a:rPr sz="1500" b="1">
-                <a:solidFill>
-                  <a:srgbClr val="00A0B0"/>
-                </a:solidFill>
-                <a:latin typeface="Calibri"/>
-              </a:rPr>
-              <a:t>▸  </a:t>
-            </a:r>
-            <a:r>
-              <a:rPr sz="1500">
-                <a:solidFill>
-                  <a:srgbClr val="1A1A2E"/>
-                </a:solidFill>
-                <a:latin typeface="Calibri"/>
-              </a:rPr>
-              <a:t>SANITIZATION:</a:t>
-            </a:r>
-          </a:p>
-          <a:p>
-            <a:pPr>
-              <a:lnSpc>
-                <a:spcPct val="140000"/>
-              </a:lnSpc>
-            </a:pPr>
-            <a:r>
-              <a:rPr sz="1500" b="1">
-                <a:solidFill>
-                  <a:srgbClr val="00A0B0"/>
-                </a:solidFill>
-                <a:latin typeface="Calibri"/>
-              </a:rPr>
-              <a:t>▸  </a:t>
-            </a:r>
-            <a:r>
-              <a:rPr sz="1500">
-                <a:solidFill>
-                  <a:srgbClr val="1A1A2E"/>
-                </a:solidFill>
-                <a:latin typeface="Calibri"/>
-              </a:rPr>
-              <a:t>  modifica + tiene</a:t>
-            </a:r>
-          </a:p>
-          <a:p>
-            <a:pPr>
-              <a:lnSpc>
-                <a:spcPct val="140000"/>
-              </a:lnSpc>
-            </a:pPr>
-            <a:r>
-              <a:rPr sz="1500" b="1">
-                <a:solidFill>
-                  <a:srgbClr val="00A0B0"/>
-                </a:solidFill>
-                <a:latin typeface="Calibri"/>
-              </a:rPr>
-              <a:t>▸  </a:t>
-            </a:r>
-            <a:r>
-              <a:rPr sz="1500">
-                <a:solidFill>
-                  <a:srgbClr val="1A1A2E"/>
-                </a:solidFill>
-                <a:latin typeface="Calibri"/>
-              </a:rPr>
-              <a:t/>
-            </a:r>
-          </a:p>
-          <a:p>
-            <a:pPr>
-              <a:lnSpc>
-                <a:spcPct val="140000"/>
-              </a:lnSpc>
-            </a:pPr>
-            <a:r>
-              <a:rPr sz="1500" b="1">
-                <a:solidFill>
-                  <a:srgbClr val="00A0B0"/>
-                </a:solidFill>
-                <a:latin typeface="Calibri"/>
-              </a:rPr>
-              <a:t>▸  </a:t>
-            </a:r>
-            <a:r>
-              <a:rPr sz="1500">
-                <a:solidFill>
-                  <a:srgbClr val="1A1A2E"/>
-                </a:solidFill>
-                <a:latin typeface="Calibri"/>
-              </a:rPr>
-              <a:t>ENCODING:</a:t>
-            </a:r>
-          </a:p>
-          <a:p>
-            <a:pPr>
-              <a:lnSpc>
-                <a:spcPct val="140000"/>
-              </a:lnSpc>
-            </a:pPr>
-            <a:r>
-              <a:rPr sz="1500" b="1">
-                <a:solidFill>
-                  <a:srgbClr val="00A0B0"/>
-                </a:solidFill>
-                <a:latin typeface="Calibri"/>
-              </a:rPr>
-              <a:t>▸  </a:t>
-            </a:r>
-            <a:r>
-              <a:rPr sz="1500">
-                <a:solidFill>
-                  <a:srgbClr val="1A1A2E"/>
-                </a:solidFill>
-                <a:latin typeface="Calibri"/>
-              </a:rPr>
-              <a:t>  trasforma all'uscita</a:t>
-            </a:r>
-          </a:p>
-        </p:txBody>
-      </p:sp>
-      <p:sp>
-        <p:nvSpPr>
-          <p:cNvPr id="8" name="Rectangle 7"/>
-          <p:cNvSpPr/>
-          <p:nvPr/>
-        </p:nvSpPr>
-        <p:spPr>
-          <a:xfrm>
-            <a:off x="6217920" y="1097280"/>
-            <a:ext cx="5486400" cy="640080"/>
-          </a:xfrm>
-          <a:prstGeom prst="rect">
-            <a:avLst/>
-          </a:prstGeom>
-          <a:solidFill>
-            <a:srgbClr val="0F2D52"/>
-          </a:solidFill>
-          <a:ln>
-            <a:noFill/>
-          </a:ln>
-        </p:spPr>
-        <p:style>
-          <a:lnRef idx="1">
-            <a:schemeClr val="accent1"/>
-          </a:lnRef>
-          <a:fillRef idx="3">
-            <a:schemeClr val="accent1"/>
-          </a:fillRef>
-          <a:effectRef idx="2">
-            <a:schemeClr val="accent1"/>
-          </a:effectRef>
-          <a:fontRef idx="minor">
-            <a:schemeClr val="lt1"/>
-          </a:fontRef>
-        </p:style>
-        <p:txBody>
-          <a:bodyPr rtlCol="0" anchor="ctr"/>
-          <a:lstStyle/>
-          <a:p>
-            <a:pPr algn="ctr"/>
-          </a:p>
-        </p:txBody>
-      </p:sp>
-      <p:sp>
-        <p:nvSpPr>
-          <p:cNvPr id="9" name="TextBox 8"/>
-          <p:cNvSpPr txBox="1"/>
-          <p:nvPr/>
-        </p:nvSpPr>
-        <p:spPr>
-          <a:xfrm>
-            <a:off x="6217920" y="1097280"/>
-            <a:ext cx="5486400" cy="640080"/>
-          </a:xfrm>
-          <a:prstGeom prst="rect">
-            <a:avLst/>
-          </a:prstGeom>
-          <a:noFill/>
-        </p:spPr>
-        <p:txBody>
-          <a:bodyPr wrap="square" lIns="45720" rIns="45720" tIns="18288" bIns="18288" anchor="ctr">
-            <a:spAutoFit/>
-          </a:bodyPr>
-          <a:lstStyle/>
-          <a:p>
-            <a:pPr algn="ctr"/>
-            <a:r>
-              <a:rPr sz="1800" b="1" i="0">
-                <a:solidFill>
-                  <a:srgbClr val="FFFFFF"/>
-                </a:solidFill>
-                <a:latin typeface="Calibri"/>
-              </a:rPr>
-              <a:t>Quando si applicano</a:t>
-            </a:r>
-          </a:p>
-        </p:txBody>
-      </p:sp>
-      <p:sp>
-        <p:nvSpPr>
-          <p:cNvPr id="10" name="Rectangle 9"/>
-          <p:cNvSpPr/>
-          <p:nvPr/>
-        </p:nvSpPr>
-        <p:spPr>
-          <a:xfrm>
-            <a:off x="6217920" y="1737360"/>
-            <a:ext cx="5486400" cy="4937760"/>
-          </a:xfrm>
-          <a:prstGeom prst="rect">
-            <a:avLst/>
-          </a:prstGeom>
-          <a:solidFill>
-            <a:srgbClr val="F1F4F8"/>
-          </a:solidFill>
-          <a:ln>
-            <a:solidFill>
-              <a:srgbClr val="0F2D52"/>
-            </a:solidFill>
-          </a:ln>
-        </p:spPr>
-        <p:style>
-          <a:lnRef idx="1">
-            <a:schemeClr val="accent1"/>
-          </a:lnRef>
-          <a:fillRef idx="3">
-            <a:schemeClr val="accent1"/>
-          </a:fillRef>
-          <a:effectRef idx="2">
-            <a:schemeClr val="accent1"/>
-          </a:effectRef>
-          <a:fontRef idx="minor">
-            <a:schemeClr val="lt1"/>
-          </a:fontRef>
-        </p:style>
-        <p:txBody>
-          <a:bodyPr rtlCol="0" anchor="ctr"/>
-          <a:lstStyle/>
-          <a:p>
-            <a:pPr algn="ctr"/>
-          </a:p>
-        </p:txBody>
-      </p:sp>
-      <p:sp>
-        <p:nvSpPr>
-          <p:cNvPr id="11" name="TextBox 10"/>
-          <p:cNvSpPr txBox="1"/>
-          <p:nvPr/>
-        </p:nvSpPr>
-        <p:spPr>
-          <a:xfrm>
-            <a:off x="6400800" y="1874519"/>
-            <a:ext cx="5120640" cy="4937760"/>
-          </a:xfrm>
-          <a:prstGeom prst="rect">
-            <a:avLst/>
-          </a:prstGeom>
-          <a:noFill/>
-        </p:spPr>
-        <p:txBody>
-          <a:bodyPr wrap="square">
-            <a:spAutoFit/>
-          </a:bodyPr>
-          <a:lstStyle/>
-          <a:p>
-            <a:pPr>
-              <a:lnSpc>
-                <a:spcPct val="140000"/>
-              </a:lnSpc>
-            </a:pPr>
-            <a:r>
-              <a:rPr sz="1500" b="1">
-                <a:solidFill>
-                  <a:srgbClr val="00A0B0"/>
-                </a:solidFill>
-                <a:latin typeface="Calibri"/>
-              </a:rPr>
-              <a:t>▸  </a:t>
-            </a:r>
-            <a:r>
-              <a:rPr sz="1500">
-                <a:solidFill>
-                  <a:srgbClr val="1A1A2E"/>
-                </a:solidFill>
-                <a:latin typeface="Calibri"/>
-              </a:rPr>
-              <a:t>VALIDATE: all'entrata</a:t>
-            </a:r>
-          </a:p>
-          <a:p>
-            <a:pPr>
-              <a:lnSpc>
-                <a:spcPct val="140000"/>
-              </a:lnSpc>
-            </a:pPr>
-            <a:r>
-              <a:rPr sz="1500" b="1">
-                <a:solidFill>
-                  <a:srgbClr val="00A0B0"/>
-                </a:solidFill>
-                <a:latin typeface="Calibri"/>
-              </a:rPr>
-              <a:t>▸  </a:t>
-            </a:r>
-            <a:r>
-              <a:rPr sz="1500">
-                <a:solidFill>
-                  <a:srgbClr val="1A1A2E"/>
-                </a:solidFill>
-                <a:latin typeface="Calibri"/>
-              </a:rPr>
-              <a:t>  (rifiuta input invalidi)</a:t>
-            </a:r>
-          </a:p>
-          <a:p>
-            <a:pPr>
-              <a:lnSpc>
-                <a:spcPct val="140000"/>
-              </a:lnSpc>
-            </a:pPr>
-            <a:r>
-              <a:rPr sz="1500" b="1">
-                <a:solidFill>
-                  <a:srgbClr val="00A0B0"/>
-                </a:solidFill>
-                <a:latin typeface="Calibri"/>
-              </a:rPr>
-              <a:t>▸  </a:t>
-            </a:r>
-            <a:r>
-              <a:rPr sz="1500">
-                <a:solidFill>
-                  <a:srgbClr val="1A1A2E"/>
-                </a:solidFill>
-                <a:latin typeface="Calibri"/>
-              </a:rPr>
-              <a:t/>
-            </a:r>
-          </a:p>
-          <a:p>
-            <a:pPr>
-              <a:lnSpc>
-                <a:spcPct val="140000"/>
-              </a:lnSpc>
-            </a:pPr>
-            <a:r>
-              <a:rPr sz="1500" b="1">
-                <a:solidFill>
-                  <a:srgbClr val="00A0B0"/>
-                </a:solidFill>
-                <a:latin typeface="Calibri"/>
-              </a:rPr>
-              <a:t>▸  </a:t>
-            </a:r>
-            <a:r>
-              <a:rPr sz="1500">
-                <a:solidFill>
-                  <a:srgbClr val="1A1A2E"/>
-                </a:solidFill>
-                <a:latin typeface="Calibri"/>
-              </a:rPr>
-              <a:t>ENCODE: all'uscita</a:t>
-            </a:r>
-          </a:p>
-          <a:p>
-            <a:pPr>
-              <a:lnSpc>
-                <a:spcPct val="140000"/>
-              </a:lnSpc>
-            </a:pPr>
-            <a:r>
-              <a:rPr sz="1500" b="1">
-                <a:solidFill>
-                  <a:srgbClr val="00A0B0"/>
-                </a:solidFill>
-                <a:latin typeface="Calibri"/>
-              </a:rPr>
-              <a:t>▸  </a:t>
-            </a:r>
-            <a:r>
-              <a:rPr sz="1500">
-                <a:solidFill>
-                  <a:srgbClr val="1A1A2E"/>
-                </a:solidFill>
-                <a:latin typeface="Calibri"/>
-              </a:rPr>
-              <a:t>  (proteggi dal contesto)</a:t>
-            </a:r>
-          </a:p>
-          <a:p>
-            <a:pPr>
-              <a:lnSpc>
-                <a:spcPct val="140000"/>
-              </a:lnSpc>
-            </a:pPr>
-            <a:r>
-              <a:rPr sz="1500" b="1">
-                <a:solidFill>
-                  <a:srgbClr val="00A0B0"/>
-                </a:solidFill>
-                <a:latin typeface="Calibri"/>
-              </a:rPr>
-              <a:t>▸  </a:t>
-            </a:r>
-            <a:r>
-              <a:rPr sz="1500">
-                <a:solidFill>
-                  <a:srgbClr val="1A1A2E"/>
-                </a:solidFill>
-                <a:latin typeface="Calibri"/>
-              </a:rPr>
-              <a:t/>
-            </a:r>
-          </a:p>
-          <a:p>
-            <a:pPr>
-              <a:lnSpc>
-                <a:spcPct val="140000"/>
-              </a:lnSpc>
-            </a:pPr>
-            <a:r>
-              <a:rPr sz="1500" b="1">
-                <a:solidFill>
-                  <a:srgbClr val="00A0B0"/>
-                </a:solidFill>
-                <a:latin typeface="Calibri"/>
-              </a:rPr>
-              <a:t>▸  </a:t>
-            </a:r>
-            <a:r>
-              <a:rPr sz="1500">
-                <a:solidFill>
-                  <a:srgbClr val="1A1A2E"/>
-                </a:solidFill>
-                <a:latin typeface="Calibri"/>
-              </a:rPr>
-              <a:t>SANITIZE: solo se serve</a:t>
-            </a:r>
-          </a:p>
-          <a:p>
-            <a:pPr>
-              <a:lnSpc>
-                <a:spcPct val="140000"/>
-              </a:lnSpc>
-            </a:pPr>
-            <a:r>
-              <a:rPr sz="1500" b="1">
-                <a:solidFill>
-                  <a:srgbClr val="00A0B0"/>
-                </a:solidFill>
-                <a:latin typeface="Calibri"/>
-              </a:rPr>
-              <a:t>▸  </a:t>
-            </a:r>
-            <a:r>
-              <a:rPr sz="1500">
-                <a:solidFill>
-                  <a:srgbClr val="1A1A2E"/>
-                </a:solidFill>
-                <a:latin typeface="Calibri"/>
-              </a:rPr>
-              <a:t>  struttura ricca (HTML)</a:t>
-            </a:r>
-          </a:p>
-        </p:txBody>
-      </p:sp>
+              <a:t>Validation vs Sanitization vs Encoding</a:t>
+            </a:r>
+          </a:p>
+        </p:txBody>
+      </p:sp>
+      <p:graphicFrame>
+        <p:nvGraphicFramePr>
+          <p:cNvPr id="4" name="Table 3"/>
+          <p:cNvGraphicFramePr>
+            <a:graphicFrameLocks noGrp="1"/>
+          </p:cNvGraphicFramePr>
+          <p:nvPr/>
+        </p:nvGraphicFramePr>
+        <p:xfrm>
+          <a:off x="457200" y="1188720"/>
+          <a:ext cx="11247120" cy="4937760"/>
+        </p:xfrm>
+        <a:graphic>
+          <a:graphicData uri="http://schemas.openxmlformats.org/drawingml/2006/table">
+            <a:tbl>
+              <a:tblPr firstRow="1" bandRow="1">
+                <a:tableStyleId>{5C22544A-7EE6-4342-B048-85BDC9FD1C3A}</a:tableStyleId>
+              </a:tblPr>
+              <a:tblGrid>
+                <a:gridCol w="3749040"/>
+                <a:gridCol w="3749040"/>
+                <a:gridCol w="3749040"/>
+              </a:tblGrid>
+              <a:tr h="1234440">
+                <a:tc>
+                  <a:txBody>
+                    <a:bodyPr/>
+                    <a:lstStyle/>
+                    <a:p>
+                      <a:pPr algn="ctr"/>
+                      <a:r>
+                        <a:rPr sz="1300" b="1">
+                          <a:solidFill>
+                            <a:srgbClr val="FFFFFF"/>
+                          </a:solidFill>
+                          <a:latin typeface="Calibri"/>
+                        </a:rPr>
+                        <a:t>Operazione</a:t>
+                      </a:r>
+                    </a:p>
+                  </a:txBody>
+                  <a:tcPr>
+                    <a:solidFill>
+                      <a:srgbClr val="0F2D52"/>
+                    </a:solidFill>
+                  </a:tcPr>
+                </a:tc>
+                <a:tc>
+                  <a:txBody>
+                    <a:bodyPr/>
+                    <a:lstStyle/>
+                    <a:p>
+                      <a:pPr algn="ctr"/>
+                      <a:r>
+                        <a:rPr sz="1300" b="1">
+                          <a:solidFill>
+                            <a:srgbClr val="FFFFFF"/>
+                          </a:solidFill>
+                          <a:latin typeface="Calibri"/>
+                        </a:rPr>
+                        <a:t>Cosa fa</a:t>
+                      </a:r>
+                    </a:p>
+                  </a:txBody>
+                  <a:tcPr>
+                    <a:solidFill>
+                      <a:srgbClr val="0F2D52"/>
+                    </a:solidFill>
+                  </a:tcPr>
+                </a:tc>
+                <a:tc>
+                  <a:txBody>
+                    <a:bodyPr/>
+                    <a:lstStyle/>
+                    <a:p>
+                      <a:pPr algn="ctr"/>
+                      <a:r>
+                        <a:rPr sz="1300" b="1">
+                          <a:solidFill>
+                            <a:srgbClr val="FFFFFF"/>
+                          </a:solidFill>
+                          <a:latin typeface="Calibri"/>
+                        </a:rPr>
+                        <a:t>Quando si usa</a:t>
+                      </a:r>
+                    </a:p>
+                  </a:txBody>
+                  <a:tcPr>
+                    <a:solidFill>
+                      <a:srgbClr val="0F2D52"/>
+                    </a:solidFill>
+                  </a:tcPr>
+                </a:tc>
+              </a:tr>
+              <a:tr h="1234440">
+                <a:tc>
+                  <a:txBody>
+                    <a:bodyPr/>
+                    <a:lstStyle/>
+                    <a:p>
+                      <a:r>
+                        <a:rPr sz="1100">
+                          <a:solidFill>
+                            <a:srgbClr val="1A1A2E"/>
+                          </a:solidFill>
+                          <a:latin typeface="Calibri"/>
+                        </a:rPr>
+                        <a:t>Validation</a:t>
+                      </a:r>
+                    </a:p>
+                  </a:txBody>
+                  <a:tcPr>
+                    <a:solidFill>
+                      <a:srgbClr val="F1F4F8"/>
+                    </a:solidFill>
+                  </a:tcPr>
+                </a:tc>
+                <a:tc>
+                  <a:txBody>
+                    <a:bodyPr/>
+                    <a:lstStyle/>
+                    <a:p>
+                      <a:r>
+                        <a:rPr sz="1100">
+                          <a:solidFill>
+                            <a:srgbClr val="1A1A2E"/>
+                          </a:solidFill>
+                          <a:latin typeface="Calibri"/>
+                        </a:rPr>
+                        <a:t>Verifica + rifiuta</a:t>
+                      </a:r>
+                    </a:p>
+                  </a:txBody>
+                  <a:tcPr>
+                    <a:solidFill>
+                      <a:srgbClr val="F1F4F8"/>
+                    </a:solidFill>
+                  </a:tcPr>
+                </a:tc>
+                <a:tc>
+                  <a:txBody>
+                    <a:bodyPr/>
+                    <a:lstStyle/>
+                    <a:p>
+                      <a:r>
+                        <a:rPr sz="1100">
+                          <a:solidFill>
+                            <a:srgbClr val="1A1A2E"/>
+                          </a:solidFill>
+                          <a:latin typeface="Calibri"/>
+                        </a:rPr>
+                        <a:t>All'ENTRATA</a:t>
+                      </a:r>
+                    </a:p>
+                  </a:txBody>
+                  <a:tcPr>
+                    <a:solidFill>
+                      <a:srgbClr val="F1F4F8"/>
+                    </a:solidFill>
+                  </a:tcPr>
+                </a:tc>
+              </a:tr>
+              <a:tr h="1234440">
+                <a:tc>
+                  <a:txBody>
+                    <a:bodyPr/>
+                    <a:lstStyle/>
+                    <a:p>
+                      <a:r>
+                        <a:rPr sz="1100">
+                          <a:solidFill>
+                            <a:srgbClr val="1A1A2E"/>
+                          </a:solidFill>
+                          <a:latin typeface="Calibri"/>
+                        </a:rPr>
+                        <a:t>Sanitization</a:t>
+                      </a:r>
+                    </a:p>
+                  </a:txBody>
+                  <a:tcPr>
+                    <a:solidFill>
+                      <a:srgbClr val="FFFFFF"/>
+                    </a:solidFill>
+                  </a:tcPr>
+                </a:tc>
+                <a:tc>
+                  <a:txBody>
+                    <a:bodyPr/>
+                    <a:lstStyle/>
+                    <a:p>
+                      <a:r>
+                        <a:rPr sz="1100">
+                          <a:solidFill>
+                            <a:srgbClr val="1A1A2E"/>
+                          </a:solidFill>
+                          <a:latin typeface="Calibri"/>
+                        </a:rPr>
+                        <a:t>Modifica + tiene</a:t>
+                      </a:r>
+                    </a:p>
+                  </a:txBody>
+                  <a:tcPr>
+                    <a:solidFill>
+                      <a:srgbClr val="FFFFFF"/>
+                    </a:solidFill>
+                  </a:tcPr>
+                </a:tc>
+                <a:tc>
+                  <a:txBody>
+                    <a:bodyPr/>
+                    <a:lstStyle/>
+                    <a:p>
+                      <a:r>
+                        <a:rPr sz="1100">
+                          <a:solidFill>
+                            <a:srgbClr val="1A1A2E"/>
+                          </a:solidFill>
+                          <a:latin typeface="Calibri"/>
+                        </a:rPr>
+                        <a:t>Per struttura ricca (HTML)</a:t>
+                      </a:r>
+                    </a:p>
+                  </a:txBody>
+                  <a:tcPr>
+                    <a:solidFill>
+                      <a:srgbClr val="FFFFFF"/>
+                    </a:solidFill>
+                  </a:tcPr>
+                </a:tc>
+              </a:tr>
+              <a:tr h="1234440">
+                <a:tc>
+                  <a:txBody>
+                    <a:bodyPr/>
+                    <a:lstStyle/>
+                    <a:p>
+                      <a:r>
+                        <a:rPr sz="1100">
+                          <a:solidFill>
+                            <a:srgbClr val="1A1A2E"/>
+                          </a:solidFill>
+                          <a:latin typeface="Calibri"/>
+                        </a:rPr>
+                        <a:t>Encoding</a:t>
+                      </a:r>
+                    </a:p>
+                  </a:txBody>
+                  <a:tcPr>
+                    <a:solidFill>
+                      <a:srgbClr val="F1F4F8"/>
+                    </a:solidFill>
+                  </a:tcPr>
+                </a:tc>
+                <a:tc>
+                  <a:txBody>
+                    <a:bodyPr/>
+                    <a:lstStyle/>
+                    <a:p>
+                      <a:r>
+                        <a:rPr sz="1100">
+                          <a:solidFill>
+                            <a:srgbClr val="1A1A2E"/>
+                          </a:solidFill>
+                          <a:latin typeface="Calibri"/>
+                        </a:rPr>
+                        <a:t>Trasforma all'uscita</a:t>
+                      </a:r>
+                    </a:p>
+                  </a:txBody>
+                  <a:tcPr>
+                    <a:solidFill>
+                      <a:srgbClr val="F1F4F8"/>
+                    </a:solidFill>
+                  </a:tcPr>
+                </a:tc>
+                <a:tc>
+                  <a:txBody>
+                    <a:bodyPr/>
+                    <a:lstStyle/>
+                    <a:p>
+                      <a:r>
+                        <a:rPr sz="1100">
+                          <a:solidFill>
+                            <a:srgbClr val="1A1A2E"/>
+                          </a:solidFill>
+                          <a:latin typeface="Calibri"/>
+                        </a:rPr>
+                        <a:t>All'USCITA, per contesto</a:t>
+                      </a:r>
+                    </a:p>
+                  </a:txBody>
+                  <a:tcPr>
+                    <a:solidFill>
+                      <a:srgbClr val="F1F4F8"/>
+                    </a:solidFill>
+                  </a:tcPr>
+                </a:tc>
+              </a:tr>
+            </a:tbl>
+          </a:graphicData>
+        </a:graphic>
+      </p:graphicFrame>
       <p:cxnSp>
         <p:nvCxnSpPr>
-          <p:cNvPr id="12" name="Connector 11"/>
+          <p:cNvPr id="5" name="Connector 4"/>
           <p:cNvCxnSpPr/>
           <p:nvPr/>
         </p:nvCxnSpPr>
@@ -6885,14 +7544,14 @@
       </p:cxnSp>
       <p:sp>
         <p:nvSpPr>
-          <p:cNvPr id="13" name="TextBox 12"/>
+          <p:cNvPr id="6" name="TextBox 5"/>
           <p:cNvSpPr txBox="1"/>
           <p:nvPr/>
         </p:nvSpPr>
         <p:spPr>
           <a:xfrm>
             <a:off x="457200" y="6473952"/>
-            <a:ext cx="7315200" cy="320040"/>
+            <a:ext cx="7315200" cy="292608"/>
           </a:xfrm>
           <a:prstGeom prst="rect">
             <a:avLst/>
@@ -6913,21 +7572,21 @@
                 </a:solidFill>
                 <a:latin typeface="Calibri"/>
               </a:rPr>
-              <a:t>Secure Coding · Corso IFTS STEM · A. Manneschi</a:t>
-            </a:r>
-          </a:p>
-        </p:txBody>
-      </p:sp>
-      <p:sp>
-        <p:nvSpPr>
-          <p:cNvPr id="14" name="TextBox 13"/>
+              <a:t>Secure Coding · Corso IFTS STEM · A. Manneschi · 2024/2025</a:t>
+            </a:r>
+          </a:p>
+        </p:txBody>
+      </p:sp>
+      <p:sp>
+        <p:nvSpPr>
+          <p:cNvPr id="7" name="TextBox 6"/>
           <p:cNvSpPr txBox="1"/>
           <p:nvPr/>
         </p:nvSpPr>
         <p:spPr>
           <a:xfrm>
             <a:off x="10515600" y="6473952"/>
-            <a:ext cx="1188720" cy="320040"/>
+            <a:ext cx="1188720" cy="292608"/>
           </a:xfrm>
           <a:prstGeom prst="rect">
             <a:avLst/>
@@ -7051,17 +7710,19 @@
       </p:sp>
       <p:sp>
         <p:nvSpPr>
-          <p:cNvPr id="4" name="Rectangle 3"/>
+          <p:cNvPr id="4" name="Rounded Rectangle 3"/>
           <p:cNvSpPr/>
           <p:nvPr/>
         </p:nvSpPr>
         <p:spPr>
           <a:xfrm>
-            <a:off x="457200" y="1097280"/>
+            <a:off x="457200" y="1051560"/>
             <a:ext cx="5486400" cy="640080"/>
           </a:xfrm>
-          <a:prstGeom prst="rect">
-            <a:avLst/>
+          <a:prstGeom prst="roundRect">
+            <a:avLst>
+              <a:gd name="adj" fmla="val 8000"/>
+            </a:avLst>
           </a:prstGeom>
           <a:solidFill>
             <a:srgbClr val="E63946"/>
@@ -7100,7 +7761,7 @@
         </p:nvSpPr>
         <p:spPr>
           <a:xfrm>
-            <a:off x="457200" y="1097280"/>
+            <a:off x="457200" y="1051560"/>
             <a:ext cx="5486400" cy="640080"/>
           </a:xfrm>
           <a:prstGeom prst="rect">
@@ -7129,22 +7790,24 @@
       </p:sp>
       <p:sp>
         <p:nvSpPr>
-          <p:cNvPr id="6" name="Rectangle 5"/>
+          <p:cNvPr id="6" name="Rounded Rectangle 5"/>
           <p:cNvSpPr/>
           <p:nvPr/>
         </p:nvSpPr>
         <p:spPr>
           <a:xfrm>
             <a:off x="457200" y="1737360"/>
-            <a:ext cx="5486400" cy="4937760"/>
-          </a:xfrm>
-          <a:prstGeom prst="rect">
-            <a:avLst/>
+            <a:ext cx="5486400" cy="4572000"/>
+          </a:xfrm>
+          <a:prstGeom prst="roundRect">
+            <a:avLst>
+              <a:gd name="adj" fmla="val 8000"/>
+            </a:avLst>
           </a:prstGeom>
           <a:solidFill>
-            <a:srgbClr val="F1F4F8"/>
+            <a:srgbClr val="FBFBFD"/>
           </a:solidFill>
-          <a:ln>
+          <a:ln w="25400">
             <a:solidFill>
               <a:srgbClr val="E63946"/>
             </a:solidFill>
@@ -7181,7 +7844,7 @@
         <p:spPr>
           <a:xfrm>
             <a:off x="640080" y="1874519"/>
-            <a:ext cx="5120640" cy="4937760"/>
+            <a:ext cx="5120640" cy="4572000"/>
           </a:xfrm>
           <a:prstGeom prst="rect">
             <a:avLst/>
@@ -7196,13 +7859,16 @@
           <a:p>
             <a:pPr>
               <a:lnSpc>
-                <a:spcPct val="140000"/>
+                <a:spcPct val="150000"/>
               </a:lnSpc>
+              <a:spcAft>
+                <a:spcPts val="400"/>
+              </a:spcAft>
             </a:pPr>
             <a:r>
               <a:rPr sz="1500" b="1">
                 <a:solidFill>
-                  <a:srgbClr val="00A0B0"/>
+                  <a:srgbClr val="E63946"/>
                 </a:solidFill>
                 <a:latin typeface="Calibri"/>
               </a:rPr>
@@ -7221,13 +7887,16 @@
           <a:p>
             <a:pPr>
               <a:lnSpc>
-                <a:spcPct val="140000"/>
+                <a:spcPct val="150000"/>
               </a:lnSpc>
+              <a:spcAft>
+                <a:spcPts val="400"/>
+              </a:spcAft>
             </a:pPr>
             <a:r>
               <a:rPr sz="1500" b="1">
                 <a:solidFill>
-                  <a:srgbClr val="00A0B0"/>
+                  <a:srgbClr val="E63946"/>
                 </a:solidFill>
                 <a:latin typeface="Calibri"/>
               </a:rPr>
@@ -7246,13 +7915,16 @@
           <a:p>
             <a:pPr>
               <a:lnSpc>
-                <a:spcPct val="140000"/>
+                <a:spcPct val="150000"/>
               </a:lnSpc>
+              <a:spcAft>
+                <a:spcPts val="400"/>
+              </a:spcAft>
             </a:pPr>
             <a:r>
               <a:rPr sz="1500" b="1">
                 <a:solidFill>
-                  <a:srgbClr val="00A0B0"/>
+                  <a:srgbClr val="E63946"/>
                 </a:solidFill>
                 <a:latin typeface="Calibri"/>
               </a:rPr>
@@ -7265,19 +7937,22 @@
                 </a:solidFill>
                 <a:latin typeface="Calibri"/>
               </a:rPr>
-              <a:t>Problema: lista incompleta</a:t>
+              <a:t/>
             </a:r>
           </a:p>
           <a:p>
             <a:pPr>
               <a:lnSpc>
-                <a:spcPct val="140000"/>
+                <a:spcPct val="150000"/>
               </a:lnSpc>
+              <a:spcAft>
+                <a:spcPts val="400"/>
+              </a:spcAft>
             </a:pPr>
             <a:r>
               <a:rPr sz="1500" b="1">
                 <a:solidFill>
-                  <a:srgbClr val="00A0B0"/>
+                  <a:srgbClr val="E63946"/>
                 </a:solidFill>
                 <a:latin typeface="Calibri"/>
               </a:rPr>
@@ -7290,19 +7965,22 @@
                 </a:solidFill>
                 <a:latin typeface="Calibri"/>
               </a:rPr>
-              <a:t>Bypass con encoding, varianti, Unicode</a:t>
+              <a:t>Problemi:</a:t>
             </a:r>
           </a:p>
           <a:p>
             <a:pPr>
               <a:lnSpc>
-                <a:spcPct val="140000"/>
+                <a:spcPct val="150000"/>
               </a:lnSpc>
+              <a:spcAft>
+                <a:spcPts val="400"/>
+              </a:spcAft>
             </a:pPr>
             <a:r>
               <a:rPr sz="1500" b="1">
                 <a:solidFill>
-                  <a:srgbClr val="00A0B0"/>
+                  <a:srgbClr val="E63946"/>
                 </a:solidFill>
                 <a:latin typeface="Calibri"/>
               </a:rPr>
@@ -7315,19 +7993,22 @@
                 </a:solidFill>
                 <a:latin typeface="Calibri"/>
               </a:rPr>
-              <a:t>L'attaccante è creativo</a:t>
+              <a:t>  lista sempre incompleta</a:t>
             </a:r>
           </a:p>
           <a:p>
             <a:pPr>
               <a:lnSpc>
-                <a:spcPct val="140000"/>
+                <a:spcPct val="150000"/>
               </a:lnSpc>
+              <a:spcAft>
+                <a:spcPts val="400"/>
+              </a:spcAft>
             </a:pPr>
             <a:r>
               <a:rPr sz="1500" b="1">
                 <a:solidFill>
-                  <a:srgbClr val="00A0B0"/>
+                  <a:srgbClr val="E63946"/>
                 </a:solidFill>
                 <a:latin typeface="Calibri"/>
               </a:rPr>
@@ -7340,6 +8021,118 @@
                 </a:solidFill>
                 <a:latin typeface="Calibri"/>
               </a:rPr>
+              <a:t>  bypass con encoding</a:t>
+            </a:r>
+          </a:p>
+          <a:p>
+            <a:pPr>
+              <a:lnSpc>
+                <a:spcPct val="150000"/>
+              </a:lnSpc>
+              <a:spcAft>
+                <a:spcPts val="400"/>
+              </a:spcAft>
+            </a:pPr>
+            <a:r>
+              <a:rPr sz="1500" b="1">
+                <a:solidFill>
+                  <a:srgbClr val="E63946"/>
+                </a:solidFill>
+                <a:latin typeface="Calibri"/>
+              </a:rPr>
+              <a:t>▸  </a:t>
+            </a:r>
+            <a:r>
+              <a:rPr sz="1500">
+                <a:solidFill>
+                  <a:srgbClr val="1A1A2E"/>
+                </a:solidFill>
+                <a:latin typeface="Calibri"/>
+              </a:rPr>
+              <a:t>  bypass con Unicode</a:t>
+            </a:r>
+          </a:p>
+          <a:p>
+            <a:pPr>
+              <a:lnSpc>
+                <a:spcPct val="150000"/>
+              </a:lnSpc>
+              <a:spcAft>
+                <a:spcPts val="400"/>
+              </a:spcAft>
+            </a:pPr>
+            <a:r>
+              <a:rPr sz="1500" b="1">
+                <a:solidFill>
+                  <a:srgbClr val="E63946"/>
+                </a:solidFill>
+                <a:latin typeface="Calibri"/>
+              </a:rPr>
+              <a:t>▸  </a:t>
+            </a:r>
+            <a:r>
+              <a:rPr sz="1500">
+                <a:solidFill>
+                  <a:srgbClr val="1A1A2E"/>
+                </a:solidFill>
+                <a:latin typeface="Calibri"/>
+              </a:rPr>
+              <a:t>  l'attaccante è creativo</a:t>
+            </a:r>
+          </a:p>
+          <a:p>
+            <a:pPr>
+              <a:lnSpc>
+                <a:spcPct val="150000"/>
+              </a:lnSpc>
+              <a:spcAft>
+                <a:spcPts val="400"/>
+              </a:spcAft>
+            </a:pPr>
+            <a:r>
+              <a:rPr sz="1500" b="1">
+                <a:solidFill>
+                  <a:srgbClr val="E63946"/>
+                </a:solidFill>
+                <a:latin typeface="Calibri"/>
+              </a:rPr>
+              <a:t>▸  </a:t>
+            </a:r>
+            <a:r>
+              <a:rPr sz="1500">
+                <a:solidFill>
+                  <a:srgbClr val="1A1A2E"/>
+                </a:solidFill>
+                <a:latin typeface="Calibri"/>
+              </a:rPr>
+              <a:t/>
+            </a:r>
+          </a:p>
+          <a:p>
+            <a:pPr>
+              <a:lnSpc>
+                <a:spcPct val="150000"/>
+              </a:lnSpc>
+              <a:spcAft>
+                <a:spcPts val="400"/>
+              </a:spcAft>
+            </a:pPr>
+            <a:r>
+              <a:rPr sz="1500" b="1">
+                <a:solidFill>
+                  <a:srgbClr val="E63946"/>
+                </a:solidFill>
+                <a:latin typeface="Calibri"/>
+              </a:rPr>
+              <a:t>▸  </a:t>
+            </a:r>
+            <a:r>
+              <a:rPr sz="1500">
+                <a:solidFill>
+                  <a:srgbClr val="1A1A2E"/>
+                </a:solidFill>
+                <a:latin typeface="Calibri"/>
+              </a:rPr>
               <a:t>Strategia perdente</a:t>
             </a:r>
           </a:p>
@@ -7347,17 +8140,19 @@
       </p:sp>
       <p:sp>
         <p:nvSpPr>
-          <p:cNvPr id="8" name="Rectangle 7"/>
+          <p:cNvPr id="8" name="Rounded Rectangle 7"/>
           <p:cNvSpPr/>
           <p:nvPr/>
         </p:nvSpPr>
         <p:spPr>
           <a:xfrm>
-            <a:off x="6217920" y="1097280"/>
+            <a:off x="6217920" y="1051560"/>
             <a:ext cx="5486400" cy="640080"/>
           </a:xfrm>
-          <a:prstGeom prst="rect">
-            <a:avLst/>
+          <a:prstGeom prst="roundRect">
+            <a:avLst>
+              <a:gd name="adj" fmla="val 8000"/>
+            </a:avLst>
           </a:prstGeom>
           <a:solidFill>
             <a:srgbClr val="06A77D"/>
@@ -7396,7 +8191,7 @@
         </p:nvSpPr>
         <p:spPr>
           <a:xfrm>
-            <a:off x="6217920" y="1097280"/>
+            <a:off x="6217920" y="1051560"/>
             <a:ext cx="5486400" cy="640080"/>
           </a:xfrm>
           <a:prstGeom prst="rect">
@@ -7425,22 +8220,24 @@
       </p:sp>
       <p:sp>
         <p:nvSpPr>
-          <p:cNvPr id="10" name="Rectangle 9"/>
+          <p:cNvPr id="10" name="Rounded Rectangle 9"/>
           <p:cNvSpPr/>
           <p:nvPr/>
         </p:nvSpPr>
         <p:spPr>
           <a:xfrm>
             <a:off x="6217920" y="1737360"/>
-            <a:ext cx="5486400" cy="4937760"/>
-          </a:xfrm>
-          <a:prstGeom prst="rect">
-            <a:avLst/>
+            <a:ext cx="5486400" cy="4572000"/>
+          </a:xfrm>
+          <a:prstGeom prst="roundRect">
+            <a:avLst>
+              <a:gd name="adj" fmla="val 8000"/>
+            </a:avLst>
           </a:prstGeom>
           <a:solidFill>
-            <a:srgbClr val="F1F4F8"/>
+            <a:srgbClr val="FBFBFD"/>
           </a:solidFill>
-          <a:ln>
+          <a:ln w="25400">
             <a:solidFill>
               <a:srgbClr val="06A77D"/>
             </a:solidFill>
@@ -7477,7 +8274,7 @@
         <p:spPr>
           <a:xfrm>
             <a:off x="6400800" y="1874519"/>
-            <a:ext cx="5120640" cy="4937760"/>
+            <a:ext cx="5120640" cy="4572000"/>
           </a:xfrm>
           <a:prstGeom prst="rect">
             <a:avLst/>
@@ -7492,13 +8289,16 @@
           <a:p>
             <a:pPr>
               <a:lnSpc>
-                <a:spcPct val="140000"/>
+                <a:spcPct val="150000"/>
               </a:lnSpc>
+              <a:spcAft>
+                <a:spcPts val="400"/>
+              </a:spcAft>
             </a:pPr>
             <a:r>
               <a:rPr sz="1500" b="1">
                 <a:solidFill>
-                  <a:srgbClr val="00A0B0"/>
+                  <a:srgbClr val="06A77D"/>
                 </a:solidFill>
                 <a:latin typeface="Calibri"/>
               </a:rPr>
@@ -7517,13 +8317,16 @@
           <a:p>
             <a:pPr>
               <a:lnSpc>
-                <a:spcPct val="140000"/>
+                <a:spcPct val="150000"/>
               </a:lnSpc>
+              <a:spcAft>
+                <a:spcPts val="400"/>
+              </a:spcAft>
             </a:pPr>
             <a:r>
               <a:rPr sz="1500" b="1">
                 <a:solidFill>
-                  <a:srgbClr val="00A0B0"/>
+                  <a:srgbClr val="06A77D"/>
                 </a:solidFill>
                 <a:latin typeface="Calibri"/>
               </a:rPr>
@@ -7542,13 +8345,16 @@
           <a:p>
             <a:pPr>
               <a:lnSpc>
-                <a:spcPct val="140000"/>
+                <a:spcPct val="150000"/>
               </a:lnSpc>
+              <a:spcAft>
+                <a:spcPts val="400"/>
+              </a:spcAft>
             </a:pPr>
             <a:r>
               <a:rPr sz="1500" b="1">
                 <a:solidFill>
-                  <a:srgbClr val="00A0B0"/>
+                  <a:srgbClr val="06A77D"/>
                 </a:solidFill>
                 <a:latin typeface="Calibri"/>
               </a:rPr>
@@ -7561,19 +8367,22 @@
                 </a:solidFill>
                 <a:latin typeface="Calibri"/>
               </a:rPr>
-              <a:t>Definito, esplicito</a:t>
+              <a:t/>
             </a:r>
           </a:p>
           <a:p>
             <a:pPr>
               <a:lnSpc>
-                <a:spcPct val="140000"/>
+                <a:spcPct val="150000"/>
               </a:lnSpc>
+              <a:spcAft>
+                <a:spcPts val="400"/>
+              </a:spcAft>
             </a:pPr>
             <a:r>
               <a:rPr sz="1500" b="1">
                 <a:solidFill>
-                  <a:srgbClr val="00A0B0"/>
+                  <a:srgbClr val="06A77D"/>
                 </a:solidFill>
                 <a:latin typeface="Calibri"/>
               </a:rPr>
@@ -7586,19 +8395,22 @@
                 </a:solidFill>
                 <a:latin typeface="Calibri"/>
               </a:rPr>
-              <a:t>Se serve aggiungere caratteri:</a:t>
+              <a:t>Vantaggi:</a:t>
             </a:r>
           </a:p>
           <a:p>
             <a:pPr>
               <a:lnSpc>
-                <a:spcPct val="140000"/>
+                <a:spcPct val="150000"/>
               </a:lnSpc>
+              <a:spcAft>
+                <a:spcPts val="400"/>
+              </a:spcAft>
             </a:pPr>
             <a:r>
               <a:rPr sz="1500" b="1">
                 <a:solidFill>
-                  <a:srgbClr val="00A0B0"/>
+                  <a:srgbClr val="06A77D"/>
                 </a:solidFill>
                 <a:latin typeface="Calibri"/>
               </a:rPr>
@@ -7611,19 +8423,134 @@
                 </a:solidFill>
                 <a:latin typeface="Calibri"/>
               </a:rPr>
-              <a:t>  li aggiungi consapevolmente</a:t>
+              <a:t>  definito ed esplicito</a:t>
             </a:r>
           </a:p>
           <a:p>
             <a:pPr>
               <a:lnSpc>
-                <a:spcPct val="140000"/>
+                <a:spcPct val="150000"/>
               </a:lnSpc>
+              <a:spcAft>
+                <a:spcPts val="400"/>
+              </a:spcAft>
             </a:pPr>
             <a:r>
               <a:rPr sz="1500" b="1">
                 <a:solidFill>
-                  <a:srgbClr val="00A0B0"/>
+                  <a:srgbClr val="06A77D"/>
+                </a:solidFill>
+                <a:latin typeface="Calibri"/>
+              </a:rPr>
+              <a:t>▸  </a:t>
+            </a:r>
+            <a:r>
+              <a:rPr sz="1500">
+                <a:solidFill>
+                  <a:srgbClr val="1A1A2E"/>
+                </a:solidFill>
+                <a:latin typeface="Calibri"/>
+              </a:rPr>
+              <a:t>  rifiuta tutto il resto</a:t>
+            </a:r>
+          </a:p>
+          <a:p>
+            <a:pPr>
+              <a:lnSpc>
+                <a:spcPct val="150000"/>
+              </a:lnSpc>
+              <a:spcAft>
+                <a:spcPts val="400"/>
+              </a:spcAft>
+            </a:pPr>
+            <a:r>
+              <a:rPr sz="1500" b="1">
+                <a:solidFill>
+                  <a:srgbClr val="06A77D"/>
+                </a:solidFill>
+                <a:latin typeface="Calibri"/>
+              </a:rPr>
+              <a:t>▸  </a:t>
+            </a:r>
+            <a:r>
+              <a:rPr sz="1500">
+                <a:solidFill>
+                  <a:srgbClr val="1A1A2E"/>
+                </a:solidFill>
+                <a:latin typeface="Calibri"/>
+              </a:rPr>
+              <a:t>  aggiungi consapevolmente</a:t>
+            </a:r>
+          </a:p>
+          <a:p>
+            <a:pPr>
+              <a:lnSpc>
+                <a:spcPct val="150000"/>
+              </a:lnSpc>
+              <a:spcAft>
+                <a:spcPts val="400"/>
+              </a:spcAft>
+            </a:pPr>
+            <a:r>
+              <a:rPr sz="1500" b="1">
+                <a:solidFill>
+                  <a:srgbClr val="06A77D"/>
+                </a:solidFill>
+                <a:latin typeface="Calibri"/>
+              </a:rPr>
+              <a:t>▸  </a:t>
+            </a:r>
+            <a:r>
+              <a:rPr sz="1500">
+                <a:solidFill>
+                  <a:srgbClr val="1A1A2E"/>
+                </a:solidFill>
+                <a:latin typeface="Calibri"/>
+              </a:rPr>
+              <a:t/>
+            </a:r>
+          </a:p>
+          <a:p>
+            <a:pPr>
+              <a:lnSpc>
+                <a:spcPct val="150000"/>
+              </a:lnSpc>
+              <a:spcAft>
+                <a:spcPts val="400"/>
+              </a:spcAft>
+            </a:pPr>
+            <a:r>
+              <a:rPr sz="1500" b="1">
+                <a:solidFill>
+                  <a:srgbClr val="06A77D"/>
+                </a:solidFill>
+                <a:latin typeface="Calibri"/>
+              </a:rPr>
+              <a:t>▸  </a:t>
+            </a:r>
+            <a:r>
+              <a:rPr sz="1500">
+                <a:solidFill>
+                  <a:srgbClr val="1A1A2E"/>
+                </a:solidFill>
+                <a:latin typeface="Calibri"/>
+              </a:rPr>
+              <a:t/>
+            </a:r>
+          </a:p>
+          <a:p>
+            <a:pPr>
+              <a:lnSpc>
+                <a:spcPct val="150000"/>
+              </a:lnSpc>
+              <a:spcAft>
+                <a:spcPts val="400"/>
+              </a:spcAft>
+            </a:pPr>
+            <a:r>
+              <a:rPr sz="1500" b="1">
+                <a:solidFill>
+                  <a:srgbClr val="06A77D"/>
                 </a:solidFill>
                 <a:latin typeface="Calibri"/>
               </a:rPr>
@@ -7685,7 +8612,7 @@
         <p:spPr>
           <a:xfrm>
             <a:off x="457200" y="6473952"/>
-            <a:ext cx="7315200" cy="320040"/>
+            <a:ext cx="7315200" cy="292608"/>
           </a:xfrm>
           <a:prstGeom prst="rect">
             <a:avLst/>
@@ -7706,7 +8633,7 @@
                 </a:solidFill>
                 <a:latin typeface="Calibri"/>
               </a:rPr>
-              <a:t>Secure Coding · Corso IFTS STEM · A. Manneschi</a:t>
+              <a:t>Secure Coding · Corso IFTS STEM · A. Manneschi · 2024/2025</a:t>
             </a:r>
           </a:p>
         </p:txBody>
@@ -7720,7 +8647,7 @@
         <p:spPr>
           <a:xfrm>
             <a:off x="10515600" y="6473952"/>
-            <a:ext cx="1188720" cy="320040"/>
+            <a:ext cx="1188720" cy="292608"/>
           </a:xfrm>
           <a:prstGeom prst="rect">
             <a:avLst/>
@@ -7773,13 +8700,13 @@
         <p:spPr>
           <a:xfrm>
             <a:off x="0" y="0"/>
-            <a:ext cx="2286000" cy="6858000"/>
+            <a:ext cx="4114800" cy="6858000"/>
           </a:xfrm>
           <a:prstGeom prst="rect">
             <a:avLst/>
           </a:prstGeom>
           <a:solidFill>
-            <a:srgbClr val="0F2D52"/>
+            <a:srgbClr val="081B33"/>
           </a:solidFill>
           <a:ln>
             <a:noFill/>
@@ -7809,14 +8736,100 @@
       </p:sp>
       <p:sp>
         <p:nvSpPr>
-          <p:cNvPr id="3" name="TextBox 2"/>
+          <p:cNvPr id="3" name="Rectangle 2"/>
+          <p:cNvSpPr/>
+          <p:nvPr/>
+        </p:nvSpPr>
+        <p:spPr>
+          <a:xfrm>
+            <a:off x="4114800" y="0"/>
+            <a:ext cx="8046720" cy="6858000"/>
+          </a:xfrm>
+          <a:prstGeom prst="rect">
+            <a:avLst/>
+          </a:prstGeom>
+          <a:solidFill>
+            <a:srgbClr val="F1F4F8"/>
+          </a:solidFill>
+          <a:ln>
+            <a:noFill/>
+          </a:ln>
+        </p:spPr>
+        <p:style>
+          <a:lnRef idx="1">
+            <a:schemeClr val="accent1"/>
+          </a:lnRef>
+          <a:fillRef idx="3">
+            <a:schemeClr val="accent1"/>
+          </a:fillRef>
+          <a:effectRef idx="2">
+            <a:schemeClr val="accent1"/>
+          </a:effectRef>
+          <a:fontRef idx="minor">
+            <a:schemeClr val="lt1"/>
+          </a:fontRef>
+        </p:style>
+        <p:txBody>
+          <a:bodyPr rtlCol="0" anchor="ctr"/>
+          <a:lstStyle/>
+          <a:p>
+            <a:pPr algn="ctr"/>
+          </a:p>
+        </p:txBody>
+      </p:sp>
+      <p:sp>
+        <p:nvSpPr>
+          <p:cNvPr id="4" name="Rectangle 3"/>
+          <p:cNvSpPr/>
+          <p:nvPr/>
+        </p:nvSpPr>
+        <p:spPr>
+          <a:xfrm>
+            <a:off x="4114800" y="0"/>
+            <a:ext cx="137160" cy="6858000"/>
+          </a:xfrm>
+          <a:prstGeom prst="rect">
+            <a:avLst/>
+          </a:prstGeom>
+          <a:solidFill>
+            <a:srgbClr val="00A0B0"/>
+          </a:solidFill>
+          <a:ln>
+            <a:noFill/>
+          </a:ln>
+        </p:spPr>
+        <p:style>
+          <a:lnRef idx="1">
+            <a:schemeClr val="accent1"/>
+          </a:lnRef>
+          <a:fillRef idx="3">
+            <a:schemeClr val="accent1"/>
+          </a:fillRef>
+          <a:effectRef idx="2">
+            <a:schemeClr val="accent1"/>
+          </a:effectRef>
+          <a:fontRef idx="minor">
+            <a:schemeClr val="lt1"/>
+          </a:fontRef>
+        </p:style>
+        <p:txBody>
+          <a:bodyPr rtlCol="0" anchor="ctr"/>
+          <a:lstStyle/>
+          <a:p>
+            <a:pPr algn="ctr"/>
+          </a:p>
+        </p:txBody>
+      </p:sp>
+      <p:sp>
+        <p:nvSpPr>
+          <p:cNvPr id="5" name="TextBox 4"/>
           <p:cNvSpPr txBox="1"/>
           <p:nvPr/>
         </p:nvSpPr>
         <p:spPr>
           <a:xfrm>
-            <a:off x="274320" y="2286000"/>
-            <a:ext cx="1828800" cy="1828800"/>
+            <a:off x="274320" y="2103120"/>
+            <a:ext cx="3657600" cy="2286000"/>
           </a:xfrm>
           <a:prstGeom prst="rect">
             <a:avLst/>
@@ -7831,7 +8844,7 @@
           <a:p>
             <a:pPr algn="ctr"/>
             <a:r>
-              <a:rPr sz="12000" b="1" i="0">
+              <a:rPr sz="17000" b="1" i="0">
                 <a:solidFill>
                   <a:srgbClr val="00A0B0"/>
                 </a:solidFill>
@@ -7844,14 +8857,14 @@
       </p:sp>
       <p:sp>
         <p:nvSpPr>
-          <p:cNvPr id="4" name="TextBox 3"/>
+          <p:cNvPr id="6" name="TextBox 5"/>
           <p:cNvSpPr txBox="1"/>
           <p:nvPr/>
         </p:nvSpPr>
         <p:spPr>
           <a:xfrm>
-            <a:off x="2743200" y="2560320"/>
-            <a:ext cx="8961120" cy="1371600"/>
+            <a:off x="274320" y="4572000"/>
+            <a:ext cx="3657600" cy="457200"/>
           </a:xfrm>
           <a:prstGeom prst="rect">
             <a:avLst/>
@@ -7864,29 +8877,29 @@
           </a:bodyPr>
           <a:lstStyle/>
           <a:p>
-            <a:pPr algn="l"/>
-            <a:r>
-              <a:rPr sz="4200" b="1" i="0">
-                <a:solidFill>
-                  <a:srgbClr val="0F2D52"/>
-                </a:solidFill>
-                <a:latin typeface="Calibri"/>
-              </a:rPr>
-              <a:t>Pydantic</a:t>
-            </a:r>
-          </a:p>
-        </p:txBody>
-      </p:sp>
-      <p:sp>
-        <p:nvSpPr>
-          <p:cNvPr id="5" name="TextBox 4"/>
+            <a:pPr algn="ctr"/>
+            <a:r>
+              <a:rPr sz="2000" b="1" i="0">
+                <a:solidFill>
+                  <a:srgbClr val="6FD8E0"/>
+                </a:solidFill>
+                <a:latin typeface="Calibri"/>
+              </a:rPr>
+              <a:t>PARTE</a:t>
+            </a:r>
+          </a:p>
+        </p:txBody>
+      </p:sp>
+      <p:sp>
+        <p:nvSpPr>
+          <p:cNvPr id="7" name="TextBox 6"/>
           <p:cNvSpPr txBox="1"/>
           <p:nvPr/>
         </p:nvSpPr>
         <p:spPr>
           <a:xfrm>
-            <a:off x="2743200" y="3931920"/>
-            <a:ext cx="8961120" cy="1828800"/>
+            <a:off x="4572000" y="2286000"/>
+            <a:ext cx="7315200" cy="1645920"/>
           </a:xfrm>
           <a:prstGeom prst="rect">
             <a:avLst/>
@@ -7901,20 +8914,55 @@
           <a:p>
             <a:pPr algn="l"/>
             <a:r>
+              <a:rPr sz="4400" b="1" i="0">
+                <a:solidFill>
+                  <a:srgbClr val="0F2D52"/>
+                </a:solidFill>
+                <a:latin typeface="Calibri"/>
+              </a:rPr>
+              <a:t>Pydantic</a:t>
+            </a:r>
+          </a:p>
+        </p:txBody>
+      </p:sp>
+      <p:sp>
+        <p:nvSpPr>
+          <p:cNvPr id="8" name="TextBox 7"/>
+          <p:cNvSpPr txBox="1"/>
+          <p:nvPr/>
+        </p:nvSpPr>
+        <p:spPr>
+          <a:xfrm>
+            <a:off x="4572000" y="3931920"/>
+            <a:ext cx="7315200" cy="1828800"/>
+          </a:xfrm>
+          <a:prstGeom prst="rect">
+            <a:avLst/>
+          </a:prstGeom>
+          <a:noFill/>
+        </p:spPr>
+        <p:txBody>
+          <a:bodyPr wrap="square" lIns="45720" rIns="45720" tIns="18288" bIns="18288" anchor="t">
+            <a:spAutoFit/>
+          </a:bodyPr>
+          <a:lstStyle/>
+          <a:p>
+            <a:pPr algn="l"/>
+            <a:r>
               <a:rPr sz="1800" b="0" i="1">
                 <a:solidFill>
                   <a:srgbClr val="6B7280"/>
                 </a:solidFill>
                 <a:latin typeface="Calibri"/>
               </a:rPr>
-              <a:t>Validation strutturata in Python</a:t>
+              <a:t>Validation strutturata, type-safe, dichiarativa</a:t>
             </a:r>
           </a:p>
         </p:txBody>
       </p:sp>
       <p:cxnSp>
         <p:nvCxnSpPr>
-          <p:cNvPr id="6" name="Connector 5"/>
+          <p:cNvPr id="9" name="Connector 8"/>
           <p:cNvCxnSpPr/>
           <p:nvPr/>
         </p:nvCxnSpPr>
@@ -7949,14 +8997,14 @@
       </p:cxnSp>
       <p:sp>
         <p:nvSpPr>
-          <p:cNvPr id="7" name="TextBox 6"/>
+          <p:cNvPr id="10" name="TextBox 9"/>
           <p:cNvSpPr txBox="1"/>
           <p:nvPr/>
         </p:nvSpPr>
         <p:spPr>
           <a:xfrm>
             <a:off x="457200" y="6473952"/>
-            <a:ext cx="7315200" cy="320040"/>
+            <a:ext cx="7315200" cy="292608"/>
           </a:xfrm>
           <a:prstGeom prst="rect">
             <a:avLst/>
@@ -7977,21 +9025,21 @@
                 </a:solidFill>
                 <a:latin typeface="Calibri"/>
               </a:rPr>
-              <a:t>Secure Coding · Corso IFTS STEM · A. Manneschi</a:t>
-            </a:r>
-          </a:p>
-        </p:txBody>
-      </p:sp>
-      <p:sp>
-        <p:nvSpPr>
-          <p:cNvPr id="8" name="TextBox 7"/>
+              <a:t>Secure Coding · Corso IFTS STEM · A. Manneschi · 2024/2025</a:t>
+            </a:r>
+          </a:p>
+        </p:txBody>
+      </p:sp>
+      <p:sp>
+        <p:nvSpPr>
+          <p:cNvPr id="11" name="TextBox 10"/>
           <p:cNvSpPr txBox="1"/>
           <p:nvPr/>
         </p:nvSpPr>
         <p:spPr>
           <a:xfrm>
             <a:off x="10515600" y="6473952"/>
-            <a:ext cx="1188720" cy="320040"/>
+            <a:ext cx="1188720" cy="292608"/>
           </a:xfrm>
           <a:prstGeom prst="rect">
             <a:avLst/>
@@ -8087,7 +9135,7 @@
         <p:spPr>
           <a:xfrm>
             <a:off x="457200" y="164592"/>
-            <a:ext cx="10058400" cy="502920"/>
+            <a:ext cx="10972800" cy="502920"/>
           </a:xfrm>
           <a:prstGeom prst="rect">
             <a:avLst/>
@@ -8113,49 +9161,30 @@
           </a:p>
         </p:txBody>
       </p:sp>
-      <p:sp>
-        <p:nvSpPr>
-          <p:cNvPr id="4" name="Rectangle 3"/>
-          <p:cNvSpPr/>
-          <p:nvPr/>
-        </p:nvSpPr>
-        <p:spPr>
-          <a:xfrm>
-            <a:off x="9875520" y="164592"/>
-            <a:ext cx="2103120" cy="457200"/>
-          </a:xfrm>
-          <a:prstGeom prst="rect">
-            <a:avLst/>
-          </a:prstGeom>
-          <a:solidFill>
-            <a:srgbClr val="06A77D"/>
-          </a:solidFill>
-          <a:ln>
-            <a:noFill/>
-          </a:ln>
-        </p:spPr>
-        <p:style>
-          <a:lnRef idx="1">
-            <a:schemeClr val="accent1"/>
-          </a:lnRef>
-          <a:fillRef idx="3">
-            <a:schemeClr val="accent1"/>
-          </a:fillRef>
-          <a:effectRef idx="2">
-            <a:schemeClr val="accent1"/>
-          </a:effectRef>
-          <a:fontRef idx="minor">
-            <a:schemeClr val="lt1"/>
-          </a:fontRef>
-        </p:style>
-        <p:txBody>
-          <a:bodyPr rtlCol="0" anchor="ctr"/>
-          <a:lstStyle/>
-          <a:p>
-            <a:pPr algn="ctr"/>
-          </a:p>
-        </p:txBody>
-      </p:sp>
+      <p:pic>
+        <p:nvPicPr>
+          <p:cNvPr id="4" name="Picture 3" descr="cap6_pydantic.png"/>
+          <p:cNvPicPr>
+            <a:picLocks noChangeAspect="1"/>
+          </p:cNvPicPr>
+          <p:nvPr/>
+        </p:nvPicPr>
+        <p:blipFill>
+          <a:blip r:embed="rId2"/>
+          <a:stretch>
+            <a:fillRect/>
+          </a:stretch>
+        </p:blipFill>
+        <p:spPr>
+          <a:xfrm>
+            <a:off x="640080" y="1097280"/>
+            <a:ext cx="10881360" cy="4572000"/>
+          </a:xfrm>
+          <a:prstGeom prst="rect">
+            <a:avLst/>
+          </a:prstGeom>
+        </p:spPr>
+      </p:pic>
       <p:sp>
         <p:nvSpPr>
           <p:cNvPr id="5" name="TextBox 4"/>
@@ -8164,88 +9193,8 @@
         </p:nvSpPr>
         <p:spPr>
           <a:xfrm>
-            <a:off x="9875520" y="182880"/>
-            <a:ext cx="2103120" cy="457200"/>
-          </a:xfrm>
-          <a:prstGeom prst="rect">
-            <a:avLst/>
-          </a:prstGeom>
-          <a:noFill/>
-        </p:spPr>
-        <p:txBody>
-          <a:bodyPr wrap="square" lIns="45720" rIns="45720" tIns="18288" bIns="18288" anchor="ctr">
-            <a:spAutoFit/>
-          </a:bodyPr>
-          <a:lstStyle/>
-          <a:p>
-            <a:pPr algn="ctr"/>
-            <a:r>
-              <a:rPr sz="1200" b="1" i="0">
-                <a:solidFill>
-                  <a:srgbClr val="FFFFFF"/>
-                </a:solidFill>
-                <a:latin typeface="Calibri"/>
-              </a:rPr>
-              <a:t>✅ PYTHON</a:t>
-            </a:r>
-          </a:p>
-        </p:txBody>
-      </p:sp>
-      <p:sp>
-        <p:nvSpPr>
-          <p:cNvPr id="6" name="Rectangle 5"/>
-          <p:cNvSpPr/>
-          <p:nvPr/>
-        </p:nvSpPr>
-        <p:spPr>
-          <a:xfrm>
-            <a:off x="457200" y="1097280"/>
-            <a:ext cx="11247120" cy="4572000"/>
-          </a:xfrm>
-          <a:prstGeom prst="rect">
-            <a:avLst/>
-          </a:prstGeom>
-          <a:solidFill>
-            <a:srgbClr val="F1F4F8"/>
-          </a:solidFill>
-          <a:ln>
-            <a:solidFill>
-              <a:srgbClr val="06A77D"/>
-            </a:solidFill>
-          </a:ln>
-        </p:spPr>
-        <p:style>
-          <a:lnRef idx="1">
-            <a:schemeClr val="accent1"/>
-          </a:lnRef>
-          <a:fillRef idx="3">
-            <a:schemeClr val="accent1"/>
-          </a:fillRef>
-          <a:effectRef idx="2">
-            <a:schemeClr val="accent1"/>
-          </a:effectRef>
-          <a:fontRef idx="minor">
-            <a:schemeClr val="lt1"/>
-          </a:fontRef>
-        </p:style>
-        <p:txBody>
-          <a:bodyPr rtlCol="0" anchor="ctr"/>
-          <a:lstStyle/>
-          <a:p>
-            <a:pPr algn="ctr"/>
-          </a:p>
-        </p:txBody>
-      </p:sp>
-      <p:sp>
-        <p:nvSpPr>
-          <p:cNvPr id="7" name="TextBox 6"/>
-          <p:cNvSpPr txBox="1"/>
-          <p:nvPr/>
-        </p:nvSpPr>
-        <p:spPr>
-          <a:xfrm>
-            <a:off x="640080" y="1280160"/>
-            <a:ext cx="10972800" cy="4206240"/>
+            <a:off x="457200" y="5852160"/>
+            <a:ext cx="11247120" cy="365760"/>
           </a:xfrm>
           <a:prstGeom prst="rect">
             <a:avLst/>
@@ -8258,249 +9207,22 @@
           </a:bodyPr>
           <a:lstStyle/>
           <a:p>
-            <a:pPr algn="l"/>
-            <a:r>
-              <a:rPr sz="1400" b="0" i="0">
-                <a:solidFill>
-                  <a:srgbClr val="1A1A2E"/>
-                </a:solidFill>
-                <a:latin typeface="Consolas"/>
-              </a:rPr>
-              <a:t>from pydantic import BaseModel, EmailStr, Field, field_validator</a:t>
-            </a:r>
-          </a:p>
-          <a:p>
-            <a:pPr algn="l"/>
-            <a:r>
-              <a:rPr sz="1400" b="0" i="0">
-                <a:solidFill>
-                  <a:srgbClr val="1A1A2E"/>
-                </a:solidFill>
-                <a:latin typeface="Consolas"/>
-              </a:rPr>
-              <a:t>from datetime import date</a:t>
-            </a:r>
-          </a:p>
-          <a:p>
-            <a:pPr algn="l"/>
-            <a:r>
-              <a:rPr sz="1400" b="0" i="0">
-                <a:solidFill>
-                  <a:srgbClr val="1A1A2E"/>
-                </a:solidFill>
-                <a:latin typeface="Consolas"/>
-              </a:rPr>
-              <a:t/>
-            </a:r>
-          </a:p>
-          <a:p>
-            <a:pPr algn="l"/>
-            <a:r>
-              <a:rPr sz="1400" b="0" i="0">
-                <a:solidFill>
-                  <a:srgbClr val="1A1A2E"/>
-                </a:solidFill>
-                <a:latin typeface="Consolas"/>
-              </a:rPr>
-              <a:t>class UserCreate(BaseModel):</a:t>
-            </a:r>
-          </a:p>
-          <a:p>
-            <a:pPr algn="l"/>
-            <a:r>
-              <a:rPr sz="1400" b="0" i="0">
-                <a:solidFill>
-                  <a:srgbClr val="1A1A2E"/>
-                </a:solidFill>
-                <a:latin typeface="Consolas"/>
-              </a:rPr>
-              <a:t>    username: str = Field(min_length=3, max_length=20,</a:t>
-            </a:r>
-          </a:p>
-          <a:p>
-            <a:pPr algn="l"/>
-            <a:r>
-              <a:rPr sz="1400" b="0" i="0">
-                <a:solidFill>
-                  <a:srgbClr val="1A1A2E"/>
-                </a:solidFill>
-                <a:latin typeface="Consolas"/>
-              </a:rPr>
-              <a:t>                           pattern=r"^[a-zA-Z0-9_]+$")</a:t>
-            </a:r>
-          </a:p>
-          <a:p>
-            <a:pPr algn="l"/>
-            <a:r>
-              <a:rPr sz="1400" b="0" i="0">
-                <a:solidFill>
-                  <a:srgbClr val="1A1A2E"/>
-                </a:solidFill>
-                <a:latin typeface="Consolas"/>
-              </a:rPr>
-              <a:t>    email: EmailStr</a:t>
-            </a:r>
-          </a:p>
-          <a:p>
-            <a:pPr algn="l"/>
-            <a:r>
-              <a:rPr sz="1400" b="0" i="0">
-                <a:solidFill>
-                  <a:srgbClr val="1A1A2E"/>
-                </a:solidFill>
-                <a:latin typeface="Consolas"/>
-              </a:rPr>
-              <a:t>    age: int = Field(ge=18, le=120)</a:t>
-            </a:r>
-          </a:p>
-          <a:p>
-            <a:pPr algn="l"/>
-            <a:r>
-              <a:rPr sz="1400" b="0" i="0">
-                <a:solidFill>
-                  <a:srgbClr val="1A1A2E"/>
-                </a:solidFill>
-                <a:latin typeface="Consolas"/>
-              </a:rPr>
-              <a:t>    password: str = Field(min_length=12)</a:t>
-            </a:r>
-          </a:p>
-          <a:p>
-            <a:pPr algn="l"/>
-            <a:r>
-              <a:rPr sz="1400" b="0" i="0">
-                <a:solidFill>
-                  <a:srgbClr val="1A1A2E"/>
-                </a:solidFill>
-                <a:latin typeface="Consolas"/>
-              </a:rPr>
-              <a:t>    birthdate: date</a:t>
-            </a:r>
-          </a:p>
-          <a:p>
-            <a:pPr algn="l"/>
-            <a:r>
-              <a:rPr sz="1400" b="0" i="0">
-                <a:solidFill>
-                  <a:srgbClr val="1A1A2E"/>
-                </a:solidFill>
-                <a:latin typeface="Consolas"/>
-              </a:rPr>
-              <a:t/>
-            </a:r>
-          </a:p>
-          <a:p>
-            <a:pPr algn="l"/>
-            <a:r>
-              <a:rPr sz="1400" b="0" i="0">
-                <a:solidFill>
-                  <a:srgbClr val="1A1A2E"/>
-                </a:solidFill>
-                <a:latin typeface="Consolas"/>
-              </a:rPr>
-              <a:t>    @field_validator("birthdate")</a:t>
-            </a:r>
-          </a:p>
-          <a:p>
-            <a:pPr algn="l"/>
-            <a:r>
-              <a:rPr sz="1400" b="0" i="0">
-                <a:solidFill>
-                  <a:srgbClr val="1A1A2E"/>
-                </a:solidFill>
-                <a:latin typeface="Consolas"/>
-              </a:rPr>
-              <a:t>    @classmethod</a:t>
-            </a:r>
-          </a:p>
-          <a:p>
-            <a:pPr algn="l"/>
-            <a:r>
-              <a:rPr sz="1400" b="0" i="0">
-                <a:solidFill>
-                  <a:srgbClr val="1A1A2E"/>
-                </a:solidFill>
-                <a:latin typeface="Consolas"/>
-              </a:rPr>
-              <a:t>    def adult(cls, v):</a:t>
-            </a:r>
-          </a:p>
-          <a:p>
-            <a:pPr algn="l"/>
-            <a:r>
-              <a:rPr sz="1400" b="0" i="0">
-                <a:solidFill>
-                  <a:srgbClr val="1A1A2E"/>
-                </a:solidFill>
-                <a:latin typeface="Consolas"/>
-              </a:rPr>
-              <a:t>        if (date.today() - v).days &lt; 18*365:</a:t>
-            </a:r>
-          </a:p>
-          <a:p>
-            <a:pPr algn="l"/>
-            <a:r>
-              <a:rPr sz="1400" b="0" i="0">
-                <a:solidFill>
-                  <a:srgbClr val="1A1A2E"/>
-                </a:solidFill>
-                <a:latin typeface="Consolas"/>
-              </a:rPr>
-              <a:t>            raise ValueError("devi essere maggiorenne")</a:t>
-            </a:r>
-          </a:p>
-          <a:p>
-            <a:pPr algn="l"/>
-            <a:r>
-              <a:rPr sz="1400" b="0" i="0">
-                <a:solidFill>
-                  <a:srgbClr val="1A1A2E"/>
-                </a:solidFill>
-                <a:latin typeface="Consolas"/>
-              </a:rPr>
-              <a:t>        return v</a:t>
-            </a:r>
-          </a:p>
-        </p:txBody>
-      </p:sp>
-      <p:sp>
-        <p:nvSpPr>
-          <p:cNvPr id="8" name="TextBox 7"/>
-          <p:cNvSpPr txBox="1"/>
-          <p:nvPr/>
-        </p:nvSpPr>
-        <p:spPr>
-          <a:xfrm>
-            <a:off x="457200" y="5852160"/>
-            <a:ext cx="11247120" cy="457200"/>
-          </a:xfrm>
-          <a:prstGeom prst="rect">
-            <a:avLst/>
-          </a:prstGeom>
-          <a:noFill/>
-        </p:spPr>
-        <p:txBody>
-          <a:bodyPr wrap="square" lIns="45720" rIns="45720" tIns="18288" bIns="18288" anchor="t">
-            <a:spAutoFit/>
-          </a:bodyPr>
-          <a:lstStyle/>
-          <a:p>
-            <a:pPr algn="l"/>
-            <a:r>
-              <a:rPr sz="1400" b="1" i="1">
-                <a:solidFill>
-                  <a:srgbClr val="06A77D"/>
-                </a:solidFill>
-                <a:latin typeface="Calibri"/>
-              </a:rPr>
-              <a:t>✓  Type-safe, dichiarativo, errori chiari, integrazione con FastAPI</a:t>
+            <a:pPr algn="ctr"/>
+            <a:r>
+              <a:rPr sz="1300" b="0" i="1">
+                <a:solidFill>
+                  <a:srgbClr val="6B7280"/>
+                </a:solidFill>
+                <a:latin typeface="Calibri"/>
+              </a:rPr>
+              <a:t>Modello con type hints, vincoli, e validator custom</a:t>
             </a:r>
           </a:p>
         </p:txBody>
       </p:sp>
       <p:cxnSp>
         <p:nvCxnSpPr>
-          <p:cNvPr id="9" name="Connector 8"/>
+          <p:cNvPr id="6" name="Connector 5"/>
           <p:cNvCxnSpPr/>
           <p:nvPr/>
         </p:nvCxnSpPr>
@@ -8535,14 +9257,14 @@
       </p:cxnSp>
       <p:sp>
         <p:nvSpPr>
-          <p:cNvPr id="10" name="TextBox 9"/>
+          <p:cNvPr id="7" name="TextBox 6"/>
           <p:cNvSpPr txBox="1"/>
           <p:nvPr/>
         </p:nvSpPr>
         <p:spPr>
           <a:xfrm>
             <a:off x="457200" y="6473952"/>
-            <a:ext cx="7315200" cy="320040"/>
+            <a:ext cx="7315200" cy="292608"/>
           </a:xfrm>
           <a:prstGeom prst="rect">
             <a:avLst/>
@@ -8563,21 +9285,21 @@
                 </a:solidFill>
                 <a:latin typeface="Calibri"/>
               </a:rPr>
-              <a:t>Secure Coding · Corso IFTS STEM · A. Manneschi</a:t>
-            </a:r>
-          </a:p>
-        </p:txBody>
-      </p:sp>
-      <p:sp>
-        <p:nvSpPr>
-          <p:cNvPr id="11" name="TextBox 10"/>
+              <a:t>Secure Coding · Corso IFTS STEM · A. Manneschi · 2024/2025</a:t>
+            </a:r>
+          </a:p>
+        </p:txBody>
+      </p:sp>
+      <p:sp>
+        <p:nvSpPr>
+          <p:cNvPr id="8" name="TextBox 7"/>
           <p:cNvSpPr txBox="1"/>
           <p:nvPr/>
         </p:nvSpPr>
         <p:spPr>
           <a:xfrm>
             <a:off x="10515600" y="6473952"/>
-            <a:ext cx="1188720" cy="320040"/>
+            <a:ext cx="1188720" cy="292608"/>
           </a:xfrm>
           <a:prstGeom prst="rect">
             <a:avLst/>
@@ -8630,13 +9352,13 @@
         <p:spPr>
           <a:xfrm>
             <a:off x="0" y="0"/>
-            <a:ext cx="12191695" cy="777240"/>
+            <a:ext cx="4114800" cy="6858000"/>
           </a:xfrm>
           <a:prstGeom prst="rect">
             <a:avLst/>
           </a:prstGeom>
           <a:solidFill>
-            <a:srgbClr val="0F2D52"/>
+            <a:srgbClr val="081B33"/>
           </a:solidFill>
           <a:ln>
             <a:noFill/>
@@ -8666,14 +9388,100 @@
       </p:sp>
       <p:sp>
         <p:nvSpPr>
-          <p:cNvPr id="3" name="TextBox 2"/>
+          <p:cNvPr id="3" name="Rectangle 2"/>
+          <p:cNvSpPr/>
+          <p:nvPr/>
+        </p:nvSpPr>
+        <p:spPr>
+          <a:xfrm>
+            <a:off x="4114800" y="0"/>
+            <a:ext cx="8046720" cy="6858000"/>
+          </a:xfrm>
+          <a:prstGeom prst="rect">
+            <a:avLst/>
+          </a:prstGeom>
+          <a:solidFill>
+            <a:srgbClr val="F1F4F8"/>
+          </a:solidFill>
+          <a:ln>
+            <a:noFill/>
+          </a:ln>
+        </p:spPr>
+        <p:style>
+          <a:lnRef idx="1">
+            <a:schemeClr val="accent1"/>
+          </a:lnRef>
+          <a:fillRef idx="3">
+            <a:schemeClr val="accent1"/>
+          </a:fillRef>
+          <a:effectRef idx="2">
+            <a:schemeClr val="accent1"/>
+          </a:effectRef>
+          <a:fontRef idx="minor">
+            <a:schemeClr val="lt1"/>
+          </a:fontRef>
+        </p:style>
+        <p:txBody>
+          <a:bodyPr rtlCol="0" anchor="ctr"/>
+          <a:lstStyle/>
+          <a:p>
+            <a:pPr algn="ctr"/>
+          </a:p>
+        </p:txBody>
+      </p:sp>
+      <p:sp>
+        <p:nvSpPr>
+          <p:cNvPr id="4" name="Rectangle 3"/>
+          <p:cNvSpPr/>
+          <p:nvPr/>
+        </p:nvSpPr>
+        <p:spPr>
+          <a:xfrm>
+            <a:off x="4114800" y="0"/>
+            <a:ext cx="137160" cy="6858000"/>
+          </a:xfrm>
+          <a:prstGeom prst="rect">
+            <a:avLst/>
+          </a:prstGeom>
+          <a:solidFill>
+            <a:srgbClr val="00A0B0"/>
+          </a:solidFill>
+          <a:ln>
+            <a:noFill/>
+          </a:ln>
+        </p:spPr>
+        <p:style>
+          <a:lnRef idx="1">
+            <a:schemeClr val="accent1"/>
+          </a:lnRef>
+          <a:fillRef idx="3">
+            <a:schemeClr val="accent1"/>
+          </a:fillRef>
+          <a:effectRef idx="2">
+            <a:schemeClr val="accent1"/>
+          </a:effectRef>
+          <a:fontRef idx="minor">
+            <a:schemeClr val="lt1"/>
+          </a:fontRef>
+        </p:style>
+        <p:txBody>
+          <a:bodyPr rtlCol="0" anchor="ctr"/>
+          <a:lstStyle/>
+          <a:p>
+            <a:pPr algn="ctr"/>
+          </a:p>
+        </p:txBody>
+      </p:sp>
+      <p:sp>
+        <p:nvSpPr>
+          <p:cNvPr id="5" name="TextBox 4"/>
           <p:cNvSpPr txBox="1"/>
           <p:nvPr/>
         </p:nvSpPr>
         <p:spPr>
           <a:xfrm>
-            <a:off x="457200" y="164592"/>
-            <a:ext cx="10972800" cy="502920"/>
+            <a:off x="274320" y="2103120"/>
+            <a:ext cx="3657600" cy="2286000"/>
           </a:xfrm>
           <a:prstGeom prst="rect">
             <a:avLst/>
@@ -8681,34 +9489,34 @@
           <a:noFill/>
         </p:spPr>
         <p:txBody>
-          <a:bodyPr wrap="square" lIns="45720" rIns="45720" tIns="18288" bIns="18288" anchor="ctr">
+          <a:bodyPr wrap="square" lIns="45720" rIns="45720" tIns="18288" bIns="18288" anchor="t">
             <a:spAutoFit/>
           </a:bodyPr>
           <a:lstStyle/>
           <a:p>
-            <a:pPr algn="l"/>
-            <a:r>
-              <a:rPr sz="2400" b="1" i="0">
-                <a:solidFill>
-                  <a:srgbClr val="FFFFFF"/>
-                </a:solidFill>
-                <a:latin typeface="Calibri"/>
-              </a:rPr>
-              <a:t>Cosa fa Pydantic per te</a:t>
-            </a:r>
-          </a:p>
-        </p:txBody>
-      </p:sp>
-      <p:sp>
-        <p:nvSpPr>
-          <p:cNvPr id="4" name="TextBox 3"/>
+            <a:pPr algn="ctr"/>
+            <a:r>
+              <a:rPr sz="17000" b="1" i="0">
+                <a:solidFill>
+                  <a:srgbClr val="00A0B0"/>
+                </a:solidFill>
+                <a:latin typeface="Calibri"/>
+              </a:rPr>
+              <a:t>02</a:t>
+            </a:r>
+          </a:p>
+        </p:txBody>
+      </p:sp>
+      <p:sp>
+        <p:nvSpPr>
+          <p:cNvPr id="6" name="TextBox 5"/>
           <p:cNvSpPr txBox="1"/>
           <p:nvPr/>
         </p:nvSpPr>
         <p:spPr>
           <a:xfrm>
-            <a:off x="640080" y="1005840"/>
-            <a:ext cx="10972800" cy="5029200"/>
+            <a:off x="274320" y="4572000"/>
+            <a:ext cx="3657600" cy="457200"/>
           </a:xfrm>
           <a:prstGeom prst="rect">
             <a:avLst/>
@@ -8716,190 +9524,97 @@
           <a:noFill/>
         </p:spPr>
         <p:txBody>
-          <a:bodyPr wrap="square">
+          <a:bodyPr wrap="square" lIns="45720" rIns="45720" tIns="18288" bIns="18288" anchor="t">
             <a:spAutoFit/>
           </a:bodyPr>
           <a:lstStyle/>
           <a:p>
-            <a:pPr>
-              <a:lnSpc>
-                <a:spcPct val="150000"/>
-              </a:lnSpc>
-            </a:pPr>
-            <a:r>
-              <a:rPr sz="2000" b="1">
-                <a:solidFill>
-                  <a:srgbClr val="00A0B0"/>
-                </a:solidFill>
-                <a:latin typeface="Calibri"/>
-              </a:rPr>
-              <a:t>▸  </a:t>
-            </a:r>
-            <a:r>
-              <a:rPr sz="2000">
-                <a:solidFill>
-                  <a:srgbClr val="1A1A2E"/>
-                </a:solidFill>
-                <a:latin typeface="Calibri"/>
-              </a:rPr>
-              <a:t>Controlla i TIPI (se non corretti, errore)</a:t>
-            </a:r>
-          </a:p>
-          <a:p>
-            <a:pPr>
-              <a:lnSpc>
-                <a:spcPct val="150000"/>
-              </a:lnSpc>
-            </a:pPr>
-            <a:r>
-              <a:rPr sz="2000" b="1">
-                <a:solidFill>
-                  <a:srgbClr val="00A0B0"/>
-                </a:solidFill>
-                <a:latin typeface="Calibri"/>
-              </a:rPr>
-              <a:t>▸  </a:t>
-            </a:r>
-            <a:r>
-              <a:rPr sz="2000">
-                <a:solidFill>
-                  <a:srgbClr val="1A1A2E"/>
-                </a:solidFill>
-                <a:latin typeface="Calibri"/>
-              </a:rPr>
-              <a:t>Controlla i VINCOLI (lunghezza, range, regex)</a:t>
-            </a:r>
-          </a:p>
-          <a:p>
-            <a:pPr>
-              <a:lnSpc>
-                <a:spcPct val="150000"/>
-              </a:lnSpc>
-            </a:pPr>
-            <a:r>
-              <a:rPr sz="2000" b="1">
-                <a:solidFill>
-                  <a:srgbClr val="00A0B0"/>
-                </a:solidFill>
-                <a:latin typeface="Calibri"/>
-              </a:rPr>
-              <a:t>▸  </a:t>
-            </a:r>
-            <a:r>
-              <a:rPr sz="2000">
-                <a:solidFill>
-                  <a:srgbClr val="1A1A2E"/>
-                </a:solidFill>
-                <a:latin typeface="Calibri"/>
-              </a:rPr>
-              <a:t>Esegue VALIDATOR custom (regole business)</a:t>
-            </a:r>
-          </a:p>
-          <a:p>
-            <a:pPr>
-              <a:lnSpc>
-                <a:spcPct val="150000"/>
-              </a:lnSpc>
-            </a:pPr>
-            <a:r>
-              <a:rPr sz="2000" b="1">
-                <a:solidFill>
-                  <a:srgbClr val="00A0B0"/>
-                </a:solidFill>
-                <a:latin typeface="Calibri"/>
-              </a:rPr>
-              <a:t>▸  </a:t>
-            </a:r>
-            <a:r>
-              <a:rPr sz="2000">
-                <a:solidFill>
-                  <a:srgbClr val="1A1A2E"/>
-                </a:solidFill>
-                <a:latin typeface="Calibri"/>
-              </a:rPr>
-              <a:t>Restituisce errori dettagliati con path JSON</a:t>
-            </a:r>
-          </a:p>
-          <a:p>
-            <a:pPr>
-              <a:lnSpc>
-                <a:spcPct val="150000"/>
-              </a:lnSpc>
-            </a:pPr>
-            <a:r>
-              <a:rPr sz="2000" b="1">
-                <a:solidFill>
-                  <a:srgbClr val="00A0B0"/>
-                </a:solidFill>
-                <a:latin typeface="Calibri"/>
-              </a:rPr>
-              <a:t>▸  </a:t>
-            </a:r>
-            <a:r>
-              <a:rPr sz="2000">
-                <a:solidFill>
-                  <a:srgbClr val="1A1A2E"/>
-                </a:solidFill>
-                <a:latin typeface="Calibri"/>
-              </a:rPr>
-              <a:t>Genera automaticamente JSON Schema (per OpenAPI/FastAPI)</a:t>
-            </a:r>
-          </a:p>
-          <a:p>
-            <a:pPr>
-              <a:lnSpc>
-                <a:spcPct val="150000"/>
-              </a:lnSpc>
-            </a:pPr>
-            <a:r>
-              <a:rPr sz="2000" b="1">
-                <a:solidFill>
-                  <a:srgbClr val="00A0B0"/>
-                </a:solidFill>
-                <a:latin typeface="Calibri"/>
-              </a:rPr>
-              <a:t>▸  </a:t>
-            </a:r>
-            <a:r>
-              <a:rPr sz="2000">
-                <a:solidFill>
-                  <a:srgbClr val="1A1A2E"/>
-                </a:solidFill>
-                <a:latin typeface="Calibri"/>
-              </a:rPr>
-              <a:t/>
-            </a:r>
-          </a:p>
-          <a:p>
-            <a:pPr>
-              <a:lnSpc>
-                <a:spcPct val="150000"/>
-              </a:lnSpc>
-            </a:pPr>
-            <a:r>
-              <a:rPr sz="2000" b="1">
-                <a:solidFill>
-                  <a:srgbClr val="00A0B0"/>
-                </a:solidFill>
-                <a:latin typeface="Calibri"/>
-              </a:rPr>
-              <a:t>▸  </a:t>
-            </a:r>
-            <a:r>
-              <a:rPr sz="2000">
-                <a:solidFill>
-                  <a:srgbClr val="1A1A2E"/>
-                </a:solidFill>
-                <a:latin typeface="Calibri"/>
-              </a:rPr>
-              <a:t>Equivalenti: Bean Validation (Java), Zod (TS), Symfony Validator (PHP)</a:t>
+            <a:pPr algn="ctr"/>
+            <a:r>
+              <a:rPr sz="2000" b="1" i="0">
+                <a:solidFill>
+                  <a:srgbClr val="6FD8E0"/>
+                </a:solidFill>
+                <a:latin typeface="Calibri"/>
+              </a:rPr>
+              <a:t>PARTE</a:t>
+            </a:r>
+          </a:p>
+        </p:txBody>
+      </p:sp>
+      <p:sp>
+        <p:nvSpPr>
+          <p:cNvPr id="7" name="TextBox 6"/>
+          <p:cNvSpPr txBox="1"/>
+          <p:nvPr/>
+        </p:nvSpPr>
+        <p:spPr>
+          <a:xfrm>
+            <a:off x="4572000" y="2286000"/>
+            <a:ext cx="7315200" cy="1645920"/>
+          </a:xfrm>
+          <a:prstGeom prst="rect">
+            <a:avLst/>
+          </a:prstGeom>
+          <a:noFill/>
+        </p:spPr>
+        <p:txBody>
+          <a:bodyPr wrap="square" lIns="45720" rIns="45720" tIns="18288" bIns="18288" anchor="t">
+            <a:spAutoFit/>
+          </a:bodyPr>
+          <a:lstStyle/>
+          <a:p>
+            <a:pPr algn="l"/>
+            <a:r>
+              <a:rPr sz="4400" b="1" i="0">
+                <a:solidFill>
+                  <a:srgbClr val="0F2D52"/>
+                </a:solidFill>
+                <a:latin typeface="Calibri"/>
+              </a:rPr>
+              <a:t>Path Traversal</a:t>
+            </a:r>
+          </a:p>
+        </p:txBody>
+      </p:sp>
+      <p:sp>
+        <p:nvSpPr>
+          <p:cNvPr id="8" name="TextBox 7"/>
+          <p:cNvSpPr txBox="1"/>
+          <p:nvPr/>
+        </p:nvSpPr>
+        <p:spPr>
+          <a:xfrm>
+            <a:off x="4572000" y="3931920"/>
+            <a:ext cx="7315200" cy="1828800"/>
+          </a:xfrm>
+          <a:prstGeom prst="rect">
+            <a:avLst/>
+          </a:prstGeom>
+          <a:noFill/>
+        </p:spPr>
+        <p:txBody>
+          <a:bodyPr wrap="square" lIns="45720" rIns="45720" tIns="18288" bIns="18288" anchor="t">
+            <a:spAutoFit/>
+          </a:bodyPr>
+          <a:lstStyle/>
+          <a:p>
+            <a:pPr algn="l"/>
+            <a:r>
+              <a:rPr sz="1800" b="0" i="1">
+                <a:solidFill>
+                  <a:srgbClr val="6B7280"/>
+                </a:solidFill>
+                <a:latin typeface="Calibri"/>
+              </a:rPr>
+              <a:t>Quando un parametro filename diventa una porta aperta</a:t>
             </a:r>
           </a:p>
         </p:txBody>
       </p:sp>
       <p:cxnSp>
         <p:nvCxnSpPr>
-          <p:cNvPr id="5" name="Connector 4"/>
+          <p:cNvPr id="9" name="Connector 8"/>
           <p:cNvCxnSpPr/>
           <p:nvPr/>
         </p:nvCxnSpPr>
@@ -8934,14 +9649,14 @@
       </p:cxnSp>
       <p:sp>
         <p:nvSpPr>
-          <p:cNvPr id="6" name="TextBox 5"/>
+          <p:cNvPr id="10" name="TextBox 9"/>
           <p:cNvSpPr txBox="1"/>
           <p:nvPr/>
         </p:nvSpPr>
         <p:spPr>
           <a:xfrm>
             <a:off x="457200" y="6473952"/>
-            <a:ext cx="7315200" cy="320040"/>
+            <a:ext cx="7315200" cy="292608"/>
           </a:xfrm>
           <a:prstGeom prst="rect">
             <a:avLst/>
@@ -8962,21 +9677,21 @@
                 </a:solidFill>
                 <a:latin typeface="Calibri"/>
               </a:rPr>
-              <a:t>Secure Coding · Corso IFTS STEM · A. Manneschi</a:t>
-            </a:r>
-          </a:p>
-        </p:txBody>
-      </p:sp>
-      <p:sp>
-        <p:nvSpPr>
-          <p:cNvPr id="7" name="TextBox 6"/>
+              <a:t>Secure Coding · Corso IFTS STEM · A. Manneschi · 2024/2025</a:t>
+            </a:r>
+          </a:p>
+        </p:txBody>
+      </p:sp>
+      <p:sp>
+        <p:nvSpPr>
+          <p:cNvPr id="11" name="TextBox 10"/>
           <p:cNvSpPr txBox="1"/>
           <p:nvPr/>
         </p:nvSpPr>
         <p:spPr>
           <a:xfrm>
             <a:off x="10515600" y="6473952"/>
-            <a:ext cx="1188720" cy="320040"/>
+            <a:ext cx="1188720" cy="292608"/>
           </a:xfrm>
           <a:prstGeom prst="rect">
             <a:avLst/>
@@ -9029,7 +9744,7 @@
         <p:spPr>
           <a:xfrm>
             <a:off x="0" y="0"/>
-            <a:ext cx="2286000" cy="6858000"/>
+            <a:ext cx="12191695" cy="777240"/>
           </a:xfrm>
           <a:prstGeom prst="rect">
             <a:avLst/>
@@ -9071,8 +9786,996 @@
         </p:nvSpPr>
         <p:spPr>
           <a:xfrm>
-            <a:off x="274320" y="2286000"/>
-            <a:ext cx="1828800" cy="1828800"/>
+            <a:off x="457200" y="164592"/>
+            <a:ext cx="9144000" cy="502920"/>
+          </a:xfrm>
+          <a:prstGeom prst="rect">
+            <a:avLst/>
+          </a:prstGeom>
+          <a:noFill/>
+        </p:spPr>
+        <p:txBody>
+          <a:bodyPr wrap="square" lIns="45720" rIns="45720" tIns="18288" bIns="18288" anchor="ctr">
+            <a:spAutoFit/>
+          </a:bodyPr>
+          <a:lstStyle/>
+          <a:p>
+            <a:pPr algn="l"/>
+            <a:r>
+              <a:rPr sz="2200" b="1" i="0">
+                <a:solidFill>
+                  <a:srgbClr val="FFFFFF"/>
+                </a:solidFill>
+                <a:latin typeface="Calibri"/>
+              </a:rPr>
+              <a:t>Codice vulnerabile (path traversal)</a:t>
+            </a:r>
+          </a:p>
+        </p:txBody>
+      </p:sp>
+      <p:sp>
+        <p:nvSpPr>
+          <p:cNvPr id="4" name="Rounded Rectangle 3"/>
+          <p:cNvSpPr/>
+          <p:nvPr/>
+        </p:nvSpPr>
+        <p:spPr>
+          <a:xfrm>
+            <a:off x="9784080" y="164592"/>
+            <a:ext cx="2194560" cy="457200"/>
+          </a:xfrm>
+          <a:prstGeom prst="roundRect">
+            <a:avLst>
+              <a:gd name="adj" fmla="val 8000"/>
+            </a:avLst>
+          </a:prstGeom>
+          <a:solidFill>
+            <a:srgbClr val="E63946"/>
+          </a:solidFill>
+          <a:ln>
+            <a:noFill/>
+          </a:ln>
+        </p:spPr>
+        <p:style>
+          <a:lnRef idx="1">
+            <a:schemeClr val="accent1"/>
+          </a:lnRef>
+          <a:fillRef idx="3">
+            <a:schemeClr val="accent1"/>
+          </a:fillRef>
+          <a:effectRef idx="2">
+            <a:schemeClr val="accent1"/>
+          </a:effectRef>
+          <a:fontRef idx="minor">
+            <a:schemeClr val="lt1"/>
+          </a:fontRef>
+        </p:style>
+        <p:txBody>
+          <a:bodyPr rtlCol="0" anchor="ctr"/>
+          <a:lstStyle/>
+          <a:p>
+            <a:pPr algn="ctr"/>
+          </a:p>
+        </p:txBody>
+      </p:sp>
+      <p:sp>
+        <p:nvSpPr>
+          <p:cNvPr id="5" name="TextBox 4"/>
+          <p:cNvSpPr txBox="1"/>
+          <p:nvPr/>
+        </p:nvSpPr>
+        <p:spPr>
+          <a:xfrm>
+            <a:off x="9784080" y="164592"/>
+            <a:ext cx="2194560" cy="457200"/>
+          </a:xfrm>
+          <a:prstGeom prst="rect">
+            <a:avLst/>
+          </a:prstGeom>
+          <a:noFill/>
+        </p:spPr>
+        <p:txBody>
+          <a:bodyPr wrap="square" lIns="45720" rIns="45720" tIns="18288" bIns="18288" anchor="ctr">
+            <a:spAutoFit/>
+          </a:bodyPr>
+          <a:lstStyle/>
+          <a:p>
+            <a:pPr algn="ctr"/>
+            <a:r>
+              <a:rPr sz="1200" b="1" i="0">
+                <a:solidFill>
+                  <a:srgbClr val="FFFFFF"/>
+                </a:solidFill>
+                <a:latin typeface="Calibri"/>
+              </a:rPr>
+              <a:t>🚩 ANTI-PATTERN</a:t>
+            </a:r>
+          </a:p>
+        </p:txBody>
+      </p:sp>
+      <p:sp>
+        <p:nvSpPr>
+          <p:cNvPr id="6" name="Rectangle 5"/>
+          <p:cNvSpPr/>
+          <p:nvPr/>
+        </p:nvSpPr>
+        <p:spPr>
+          <a:xfrm>
+            <a:off x="457200" y="1097280"/>
+            <a:ext cx="11247120" cy="365760"/>
+          </a:xfrm>
+          <a:prstGeom prst="rect">
+            <a:avLst/>
+          </a:prstGeom>
+          <a:solidFill>
+            <a:srgbClr val="2D2D37"/>
+          </a:solidFill>
+          <a:ln>
+            <a:noFill/>
+          </a:ln>
+        </p:spPr>
+        <p:style>
+          <a:lnRef idx="1">
+            <a:schemeClr val="accent1"/>
+          </a:lnRef>
+          <a:fillRef idx="3">
+            <a:schemeClr val="accent1"/>
+          </a:fillRef>
+          <a:effectRef idx="2">
+            <a:schemeClr val="accent1"/>
+          </a:effectRef>
+          <a:fontRef idx="minor">
+            <a:schemeClr val="lt1"/>
+          </a:fontRef>
+        </p:style>
+        <p:txBody>
+          <a:bodyPr rtlCol="0" anchor="ctr"/>
+          <a:lstStyle/>
+          <a:p>
+            <a:pPr algn="ctr"/>
+          </a:p>
+        </p:txBody>
+      </p:sp>
+      <p:sp>
+        <p:nvSpPr>
+          <p:cNvPr id="7" name="Oval 6"/>
+          <p:cNvSpPr/>
+          <p:nvPr/>
+        </p:nvSpPr>
+        <p:spPr>
+          <a:xfrm>
+            <a:off x="594360" y="1216152"/>
+            <a:ext cx="118872" cy="118872"/>
+          </a:xfrm>
+          <a:prstGeom prst="ellipse">
+            <a:avLst/>
+          </a:prstGeom>
+          <a:solidFill>
+            <a:srgbClr val="FF5F56"/>
+          </a:solidFill>
+          <a:ln>
+            <a:noFill/>
+          </a:ln>
+        </p:spPr>
+        <p:style>
+          <a:lnRef idx="1">
+            <a:schemeClr val="accent1"/>
+          </a:lnRef>
+          <a:fillRef idx="3">
+            <a:schemeClr val="accent1"/>
+          </a:fillRef>
+          <a:effectRef idx="2">
+            <a:schemeClr val="accent1"/>
+          </a:effectRef>
+          <a:fontRef idx="minor">
+            <a:schemeClr val="lt1"/>
+          </a:fontRef>
+        </p:style>
+        <p:txBody>
+          <a:bodyPr rtlCol="0" anchor="ctr"/>
+          <a:lstStyle/>
+          <a:p>
+            <a:pPr algn="ctr"/>
+          </a:p>
+        </p:txBody>
+      </p:sp>
+      <p:sp>
+        <p:nvSpPr>
+          <p:cNvPr id="8" name="Oval 7"/>
+          <p:cNvSpPr/>
+          <p:nvPr/>
+        </p:nvSpPr>
+        <p:spPr>
+          <a:xfrm>
+            <a:off x="777240" y="1216152"/>
+            <a:ext cx="118872" cy="118872"/>
+          </a:xfrm>
+          <a:prstGeom prst="ellipse">
+            <a:avLst/>
+          </a:prstGeom>
+          <a:solidFill>
+            <a:srgbClr val="FFBD2E"/>
+          </a:solidFill>
+          <a:ln>
+            <a:noFill/>
+          </a:ln>
+        </p:spPr>
+        <p:style>
+          <a:lnRef idx="1">
+            <a:schemeClr val="accent1"/>
+          </a:lnRef>
+          <a:fillRef idx="3">
+            <a:schemeClr val="accent1"/>
+          </a:fillRef>
+          <a:effectRef idx="2">
+            <a:schemeClr val="accent1"/>
+          </a:effectRef>
+          <a:fontRef idx="minor">
+            <a:schemeClr val="lt1"/>
+          </a:fontRef>
+        </p:style>
+        <p:txBody>
+          <a:bodyPr rtlCol="0" anchor="ctr"/>
+          <a:lstStyle/>
+          <a:p>
+            <a:pPr algn="ctr"/>
+          </a:p>
+        </p:txBody>
+      </p:sp>
+      <p:sp>
+        <p:nvSpPr>
+          <p:cNvPr id="9" name="Oval 8"/>
+          <p:cNvSpPr/>
+          <p:nvPr/>
+        </p:nvSpPr>
+        <p:spPr>
+          <a:xfrm>
+            <a:off x="960120" y="1216152"/>
+            <a:ext cx="118872" cy="118872"/>
+          </a:xfrm>
+          <a:prstGeom prst="ellipse">
+            <a:avLst/>
+          </a:prstGeom>
+          <a:solidFill>
+            <a:srgbClr val="27C93F"/>
+          </a:solidFill>
+          <a:ln>
+            <a:noFill/>
+          </a:ln>
+        </p:spPr>
+        <p:style>
+          <a:lnRef idx="1">
+            <a:schemeClr val="accent1"/>
+          </a:lnRef>
+          <a:fillRef idx="3">
+            <a:schemeClr val="accent1"/>
+          </a:fillRef>
+          <a:effectRef idx="2">
+            <a:schemeClr val="accent1"/>
+          </a:effectRef>
+          <a:fontRef idx="minor">
+            <a:schemeClr val="lt1"/>
+          </a:fontRef>
+        </p:style>
+        <p:txBody>
+          <a:bodyPr rtlCol="0" anchor="ctr"/>
+          <a:lstStyle/>
+          <a:p>
+            <a:pPr algn="ctr"/>
+          </a:p>
+        </p:txBody>
+      </p:sp>
+      <p:sp>
+        <p:nvSpPr>
+          <p:cNvPr id="10" name="TextBox 9"/>
+          <p:cNvSpPr txBox="1"/>
+          <p:nvPr/>
+        </p:nvSpPr>
+        <p:spPr>
+          <a:xfrm>
+            <a:off x="1371600" y="1161288"/>
+            <a:ext cx="5486400" cy="274320"/>
+          </a:xfrm>
+          <a:prstGeom prst="rect">
+            <a:avLst/>
+          </a:prstGeom>
+          <a:noFill/>
+        </p:spPr>
+        <p:txBody>
+          <a:bodyPr wrap="square" lIns="45720" rIns="45720" tIns="18288" bIns="18288" anchor="ctr">
+            <a:spAutoFit/>
+          </a:bodyPr>
+          <a:lstStyle/>
+          <a:p>
+            <a:pPr algn="l"/>
+            <a:r>
+              <a:rPr sz="1000" b="0" i="0">
+                <a:solidFill>
+                  <a:srgbClr val="CBD0D8"/>
+                </a:solidFill>
+                <a:latin typeface="Calibri"/>
+              </a:rPr>
+              <a:t>  app.py  —  python</a:t>
+            </a:r>
+          </a:p>
+        </p:txBody>
+      </p:sp>
+      <p:sp>
+        <p:nvSpPr>
+          <p:cNvPr id="11" name="Rectangle 10"/>
+          <p:cNvSpPr/>
+          <p:nvPr/>
+        </p:nvSpPr>
+        <p:spPr>
+          <a:xfrm>
+            <a:off x="457200" y="1463040"/>
+            <a:ext cx="11247120" cy="4206240"/>
+          </a:xfrm>
+          <a:prstGeom prst="rect">
+            <a:avLst/>
+          </a:prstGeom>
+          <a:solidFill>
+            <a:srgbClr val="1E1E28"/>
+          </a:solidFill>
+          <a:ln w="19050">
+            <a:solidFill>
+              <a:srgbClr val="E63946"/>
+            </a:solidFill>
+          </a:ln>
+        </p:spPr>
+        <p:style>
+          <a:lnRef idx="1">
+            <a:schemeClr val="accent1"/>
+          </a:lnRef>
+          <a:fillRef idx="3">
+            <a:schemeClr val="accent1"/>
+          </a:fillRef>
+          <a:effectRef idx="2">
+            <a:schemeClr val="accent1"/>
+          </a:effectRef>
+          <a:fontRef idx="minor">
+            <a:schemeClr val="lt1"/>
+          </a:fontRef>
+        </p:style>
+        <p:txBody>
+          <a:bodyPr rtlCol="0" anchor="ctr"/>
+          <a:lstStyle/>
+          <a:p>
+            <a:pPr algn="ctr"/>
+          </a:p>
+        </p:txBody>
+      </p:sp>
+      <p:sp>
+        <p:nvSpPr>
+          <p:cNvPr id="12" name="Rectangle 11"/>
+          <p:cNvSpPr/>
+          <p:nvPr/>
+        </p:nvSpPr>
+        <p:spPr>
+          <a:xfrm>
+            <a:off x="457200" y="1463040"/>
+            <a:ext cx="457200" cy="4206240"/>
+          </a:xfrm>
+          <a:prstGeom prst="rect">
+            <a:avLst/>
+          </a:prstGeom>
+          <a:solidFill>
+            <a:srgbClr val="24242E"/>
+          </a:solidFill>
+          <a:ln>
+            <a:noFill/>
+          </a:ln>
+        </p:spPr>
+        <p:style>
+          <a:lnRef idx="1">
+            <a:schemeClr val="accent1"/>
+          </a:lnRef>
+          <a:fillRef idx="3">
+            <a:schemeClr val="accent1"/>
+          </a:fillRef>
+          <a:effectRef idx="2">
+            <a:schemeClr val="accent1"/>
+          </a:effectRef>
+          <a:fontRef idx="minor">
+            <a:schemeClr val="lt1"/>
+          </a:fontRef>
+        </p:style>
+        <p:txBody>
+          <a:bodyPr rtlCol="0" anchor="ctr"/>
+          <a:lstStyle/>
+          <a:p>
+            <a:pPr algn="ctr"/>
+          </a:p>
+        </p:txBody>
+      </p:sp>
+      <p:sp>
+        <p:nvSpPr>
+          <p:cNvPr id="13" name="TextBox 12"/>
+          <p:cNvSpPr txBox="1"/>
+          <p:nvPr/>
+        </p:nvSpPr>
+        <p:spPr>
+          <a:xfrm>
+            <a:off x="1051560" y="1600200"/>
+            <a:ext cx="10607040" cy="4114800"/>
+          </a:xfrm>
+          <a:prstGeom prst="rect">
+            <a:avLst/>
+          </a:prstGeom>
+          <a:noFill/>
+        </p:spPr>
+        <p:txBody>
+          <a:bodyPr wrap="none">
+            <a:spAutoFit/>
+          </a:bodyPr>
+          <a:lstStyle/>
+          <a:p>
+            <a:pPr>
+              <a:lnSpc>
+                <a:spcPct val="115000"/>
+              </a:lnSpc>
+              <a:spcAft>
+                <a:spcPts val="0"/>
+              </a:spcAft>
+            </a:pPr>
+            <a:r>
+              <a:rPr sz="1300">
+                <a:solidFill>
+                  <a:srgbClr val="E5E5EC"/>
+                </a:solidFill>
+                <a:latin typeface="Consolas"/>
+              </a:rPr>
+              <a:t>@app.route("/download")</a:t>
+            </a:r>
+          </a:p>
+          <a:p>
+            <a:pPr>
+              <a:lnSpc>
+                <a:spcPct val="115000"/>
+              </a:lnSpc>
+              <a:spcAft>
+                <a:spcPts val="0"/>
+              </a:spcAft>
+            </a:pPr>
+            <a:r>
+              <a:rPr sz="1300">
+                <a:solidFill>
+                  <a:srgbClr val="E5E5EC"/>
+                </a:solidFill>
+                <a:latin typeface="Consolas"/>
+              </a:rPr>
+              <a:t>def download():</a:t>
+            </a:r>
+          </a:p>
+          <a:p>
+            <a:pPr>
+              <a:lnSpc>
+                <a:spcPct val="115000"/>
+              </a:lnSpc>
+              <a:spcAft>
+                <a:spcPts val="0"/>
+              </a:spcAft>
+            </a:pPr>
+            <a:r>
+              <a:rPr sz="1300">
+                <a:solidFill>
+                  <a:srgbClr val="E5E5EC"/>
+                </a:solidFill>
+                <a:latin typeface="Consolas"/>
+              </a:rPr>
+              <a:t>    filename = request.args.get("file")</a:t>
+            </a:r>
+          </a:p>
+          <a:p>
+            <a:pPr>
+              <a:lnSpc>
+                <a:spcPct val="115000"/>
+              </a:lnSpc>
+              <a:spcAft>
+                <a:spcPts val="0"/>
+              </a:spcAft>
+            </a:pPr>
+            <a:r>
+              <a:rPr sz="1300">
+                <a:solidFill>
+                  <a:srgbClr val="E5E5EC"/>
+                </a:solidFill>
+                <a:latin typeface="Consolas"/>
+              </a:rPr>
+              <a:t>    return send_file(f"./uploads/{filename}")</a:t>
+            </a:r>
+          </a:p>
+          <a:p>
+            <a:pPr>
+              <a:lnSpc>
+                <a:spcPct val="115000"/>
+              </a:lnSpc>
+              <a:spcAft>
+                <a:spcPts val="0"/>
+              </a:spcAft>
+            </a:pPr>
+            <a:r>
+              <a:rPr sz="1300">
+                <a:solidFill>
+                  <a:srgbClr val="E5E5EC"/>
+                </a:solidFill>
+                <a:latin typeface="Consolas"/>
+              </a:rPr>
+              <a:t> </a:t>
+            </a:r>
+          </a:p>
+          <a:p>
+            <a:pPr>
+              <a:lnSpc>
+                <a:spcPct val="115000"/>
+              </a:lnSpc>
+              <a:spcAft>
+                <a:spcPts val="0"/>
+              </a:spcAft>
+            </a:pPr>
+            <a:r>
+              <a:rPr sz="1300">
+                <a:solidFill>
+                  <a:srgbClr val="E5E5EC"/>
+                </a:solidFill>
+                <a:latin typeface="Consolas"/>
+              </a:rPr>
+              <a:t># Attacco: GET /download?file=../etc/passwd</a:t>
+            </a:r>
+          </a:p>
+          <a:p>
+            <a:pPr>
+              <a:lnSpc>
+                <a:spcPct val="115000"/>
+              </a:lnSpc>
+              <a:spcAft>
+                <a:spcPts val="0"/>
+              </a:spcAft>
+            </a:pPr>
+            <a:r>
+              <a:rPr sz="1300">
+                <a:solidFill>
+                  <a:srgbClr val="E5E5EC"/>
+                </a:solidFill>
+                <a:latin typeface="Consolas"/>
+              </a:rPr>
+              <a:t># Path costruito: ./uploads/../etc/passwd</a:t>
+            </a:r>
+          </a:p>
+          <a:p>
+            <a:pPr>
+              <a:lnSpc>
+                <a:spcPct val="115000"/>
+              </a:lnSpc>
+              <a:spcAft>
+                <a:spcPts val="0"/>
+              </a:spcAft>
+            </a:pPr>
+            <a:r>
+              <a:rPr sz="1300">
+                <a:solidFill>
+                  <a:srgbClr val="E5E5EC"/>
+                </a:solidFill>
+                <a:latin typeface="Consolas"/>
+              </a:rPr>
+              <a:t># OS lo risolve a: /etc/passwd</a:t>
+            </a:r>
+          </a:p>
+          <a:p>
+            <a:pPr>
+              <a:lnSpc>
+                <a:spcPct val="115000"/>
+              </a:lnSpc>
+              <a:spcAft>
+                <a:spcPts val="0"/>
+              </a:spcAft>
+            </a:pPr>
+            <a:r>
+              <a:rPr sz="1300">
+                <a:solidFill>
+                  <a:srgbClr val="E5E5EC"/>
+                </a:solidFill>
+                <a:latin typeface="Consolas"/>
+              </a:rPr>
+              <a:t># → L'attaccante legge file di sistema</a:t>
+            </a:r>
+          </a:p>
+          <a:p>
+            <a:pPr>
+              <a:lnSpc>
+                <a:spcPct val="115000"/>
+              </a:lnSpc>
+              <a:spcAft>
+                <a:spcPts val="0"/>
+              </a:spcAft>
+            </a:pPr>
+            <a:r>
+              <a:rPr sz="1300">
+                <a:solidFill>
+                  <a:srgbClr val="E5E5EC"/>
+                </a:solidFill>
+                <a:latin typeface="Consolas"/>
+              </a:rPr>
+              <a:t> </a:t>
+            </a:r>
+          </a:p>
+          <a:p>
+            <a:pPr>
+              <a:lnSpc>
+                <a:spcPct val="115000"/>
+              </a:lnSpc>
+              <a:spcAft>
+                <a:spcPts val="0"/>
+              </a:spcAft>
+            </a:pPr>
+            <a:r>
+              <a:rPr sz="1300">
+                <a:solidFill>
+                  <a:srgbClr val="E5E5EC"/>
+                </a:solidFill>
+                <a:latin typeface="Consolas"/>
+              </a:rPr>
+              <a:t># Bypass del filtro ingenuo:</a:t>
+            </a:r>
+          </a:p>
+          <a:p>
+            <a:pPr>
+              <a:lnSpc>
+                <a:spcPct val="115000"/>
+              </a:lnSpc>
+              <a:spcAft>
+                <a:spcPts val="0"/>
+              </a:spcAft>
+            </a:pPr>
+            <a:r>
+              <a:rPr sz="1300">
+                <a:solidFill>
+                  <a:srgbClr val="E5E5EC"/>
+                </a:solidFill>
+                <a:latin typeface="Consolas"/>
+              </a:rPr>
+              <a:t>#   ../../etc/passwd       (più livelli)</a:t>
+            </a:r>
+          </a:p>
+          <a:p>
+            <a:pPr>
+              <a:lnSpc>
+                <a:spcPct val="115000"/>
+              </a:lnSpc>
+              <a:spcAft>
+                <a:spcPts val="0"/>
+              </a:spcAft>
+            </a:pPr>
+            <a:r>
+              <a:rPr sz="1300">
+                <a:solidFill>
+                  <a:srgbClr val="E5E5EC"/>
+                </a:solidFill>
+                <a:latin typeface="Consolas"/>
+              </a:rPr>
+              <a:t>#   ....//....//etc/passwd (filtro ../ ingenuo)</a:t>
+            </a:r>
+          </a:p>
+          <a:p>
+            <a:pPr>
+              <a:lnSpc>
+                <a:spcPct val="115000"/>
+              </a:lnSpc>
+              <a:spcAft>
+                <a:spcPts val="0"/>
+              </a:spcAft>
+            </a:pPr>
+            <a:r>
+              <a:rPr sz="1300">
+                <a:solidFill>
+                  <a:srgbClr val="E5E5EC"/>
+                </a:solidFill>
+                <a:latin typeface="Consolas"/>
+              </a:rPr>
+              <a:t>#   ..%2f..%2fetc%2fpasswd (URL encoded)</a:t>
+            </a:r>
+          </a:p>
+        </p:txBody>
+      </p:sp>
+      <p:sp>
+        <p:nvSpPr>
+          <p:cNvPr id="14" name="TextBox 13"/>
+          <p:cNvSpPr txBox="1"/>
+          <p:nvPr/>
+        </p:nvSpPr>
+        <p:spPr>
+          <a:xfrm>
+            <a:off x="502920" y="1600200"/>
+            <a:ext cx="365760" cy="4114800"/>
+          </a:xfrm>
+          <a:prstGeom prst="rect">
+            <a:avLst/>
+          </a:prstGeom>
+          <a:noFill/>
+        </p:spPr>
+        <p:txBody>
+          <a:bodyPr wrap="none">
+            <a:spAutoFit/>
+          </a:bodyPr>
+          <a:lstStyle/>
+          <a:p>
+            <a:pPr algn="r">
+              <a:lnSpc>
+                <a:spcPct val="115000"/>
+              </a:lnSpc>
+              <a:spcAft>
+                <a:spcPts val="0"/>
+              </a:spcAft>
+            </a:pPr>
+            <a:r>
+              <a:rPr sz="1100">
+                <a:solidFill>
+                  <a:srgbClr val="6B7280"/>
+                </a:solidFill>
+                <a:latin typeface="Consolas"/>
+              </a:rPr>
+              <a:t>1</a:t>
+            </a:r>
+          </a:p>
+          <a:p>
+            <a:pPr algn="r">
+              <a:lnSpc>
+                <a:spcPct val="115000"/>
+              </a:lnSpc>
+              <a:spcAft>
+                <a:spcPts val="0"/>
+              </a:spcAft>
+            </a:pPr>
+            <a:r>
+              <a:rPr sz="1100">
+                <a:solidFill>
+                  <a:srgbClr val="6B7280"/>
+                </a:solidFill>
+                <a:latin typeface="Consolas"/>
+              </a:rPr>
+              <a:t>2</a:t>
+            </a:r>
+          </a:p>
+          <a:p>
+            <a:pPr algn="r">
+              <a:lnSpc>
+                <a:spcPct val="115000"/>
+              </a:lnSpc>
+              <a:spcAft>
+                <a:spcPts val="0"/>
+              </a:spcAft>
+            </a:pPr>
+            <a:r>
+              <a:rPr sz="1100">
+                <a:solidFill>
+                  <a:srgbClr val="6B7280"/>
+                </a:solidFill>
+                <a:latin typeface="Consolas"/>
+              </a:rPr>
+              <a:t>3</a:t>
+            </a:r>
+          </a:p>
+          <a:p>
+            <a:pPr algn="r">
+              <a:lnSpc>
+                <a:spcPct val="115000"/>
+              </a:lnSpc>
+              <a:spcAft>
+                <a:spcPts val="0"/>
+              </a:spcAft>
+            </a:pPr>
+            <a:r>
+              <a:rPr sz="1100">
+                <a:solidFill>
+                  <a:srgbClr val="6B7280"/>
+                </a:solidFill>
+                <a:latin typeface="Consolas"/>
+              </a:rPr>
+              <a:t>4</a:t>
+            </a:r>
+          </a:p>
+          <a:p>
+            <a:pPr algn="r">
+              <a:lnSpc>
+                <a:spcPct val="115000"/>
+              </a:lnSpc>
+              <a:spcAft>
+                <a:spcPts val="0"/>
+              </a:spcAft>
+            </a:pPr>
+            <a:r>
+              <a:rPr sz="1100">
+                <a:solidFill>
+                  <a:srgbClr val="6B7280"/>
+                </a:solidFill>
+                <a:latin typeface="Consolas"/>
+              </a:rPr>
+              <a:t>5</a:t>
+            </a:r>
+          </a:p>
+          <a:p>
+            <a:pPr algn="r">
+              <a:lnSpc>
+                <a:spcPct val="115000"/>
+              </a:lnSpc>
+              <a:spcAft>
+                <a:spcPts val="0"/>
+              </a:spcAft>
+            </a:pPr>
+            <a:r>
+              <a:rPr sz="1100">
+                <a:solidFill>
+                  <a:srgbClr val="6B7280"/>
+                </a:solidFill>
+                <a:latin typeface="Consolas"/>
+              </a:rPr>
+              <a:t>6</a:t>
+            </a:r>
+          </a:p>
+          <a:p>
+            <a:pPr algn="r">
+              <a:lnSpc>
+                <a:spcPct val="115000"/>
+              </a:lnSpc>
+              <a:spcAft>
+                <a:spcPts val="0"/>
+              </a:spcAft>
+            </a:pPr>
+            <a:r>
+              <a:rPr sz="1100">
+                <a:solidFill>
+                  <a:srgbClr val="6B7280"/>
+                </a:solidFill>
+                <a:latin typeface="Consolas"/>
+              </a:rPr>
+              <a:t>7</a:t>
+            </a:r>
+          </a:p>
+          <a:p>
+            <a:pPr algn="r">
+              <a:lnSpc>
+                <a:spcPct val="115000"/>
+              </a:lnSpc>
+              <a:spcAft>
+                <a:spcPts val="0"/>
+              </a:spcAft>
+            </a:pPr>
+            <a:r>
+              <a:rPr sz="1100">
+                <a:solidFill>
+                  <a:srgbClr val="6B7280"/>
+                </a:solidFill>
+                <a:latin typeface="Consolas"/>
+              </a:rPr>
+              <a:t>8</a:t>
+            </a:r>
+          </a:p>
+          <a:p>
+            <a:pPr algn="r">
+              <a:lnSpc>
+                <a:spcPct val="115000"/>
+              </a:lnSpc>
+              <a:spcAft>
+                <a:spcPts val="0"/>
+              </a:spcAft>
+            </a:pPr>
+            <a:r>
+              <a:rPr sz="1100">
+                <a:solidFill>
+                  <a:srgbClr val="6B7280"/>
+                </a:solidFill>
+                <a:latin typeface="Consolas"/>
+              </a:rPr>
+              <a:t>9</a:t>
+            </a:r>
+          </a:p>
+          <a:p>
+            <a:pPr algn="r">
+              <a:lnSpc>
+                <a:spcPct val="115000"/>
+              </a:lnSpc>
+              <a:spcAft>
+                <a:spcPts val="0"/>
+              </a:spcAft>
+            </a:pPr>
+            <a:r>
+              <a:rPr sz="1100">
+                <a:solidFill>
+                  <a:srgbClr val="6B7280"/>
+                </a:solidFill>
+                <a:latin typeface="Consolas"/>
+              </a:rPr>
+              <a:t>10</a:t>
+            </a:r>
+          </a:p>
+          <a:p>
+            <a:pPr algn="r">
+              <a:lnSpc>
+                <a:spcPct val="115000"/>
+              </a:lnSpc>
+              <a:spcAft>
+                <a:spcPts val="0"/>
+              </a:spcAft>
+            </a:pPr>
+            <a:r>
+              <a:rPr sz="1100">
+                <a:solidFill>
+                  <a:srgbClr val="6B7280"/>
+                </a:solidFill>
+                <a:latin typeface="Consolas"/>
+              </a:rPr>
+              <a:t>11</a:t>
+            </a:r>
+          </a:p>
+          <a:p>
+            <a:pPr algn="r">
+              <a:lnSpc>
+                <a:spcPct val="115000"/>
+              </a:lnSpc>
+              <a:spcAft>
+                <a:spcPts val="0"/>
+              </a:spcAft>
+            </a:pPr>
+            <a:r>
+              <a:rPr sz="1100">
+                <a:solidFill>
+                  <a:srgbClr val="6B7280"/>
+                </a:solidFill>
+                <a:latin typeface="Consolas"/>
+              </a:rPr>
+              <a:t>12</a:t>
+            </a:r>
+          </a:p>
+          <a:p>
+            <a:pPr algn="r">
+              <a:lnSpc>
+                <a:spcPct val="115000"/>
+              </a:lnSpc>
+              <a:spcAft>
+                <a:spcPts val="0"/>
+              </a:spcAft>
+            </a:pPr>
+            <a:r>
+              <a:rPr sz="1100">
+                <a:solidFill>
+                  <a:srgbClr val="6B7280"/>
+                </a:solidFill>
+                <a:latin typeface="Consolas"/>
+              </a:rPr>
+              <a:t>13</a:t>
+            </a:r>
+          </a:p>
+          <a:p>
+            <a:pPr algn="r">
+              <a:lnSpc>
+                <a:spcPct val="115000"/>
+              </a:lnSpc>
+              <a:spcAft>
+                <a:spcPts val="0"/>
+              </a:spcAft>
+            </a:pPr>
+            <a:r>
+              <a:rPr sz="1100">
+                <a:solidFill>
+                  <a:srgbClr val="6B7280"/>
+                </a:solidFill>
+                <a:latin typeface="Consolas"/>
+              </a:rPr>
+              <a:t>14</a:t>
+            </a:r>
+          </a:p>
+        </p:txBody>
+      </p:sp>
+      <p:sp>
+        <p:nvSpPr>
+          <p:cNvPr id="15" name="TextBox 14"/>
+          <p:cNvSpPr txBox="1"/>
+          <p:nvPr/>
+        </p:nvSpPr>
+        <p:spPr>
+          <a:xfrm>
+            <a:off x="457200" y="5852160"/>
+            <a:ext cx="11247120" cy="502920"/>
           </a:xfrm>
           <a:prstGeom prst="rect">
             <a:avLst/>
@@ -9085,92 +10788,22 @@
           </a:bodyPr>
           <a:lstStyle/>
           <a:p>
-            <a:pPr algn="ctr"/>
-            <a:r>
-              <a:rPr sz="12000" b="1" i="0">
-                <a:solidFill>
-                  <a:srgbClr val="00A0B0"/>
-                </a:solidFill>
-                <a:latin typeface="Calibri"/>
-              </a:rPr>
-              <a:t>02</a:t>
-            </a:r>
-          </a:p>
-        </p:txBody>
-      </p:sp>
-      <p:sp>
-        <p:nvSpPr>
-          <p:cNvPr id="4" name="TextBox 3"/>
-          <p:cNvSpPr txBox="1"/>
-          <p:nvPr/>
-        </p:nvSpPr>
-        <p:spPr>
-          <a:xfrm>
-            <a:off x="2743200" y="2560320"/>
-            <a:ext cx="8961120" cy="1371600"/>
-          </a:xfrm>
-          <a:prstGeom prst="rect">
-            <a:avLst/>
-          </a:prstGeom>
-          <a:noFill/>
-        </p:spPr>
-        <p:txBody>
-          <a:bodyPr wrap="square" lIns="45720" rIns="45720" tIns="18288" bIns="18288" anchor="t">
-            <a:spAutoFit/>
-          </a:bodyPr>
-          <a:lstStyle/>
-          <a:p>
             <a:pPr algn="l"/>
             <a:r>
-              <a:rPr sz="4200" b="1" i="0">
-                <a:solidFill>
-                  <a:srgbClr val="0F2D52"/>
-                </a:solidFill>
-                <a:latin typeface="Calibri"/>
-              </a:rPr>
-              <a:t>Path Traversal</a:t>
-            </a:r>
-          </a:p>
-        </p:txBody>
-      </p:sp>
-      <p:sp>
-        <p:nvSpPr>
-          <p:cNvPr id="5" name="TextBox 4"/>
-          <p:cNvSpPr txBox="1"/>
-          <p:nvPr/>
-        </p:nvSpPr>
-        <p:spPr>
-          <a:xfrm>
-            <a:off x="2743200" y="3931920"/>
-            <a:ext cx="8961120" cy="1828800"/>
-          </a:xfrm>
-          <a:prstGeom prst="rect">
-            <a:avLst/>
-          </a:prstGeom>
-          <a:noFill/>
-        </p:spPr>
-        <p:txBody>
-          <a:bodyPr wrap="square" lIns="45720" rIns="45720" tIns="18288" bIns="18288" anchor="t">
-            <a:spAutoFit/>
-          </a:bodyPr>
-          <a:lstStyle/>
-          <a:p>
-            <a:pPr algn="l"/>
-            <a:r>
-              <a:rPr sz="1800" b="0" i="1">
-                <a:solidFill>
-                  <a:srgbClr val="6B7280"/>
-                </a:solidFill>
-                <a:latin typeface="Calibri"/>
-              </a:rPr>
-              <a:t>Quando un parametro filename diventa una porta aperta</a:t>
+              <a:rPr sz="1400" b="1" i="1">
+                <a:solidFill>
+                  <a:srgbClr val="E63946"/>
+                </a:solidFill>
+                <a:latin typeface="Calibri"/>
+              </a:rPr>
+              <a:t>⚠  Vale anche per /var/myapp/secrets, /home/user/.ssh/id_rsa, ...</a:t>
             </a:r>
           </a:p>
         </p:txBody>
       </p:sp>
       <p:cxnSp>
         <p:nvCxnSpPr>
-          <p:cNvPr id="6" name="Connector 5"/>
+          <p:cNvPr id="16" name="Connector 15"/>
           <p:cNvCxnSpPr/>
           <p:nvPr/>
         </p:nvCxnSpPr>
@@ -9205,14 +10838,14 @@
       </p:cxnSp>
       <p:sp>
         <p:nvSpPr>
-          <p:cNvPr id="7" name="TextBox 6"/>
+          <p:cNvPr id="17" name="TextBox 16"/>
           <p:cNvSpPr txBox="1"/>
           <p:nvPr/>
         </p:nvSpPr>
         <p:spPr>
           <a:xfrm>
             <a:off x="457200" y="6473952"/>
-            <a:ext cx="7315200" cy="320040"/>
+            <a:ext cx="7315200" cy="292608"/>
           </a:xfrm>
           <a:prstGeom prst="rect">
             <a:avLst/>
@@ -9233,21 +10866,21 @@
                 </a:solidFill>
                 <a:latin typeface="Calibri"/>
               </a:rPr>
-              <a:t>Secure Coding · Corso IFTS STEM · A. Manneschi</a:t>
-            </a:r>
-          </a:p>
-        </p:txBody>
-      </p:sp>
-      <p:sp>
-        <p:nvSpPr>
-          <p:cNvPr id="8" name="TextBox 7"/>
+              <a:t>Secure Coding · Corso IFTS STEM · A. Manneschi · 2024/2025</a:t>
+            </a:r>
+          </a:p>
+        </p:txBody>
+      </p:sp>
+      <p:sp>
+        <p:nvSpPr>
+          <p:cNvPr id="18" name="TextBox 17"/>
           <p:cNvSpPr txBox="1"/>
           <p:nvPr/>
         </p:nvSpPr>
         <p:spPr>
           <a:xfrm>
             <a:off x="10515600" y="6473952"/>
-            <a:ext cx="1188720" cy="320040"/>
+            <a:ext cx="1188720" cy="292608"/>
           </a:xfrm>
           <a:prstGeom prst="rect">
             <a:avLst/>
@@ -9343,7 +10976,7 @@
         <p:spPr>
           <a:xfrm>
             <a:off x="457200" y="164592"/>
-            <a:ext cx="10058400" cy="502920"/>
+            <a:ext cx="9144000" cy="502920"/>
           </a:xfrm>
           <a:prstGeom prst="rect">
             <a:avLst/>
@@ -9358,33 +10991,35 @@
           <a:p>
             <a:pPr algn="l"/>
             <a:r>
-              <a:rPr sz="2400" b="1" i="0">
+              <a:rPr sz="2200" b="1" i="0">
                 <a:solidFill>
                   <a:srgbClr val="FFFFFF"/>
                 </a:solidFill>
                 <a:latin typeface="Calibri"/>
               </a:rPr>
-              <a:t>Codice vulnerabile a path traversal</a:t>
-            </a:r>
-          </a:p>
-        </p:txBody>
-      </p:sp>
-      <p:sp>
-        <p:nvSpPr>
-          <p:cNvPr id="4" name="Rectangle 3"/>
+              <a:t>Correzione: 3 controlli obbligatori</a:t>
+            </a:r>
+          </a:p>
+        </p:txBody>
+      </p:sp>
+      <p:sp>
+        <p:nvSpPr>
+          <p:cNvPr id="4" name="Rounded Rectangle 3"/>
           <p:cNvSpPr/>
           <p:nvPr/>
         </p:nvSpPr>
         <p:spPr>
           <a:xfrm>
-            <a:off x="9875520" y="164592"/>
-            <a:ext cx="2103120" cy="457200"/>
-          </a:xfrm>
-          <a:prstGeom prst="rect">
-            <a:avLst/>
+            <a:off x="9784080" y="164592"/>
+            <a:ext cx="2194560" cy="457200"/>
+          </a:xfrm>
+          <a:prstGeom prst="roundRect">
+            <a:avLst>
+              <a:gd name="adj" fmla="val 8000"/>
+            </a:avLst>
           </a:prstGeom>
           <a:solidFill>
-            <a:srgbClr val="E63946"/>
+            <a:srgbClr val="06A77D"/>
           </a:solidFill>
           <a:ln>
             <a:noFill/>
@@ -9420,8 +11055,8 @@
         </p:nvSpPr>
         <p:spPr>
           <a:xfrm>
-            <a:off x="9875520" y="182880"/>
-            <a:ext cx="2103120" cy="457200"/>
+            <a:off x="9784080" y="164592"/>
+            <a:ext cx="2194560" cy="457200"/>
           </a:xfrm>
           <a:prstGeom prst="rect">
             <a:avLst/>
@@ -9442,7 +11077,7 @@
                 </a:solidFill>
                 <a:latin typeface="Calibri"/>
               </a:rPr>
-              <a:t>🚩 ANTI-PATTERN</a:t>
+              <a:t>✅ PYTHON</a:t>
             </a:r>
           </a:p>
         </p:txBody>
@@ -9456,18 +11091,16 @@
         <p:spPr>
           <a:xfrm>
             <a:off x="457200" y="1097280"/>
-            <a:ext cx="11247120" cy="4572000"/>
+            <a:ext cx="11247120" cy="365760"/>
           </a:xfrm>
           <a:prstGeom prst="rect">
             <a:avLst/>
           </a:prstGeom>
           <a:solidFill>
-            <a:srgbClr val="F1F4F8"/>
+            <a:srgbClr val="2D2D37"/>
           </a:solidFill>
           <a:ln>
-            <a:solidFill>
-              <a:srgbClr val="E63946"/>
-            </a:solidFill>
+            <a:noFill/>
           </a:ln>
         </p:spPr>
         <p:style>
@@ -9494,14 +11127,1110 @@
       </p:sp>
       <p:sp>
         <p:nvSpPr>
-          <p:cNvPr id="7" name="TextBox 6"/>
+          <p:cNvPr id="7" name="Oval 6"/>
+          <p:cNvSpPr/>
+          <p:nvPr/>
+        </p:nvSpPr>
+        <p:spPr>
+          <a:xfrm>
+            <a:off x="594360" y="1216152"/>
+            <a:ext cx="118872" cy="118872"/>
+          </a:xfrm>
+          <a:prstGeom prst="ellipse">
+            <a:avLst/>
+          </a:prstGeom>
+          <a:solidFill>
+            <a:srgbClr val="FF5F56"/>
+          </a:solidFill>
+          <a:ln>
+            <a:noFill/>
+          </a:ln>
+        </p:spPr>
+        <p:style>
+          <a:lnRef idx="1">
+            <a:schemeClr val="accent1"/>
+          </a:lnRef>
+          <a:fillRef idx="3">
+            <a:schemeClr val="accent1"/>
+          </a:fillRef>
+          <a:effectRef idx="2">
+            <a:schemeClr val="accent1"/>
+          </a:effectRef>
+          <a:fontRef idx="minor">
+            <a:schemeClr val="lt1"/>
+          </a:fontRef>
+        </p:style>
+        <p:txBody>
+          <a:bodyPr rtlCol="0" anchor="ctr"/>
+          <a:lstStyle/>
+          <a:p>
+            <a:pPr algn="ctr"/>
+          </a:p>
+        </p:txBody>
+      </p:sp>
+      <p:sp>
+        <p:nvSpPr>
+          <p:cNvPr id="8" name="Oval 7"/>
+          <p:cNvSpPr/>
+          <p:nvPr/>
+        </p:nvSpPr>
+        <p:spPr>
+          <a:xfrm>
+            <a:off x="777240" y="1216152"/>
+            <a:ext cx="118872" cy="118872"/>
+          </a:xfrm>
+          <a:prstGeom prst="ellipse">
+            <a:avLst/>
+          </a:prstGeom>
+          <a:solidFill>
+            <a:srgbClr val="FFBD2E"/>
+          </a:solidFill>
+          <a:ln>
+            <a:noFill/>
+          </a:ln>
+        </p:spPr>
+        <p:style>
+          <a:lnRef idx="1">
+            <a:schemeClr val="accent1"/>
+          </a:lnRef>
+          <a:fillRef idx="3">
+            <a:schemeClr val="accent1"/>
+          </a:fillRef>
+          <a:effectRef idx="2">
+            <a:schemeClr val="accent1"/>
+          </a:effectRef>
+          <a:fontRef idx="minor">
+            <a:schemeClr val="lt1"/>
+          </a:fontRef>
+        </p:style>
+        <p:txBody>
+          <a:bodyPr rtlCol="0" anchor="ctr"/>
+          <a:lstStyle/>
+          <a:p>
+            <a:pPr algn="ctr"/>
+          </a:p>
+        </p:txBody>
+      </p:sp>
+      <p:sp>
+        <p:nvSpPr>
+          <p:cNvPr id="9" name="Oval 8"/>
+          <p:cNvSpPr/>
+          <p:nvPr/>
+        </p:nvSpPr>
+        <p:spPr>
+          <a:xfrm>
+            <a:off x="960120" y="1216152"/>
+            <a:ext cx="118872" cy="118872"/>
+          </a:xfrm>
+          <a:prstGeom prst="ellipse">
+            <a:avLst/>
+          </a:prstGeom>
+          <a:solidFill>
+            <a:srgbClr val="27C93F"/>
+          </a:solidFill>
+          <a:ln>
+            <a:noFill/>
+          </a:ln>
+        </p:spPr>
+        <p:style>
+          <a:lnRef idx="1">
+            <a:schemeClr val="accent1"/>
+          </a:lnRef>
+          <a:fillRef idx="3">
+            <a:schemeClr val="accent1"/>
+          </a:fillRef>
+          <a:effectRef idx="2">
+            <a:schemeClr val="accent1"/>
+          </a:effectRef>
+          <a:fontRef idx="minor">
+            <a:schemeClr val="lt1"/>
+          </a:fontRef>
+        </p:style>
+        <p:txBody>
+          <a:bodyPr rtlCol="0" anchor="ctr"/>
+          <a:lstStyle/>
+          <a:p>
+            <a:pPr algn="ctr"/>
+          </a:p>
+        </p:txBody>
+      </p:sp>
+      <p:sp>
+        <p:nvSpPr>
+          <p:cNvPr id="10" name="TextBox 9"/>
           <p:cNvSpPr txBox="1"/>
           <p:nvPr/>
         </p:nvSpPr>
         <p:spPr>
           <a:xfrm>
-            <a:off x="640080" y="1280160"/>
-            <a:ext cx="10972800" cy="4206240"/>
+            <a:off x="1371600" y="1161288"/>
+            <a:ext cx="5486400" cy="274320"/>
+          </a:xfrm>
+          <a:prstGeom prst="rect">
+            <a:avLst/>
+          </a:prstGeom>
+          <a:noFill/>
+        </p:spPr>
+        <p:txBody>
+          <a:bodyPr wrap="square" lIns="45720" rIns="45720" tIns="18288" bIns="18288" anchor="ctr">
+            <a:spAutoFit/>
+          </a:bodyPr>
+          <a:lstStyle/>
+          <a:p>
+            <a:pPr algn="l"/>
+            <a:r>
+              <a:rPr sz="1000" b="0" i="0">
+                <a:solidFill>
+                  <a:srgbClr val="CBD0D8"/>
+                </a:solidFill>
+                <a:latin typeface="Calibri"/>
+              </a:rPr>
+              <a:t>  app.py  —  python</a:t>
+            </a:r>
+          </a:p>
+        </p:txBody>
+      </p:sp>
+      <p:sp>
+        <p:nvSpPr>
+          <p:cNvPr id="11" name="Rectangle 10"/>
+          <p:cNvSpPr/>
+          <p:nvPr/>
+        </p:nvSpPr>
+        <p:spPr>
+          <a:xfrm>
+            <a:off x="457200" y="1463040"/>
+            <a:ext cx="11247120" cy="4206240"/>
+          </a:xfrm>
+          <a:prstGeom prst="rect">
+            <a:avLst/>
+          </a:prstGeom>
+          <a:solidFill>
+            <a:srgbClr val="1E1E28"/>
+          </a:solidFill>
+          <a:ln w="19050">
+            <a:solidFill>
+              <a:srgbClr val="06A77D"/>
+            </a:solidFill>
+          </a:ln>
+        </p:spPr>
+        <p:style>
+          <a:lnRef idx="1">
+            <a:schemeClr val="accent1"/>
+          </a:lnRef>
+          <a:fillRef idx="3">
+            <a:schemeClr val="accent1"/>
+          </a:fillRef>
+          <a:effectRef idx="2">
+            <a:schemeClr val="accent1"/>
+          </a:effectRef>
+          <a:fontRef idx="minor">
+            <a:schemeClr val="lt1"/>
+          </a:fontRef>
+        </p:style>
+        <p:txBody>
+          <a:bodyPr rtlCol="0" anchor="ctr"/>
+          <a:lstStyle/>
+          <a:p>
+            <a:pPr algn="ctr"/>
+          </a:p>
+        </p:txBody>
+      </p:sp>
+      <p:sp>
+        <p:nvSpPr>
+          <p:cNvPr id="12" name="Rectangle 11"/>
+          <p:cNvSpPr/>
+          <p:nvPr/>
+        </p:nvSpPr>
+        <p:spPr>
+          <a:xfrm>
+            <a:off x="457200" y="1463040"/>
+            <a:ext cx="457200" cy="4206240"/>
+          </a:xfrm>
+          <a:prstGeom prst="rect">
+            <a:avLst/>
+          </a:prstGeom>
+          <a:solidFill>
+            <a:srgbClr val="24242E"/>
+          </a:solidFill>
+          <a:ln>
+            <a:noFill/>
+          </a:ln>
+        </p:spPr>
+        <p:style>
+          <a:lnRef idx="1">
+            <a:schemeClr val="accent1"/>
+          </a:lnRef>
+          <a:fillRef idx="3">
+            <a:schemeClr val="accent1"/>
+          </a:fillRef>
+          <a:effectRef idx="2">
+            <a:schemeClr val="accent1"/>
+          </a:effectRef>
+          <a:fontRef idx="minor">
+            <a:schemeClr val="lt1"/>
+          </a:fontRef>
+        </p:style>
+        <p:txBody>
+          <a:bodyPr rtlCol="0" anchor="ctr"/>
+          <a:lstStyle/>
+          <a:p>
+            <a:pPr algn="ctr"/>
+          </a:p>
+        </p:txBody>
+      </p:sp>
+      <p:sp>
+        <p:nvSpPr>
+          <p:cNvPr id="13" name="TextBox 12"/>
+          <p:cNvSpPr txBox="1"/>
+          <p:nvPr/>
+        </p:nvSpPr>
+        <p:spPr>
+          <a:xfrm>
+            <a:off x="1051560" y="1600200"/>
+            <a:ext cx="10607040" cy="4114800"/>
+          </a:xfrm>
+          <a:prstGeom prst="rect">
+            <a:avLst/>
+          </a:prstGeom>
+          <a:noFill/>
+        </p:spPr>
+        <p:txBody>
+          <a:bodyPr wrap="none">
+            <a:spAutoFit/>
+          </a:bodyPr>
+          <a:lstStyle/>
+          <a:p>
+            <a:pPr>
+              <a:lnSpc>
+                <a:spcPct val="115000"/>
+              </a:lnSpc>
+              <a:spcAft>
+                <a:spcPts val="0"/>
+              </a:spcAft>
+            </a:pPr>
+            <a:r>
+              <a:rPr sz="1300">
+                <a:solidFill>
+                  <a:srgbClr val="E5E5EC"/>
+                </a:solidFill>
+                <a:latin typeface="Consolas"/>
+              </a:rPr>
+              <a:t>import os</a:t>
+            </a:r>
+          </a:p>
+          <a:p>
+            <a:pPr>
+              <a:lnSpc>
+                <a:spcPct val="115000"/>
+              </a:lnSpc>
+              <a:spcAft>
+                <a:spcPts val="0"/>
+              </a:spcAft>
+            </a:pPr>
+            <a:r>
+              <a:rPr sz="1300">
+                <a:solidFill>
+                  <a:srgbClr val="E5E5EC"/>
+                </a:solidFill>
+                <a:latin typeface="Consolas"/>
+              </a:rPr>
+              <a:t>from flask import abort, send_from_directory</a:t>
+            </a:r>
+          </a:p>
+          <a:p>
+            <a:pPr>
+              <a:lnSpc>
+                <a:spcPct val="115000"/>
+              </a:lnSpc>
+              <a:spcAft>
+                <a:spcPts val="0"/>
+              </a:spcAft>
+            </a:pPr>
+            <a:r>
+              <a:rPr sz="1300">
+                <a:solidFill>
+                  <a:srgbClr val="E5E5EC"/>
+                </a:solidFill>
+                <a:latin typeface="Consolas"/>
+              </a:rPr>
+              <a:t> </a:t>
+            </a:r>
+          </a:p>
+          <a:p>
+            <a:pPr>
+              <a:lnSpc>
+                <a:spcPct val="115000"/>
+              </a:lnSpc>
+              <a:spcAft>
+                <a:spcPts val="0"/>
+              </a:spcAft>
+            </a:pPr>
+            <a:r>
+              <a:rPr sz="1300">
+                <a:solidFill>
+                  <a:srgbClr val="E5E5EC"/>
+                </a:solidFill>
+                <a:latin typeface="Consolas"/>
+              </a:rPr>
+              <a:t>UPLOAD_DIR = os.path.realpath("./uploads")</a:t>
+            </a:r>
+          </a:p>
+          <a:p>
+            <a:pPr>
+              <a:lnSpc>
+                <a:spcPct val="115000"/>
+              </a:lnSpc>
+              <a:spcAft>
+                <a:spcPts val="0"/>
+              </a:spcAft>
+            </a:pPr>
+            <a:r>
+              <a:rPr sz="1300">
+                <a:solidFill>
+                  <a:srgbClr val="E5E5EC"/>
+                </a:solidFill>
+                <a:latin typeface="Consolas"/>
+              </a:rPr>
+              <a:t>ALLOWED_EXTS = {".pdf", ".png", ".jpg"}</a:t>
+            </a:r>
+          </a:p>
+          <a:p>
+            <a:pPr>
+              <a:lnSpc>
+                <a:spcPct val="115000"/>
+              </a:lnSpc>
+              <a:spcAft>
+                <a:spcPts val="0"/>
+              </a:spcAft>
+            </a:pPr>
+            <a:r>
+              <a:rPr sz="1300">
+                <a:solidFill>
+                  <a:srgbClr val="E5E5EC"/>
+                </a:solidFill>
+                <a:latin typeface="Consolas"/>
+              </a:rPr>
+              <a:t> </a:t>
+            </a:r>
+          </a:p>
+          <a:p>
+            <a:pPr>
+              <a:lnSpc>
+                <a:spcPct val="115000"/>
+              </a:lnSpc>
+              <a:spcAft>
+                <a:spcPts val="0"/>
+              </a:spcAft>
+            </a:pPr>
+            <a:r>
+              <a:rPr sz="1300">
+                <a:solidFill>
+                  <a:srgbClr val="E5E5EC"/>
+                </a:solidFill>
+                <a:latin typeface="Consolas"/>
+              </a:rPr>
+              <a:t>@app.route("/download")</a:t>
+            </a:r>
+          </a:p>
+          <a:p>
+            <a:pPr>
+              <a:lnSpc>
+                <a:spcPct val="115000"/>
+              </a:lnSpc>
+              <a:spcAft>
+                <a:spcPts val="0"/>
+              </a:spcAft>
+            </a:pPr>
+            <a:r>
+              <a:rPr sz="1300">
+                <a:solidFill>
+                  <a:srgbClr val="E5E5EC"/>
+                </a:solidFill>
+                <a:latin typeface="Consolas"/>
+              </a:rPr>
+              <a:t>@login_required</a:t>
+            </a:r>
+          </a:p>
+          <a:p>
+            <a:pPr>
+              <a:lnSpc>
+                <a:spcPct val="115000"/>
+              </a:lnSpc>
+              <a:spcAft>
+                <a:spcPts val="0"/>
+              </a:spcAft>
+            </a:pPr>
+            <a:r>
+              <a:rPr sz="1300">
+                <a:solidFill>
+                  <a:srgbClr val="E5E5EC"/>
+                </a:solidFill>
+                <a:latin typeface="Consolas"/>
+              </a:rPr>
+              <a:t>def download():</a:t>
+            </a:r>
+          </a:p>
+          <a:p>
+            <a:pPr>
+              <a:lnSpc>
+                <a:spcPct val="115000"/>
+              </a:lnSpc>
+              <a:spcAft>
+                <a:spcPts val="0"/>
+              </a:spcAft>
+            </a:pPr>
+            <a:r>
+              <a:rPr sz="1300">
+                <a:solidFill>
+                  <a:srgbClr val="E5E5EC"/>
+                </a:solidFill>
+                <a:latin typeface="Consolas"/>
+              </a:rPr>
+              <a:t>    filename = request.args.get("file", "")</a:t>
+            </a:r>
+          </a:p>
+          <a:p>
+            <a:pPr>
+              <a:lnSpc>
+                <a:spcPct val="115000"/>
+              </a:lnSpc>
+              <a:spcAft>
+                <a:spcPts val="0"/>
+              </a:spcAft>
+            </a:pPr>
+            <a:r>
+              <a:rPr sz="1300">
+                <a:solidFill>
+                  <a:srgbClr val="E5E5EC"/>
+                </a:solidFill>
+                <a:latin typeface="Consolas"/>
+              </a:rPr>
+              <a:t>    # 1) Whitelist: niente separatori</a:t>
+            </a:r>
+          </a:p>
+          <a:p>
+            <a:pPr>
+              <a:lnSpc>
+                <a:spcPct val="115000"/>
+              </a:lnSpc>
+              <a:spcAft>
+                <a:spcPts val="0"/>
+              </a:spcAft>
+            </a:pPr>
+            <a:r>
+              <a:rPr sz="1300">
+                <a:solidFill>
+                  <a:srgbClr val="E5E5EC"/>
+                </a:solidFill>
+                <a:latin typeface="Consolas"/>
+              </a:rPr>
+              <a:t>    if "/" in filename or "\\" in filename or filename.startswith("."):</a:t>
+            </a:r>
+          </a:p>
+          <a:p>
+            <a:pPr>
+              <a:lnSpc>
+                <a:spcPct val="115000"/>
+              </a:lnSpc>
+              <a:spcAft>
+                <a:spcPts val="0"/>
+              </a:spcAft>
+            </a:pPr>
+            <a:r>
+              <a:rPr sz="1300">
+                <a:solidFill>
+                  <a:srgbClr val="E5E5EC"/>
+                </a:solidFill>
+                <a:latin typeface="Consolas"/>
+              </a:rPr>
+              <a:t>        abort(400)</a:t>
+            </a:r>
+          </a:p>
+          <a:p>
+            <a:pPr>
+              <a:lnSpc>
+                <a:spcPct val="115000"/>
+              </a:lnSpc>
+              <a:spcAft>
+                <a:spcPts val="0"/>
+              </a:spcAft>
+            </a:pPr>
+            <a:r>
+              <a:rPr sz="1300">
+                <a:solidFill>
+                  <a:srgbClr val="E5E5EC"/>
+                </a:solidFill>
+                <a:latin typeface="Consolas"/>
+              </a:rPr>
+              <a:t>    # 2) Whitelist estensione</a:t>
+            </a:r>
+          </a:p>
+          <a:p>
+            <a:pPr>
+              <a:lnSpc>
+                <a:spcPct val="115000"/>
+              </a:lnSpc>
+              <a:spcAft>
+                <a:spcPts val="0"/>
+              </a:spcAft>
+            </a:pPr>
+            <a:r>
+              <a:rPr sz="1300">
+                <a:solidFill>
+                  <a:srgbClr val="E5E5EC"/>
+                </a:solidFill>
+                <a:latin typeface="Consolas"/>
+              </a:rPr>
+              <a:t>    if os.path.splitext(filename)[1].lower() not in ALLOWED_EXTS:</a:t>
+            </a:r>
+          </a:p>
+          <a:p>
+            <a:pPr>
+              <a:lnSpc>
+                <a:spcPct val="115000"/>
+              </a:lnSpc>
+              <a:spcAft>
+                <a:spcPts val="0"/>
+              </a:spcAft>
+            </a:pPr>
+            <a:r>
+              <a:rPr sz="1300">
+                <a:solidFill>
+                  <a:srgbClr val="E5E5EC"/>
+                </a:solidFill>
+                <a:latin typeface="Consolas"/>
+              </a:rPr>
+              <a:t>        abort(400)</a:t>
+            </a:r>
+          </a:p>
+          <a:p>
+            <a:pPr>
+              <a:lnSpc>
+                <a:spcPct val="115000"/>
+              </a:lnSpc>
+              <a:spcAft>
+                <a:spcPts val="0"/>
+              </a:spcAft>
+            </a:pPr>
+            <a:r>
+              <a:rPr sz="1300">
+                <a:solidFill>
+                  <a:srgbClr val="E5E5EC"/>
+                </a:solidFill>
+                <a:latin typeface="Consolas"/>
+              </a:rPr>
+              <a:t>    # 3) realpath + startswith</a:t>
+            </a:r>
+          </a:p>
+          <a:p>
+            <a:pPr>
+              <a:lnSpc>
+                <a:spcPct val="115000"/>
+              </a:lnSpc>
+              <a:spcAft>
+                <a:spcPts val="0"/>
+              </a:spcAft>
+            </a:pPr>
+            <a:r>
+              <a:rPr sz="1300">
+                <a:solidFill>
+                  <a:srgbClr val="E5E5EC"/>
+                </a:solidFill>
+                <a:latin typeface="Consolas"/>
+              </a:rPr>
+              <a:t>    full = os.path.realpath(os.path.join(UPLOAD_DIR, filename))</a:t>
+            </a:r>
+          </a:p>
+          <a:p>
+            <a:pPr>
+              <a:lnSpc>
+                <a:spcPct val="115000"/>
+              </a:lnSpc>
+              <a:spcAft>
+                <a:spcPts val="0"/>
+              </a:spcAft>
+            </a:pPr>
+            <a:r>
+              <a:rPr sz="1300">
+                <a:solidFill>
+                  <a:srgbClr val="E5E5EC"/>
+                </a:solidFill>
+                <a:latin typeface="Consolas"/>
+              </a:rPr>
+              <a:t>    if not full.startswith(UPLOAD_DIR + os.sep):</a:t>
+            </a:r>
+          </a:p>
+          <a:p>
+            <a:pPr>
+              <a:lnSpc>
+                <a:spcPct val="115000"/>
+              </a:lnSpc>
+              <a:spcAft>
+                <a:spcPts val="0"/>
+              </a:spcAft>
+            </a:pPr>
+            <a:r>
+              <a:rPr sz="1300">
+                <a:solidFill>
+                  <a:srgbClr val="E5E5EC"/>
+                </a:solidFill>
+                <a:latin typeface="Consolas"/>
+              </a:rPr>
+              <a:t>        abort(403)</a:t>
+            </a:r>
+          </a:p>
+          <a:p>
+            <a:pPr>
+              <a:lnSpc>
+                <a:spcPct val="115000"/>
+              </a:lnSpc>
+              <a:spcAft>
+                <a:spcPts val="0"/>
+              </a:spcAft>
+            </a:pPr>
+            <a:r>
+              <a:rPr sz="1300">
+                <a:solidFill>
+                  <a:srgbClr val="E5E5EC"/>
+                </a:solidFill>
+                <a:latin typeface="Consolas"/>
+              </a:rPr>
+              <a:t>    return send_from_directory(UPLOAD_DIR, filename, as_attachment=True)</a:t>
+            </a:r>
+          </a:p>
+        </p:txBody>
+      </p:sp>
+      <p:sp>
+        <p:nvSpPr>
+          <p:cNvPr id="14" name="TextBox 13"/>
+          <p:cNvSpPr txBox="1"/>
+          <p:nvPr/>
+        </p:nvSpPr>
+        <p:spPr>
+          <a:xfrm>
+            <a:off x="502920" y="1600200"/>
+            <a:ext cx="365760" cy="4114800"/>
+          </a:xfrm>
+          <a:prstGeom prst="rect">
+            <a:avLst/>
+          </a:prstGeom>
+          <a:noFill/>
+        </p:spPr>
+        <p:txBody>
+          <a:bodyPr wrap="none">
+            <a:spAutoFit/>
+          </a:bodyPr>
+          <a:lstStyle/>
+          <a:p>
+            <a:pPr algn="r">
+              <a:lnSpc>
+                <a:spcPct val="115000"/>
+              </a:lnSpc>
+              <a:spcAft>
+                <a:spcPts val="0"/>
+              </a:spcAft>
+            </a:pPr>
+            <a:r>
+              <a:rPr sz="1100">
+                <a:solidFill>
+                  <a:srgbClr val="6B7280"/>
+                </a:solidFill>
+                <a:latin typeface="Consolas"/>
+              </a:rPr>
+              <a:t>1</a:t>
+            </a:r>
+          </a:p>
+          <a:p>
+            <a:pPr algn="r">
+              <a:lnSpc>
+                <a:spcPct val="115000"/>
+              </a:lnSpc>
+              <a:spcAft>
+                <a:spcPts val="0"/>
+              </a:spcAft>
+            </a:pPr>
+            <a:r>
+              <a:rPr sz="1100">
+                <a:solidFill>
+                  <a:srgbClr val="6B7280"/>
+                </a:solidFill>
+                <a:latin typeface="Consolas"/>
+              </a:rPr>
+              <a:t>2</a:t>
+            </a:r>
+          </a:p>
+          <a:p>
+            <a:pPr algn="r">
+              <a:lnSpc>
+                <a:spcPct val="115000"/>
+              </a:lnSpc>
+              <a:spcAft>
+                <a:spcPts val="0"/>
+              </a:spcAft>
+            </a:pPr>
+            <a:r>
+              <a:rPr sz="1100">
+                <a:solidFill>
+                  <a:srgbClr val="6B7280"/>
+                </a:solidFill>
+                <a:latin typeface="Consolas"/>
+              </a:rPr>
+              <a:t>3</a:t>
+            </a:r>
+          </a:p>
+          <a:p>
+            <a:pPr algn="r">
+              <a:lnSpc>
+                <a:spcPct val="115000"/>
+              </a:lnSpc>
+              <a:spcAft>
+                <a:spcPts val="0"/>
+              </a:spcAft>
+            </a:pPr>
+            <a:r>
+              <a:rPr sz="1100">
+                <a:solidFill>
+                  <a:srgbClr val="6B7280"/>
+                </a:solidFill>
+                <a:latin typeface="Consolas"/>
+              </a:rPr>
+              <a:t>4</a:t>
+            </a:r>
+          </a:p>
+          <a:p>
+            <a:pPr algn="r">
+              <a:lnSpc>
+                <a:spcPct val="115000"/>
+              </a:lnSpc>
+              <a:spcAft>
+                <a:spcPts val="0"/>
+              </a:spcAft>
+            </a:pPr>
+            <a:r>
+              <a:rPr sz="1100">
+                <a:solidFill>
+                  <a:srgbClr val="6B7280"/>
+                </a:solidFill>
+                <a:latin typeface="Consolas"/>
+              </a:rPr>
+              <a:t>5</a:t>
+            </a:r>
+          </a:p>
+          <a:p>
+            <a:pPr algn="r">
+              <a:lnSpc>
+                <a:spcPct val="115000"/>
+              </a:lnSpc>
+              <a:spcAft>
+                <a:spcPts val="0"/>
+              </a:spcAft>
+            </a:pPr>
+            <a:r>
+              <a:rPr sz="1100">
+                <a:solidFill>
+                  <a:srgbClr val="6B7280"/>
+                </a:solidFill>
+                <a:latin typeface="Consolas"/>
+              </a:rPr>
+              <a:t>6</a:t>
+            </a:r>
+          </a:p>
+          <a:p>
+            <a:pPr algn="r">
+              <a:lnSpc>
+                <a:spcPct val="115000"/>
+              </a:lnSpc>
+              <a:spcAft>
+                <a:spcPts val="0"/>
+              </a:spcAft>
+            </a:pPr>
+            <a:r>
+              <a:rPr sz="1100">
+                <a:solidFill>
+                  <a:srgbClr val="6B7280"/>
+                </a:solidFill>
+                <a:latin typeface="Consolas"/>
+              </a:rPr>
+              <a:t>7</a:t>
+            </a:r>
+          </a:p>
+          <a:p>
+            <a:pPr algn="r">
+              <a:lnSpc>
+                <a:spcPct val="115000"/>
+              </a:lnSpc>
+              <a:spcAft>
+                <a:spcPts val="0"/>
+              </a:spcAft>
+            </a:pPr>
+            <a:r>
+              <a:rPr sz="1100">
+                <a:solidFill>
+                  <a:srgbClr val="6B7280"/>
+                </a:solidFill>
+                <a:latin typeface="Consolas"/>
+              </a:rPr>
+              <a:t>8</a:t>
+            </a:r>
+          </a:p>
+          <a:p>
+            <a:pPr algn="r">
+              <a:lnSpc>
+                <a:spcPct val="115000"/>
+              </a:lnSpc>
+              <a:spcAft>
+                <a:spcPts val="0"/>
+              </a:spcAft>
+            </a:pPr>
+            <a:r>
+              <a:rPr sz="1100">
+                <a:solidFill>
+                  <a:srgbClr val="6B7280"/>
+                </a:solidFill>
+                <a:latin typeface="Consolas"/>
+              </a:rPr>
+              <a:t>9</a:t>
+            </a:r>
+          </a:p>
+          <a:p>
+            <a:pPr algn="r">
+              <a:lnSpc>
+                <a:spcPct val="115000"/>
+              </a:lnSpc>
+              <a:spcAft>
+                <a:spcPts val="0"/>
+              </a:spcAft>
+            </a:pPr>
+            <a:r>
+              <a:rPr sz="1100">
+                <a:solidFill>
+                  <a:srgbClr val="6B7280"/>
+                </a:solidFill>
+                <a:latin typeface="Consolas"/>
+              </a:rPr>
+              <a:t>10</a:t>
+            </a:r>
+          </a:p>
+          <a:p>
+            <a:pPr algn="r">
+              <a:lnSpc>
+                <a:spcPct val="115000"/>
+              </a:lnSpc>
+              <a:spcAft>
+                <a:spcPts val="0"/>
+              </a:spcAft>
+            </a:pPr>
+            <a:r>
+              <a:rPr sz="1100">
+                <a:solidFill>
+                  <a:srgbClr val="6B7280"/>
+                </a:solidFill>
+                <a:latin typeface="Consolas"/>
+              </a:rPr>
+              <a:t>11</a:t>
+            </a:r>
+          </a:p>
+          <a:p>
+            <a:pPr algn="r">
+              <a:lnSpc>
+                <a:spcPct val="115000"/>
+              </a:lnSpc>
+              <a:spcAft>
+                <a:spcPts val="0"/>
+              </a:spcAft>
+            </a:pPr>
+            <a:r>
+              <a:rPr sz="1100">
+                <a:solidFill>
+                  <a:srgbClr val="6B7280"/>
+                </a:solidFill>
+                <a:latin typeface="Consolas"/>
+              </a:rPr>
+              <a:t>12</a:t>
+            </a:r>
+          </a:p>
+          <a:p>
+            <a:pPr algn="r">
+              <a:lnSpc>
+                <a:spcPct val="115000"/>
+              </a:lnSpc>
+              <a:spcAft>
+                <a:spcPts val="0"/>
+              </a:spcAft>
+            </a:pPr>
+            <a:r>
+              <a:rPr sz="1100">
+                <a:solidFill>
+                  <a:srgbClr val="6B7280"/>
+                </a:solidFill>
+                <a:latin typeface="Consolas"/>
+              </a:rPr>
+              <a:t>13</a:t>
+            </a:r>
+          </a:p>
+          <a:p>
+            <a:pPr algn="r">
+              <a:lnSpc>
+                <a:spcPct val="115000"/>
+              </a:lnSpc>
+              <a:spcAft>
+                <a:spcPts val="0"/>
+              </a:spcAft>
+            </a:pPr>
+            <a:r>
+              <a:rPr sz="1100">
+                <a:solidFill>
+                  <a:srgbClr val="6B7280"/>
+                </a:solidFill>
+                <a:latin typeface="Consolas"/>
+              </a:rPr>
+              <a:t>14</a:t>
+            </a:r>
+          </a:p>
+          <a:p>
+            <a:pPr algn="r">
+              <a:lnSpc>
+                <a:spcPct val="115000"/>
+              </a:lnSpc>
+              <a:spcAft>
+                <a:spcPts val="0"/>
+              </a:spcAft>
+            </a:pPr>
+            <a:r>
+              <a:rPr sz="1100">
+                <a:solidFill>
+                  <a:srgbClr val="6B7280"/>
+                </a:solidFill>
+                <a:latin typeface="Consolas"/>
+              </a:rPr>
+              <a:t>15</a:t>
+            </a:r>
+          </a:p>
+          <a:p>
+            <a:pPr algn="r">
+              <a:lnSpc>
+                <a:spcPct val="115000"/>
+              </a:lnSpc>
+              <a:spcAft>
+                <a:spcPts val="0"/>
+              </a:spcAft>
+            </a:pPr>
+            <a:r>
+              <a:rPr sz="1100">
+                <a:solidFill>
+                  <a:srgbClr val="6B7280"/>
+                </a:solidFill>
+                <a:latin typeface="Consolas"/>
+              </a:rPr>
+              <a:t>16</a:t>
+            </a:r>
+          </a:p>
+          <a:p>
+            <a:pPr algn="r">
+              <a:lnSpc>
+                <a:spcPct val="115000"/>
+              </a:lnSpc>
+              <a:spcAft>
+                <a:spcPts val="0"/>
+              </a:spcAft>
+            </a:pPr>
+            <a:r>
+              <a:rPr sz="1100">
+                <a:solidFill>
+                  <a:srgbClr val="6B7280"/>
+                </a:solidFill>
+                <a:latin typeface="Consolas"/>
+              </a:rPr>
+              <a:t>17</a:t>
+            </a:r>
+          </a:p>
+          <a:p>
+            <a:pPr algn="r">
+              <a:lnSpc>
+                <a:spcPct val="115000"/>
+              </a:lnSpc>
+              <a:spcAft>
+                <a:spcPts val="0"/>
+              </a:spcAft>
+            </a:pPr>
+            <a:r>
+              <a:rPr sz="1100">
+                <a:solidFill>
+                  <a:srgbClr val="6B7280"/>
+                </a:solidFill>
+                <a:latin typeface="Consolas"/>
+              </a:rPr>
+              <a:t>18</a:t>
+            </a:r>
+          </a:p>
+          <a:p>
+            <a:pPr algn="r">
+              <a:lnSpc>
+                <a:spcPct val="115000"/>
+              </a:lnSpc>
+              <a:spcAft>
+                <a:spcPts val="0"/>
+              </a:spcAft>
+            </a:pPr>
+            <a:r>
+              <a:rPr sz="1100">
+                <a:solidFill>
+                  <a:srgbClr val="6B7280"/>
+                </a:solidFill>
+                <a:latin typeface="Consolas"/>
+              </a:rPr>
+              <a:t>19</a:t>
+            </a:r>
+          </a:p>
+          <a:p>
+            <a:pPr algn="r">
+              <a:lnSpc>
+                <a:spcPct val="115000"/>
+              </a:lnSpc>
+              <a:spcAft>
+                <a:spcPts val="0"/>
+              </a:spcAft>
+            </a:pPr>
+            <a:r>
+              <a:rPr sz="1100">
+                <a:solidFill>
+                  <a:srgbClr val="6B7280"/>
+                </a:solidFill>
+                <a:latin typeface="Consolas"/>
+              </a:rPr>
+              <a:t>20</a:t>
+            </a:r>
+          </a:p>
+          <a:p>
+            <a:pPr algn="r">
+              <a:lnSpc>
+                <a:spcPct val="115000"/>
+              </a:lnSpc>
+              <a:spcAft>
+                <a:spcPts val="0"/>
+              </a:spcAft>
+            </a:pPr>
+            <a:r>
+              <a:rPr sz="1100">
+                <a:solidFill>
+                  <a:srgbClr val="6B7280"/>
+                </a:solidFill>
+                <a:latin typeface="Consolas"/>
+              </a:rPr>
+              <a:t>21</a:t>
+            </a:r>
+          </a:p>
+        </p:txBody>
+      </p:sp>
+      <p:sp>
+        <p:nvSpPr>
+          <p:cNvPr id="15" name="TextBox 14"/>
+          <p:cNvSpPr txBox="1"/>
+          <p:nvPr/>
+        </p:nvSpPr>
+        <p:spPr>
+          <a:xfrm>
+            <a:off x="457200" y="5852160"/>
+            <a:ext cx="11247120" cy="502920"/>
           </a:xfrm>
           <a:prstGeom prst="rect">
             <a:avLst/>
@@ -9516,211 +12245,20 @@
           <a:p>
             <a:pPr algn="l"/>
             <a:r>
-              <a:rPr sz="1400" b="0" i="0">
-                <a:solidFill>
-                  <a:srgbClr val="1A1A2E"/>
-                </a:solidFill>
-                <a:latin typeface="Consolas"/>
-              </a:rPr>
-              <a:t>@app.route("/download")</a:t>
-            </a:r>
-          </a:p>
-          <a:p>
-            <a:pPr algn="l"/>
-            <a:r>
-              <a:rPr sz="1400" b="0" i="0">
-                <a:solidFill>
-                  <a:srgbClr val="1A1A2E"/>
-                </a:solidFill>
-                <a:latin typeface="Consolas"/>
-              </a:rPr>
-              <a:t>def download():</a:t>
-            </a:r>
-          </a:p>
-          <a:p>
-            <a:pPr algn="l"/>
-            <a:r>
-              <a:rPr sz="1400" b="0" i="0">
-                <a:solidFill>
-                  <a:srgbClr val="1A1A2E"/>
-                </a:solidFill>
-                <a:latin typeface="Consolas"/>
-              </a:rPr>
-              <a:t>    filename = request.args.get("file")</a:t>
-            </a:r>
-          </a:p>
-          <a:p>
-            <a:pPr algn="l"/>
-            <a:r>
-              <a:rPr sz="1400" b="0" i="0">
-                <a:solidFill>
-                  <a:srgbClr val="1A1A2E"/>
-                </a:solidFill>
-                <a:latin typeface="Consolas"/>
-              </a:rPr>
-              <a:t>    return send_file(f"./uploads/{filename}")</a:t>
-            </a:r>
-          </a:p>
-          <a:p>
-            <a:pPr algn="l"/>
-            <a:r>
-              <a:rPr sz="1400" b="0" i="0">
-                <a:solidFill>
-                  <a:srgbClr val="1A1A2E"/>
-                </a:solidFill>
-                <a:latin typeface="Consolas"/>
-              </a:rPr>
-              <a:t/>
-            </a:r>
-          </a:p>
-          <a:p>
-            <a:pPr algn="l"/>
-            <a:r>
-              <a:rPr sz="1400" b="0" i="0">
-                <a:solidFill>
-                  <a:srgbClr val="1A1A2E"/>
-                </a:solidFill>
-                <a:latin typeface="Consolas"/>
-              </a:rPr>
-              <a:t># Attacco: GET /download?file=../etc/passwd</a:t>
-            </a:r>
-          </a:p>
-          <a:p>
-            <a:pPr algn="l"/>
-            <a:r>
-              <a:rPr sz="1400" b="0" i="0">
-                <a:solidFill>
-                  <a:srgbClr val="1A1A2E"/>
-                </a:solidFill>
-                <a:latin typeface="Consolas"/>
-              </a:rPr>
-              <a:t># Path costruito: ./uploads/../etc/passwd</a:t>
-            </a:r>
-          </a:p>
-          <a:p>
-            <a:pPr algn="l"/>
-            <a:r>
-              <a:rPr sz="1400" b="0" i="0">
-                <a:solidFill>
-                  <a:srgbClr val="1A1A2E"/>
-                </a:solidFill>
-                <a:latin typeface="Consolas"/>
-              </a:rPr>
-              <a:t># Il sistema operativo lo risolve a: /etc/passwd</a:t>
-            </a:r>
-          </a:p>
-          <a:p>
-            <a:pPr algn="l"/>
-            <a:r>
-              <a:rPr sz="1400" b="0" i="0">
-                <a:solidFill>
-                  <a:srgbClr val="1A1A2E"/>
-                </a:solidFill>
-                <a:latin typeface="Consolas"/>
-              </a:rPr>
-              <a:t># → L'attaccante legge file di sistema</a:t>
-            </a:r>
-          </a:p>
-          <a:p>
-            <a:pPr algn="l"/>
-            <a:r>
-              <a:rPr sz="1400" b="0" i="0">
-                <a:solidFill>
-                  <a:srgbClr val="1A1A2E"/>
-                </a:solidFill>
-                <a:latin typeface="Consolas"/>
-              </a:rPr>
-              <a:t/>
-            </a:r>
-          </a:p>
-          <a:p>
-            <a:pPr algn="l"/>
-            <a:r>
-              <a:rPr sz="1400" b="0" i="0">
-                <a:solidFill>
-                  <a:srgbClr val="1A1A2E"/>
-                </a:solidFill>
-                <a:latin typeface="Consolas"/>
-              </a:rPr>
-              <a:t># Varianti:</a:t>
-            </a:r>
-          </a:p>
-          <a:p>
-            <a:pPr algn="l"/>
-            <a:r>
-              <a:rPr sz="1400" b="0" i="0">
-                <a:solidFill>
-                  <a:srgbClr val="1A1A2E"/>
-                </a:solidFill>
-                <a:latin typeface="Consolas"/>
-              </a:rPr>
-              <a:t>#   ../../etc/passwd       (più livelli)</a:t>
-            </a:r>
-          </a:p>
-          <a:p>
-            <a:pPr algn="l"/>
-            <a:r>
-              <a:rPr sz="1400" b="0" i="0">
-                <a:solidFill>
-                  <a:srgbClr val="1A1A2E"/>
-                </a:solidFill>
-                <a:latin typeface="Consolas"/>
-              </a:rPr>
-              <a:t>#   ....//....//etc/passwd (bypass filtro ../)</a:t>
-            </a:r>
-          </a:p>
-          <a:p>
-            <a:pPr algn="l"/>
-            <a:r>
-              <a:rPr sz="1400" b="0" i="0">
-                <a:solidFill>
-                  <a:srgbClr val="1A1A2E"/>
-                </a:solidFill>
-                <a:latin typeface="Consolas"/>
-              </a:rPr>
-              <a:t>#   ..%2f..%2fetc%2fpasswd (URL encoded)</a:t>
-            </a:r>
-          </a:p>
-        </p:txBody>
-      </p:sp>
-      <p:sp>
-        <p:nvSpPr>
-          <p:cNvPr id="8" name="TextBox 7"/>
-          <p:cNvSpPr txBox="1"/>
-          <p:nvPr/>
-        </p:nvSpPr>
-        <p:spPr>
-          <a:xfrm>
-            <a:off x="457200" y="5852160"/>
-            <a:ext cx="11247120" cy="457200"/>
-          </a:xfrm>
-          <a:prstGeom prst="rect">
-            <a:avLst/>
-          </a:prstGeom>
-          <a:noFill/>
-        </p:spPr>
-        <p:txBody>
-          <a:bodyPr wrap="square" lIns="45720" rIns="45720" tIns="18288" bIns="18288" anchor="t">
-            <a:spAutoFit/>
-          </a:bodyPr>
-          <a:lstStyle/>
-          <a:p>
-            <a:pPr algn="l"/>
-            <a:r>
               <a:rPr sz="1400" b="1" i="1">
                 <a:solidFill>
-                  <a:srgbClr val="E63946"/>
-                </a:solidFill>
-                <a:latin typeface="Calibri"/>
-              </a:rPr>
-              <a:t>⚠  Vale anche per /var/myapp/secrets, /home/user/.ssh/id_rsa, ...</a:t>
+                  <a:srgbClr val="06A77D"/>
+                </a:solidFill>
+                <a:latin typeface="Calibri"/>
+              </a:rPr>
+              <a:t>✓  Quattro righe di controllo, tre attacchi neutralizzati</a:t>
             </a:r>
           </a:p>
         </p:txBody>
       </p:sp>
       <p:cxnSp>
         <p:nvCxnSpPr>
-          <p:cNvPr id="9" name="Connector 8"/>
+          <p:cNvPr id="16" name="Connector 15"/>
           <p:cNvCxnSpPr/>
           <p:nvPr/>
         </p:nvCxnSpPr>
@@ -9755,14 +12293,14 @@
       </p:cxnSp>
       <p:sp>
         <p:nvSpPr>
-          <p:cNvPr id="10" name="TextBox 9"/>
+          <p:cNvPr id="17" name="TextBox 16"/>
           <p:cNvSpPr txBox="1"/>
           <p:nvPr/>
         </p:nvSpPr>
         <p:spPr>
           <a:xfrm>
             <a:off x="457200" y="6473952"/>
-            <a:ext cx="7315200" cy="320040"/>
+            <a:ext cx="7315200" cy="292608"/>
           </a:xfrm>
           <a:prstGeom prst="rect">
             <a:avLst/>
@@ -9783,21 +12321,21 @@
                 </a:solidFill>
                 <a:latin typeface="Calibri"/>
               </a:rPr>
-              <a:t>Secure Coding · Corso IFTS STEM · A. Manneschi</a:t>
-            </a:r>
-          </a:p>
-        </p:txBody>
-      </p:sp>
-      <p:sp>
-        <p:nvSpPr>
-          <p:cNvPr id="11" name="TextBox 10"/>
+              <a:t>Secure Coding · Corso IFTS STEM · A. Manneschi · 2024/2025</a:t>
+            </a:r>
+          </a:p>
+        </p:txBody>
+      </p:sp>
+      <p:sp>
+        <p:nvSpPr>
+          <p:cNvPr id="18" name="TextBox 17"/>
           <p:cNvSpPr txBox="1"/>
           <p:nvPr/>
         </p:nvSpPr>
         <p:spPr>
           <a:xfrm>
             <a:off x="10515600" y="6473952"/>
-            <a:ext cx="1188720" cy="320040"/>
+            <a:ext cx="1188720" cy="292608"/>
           </a:xfrm>
           <a:prstGeom prst="rect">
             <a:avLst/>

--- a/slide/L6_validation_supply.pptx
+++ b/slide/L6_validation_supply.pptx
@@ -19,6 +19,7 @@
     <p:sldId id="267" r:id="rId18"/>
     <p:sldId id="268" r:id="rId19"/>
     <p:sldId id="269" r:id="rId20"/>
+    <p:sldId id="270" r:id="rId21"/>
   </p:sldIdLst>
   <p:sldSz cx="12191695" cy="6858000" type="screen4x3"/>
   <p:notesSz cx="6858000" cy="9144000"/>
@@ -3966,7 +3967,7 @@
                 </a:solidFill>
                 <a:latin typeface="Calibri"/>
               </a:rPr>
-              <a:t>L6  ·  10/14</a:t>
+              <a:t>L6  ·  10/15</a:t>
             </a:r>
           </a:p>
         </p:txBody>
@@ -4414,7 +4415,7 @@
                 </a:solidFill>
                 <a:latin typeface="Calibri"/>
               </a:rPr>
-              <a:t>L6  ·  11/14</a:t>
+              <a:t>L6  ·  11/15</a:t>
             </a:r>
           </a:p>
         </p:txBody>
@@ -4674,7 +4675,7 @@
                 </a:solidFill>
                 <a:latin typeface="Calibri"/>
               </a:rPr>
-              <a:t>L6  ·  12/14</a:t>
+              <a:t>L6  ·  12/15</a:t>
             </a:r>
           </a:p>
         </p:txBody>
@@ -4770,51 +4771,43 @@
                 </a:solidFill>
                 <a:latin typeface="Calibri"/>
               </a:rPr>
-              <a:t>📌  Cosa portare a casa</a:t>
-            </a:r>
-          </a:p>
-        </p:txBody>
-      </p:sp>
-      <p:sp>
-        <p:nvSpPr>
-          <p:cNvPr id="4" name="Oval 3"/>
-          <p:cNvSpPr/>
-          <p:nvPr/>
-        </p:nvSpPr>
-        <p:spPr>
-          <a:xfrm>
-            <a:off x="914400" y="1440180"/>
-            <a:ext cx="777240" cy="777240"/>
-          </a:xfrm>
-          <a:prstGeom prst="ellipse">
-            <a:avLst/>
-          </a:prstGeom>
-          <a:solidFill>
-            <a:srgbClr val="00A0B0"/>
-          </a:solidFill>
-          <a:ln>
-            <a:noFill/>
-          </a:ln>
-        </p:spPr>
-        <p:style>
-          <a:lnRef idx="1">
-            <a:schemeClr val="accent1"/>
-          </a:lnRef>
-          <a:fillRef idx="3">
-            <a:schemeClr val="accent1"/>
-          </a:fillRef>
-          <a:effectRef idx="2">
-            <a:schemeClr val="accent1"/>
-          </a:effectRef>
-          <a:fontRef idx="minor">
-            <a:schemeClr val="lt1"/>
-          </a:fontRef>
-        </p:style>
-        <p:txBody>
-          <a:bodyPr rtlCol="0" anchor="ctr"/>
-          <a:lstStyle/>
-          <a:p>
-            <a:pPr algn="ctr"/>
+              <a:t>📜  SBOM e Cyber Resilience Act (dicembre 2027)</a:t>
+            </a:r>
+          </a:p>
+        </p:txBody>
+      </p:sp>
+      <p:sp>
+        <p:nvSpPr>
+          <p:cNvPr id="4" name="TextBox 3"/>
+          <p:cNvSpPr txBox="1"/>
+          <p:nvPr/>
+        </p:nvSpPr>
+        <p:spPr>
+          <a:xfrm>
+            <a:off x="457200" y="914400"/>
+            <a:ext cx="11247120" cy="457200"/>
+          </a:xfrm>
+          <a:prstGeom prst="rect">
+            <a:avLst/>
+          </a:prstGeom>
+          <a:noFill/>
+        </p:spPr>
+        <p:txBody>
+          <a:bodyPr wrap="square" lIns="45720" rIns="45720" tIns="18288" bIns="18288" anchor="t">
+            <a:spAutoFit/>
+          </a:bodyPr>
+          <a:lstStyle/>
+          <a:p>
+            <a:pPr algn="l"/>
+            <a:r>
+              <a:rPr sz="1500" b="0" i="1">
+                <a:solidFill>
+                  <a:srgbClr val="00A0B0"/>
+                </a:solidFill>
+                <a:latin typeface="Calibri"/>
+              </a:rPr>
+              <a:t>Iniziate a familiarizzare con pip-audit e cyclonedx-bom ADESSO</a:t>
+            </a:r>
           </a:p>
         </p:txBody>
       </p:sp>
@@ -4826,8 +4819,8 @@
         </p:nvSpPr>
         <p:spPr>
           <a:xfrm>
-            <a:off x="914400" y="1440180"/>
-            <a:ext cx="777240" cy="777240"/>
+            <a:off x="640080" y="1554480"/>
+            <a:ext cx="10972800" cy="5029200"/>
           </a:xfrm>
           <a:prstGeom prst="rect">
             <a:avLst/>
@@ -4835,749 +4828,323 @@
           <a:noFill/>
         </p:spPr>
         <p:txBody>
-          <a:bodyPr wrap="square" lIns="45720" rIns="45720" tIns="18288" bIns="18288" anchor="ctr">
+          <a:bodyPr wrap="square">
             <a:spAutoFit/>
           </a:bodyPr>
           <a:lstStyle/>
           <a:p>
-            <a:pPr algn="ctr"/>
-            <a:r>
-              <a:rPr sz="2800" b="1" i="0">
-                <a:solidFill>
-                  <a:srgbClr val="FFFFFF"/>
-                </a:solidFill>
-                <a:latin typeface="Calibri"/>
-              </a:rPr>
-              <a:t>1</a:t>
-            </a:r>
-          </a:p>
-        </p:txBody>
-      </p:sp>
-      <p:sp>
-        <p:nvSpPr>
-          <p:cNvPr id="6" name="Rounded Rectangle 5"/>
-          <p:cNvSpPr/>
-          <p:nvPr/>
-        </p:nvSpPr>
-        <p:spPr>
-          <a:xfrm>
-            <a:off x="2011680" y="1440180"/>
-            <a:ext cx="9144000" cy="777240"/>
-          </a:xfrm>
-          <a:prstGeom prst="roundRect">
-            <a:avLst>
-              <a:gd name="adj" fmla="val 8000"/>
-            </a:avLst>
-          </a:prstGeom>
-          <a:solidFill>
-            <a:srgbClr val="FBFBFD"/>
-          </a:solidFill>
-          <a:ln w="19050">
-            <a:solidFill>
-              <a:srgbClr val="00A0B0"/>
-            </a:solidFill>
-          </a:ln>
-        </p:spPr>
-        <p:style>
-          <a:lnRef idx="1">
-            <a:schemeClr val="accent1"/>
-          </a:lnRef>
-          <a:fillRef idx="3">
-            <a:schemeClr val="accent1"/>
-          </a:fillRef>
-          <a:effectRef idx="2">
-            <a:schemeClr val="accent1"/>
-          </a:effectRef>
-          <a:fontRef idx="minor">
-            <a:schemeClr val="lt1"/>
-          </a:fontRef>
-        </p:style>
-        <p:txBody>
-          <a:bodyPr rtlCol="0" anchor="ctr"/>
-          <a:lstStyle/>
-          <a:p>
-            <a:pPr algn="ctr"/>
-          </a:p>
-        </p:txBody>
-      </p:sp>
-      <p:sp>
-        <p:nvSpPr>
-          <p:cNvPr id="7" name="TextBox 6"/>
-          <p:cNvSpPr txBox="1"/>
-          <p:nvPr/>
-        </p:nvSpPr>
-        <p:spPr>
-          <a:xfrm>
-            <a:off x="2286000" y="1440180"/>
-            <a:ext cx="8686800" cy="777240"/>
-          </a:xfrm>
-          <a:prstGeom prst="rect">
-            <a:avLst/>
-          </a:prstGeom>
-          <a:noFill/>
-        </p:spPr>
-        <p:txBody>
-          <a:bodyPr wrap="square" lIns="45720" rIns="45720" tIns="18288" bIns="18288" anchor="ctr">
-            <a:spAutoFit/>
-          </a:bodyPr>
-          <a:lstStyle/>
-          <a:p>
-            <a:pPr algn="l"/>
-            <a:r>
-              <a:rPr sz="1800" b="0" i="0">
+            <a:pPr>
+              <a:lnSpc>
+                <a:spcPct val="150000"/>
+              </a:lnSpc>
+              <a:spcAft>
+                <a:spcPts val="400"/>
+              </a:spcAft>
+            </a:pPr>
+            <a:r>
+              <a:rPr sz="2000" b="1">
+                <a:solidFill>
+                  <a:srgbClr val="00A0B0"/>
+                </a:solidFill>
+                <a:latin typeface="Calibri"/>
+              </a:rPr>
+              <a:t>▸  </a:t>
+            </a:r>
+            <a:r>
+              <a:rPr sz="2000">
                 <a:solidFill>
                   <a:srgbClr val="1A1A2E"/>
                 </a:solidFill>
                 <a:latin typeface="Calibri"/>
               </a:rPr>
-              <a:t>Validation, sanitization, encoding: cose DIVERSE</a:t>
-            </a:r>
-          </a:p>
-        </p:txBody>
-      </p:sp>
-      <p:sp>
-        <p:nvSpPr>
-          <p:cNvPr id="8" name="Oval 7"/>
-          <p:cNvSpPr/>
-          <p:nvPr/>
-        </p:nvSpPr>
-        <p:spPr>
-          <a:xfrm>
-            <a:off x="914400" y="2354580"/>
-            <a:ext cx="777240" cy="777240"/>
-          </a:xfrm>
-          <a:prstGeom prst="ellipse">
-            <a:avLst/>
-          </a:prstGeom>
-          <a:solidFill>
-            <a:srgbClr val="00A0B0"/>
-          </a:solidFill>
-          <a:ln>
-            <a:noFill/>
-          </a:ln>
-        </p:spPr>
-        <p:style>
-          <a:lnRef idx="1">
-            <a:schemeClr val="accent1"/>
-          </a:lnRef>
-          <a:fillRef idx="3">
-            <a:schemeClr val="accent1"/>
-          </a:fillRef>
-          <a:effectRef idx="2">
-            <a:schemeClr val="accent1"/>
-          </a:effectRef>
-          <a:fontRef idx="minor">
-            <a:schemeClr val="lt1"/>
-          </a:fontRef>
-        </p:style>
-        <p:txBody>
-          <a:bodyPr rtlCol="0" anchor="ctr"/>
-          <a:lstStyle/>
-          <a:p>
-            <a:pPr algn="ctr"/>
-          </a:p>
-        </p:txBody>
-      </p:sp>
-      <p:sp>
-        <p:nvSpPr>
-          <p:cNvPr id="9" name="TextBox 8"/>
-          <p:cNvSpPr txBox="1"/>
-          <p:nvPr/>
-        </p:nvSpPr>
-        <p:spPr>
-          <a:xfrm>
-            <a:off x="914400" y="2354580"/>
-            <a:ext cx="777240" cy="777240"/>
-          </a:xfrm>
-          <a:prstGeom prst="rect">
-            <a:avLst/>
-          </a:prstGeom>
-          <a:noFill/>
-        </p:spPr>
-        <p:txBody>
-          <a:bodyPr wrap="square" lIns="45720" rIns="45720" tIns="18288" bIns="18288" anchor="ctr">
-            <a:spAutoFit/>
-          </a:bodyPr>
-          <a:lstStyle/>
-          <a:p>
-            <a:pPr algn="ctr"/>
-            <a:r>
-              <a:rPr sz="2800" b="1" i="0">
-                <a:solidFill>
-                  <a:srgbClr val="FFFFFF"/>
-                </a:solidFill>
-                <a:latin typeface="Calibri"/>
-              </a:rPr>
-              <a:t>2</a:t>
-            </a:r>
-          </a:p>
-        </p:txBody>
-      </p:sp>
-      <p:sp>
-        <p:nvSpPr>
-          <p:cNvPr id="10" name="Rounded Rectangle 9"/>
-          <p:cNvSpPr/>
-          <p:nvPr/>
-        </p:nvSpPr>
-        <p:spPr>
-          <a:xfrm>
-            <a:off x="2011680" y="2354580"/>
-            <a:ext cx="9144000" cy="777240"/>
-          </a:xfrm>
-          <a:prstGeom prst="roundRect">
-            <a:avLst>
-              <a:gd name="adj" fmla="val 8000"/>
-            </a:avLst>
-          </a:prstGeom>
-          <a:solidFill>
-            <a:srgbClr val="FBFBFD"/>
-          </a:solidFill>
-          <a:ln w="19050">
-            <a:solidFill>
-              <a:srgbClr val="00A0B0"/>
-            </a:solidFill>
-          </a:ln>
-        </p:spPr>
-        <p:style>
-          <a:lnRef idx="1">
-            <a:schemeClr val="accent1"/>
-          </a:lnRef>
-          <a:fillRef idx="3">
-            <a:schemeClr val="accent1"/>
-          </a:fillRef>
-          <a:effectRef idx="2">
-            <a:schemeClr val="accent1"/>
-          </a:effectRef>
-          <a:fontRef idx="minor">
-            <a:schemeClr val="lt1"/>
-          </a:fontRef>
-        </p:style>
-        <p:txBody>
-          <a:bodyPr rtlCol="0" anchor="ctr"/>
-          <a:lstStyle/>
-          <a:p>
-            <a:pPr algn="ctr"/>
-          </a:p>
-        </p:txBody>
-      </p:sp>
-      <p:sp>
-        <p:nvSpPr>
-          <p:cNvPr id="11" name="TextBox 10"/>
-          <p:cNvSpPr txBox="1"/>
-          <p:nvPr/>
-        </p:nvSpPr>
-        <p:spPr>
-          <a:xfrm>
-            <a:off x="2286000" y="2354580"/>
-            <a:ext cx="8686800" cy="777240"/>
-          </a:xfrm>
-          <a:prstGeom prst="rect">
-            <a:avLst/>
-          </a:prstGeom>
-          <a:noFill/>
-        </p:spPr>
-        <p:txBody>
-          <a:bodyPr wrap="square" lIns="45720" rIns="45720" tIns="18288" bIns="18288" anchor="ctr">
-            <a:spAutoFit/>
-          </a:bodyPr>
-          <a:lstStyle/>
-          <a:p>
-            <a:pPr algn="l"/>
-            <a:r>
-              <a:rPr sz="1800" b="0" i="0">
+              <a:t>SBOM = Software Bill of Materials</a:t>
+            </a:r>
+          </a:p>
+          <a:p>
+            <a:pPr>
+              <a:lnSpc>
+                <a:spcPct val="150000"/>
+              </a:lnSpc>
+              <a:spcAft>
+                <a:spcPts val="400"/>
+              </a:spcAft>
+            </a:pPr>
+            <a:r>
+              <a:rPr sz="2000" b="1">
+                <a:solidFill>
+                  <a:srgbClr val="00A0B0"/>
+                </a:solidFill>
+                <a:latin typeface="Calibri"/>
+              </a:rPr>
+              <a:t>▸  </a:t>
+            </a:r>
+            <a:r>
+              <a:rPr sz="2000">
                 <a:solidFill>
                   <a:srgbClr val="1A1A2E"/>
                 </a:solidFill>
                 <a:latin typeface="Calibri"/>
               </a:rPr>
-              <a:t>Whitelist sempre. Blacklist mai.</a:t>
-            </a:r>
-          </a:p>
-        </p:txBody>
-      </p:sp>
-      <p:sp>
-        <p:nvSpPr>
-          <p:cNvPr id="12" name="Oval 11"/>
-          <p:cNvSpPr/>
-          <p:nvPr/>
-        </p:nvSpPr>
-        <p:spPr>
-          <a:xfrm>
-            <a:off x="914400" y="3268980"/>
-            <a:ext cx="777240" cy="777240"/>
-          </a:xfrm>
-          <a:prstGeom prst="ellipse">
-            <a:avLst/>
-          </a:prstGeom>
-          <a:solidFill>
-            <a:srgbClr val="00A0B0"/>
-          </a:solidFill>
-          <a:ln>
-            <a:noFill/>
-          </a:ln>
-        </p:spPr>
-        <p:style>
-          <a:lnRef idx="1">
-            <a:schemeClr val="accent1"/>
-          </a:lnRef>
-          <a:fillRef idx="3">
-            <a:schemeClr val="accent1"/>
-          </a:fillRef>
-          <a:effectRef idx="2">
-            <a:schemeClr val="accent1"/>
-          </a:effectRef>
-          <a:fontRef idx="minor">
-            <a:schemeClr val="lt1"/>
-          </a:fontRef>
-        </p:style>
-        <p:txBody>
-          <a:bodyPr rtlCol="0" anchor="ctr"/>
-          <a:lstStyle/>
-          <a:p>
-            <a:pPr algn="ctr"/>
-          </a:p>
-        </p:txBody>
-      </p:sp>
-      <p:sp>
-        <p:nvSpPr>
-          <p:cNvPr id="13" name="TextBox 12"/>
-          <p:cNvSpPr txBox="1"/>
-          <p:nvPr/>
-        </p:nvSpPr>
-        <p:spPr>
-          <a:xfrm>
-            <a:off x="914400" y="3268980"/>
-            <a:ext cx="777240" cy="777240"/>
-          </a:xfrm>
-          <a:prstGeom prst="rect">
-            <a:avLst/>
-          </a:prstGeom>
-          <a:noFill/>
-        </p:spPr>
-        <p:txBody>
-          <a:bodyPr wrap="square" lIns="45720" rIns="45720" tIns="18288" bIns="18288" anchor="ctr">
-            <a:spAutoFit/>
-          </a:bodyPr>
-          <a:lstStyle/>
-          <a:p>
-            <a:pPr algn="ctr"/>
-            <a:r>
-              <a:rPr sz="2800" b="1" i="0">
-                <a:solidFill>
-                  <a:srgbClr val="FFFFFF"/>
-                </a:solidFill>
-                <a:latin typeface="Calibri"/>
-              </a:rPr>
-              <a:t>3</a:t>
-            </a:r>
-          </a:p>
-        </p:txBody>
-      </p:sp>
-      <p:sp>
-        <p:nvSpPr>
-          <p:cNvPr id="14" name="Rounded Rectangle 13"/>
-          <p:cNvSpPr/>
-          <p:nvPr/>
-        </p:nvSpPr>
-        <p:spPr>
-          <a:xfrm>
-            <a:off x="2011680" y="3268980"/>
-            <a:ext cx="9144000" cy="777240"/>
-          </a:xfrm>
-          <a:prstGeom prst="roundRect">
-            <a:avLst>
-              <a:gd name="adj" fmla="val 8000"/>
-            </a:avLst>
-          </a:prstGeom>
-          <a:solidFill>
-            <a:srgbClr val="FBFBFD"/>
-          </a:solidFill>
-          <a:ln w="19050">
-            <a:solidFill>
-              <a:srgbClr val="00A0B0"/>
-            </a:solidFill>
-          </a:ln>
-        </p:spPr>
-        <p:style>
-          <a:lnRef idx="1">
-            <a:schemeClr val="accent1"/>
-          </a:lnRef>
-          <a:fillRef idx="3">
-            <a:schemeClr val="accent1"/>
-          </a:fillRef>
-          <a:effectRef idx="2">
-            <a:schemeClr val="accent1"/>
-          </a:effectRef>
-          <a:fontRef idx="minor">
-            <a:schemeClr val="lt1"/>
-          </a:fontRef>
-        </p:style>
-        <p:txBody>
-          <a:bodyPr rtlCol="0" anchor="ctr"/>
-          <a:lstStyle/>
-          <a:p>
-            <a:pPr algn="ctr"/>
-          </a:p>
-        </p:txBody>
-      </p:sp>
-      <p:sp>
-        <p:nvSpPr>
-          <p:cNvPr id="15" name="TextBox 14"/>
-          <p:cNvSpPr txBox="1"/>
-          <p:nvPr/>
-        </p:nvSpPr>
-        <p:spPr>
-          <a:xfrm>
-            <a:off x="2286000" y="3268980"/>
-            <a:ext cx="8686800" cy="777240"/>
-          </a:xfrm>
-          <a:prstGeom prst="rect">
-            <a:avLst/>
-          </a:prstGeom>
-          <a:noFill/>
-        </p:spPr>
-        <p:txBody>
-          <a:bodyPr wrap="square" lIns="45720" rIns="45720" tIns="18288" bIns="18288" anchor="ctr">
-            <a:spAutoFit/>
-          </a:bodyPr>
-          <a:lstStyle/>
-          <a:p>
-            <a:pPr algn="l"/>
-            <a:r>
-              <a:rPr sz="1800" b="0" i="0">
+              <a:t>  Lista completa delle dipendenze del prodotto (versioni, hash)</a:t>
+            </a:r>
+          </a:p>
+          <a:p>
+            <a:pPr>
+              <a:lnSpc>
+                <a:spcPct val="150000"/>
+              </a:lnSpc>
+              <a:spcAft>
+                <a:spcPts val="400"/>
+              </a:spcAft>
+            </a:pPr>
+            <a:r>
+              <a:rPr sz="2000" b="1">
+                <a:solidFill>
+                  <a:srgbClr val="00A0B0"/>
+                </a:solidFill>
+                <a:latin typeface="Calibri"/>
+              </a:rPr>
+              <a:t>▸  </a:t>
+            </a:r>
+            <a:r>
+              <a:rPr sz="2000">
                 <a:solidFill>
                   <a:srgbClr val="1A1A2E"/>
                 </a:solidFill>
                 <a:latin typeface="Calibri"/>
               </a:rPr>
-              <a:t>Pydantic per validation strutturata in Python</a:t>
-            </a:r>
-          </a:p>
-        </p:txBody>
-      </p:sp>
-      <p:sp>
-        <p:nvSpPr>
-          <p:cNvPr id="16" name="Oval 15"/>
-          <p:cNvSpPr/>
-          <p:nvPr/>
-        </p:nvSpPr>
-        <p:spPr>
-          <a:xfrm>
-            <a:off x="914400" y="4183380"/>
-            <a:ext cx="777240" cy="777240"/>
-          </a:xfrm>
-          <a:prstGeom prst="ellipse">
-            <a:avLst/>
-          </a:prstGeom>
-          <a:solidFill>
-            <a:srgbClr val="00A0B0"/>
-          </a:solidFill>
-          <a:ln>
-            <a:noFill/>
-          </a:ln>
-        </p:spPr>
-        <p:style>
-          <a:lnRef idx="1">
-            <a:schemeClr val="accent1"/>
-          </a:lnRef>
-          <a:fillRef idx="3">
-            <a:schemeClr val="accent1"/>
-          </a:fillRef>
-          <a:effectRef idx="2">
-            <a:schemeClr val="accent1"/>
-          </a:effectRef>
-          <a:fontRef idx="minor">
-            <a:schemeClr val="lt1"/>
-          </a:fontRef>
-        </p:style>
-        <p:txBody>
-          <a:bodyPr rtlCol="0" anchor="ctr"/>
-          <a:lstStyle/>
-          <a:p>
-            <a:pPr algn="ctr"/>
-          </a:p>
-        </p:txBody>
-      </p:sp>
-      <p:sp>
-        <p:nvSpPr>
-          <p:cNvPr id="17" name="TextBox 16"/>
-          <p:cNvSpPr txBox="1"/>
-          <p:nvPr/>
-        </p:nvSpPr>
-        <p:spPr>
-          <a:xfrm>
-            <a:off x="914400" y="4183380"/>
-            <a:ext cx="777240" cy="777240"/>
-          </a:xfrm>
-          <a:prstGeom prst="rect">
-            <a:avLst/>
-          </a:prstGeom>
-          <a:noFill/>
-        </p:spPr>
-        <p:txBody>
-          <a:bodyPr wrap="square" lIns="45720" rIns="45720" tIns="18288" bIns="18288" anchor="ctr">
-            <a:spAutoFit/>
-          </a:bodyPr>
-          <a:lstStyle/>
-          <a:p>
-            <a:pPr algn="ctr"/>
-            <a:r>
-              <a:rPr sz="2800" b="1" i="0">
-                <a:solidFill>
-                  <a:srgbClr val="FFFFFF"/>
-                </a:solidFill>
-                <a:latin typeface="Calibri"/>
-              </a:rPr>
-              <a:t>4</a:t>
-            </a:r>
-          </a:p>
-        </p:txBody>
-      </p:sp>
-      <p:sp>
-        <p:nvSpPr>
-          <p:cNvPr id="18" name="Rounded Rectangle 17"/>
-          <p:cNvSpPr/>
-          <p:nvPr/>
-        </p:nvSpPr>
-        <p:spPr>
-          <a:xfrm>
-            <a:off x="2011680" y="4183380"/>
-            <a:ext cx="9144000" cy="777240"/>
-          </a:xfrm>
-          <a:prstGeom prst="roundRect">
-            <a:avLst>
-              <a:gd name="adj" fmla="val 8000"/>
-            </a:avLst>
-          </a:prstGeom>
-          <a:solidFill>
-            <a:srgbClr val="FBFBFD"/>
-          </a:solidFill>
-          <a:ln w="19050">
-            <a:solidFill>
-              <a:srgbClr val="00A0B0"/>
-            </a:solidFill>
-          </a:ln>
-        </p:spPr>
-        <p:style>
-          <a:lnRef idx="1">
-            <a:schemeClr val="accent1"/>
-          </a:lnRef>
-          <a:fillRef idx="3">
-            <a:schemeClr val="accent1"/>
-          </a:fillRef>
-          <a:effectRef idx="2">
-            <a:schemeClr val="accent1"/>
-          </a:effectRef>
-          <a:fontRef idx="minor">
-            <a:schemeClr val="lt1"/>
-          </a:fontRef>
-        </p:style>
-        <p:txBody>
-          <a:bodyPr rtlCol="0" anchor="ctr"/>
-          <a:lstStyle/>
-          <a:p>
-            <a:pPr algn="ctr"/>
-          </a:p>
-        </p:txBody>
-      </p:sp>
-      <p:sp>
-        <p:nvSpPr>
-          <p:cNvPr id="19" name="TextBox 18"/>
-          <p:cNvSpPr txBox="1"/>
-          <p:nvPr/>
-        </p:nvSpPr>
-        <p:spPr>
-          <a:xfrm>
-            <a:off x="2286000" y="4183380"/>
-            <a:ext cx="8686800" cy="777240"/>
-          </a:xfrm>
-          <a:prstGeom prst="rect">
-            <a:avLst/>
-          </a:prstGeom>
-          <a:noFill/>
-        </p:spPr>
-        <p:txBody>
-          <a:bodyPr wrap="square" lIns="45720" rIns="45720" tIns="18288" bIns="18288" anchor="ctr">
-            <a:spAutoFit/>
-          </a:bodyPr>
-          <a:lstStyle/>
-          <a:p>
-            <a:pPr algn="l"/>
-            <a:r>
-              <a:rPr sz="1800" b="0" i="0">
+              <a:t>  Formati: CycloneDX, SPDX</a:t>
+            </a:r>
+          </a:p>
+          <a:p>
+            <a:pPr>
+              <a:lnSpc>
+                <a:spcPct val="150000"/>
+              </a:lnSpc>
+              <a:spcAft>
+                <a:spcPts val="400"/>
+              </a:spcAft>
+            </a:pPr>
+            <a:r>
+              <a:rPr sz="2000" b="1">
+                <a:solidFill>
+                  <a:srgbClr val="00A0B0"/>
+                </a:solidFill>
+                <a:latin typeface="Calibri"/>
+              </a:rPr>
+              <a:t>▸  </a:t>
+            </a:r>
+            <a:r>
+              <a:rPr sz="2000">
                 <a:solidFill>
                   <a:srgbClr val="1A1A2E"/>
                 </a:solidFill>
                 <a:latin typeface="Calibri"/>
               </a:rPr>
-              <a:t>Path traversal: 3 controlli obbligatori (whitelist, ext, realpath)</a:t>
-            </a:r>
-          </a:p>
-        </p:txBody>
-      </p:sp>
-      <p:sp>
-        <p:nvSpPr>
-          <p:cNvPr id="20" name="Oval 19"/>
-          <p:cNvSpPr/>
-          <p:nvPr/>
-        </p:nvSpPr>
-        <p:spPr>
-          <a:xfrm>
-            <a:off x="914400" y="5097780"/>
-            <a:ext cx="777240" cy="777240"/>
-          </a:xfrm>
-          <a:prstGeom prst="ellipse">
-            <a:avLst/>
-          </a:prstGeom>
-          <a:solidFill>
-            <a:srgbClr val="00A0B0"/>
-          </a:solidFill>
-          <a:ln>
-            <a:noFill/>
-          </a:ln>
-        </p:spPr>
-        <p:style>
-          <a:lnRef idx="1">
-            <a:schemeClr val="accent1"/>
-          </a:lnRef>
-          <a:fillRef idx="3">
-            <a:schemeClr val="accent1"/>
-          </a:fillRef>
-          <a:effectRef idx="2">
-            <a:schemeClr val="accent1"/>
-          </a:effectRef>
-          <a:fontRef idx="minor">
-            <a:schemeClr val="lt1"/>
-          </a:fontRef>
-        </p:style>
-        <p:txBody>
-          <a:bodyPr rtlCol="0" anchor="ctr"/>
-          <a:lstStyle/>
-          <a:p>
-            <a:pPr algn="ctr"/>
-          </a:p>
-        </p:txBody>
-      </p:sp>
-      <p:sp>
-        <p:nvSpPr>
-          <p:cNvPr id="21" name="TextBox 20"/>
-          <p:cNvSpPr txBox="1"/>
-          <p:nvPr/>
-        </p:nvSpPr>
-        <p:spPr>
-          <a:xfrm>
-            <a:off x="914400" y="5097780"/>
-            <a:ext cx="777240" cy="777240"/>
-          </a:xfrm>
-          <a:prstGeom prst="rect">
-            <a:avLst/>
-          </a:prstGeom>
-          <a:noFill/>
-        </p:spPr>
-        <p:txBody>
-          <a:bodyPr wrap="square" lIns="45720" rIns="45720" tIns="18288" bIns="18288" anchor="ctr">
-            <a:spAutoFit/>
-          </a:bodyPr>
-          <a:lstStyle/>
-          <a:p>
-            <a:pPr algn="ctr"/>
-            <a:r>
-              <a:rPr sz="2800" b="1" i="0">
-                <a:solidFill>
-                  <a:srgbClr val="FFFFFF"/>
-                </a:solidFill>
-                <a:latin typeface="Calibri"/>
-              </a:rPr>
-              <a:t>5</a:t>
-            </a:r>
-          </a:p>
-        </p:txBody>
-      </p:sp>
-      <p:sp>
-        <p:nvSpPr>
-          <p:cNvPr id="22" name="Rounded Rectangle 21"/>
-          <p:cNvSpPr/>
-          <p:nvPr/>
-        </p:nvSpPr>
-        <p:spPr>
-          <a:xfrm>
-            <a:off x="2011680" y="5097780"/>
-            <a:ext cx="9144000" cy="777240"/>
-          </a:xfrm>
-          <a:prstGeom prst="roundRect">
-            <a:avLst>
-              <a:gd name="adj" fmla="val 8000"/>
-            </a:avLst>
-          </a:prstGeom>
-          <a:solidFill>
-            <a:srgbClr val="FBFBFD"/>
-          </a:solidFill>
-          <a:ln w="19050">
-            <a:solidFill>
-              <a:srgbClr val="00A0B0"/>
-            </a:solidFill>
-          </a:ln>
-        </p:spPr>
-        <p:style>
-          <a:lnRef idx="1">
-            <a:schemeClr val="accent1"/>
-          </a:lnRef>
-          <a:fillRef idx="3">
-            <a:schemeClr val="accent1"/>
-          </a:fillRef>
-          <a:effectRef idx="2">
-            <a:schemeClr val="accent1"/>
-          </a:effectRef>
-          <a:fontRef idx="minor">
-            <a:schemeClr val="lt1"/>
-          </a:fontRef>
-        </p:style>
-        <p:txBody>
-          <a:bodyPr rtlCol="0" anchor="ctr"/>
-          <a:lstStyle/>
-          <a:p>
-            <a:pPr algn="ctr"/>
-          </a:p>
-        </p:txBody>
-      </p:sp>
-      <p:sp>
-        <p:nvSpPr>
-          <p:cNvPr id="23" name="TextBox 22"/>
-          <p:cNvSpPr txBox="1"/>
-          <p:nvPr/>
-        </p:nvSpPr>
-        <p:spPr>
-          <a:xfrm>
-            <a:off x="2286000" y="5097780"/>
-            <a:ext cx="8686800" cy="777240"/>
-          </a:xfrm>
-          <a:prstGeom prst="rect">
-            <a:avLst/>
-          </a:prstGeom>
-          <a:noFill/>
-        </p:spPr>
-        <p:txBody>
-          <a:bodyPr wrap="square" lIns="45720" rIns="45720" tIns="18288" bIns="18288" anchor="ctr">
-            <a:spAutoFit/>
-          </a:bodyPr>
-          <a:lstStyle/>
-          <a:p>
-            <a:pPr algn="l"/>
-            <a:r>
-              <a:rPr sz="1800" b="0" i="0">
+              <a:t/>
+            </a:r>
+          </a:p>
+          <a:p>
+            <a:pPr>
+              <a:lnSpc>
+                <a:spcPct val="150000"/>
+              </a:lnSpc>
+              <a:spcAft>
+                <a:spcPts val="400"/>
+              </a:spcAft>
+            </a:pPr>
+            <a:r>
+              <a:rPr sz="2000" b="1">
+                <a:solidFill>
+                  <a:srgbClr val="00A0B0"/>
+                </a:solidFill>
+                <a:latin typeface="Calibri"/>
+              </a:rPr>
+              <a:t>▸  </a:t>
+            </a:r>
+            <a:r>
+              <a:rPr sz="2000">
                 <a:solidFill>
                   <a:srgbClr val="1A1A2E"/>
                 </a:solidFill>
                 <a:latin typeface="Calibri"/>
               </a:rPr>
-              <a:t>pip-audit in CI: blocca il deploy con CVE Critical</a:t>
+              <a:t>Cyber Resilience Act (Reg. UE 2024/2847):</a:t>
+            </a:r>
+          </a:p>
+          <a:p>
+            <a:pPr>
+              <a:lnSpc>
+                <a:spcPct val="150000"/>
+              </a:lnSpc>
+              <a:spcAft>
+                <a:spcPts val="400"/>
+              </a:spcAft>
+            </a:pPr>
+            <a:r>
+              <a:rPr sz="2000" b="1">
+                <a:solidFill>
+                  <a:srgbClr val="00A0B0"/>
+                </a:solidFill>
+                <a:latin typeface="Calibri"/>
+              </a:rPr>
+              <a:t>▸  </a:t>
+            </a:r>
+            <a:r>
+              <a:rPr sz="2000">
+                <a:solidFill>
+                  <a:srgbClr val="1A1A2E"/>
+                </a:solidFill>
+                <a:latin typeface="Calibri"/>
+              </a:rPr>
+              <a:t>  In vigore pieno: DICEMBRE 2027</a:t>
+            </a:r>
+          </a:p>
+          <a:p>
+            <a:pPr>
+              <a:lnSpc>
+                <a:spcPct val="150000"/>
+              </a:lnSpc>
+              <a:spcAft>
+                <a:spcPts val="400"/>
+              </a:spcAft>
+            </a:pPr>
+            <a:r>
+              <a:rPr sz="2000" b="1">
+                <a:solidFill>
+                  <a:srgbClr val="00A0B0"/>
+                </a:solidFill>
+                <a:latin typeface="Calibri"/>
+              </a:rPr>
+              <a:t>▸  </a:t>
+            </a:r>
+            <a:r>
+              <a:rPr sz="2000">
+                <a:solidFill>
+                  <a:srgbClr val="1A1A2E"/>
+                </a:solidFill>
+                <a:latin typeface="Calibri"/>
+              </a:rPr>
+              <a:t>  Per ogni 'prodotto digitale' venduto in UE</a:t>
+            </a:r>
+          </a:p>
+          <a:p>
+            <a:pPr>
+              <a:lnSpc>
+                <a:spcPct val="150000"/>
+              </a:lnSpc>
+              <a:spcAft>
+                <a:spcPts val="400"/>
+              </a:spcAft>
+            </a:pPr>
+            <a:r>
+              <a:rPr sz="2000" b="1">
+                <a:solidFill>
+                  <a:srgbClr val="00A0B0"/>
+                </a:solidFill>
+                <a:latin typeface="Calibri"/>
+              </a:rPr>
+              <a:t>▸  </a:t>
+            </a:r>
+            <a:r>
+              <a:rPr sz="2000">
+                <a:solidFill>
+                  <a:srgbClr val="1A1A2E"/>
+                </a:solidFill>
+                <a:latin typeface="Calibri"/>
+              </a:rPr>
+              <a:t/>
+            </a:r>
+          </a:p>
+          <a:p>
+            <a:pPr>
+              <a:lnSpc>
+                <a:spcPct val="150000"/>
+              </a:lnSpc>
+              <a:spcAft>
+                <a:spcPts val="400"/>
+              </a:spcAft>
+            </a:pPr>
+            <a:r>
+              <a:rPr sz="2000" b="1">
+                <a:solidFill>
+                  <a:srgbClr val="00A0B0"/>
+                </a:solidFill>
+                <a:latin typeface="Calibri"/>
+              </a:rPr>
+              <a:t>▸  </a:t>
+            </a:r>
+            <a:r>
+              <a:rPr sz="2000">
+                <a:solidFill>
+                  <a:srgbClr val="1A1A2E"/>
+                </a:solidFill>
+                <a:latin typeface="Calibri"/>
+              </a:rPr>
+              <a:t>Obblighi: SBOM pubblicato · niente CVE note alla vendita</a:t>
+            </a:r>
+          </a:p>
+          <a:p>
+            <a:pPr>
+              <a:lnSpc>
+                <a:spcPct val="150000"/>
+              </a:lnSpc>
+              <a:spcAft>
+                <a:spcPts val="400"/>
+              </a:spcAft>
+            </a:pPr>
+            <a:r>
+              <a:rPr sz="2000" b="1">
+                <a:solidFill>
+                  <a:srgbClr val="00A0B0"/>
+                </a:solidFill>
+                <a:latin typeface="Calibri"/>
+              </a:rPr>
+              <a:t>▸  </a:t>
+            </a:r>
+            <a:r>
+              <a:rPr sz="2000">
+                <a:solidFill>
+                  <a:srgbClr val="1A1A2E"/>
+                </a:solidFill>
+                <a:latin typeface="Calibri"/>
+              </a:rPr>
+              <a:t>         · patching ≥5 anni · notifica 24h vulnerabilità sfruttate</a:t>
+            </a:r>
+          </a:p>
+          <a:p>
+            <a:pPr>
+              <a:lnSpc>
+                <a:spcPct val="150000"/>
+              </a:lnSpc>
+              <a:spcAft>
+                <a:spcPts val="400"/>
+              </a:spcAft>
+            </a:pPr>
+            <a:r>
+              <a:rPr sz="2000" b="1">
+                <a:solidFill>
+                  <a:srgbClr val="00A0B0"/>
+                </a:solidFill>
+                <a:latin typeface="Calibri"/>
+              </a:rPr>
+              <a:t>▸  </a:t>
+            </a:r>
+            <a:r>
+              <a:rPr sz="2000">
+                <a:solidFill>
+                  <a:srgbClr val="1A1A2E"/>
+                </a:solidFill>
+                <a:latin typeface="Calibri"/>
+              </a:rPr>
+              <a:t>         · sanzioni fino a 15M€ o 2,5% fatturato</a:t>
             </a:r>
           </a:p>
         </p:txBody>
       </p:sp>
       <p:cxnSp>
         <p:nvCxnSpPr>
-          <p:cNvPr id="24" name="Connector 23"/>
+          <p:cNvPr id="6" name="Connector 5"/>
           <p:cNvCxnSpPr/>
           <p:nvPr/>
         </p:nvCxnSpPr>
@@ -5612,7 +5179,7 @@
       </p:cxnSp>
       <p:sp>
         <p:nvSpPr>
-          <p:cNvPr id="25" name="TextBox 24"/>
+          <p:cNvPr id="7" name="TextBox 6"/>
           <p:cNvSpPr txBox="1"/>
           <p:nvPr/>
         </p:nvSpPr>
@@ -5647,7 +5214,7 @@
       </p:sp>
       <p:sp>
         <p:nvSpPr>
-          <p:cNvPr id="26" name="TextBox 25"/>
+          <p:cNvPr id="8" name="TextBox 7"/>
           <p:cNvSpPr txBox="1"/>
           <p:nvPr/>
         </p:nvSpPr>
@@ -5675,7 +5242,7 @@
                 </a:solidFill>
                 <a:latin typeface="Calibri"/>
               </a:rPr>
-              <a:t>L6  ·  13/14</a:t>
+              <a:t>L6  ·  13/15</a:t>
             </a:r>
           </a:p>
         </p:txBody>
@@ -5707,6 +5274,1007 @@
         <p:spPr>
           <a:xfrm>
             <a:off x="0" y="0"/>
+            <a:ext cx="12191695" cy="777240"/>
+          </a:xfrm>
+          <a:prstGeom prst="rect">
+            <a:avLst/>
+          </a:prstGeom>
+          <a:solidFill>
+            <a:srgbClr val="0F2D52"/>
+          </a:solidFill>
+          <a:ln>
+            <a:noFill/>
+          </a:ln>
+        </p:spPr>
+        <p:style>
+          <a:lnRef idx="1">
+            <a:schemeClr val="accent1"/>
+          </a:lnRef>
+          <a:fillRef idx="3">
+            <a:schemeClr val="accent1"/>
+          </a:fillRef>
+          <a:effectRef idx="2">
+            <a:schemeClr val="accent1"/>
+          </a:effectRef>
+          <a:fontRef idx="minor">
+            <a:schemeClr val="lt1"/>
+          </a:fontRef>
+        </p:style>
+        <p:txBody>
+          <a:bodyPr rtlCol="0" anchor="ctr"/>
+          <a:lstStyle/>
+          <a:p>
+            <a:pPr algn="ctr"/>
+          </a:p>
+        </p:txBody>
+      </p:sp>
+      <p:sp>
+        <p:nvSpPr>
+          <p:cNvPr id="3" name="TextBox 2"/>
+          <p:cNvSpPr txBox="1"/>
+          <p:nvPr/>
+        </p:nvSpPr>
+        <p:spPr>
+          <a:xfrm>
+            <a:off x="457200" y="164592"/>
+            <a:ext cx="10972800" cy="502920"/>
+          </a:xfrm>
+          <a:prstGeom prst="rect">
+            <a:avLst/>
+          </a:prstGeom>
+          <a:noFill/>
+        </p:spPr>
+        <p:txBody>
+          <a:bodyPr wrap="square" lIns="45720" rIns="45720" tIns="18288" bIns="18288" anchor="ctr">
+            <a:spAutoFit/>
+          </a:bodyPr>
+          <a:lstStyle/>
+          <a:p>
+            <a:pPr algn="l"/>
+            <a:r>
+              <a:rPr sz="2400" b="1" i="0">
+                <a:solidFill>
+                  <a:srgbClr val="FFFFFF"/>
+                </a:solidFill>
+                <a:latin typeface="Calibri"/>
+              </a:rPr>
+              <a:t>📌  Cosa portare a casa</a:t>
+            </a:r>
+          </a:p>
+        </p:txBody>
+      </p:sp>
+      <p:sp>
+        <p:nvSpPr>
+          <p:cNvPr id="4" name="Oval 3"/>
+          <p:cNvSpPr/>
+          <p:nvPr/>
+        </p:nvSpPr>
+        <p:spPr>
+          <a:xfrm>
+            <a:off x="914400" y="1440180"/>
+            <a:ext cx="777240" cy="777240"/>
+          </a:xfrm>
+          <a:prstGeom prst="ellipse">
+            <a:avLst/>
+          </a:prstGeom>
+          <a:solidFill>
+            <a:srgbClr val="00A0B0"/>
+          </a:solidFill>
+          <a:ln>
+            <a:noFill/>
+          </a:ln>
+        </p:spPr>
+        <p:style>
+          <a:lnRef idx="1">
+            <a:schemeClr val="accent1"/>
+          </a:lnRef>
+          <a:fillRef idx="3">
+            <a:schemeClr val="accent1"/>
+          </a:fillRef>
+          <a:effectRef idx="2">
+            <a:schemeClr val="accent1"/>
+          </a:effectRef>
+          <a:fontRef idx="minor">
+            <a:schemeClr val="lt1"/>
+          </a:fontRef>
+        </p:style>
+        <p:txBody>
+          <a:bodyPr rtlCol="0" anchor="ctr"/>
+          <a:lstStyle/>
+          <a:p>
+            <a:pPr algn="ctr"/>
+          </a:p>
+        </p:txBody>
+      </p:sp>
+      <p:sp>
+        <p:nvSpPr>
+          <p:cNvPr id="5" name="TextBox 4"/>
+          <p:cNvSpPr txBox="1"/>
+          <p:nvPr/>
+        </p:nvSpPr>
+        <p:spPr>
+          <a:xfrm>
+            <a:off x="914400" y="1440180"/>
+            <a:ext cx="777240" cy="777240"/>
+          </a:xfrm>
+          <a:prstGeom prst="rect">
+            <a:avLst/>
+          </a:prstGeom>
+          <a:noFill/>
+        </p:spPr>
+        <p:txBody>
+          <a:bodyPr wrap="square" lIns="45720" rIns="45720" tIns="18288" bIns="18288" anchor="ctr">
+            <a:spAutoFit/>
+          </a:bodyPr>
+          <a:lstStyle/>
+          <a:p>
+            <a:pPr algn="ctr"/>
+            <a:r>
+              <a:rPr sz="2800" b="1" i="0">
+                <a:solidFill>
+                  <a:srgbClr val="FFFFFF"/>
+                </a:solidFill>
+                <a:latin typeface="Calibri"/>
+              </a:rPr>
+              <a:t>1</a:t>
+            </a:r>
+          </a:p>
+        </p:txBody>
+      </p:sp>
+      <p:sp>
+        <p:nvSpPr>
+          <p:cNvPr id="6" name="Rounded Rectangle 5"/>
+          <p:cNvSpPr/>
+          <p:nvPr/>
+        </p:nvSpPr>
+        <p:spPr>
+          <a:xfrm>
+            <a:off x="2011680" y="1440180"/>
+            <a:ext cx="9144000" cy="777240"/>
+          </a:xfrm>
+          <a:prstGeom prst="roundRect">
+            <a:avLst>
+              <a:gd name="adj" fmla="val 8000"/>
+            </a:avLst>
+          </a:prstGeom>
+          <a:solidFill>
+            <a:srgbClr val="FBFBFD"/>
+          </a:solidFill>
+          <a:ln w="19050">
+            <a:solidFill>
+              <a:srgbClr val="00A0B0"/>
+            </a:solidFill>
+          </a:ln>
+        </p:spPr>
+        <p:style>
+          <a:lnRef idx="1">
+            <a:schemeClr val="accent1"/>
+          </a:lnRef>
+          <a:fillRef idx="3">
+            <a:schemeClr val="accent1"/>
+          </a:fillRef>
+          <a:effectRef idx="2">
+            <a:schemeClr val="accent1"/>
+          </a:effectRef>
+          <a:fontRef idx="minor">
+            <a:schemeClr val="lt1"/>
+          </a:fontRef>
+        </p:style>
+        <p:txBody>
+          <a:bodyPr rtlCol="0" anchor="ctr"/>
+          <a:lstStyle/>
+          <a:p>
+            <a:pPr algn="ctr"/>
+          </a:p>
+        </p:txBody>
+      </p:sp>
+      <p:sp>
+        <p:nvSpPr>
+          <p:cNvPr id="7" name="TextBox 6"/>
+          <p:cNvSpPr txBox="1"/>
+          <p:nvPr/>
+        </p:nvSpPr>
+        <p:spPr>
+          <a:xfrm>
+            <a:off x="2286000" y="1440180"/>
+            <a:ext cx="8686800" cy="777240"/>
+          </a:xfrm>
+          <a:prstGeom prst="rect">
+            <a:avLst/>
+          </a:prstGeom>
+          <a:noFill/>
+        </p:spPr>
+        <p:txBody>
+          <a:bodyPr wrap="square" lIns="45720" rIns="45720" tIns="18288" bIns="18288" anchor="ctr">
+            <a:spAutoFit/>
+          </a:bodyPr>
+          <a:lstStyle/>
+          <a:p>
+            <a:pPr algn="l"/>
+            <a:r>
+              <a:rPr sz="1800" b="0" i="0">
+                <a:solidFill>
+                  <a:srgbClr val="1A1A2E"/>
+                </a:solidFill>
+                <a:latin typeface="Calibri"/>
+              </a:rPr>
+              <a:t>Validation, sanitization, encoding: cose DIVERSE</a:t>
+            </a:r>
+          </a:p>
+        </p:txBody>
+      </p:sp>
+      <p:sp>
+        <p:nvSpPr>
+          <p:cNvPr id="8" name="Oval 7"/>
+          <p:cNvSpPr/>
+          <p:nvPr/>
+        </p:nvSpPr>
+        <p:spPr>
+          <a:xfrm>
+            <a:off x="914400" y="2354580"/>
+            <a:ext cx="777240" cy="777240"/>
+          </a:xfrm>
+          <a:prstGeom prst="ellipse">
+            <a:avLst/>
+          </a:prstGeom>
+          <a:solidFill>
+            <a:srgbClr val="00A0B0"/>
+          </a:solidFill>
+          <a:ln>
+            <a:noFill/>
+          </a:ln>
+        </p:spPr>
+        <p:style>
+          <a:lnRef idx="1">
+            <a:schemeClr val="accent1"/>
+          </a:lnRef>
+          <a:fillRef idx="3">
+            <a:schemeClr val="accent1"/>
+          </a:fillRef>
+          <a:effectRef idx="2">
+            <a:schemeClr val="accent1"/>
+          </a:effectRef>
+          <a:fontRef idx="minor">
+            <a:schemeClr val="lt1"/>
+          </a:fontRef>
+        </p:style>
+        <p:txBody>
+          <a:bodyPr rtlCol="0" anchor="ctr"/>
+          <a:lstStyle/>
+          <a:p>
+            <a:pPr algn="ctr"/>
+          </a:p>
+        </p:txBody>
+      </p:sp>
+      <p:sp>
+        <p:nvSpPr>
+          <p:cNvPr id="9" name="TextBox 8"/>
+          <p:cNvSpPr txBox="1"/>
+          <p:nvPr/>
+        </p:nvSpPr>
+        <p:spPr>
+          <a:xfrm>
+            <a:off x="914400" y="2354580"/>
+            <a:ext cx="777240" cy="777240"/>
+          </a:xfrm>
+          <a:prstGeom prst="rect">
+            <a:avLst/>
+          </a:prstGeom>
+          <a:noFill/>
+        </p:spPr>
+        <p:txBody>
+          <a:bodyPr wrap="square" lIns="45720" rIns="45720" tIns="18288" bIns="18288" anchor="ctr">
+            <a:spAutoFit/>
+          </a:bodyPr>
+          <a:lstStyle/>
+          <a:p>
+            <a:pPr algn="ctr"/>
+            <a:r>
+              <a:rPr sz="2800" b="1" i="0">
+                <a:solidFill>
+                  <a:srgbClr val="FFFFFF"/>
+                </a:solidFill>
+                <a:latin typeface="Calibri"/>
+              </a:rPr>
+              <a:t>2</a:t>
+            </a:r>
+          </a:p>
+        </p:txBody>
+      </p:sp>
+      <p:sp>
+        <p:nvSpPr>
+          <p:cNvPr id="10" name="Rounded Rectangle 9"/>
+          <p:cNvSpPr/>
+          <p:nvPr/>
+        </p:nvSpPr>
+        <p:spPr>
+          <a:xfrm>
+            <a:off x="2011680" y="2354580"/>
+            <a:ext cx="9144000" cy="777240"/>
+          </a:xfrm>
+          <a:prstGeom prst="roundRect">
+            <a:avLst>
+              <a:gd name="adj" fmla="val 8000"/>
+            </a:avLst>
+          </a:prstGeom>
+          <a:solidFill>
+            <a:srgbClr val="FBFBFD"/>
+          </a:solidFill>
+          <a:ln w="19050">
+            <a:solidFill>
+              <a:srgbClr val="00A0B0"/>
+            </a:solidFill>
+          </a:ln>
+        </p:spPr>
+        <p:style>
+          <a:lnRef idx="1">
+            <a:schemeClr val="accent1"/>
+          </a:lnRef>
+          <a:fillRef idx="3">
+            <a:schemeClr val="accent1"/>
+          </a:fillRef>
+          <a:effectRef idx="2">
+            <a:schemeClr val="accent1"/>
+          </a:effectRef>
+          <a:fontRef idx="minor">
+            <a:schemeClr val="lt1"/>
+          </a:fontRef>
+        </p:style>
+        <p:txBody>
+          <a:bodyPr rtlCol="0" anchor="ctr"/>
+          <a:lstStyle/>
+          <a:p>
+            <a:pPr algn="ctr"/>
+          </a:p>
+        </p:txBody>
+      </p:sp>
+      <p:sp>
+        <p:nvSpPr>
+          <p:cNvPr id="11" name="TextBox 10"/>
+          <p:cNvSpPr txBox="1"/>
+          <p:nvPr/>
+        </p:nvSpPr>
+        <p:spPr>
+          <a:xfrm>
+            <a:off x="2286000" y="2354580"/>
+            <a:ext cx="8686800" cy="777240"/>
+          </a:xfrm>
+          <a:prstGeom prst="rect">
+            <a:avLst/>
+          </a:prstGeom>
+          <a:noFill/>
+        </p:spPr>
+        <p:txBody>
+          <a:bodyPr wrap="square" lIns="45720" rIns="45720" tIns="18288" bIns="18288" anchor="ctr">
+            <a:spAutoFit/>
+          </a:bodyPr>
+          <a:lstStyle/>
+          <a:p>
+            <a:pPr algn="l"/>
+            <a:r>
+              <a:rPr sz="1800" b="0" i="0">
+                <a:solidFill>
+                  <a:srgbClr val="1A1A2E"/>
+                </a:solidFill>
+                <a:latin typeface="Calibri"/>
+              </a:rPr>
+              <a:t>Whitelist sempre. Blacklist mai.</a:t>
+            </a:r>
+          </a:p>
+        </p:txBody>
+      </p:sp>
+      <p:sp>
+        <p:nvSpPr>
+          <p:cNvPr id="12" name="Oval 11"/>
+          <p:cNvSpPr/>
+          <p:nvPr/>
+        </p:nvSpPr>
+        <p:spPr>
+          <a:xfrm>
+            <a:off x="914400" y="3268980"/>
+            <a:ext cx="777240" cy="777240"/>
+          </a:xfrm>
+          <a:prstGeom prst="ellipse">
+            <a:avLst/>
+          </a:prstGeom>
+          <a:solidFill>
+            <a:srgbClr val="00A0B0"/>
+          </a:solidFill>
+          <a:ln>
+            <a:noFill/>
+          </a:ln>
+        </p:spPr>
+        <p:style>
+          <a:lnRef idx="1">
+            <a:schemeClr val="accent1"/>
+          </a:lnRef>
+          <a:fillRef idx="3">
+            <a:schemeClr val="accent1"/>
+          </a:fillRef>
+          <a:effectRef idx="2">
+            <a:schemeClr val="accent1"/>
+          </a:effectRef>
+          <a:fontRef idx="minor">
+            <a:schemeClr val="lt1"/>
+          </a:fontRef>
+        </p:style>
+        <p:txBody>
+          <a:bodyPr rtlCol="0" anchor="ctr"/>
+          <a:lstStyle/>
+          <a:p>
+            <a:pPr algn="ctr"/>
+          </a:p>
+        </p:txBody>
+      </p:sp>
+      <p:sp>
+        <p:nvSpPr>
+          <p:cNvPr id="13" name="TextBox 12"/>
+          <p:cNvSpPr txBox="1"/>
+          <p:nvPr/>
+        </p:nvSpPr>
+        <p:spPr>
+          <a:xfrm>
+            <a:off x="914400" y="3268980"/>
+            <a:ext cx="777240" cy="777240"/>
+          </a:xfrm>
+          <a:prstGeom prst="rect">
+            <a:avLst/>
+          </a:prstGeom>
+          <a:noFill/>
+        </p:spPr>
+        <p:txBody>
+          <a:bodyPr wrap="square" lIns="45720" rIns="45720" tIns="18288" bIns="18288" anchor="ctr">
+            <a:spAutoFit/>
+          </a:bodyPr>
+          <a:lstStyle/>
+          <a:p>
+            <a:pPr algn="ctr"/>
+            <a:r>
+              <a:rPr sz="2800" b="1" i="0">
+                <a:solidFill>
+                  <a:srgbClr val="FFFFFF"/>
+                </a:solidFill>
+                <a:latin typeface="Calibri"/>
+              </a:rPr>
+              <a:t>3</a:t>
+            </a:r>
+          </a:p>
+        </p:txBody>
+      </p:sp>
+      <p:sp>
+        <p:nvSpPr>
+          <p:cNvPr id="14" name="Rounded Rectangle 13"/>
+          <p:cNvSpPr/>
+          <p:nvPr/>
+        </p:nvSpPr>
+        <p:spPr>
+          <a:xfrm>
+            <a:off x="2011680" y="3268980"/>
+            <a:ext cx="9144000" cy="777240"/>
+          </a:xfrm>
+          <a:prstGeom prst="roundRect">
+            <a:avLst>
+              <a:gd name="adj" fmla="val 8000"/>
+            </a:avLst>
+          </a:prstGeom>
+          <a:solidFill>
+            <a:srgbClr val="FBFBFD"/>
+          </a:solidFill>
+          <a:ln w="19050">
+            <a:solidFill>
+              <a:srgbClr val="00A0B0"/>
+            </a:solidFill>
+          </a:ln>
+        </p:spPr>
+        <p:style>
+          <a:lnRef idx="1">
+            <a:schemeClr val="accent1"/>
+          </a:lnRef>
+          <a:fillRef idx="3">
+            <a:schemeClr val="accent1"/>
+          </a:fillRef>
+          <a:effectRef idx="2">
+            <a:schemeClr val="accent1"/>
+          </a:effectRef>
+          <a:fontRef idx="minor">
+            <a:schemeClr val="lt1"/>
+          </a:fontRef>
+        </p:style>
+        <p:txBody>
+          <a:bodyPr rtlCol="0" anchor="ctr"/>
+          <a:lstStyle/>
+          <a:p>
+            <a:pPr algn="ctr"/>
+          </a:p>
+        </p:txBody>
+      </p:sp>
+      <p:sp>
+        <p:nvSpPr>
+          <p:cNvPr id="15" name="TextBox 14"/>
+          <p:cNvSpPr txBox="1"/>
+          <p:nvPr/>
+        </p:nvSpPr>
+        <p:spPr>
+          <a:xfrm>
+            <a:off x="2286000" y="3268980"/>
+            <a:ext cx="8686800" cy="777240"/>
+          </a:xfrm>
+          <a:prstGeom prst="rect">
+            <a:avLst/>
+          </a:prstGeom>
+          <a:noFill/>
+        </p:spPr>
+        <p:txBody>
+          <a:bodyPr wrap="square" lIns="45720" rIns="45720" tIns="18288" bIns="18288" anchor="ctr">
+            <a:spAutoFit/>
+          </a:bodyPr>
+          <a:lstStyle/>
+          <a:p>
+            <a:pPr algn="l"/>
+            <a:r>
+              <a:rPr sz="1800" b="0" i="0">
+                <a:solidFill>
+                  <a:srgbClr val="1A1A2E"/>
+                </a:solidFill>
+                <a:latin typeface="Calibri"/>
+              </a:rPr>
+              <a:t>Pydantic per validation strutturata in Python</a:t>
+            </a:r>
+          </a:p>
+        </p:txBody>
+      </p:sp>
+      <p:sp>
+        <p:nvSpPr>
+          <p:cNvPr id="16" name="Oval 15"/>
+          <p:cNvSpPr/>
+          <p:nvPr/>
+        </p:nvSpPr>
+        <p:spPr>
+          <a:xfrm>
+            <a:off x="914400" y="4183380"/>
+            <a:ext cx="777240" cy="777240"/>
+          </a:xfrm>
+          <a:prstGeom prst="ellipse">
+            <a:avLst/>
+          </a:prstGeom>
+          <a:solidFill>
+            <a:srgbClr val="00A0B0"/>
+          </a:solidFill>
+          <a:ln>
+            <a:noFill/>
+          </a:ln>
+        </p:spPr>
+        <p:style>
+          <a:lnRef idx="1">
+            <a:schemeClr val="accent1"/>
+          </a:lnRef>
+          <a:fillRef idx="3">
+            <a:schemeClr val="accent1"/>
+          </a:fillRef>
+          <a:effectRef idx="2">
+            <a:schemeClr val="accent1"/>
+          </a:effectRef>
+          <a:fontRef idx="minor">
+            <a:schemeClr val="lt1"/>
+          </a:fontRef>
+        </p:style>
+        <p:txBody>
+          <a:bodyPr rtlCol="0" anchor="ctr"/>
+          <a:lstStyle/>
+          <a:p>
+            <a:pPr algn="ctr"/>
+          </a:p>
+        </p:txBody>
+      </p:sp>
+      <p:sp>
+        <p:nvSpPr>
+          <p:cNvPr id="17" name="TextBox 16"/>
+          <p:cNvSpPr txBox="1"/>
+          <p:nvPr/>
+        </p:nvSpPr>
+        <p:spPr>
+          <a:xfrm>
+            <a:off x="914400" y="4183380"/>
+            <a:ext cx="777240" cy="777240"/>
+          </a:xfrm>
+          <a:prstGeom prst="rect">
+            <a:avLst/>
+          </a:prstGeom>
+          <a:noFill/>
+        </p:spPr>
+        <p:txBody>
+          <a:bodyPr wrap="square" lIns="45720" rIns="45720" tIns="18288" bIns="18288" anchor="ctr">
+            <a:spAutoFit/>
+          </a:bodyPr>
+          <a:lstStyle/>
+          <a:p>
+            <a:pPr algn="ctr"/>
+            <a:r>
+              <a:rPr sz="2800" b="1" i="0">
+                <a:solidFill>
+                  <a:srgbClr val="FFFFFF"/>
+                </a:solidFill>
+                <a:latin typeface="Calibri"/>
+              </a:rPr>
+              <a:t>4</a:t>
+            </a:r>
+          </a:p>
+        </p:txBody>
+      </p:sp>
+      <p:sp>
+        <p:nvSpPr>
+          <p:cNvPr id="18" name="Rounded Rectangle 17"/>
+          <p:cNvSpPr/>
+          <p:nvPr/>
+        </p:nvSpPr>
+        <p:spPr>
+          <a:xfrm>
+            <a:off x="2011680" y="4183380"/>
+            <a:ext cx="9144000" cy="777240"/>
+          </a:xfrm>
+          <a:prstGeom prst="roundRect">
+            <a:avLst>
+              <a:gd name="adj" fmla="val 8000"/>
+            </a:avLst>
+          </a:prstGeom>
+          <a:solidFill>
+            <a:srgbClr val="FBFBFD"/>
+          </a:solidFill>
+          <a:ln w="19050">
+            <a:solidFill>
+              <a:srgbClr val="00A0B0"/>
+            </a:solidFill>
+          </a:ln>
+        </p:spPr>
+        <p:style>
+          <a:lnRef idx="1">
+            <a:schemeClr val="accent1"/>
+          </a:lnRef>
+          <a:fillRef idx="3">
+            <a:schemeClr val="accent1"/>
+          </a:fillRef>
+          <a:effectRef idx="2">
+            <a:schemeClr val="accent1"/>
+          </a:effectRef>
+          <a:fontRef idx="minor">
+            <a:schemeClr val="lt1"/>
+          </a:fontRef>
+        </p:style>
+        <p:txBody>
+          <a:bodyPr rtlCol="0" anchor="ctr"/>
+          <a:lstStyle/>
+          <a:p>
+            <a:pPr algn="ctr"/>
+          </a:p>
+        </p:txBody>
+      </p:sp>
+      <p:sp>
+        <p:nvSpPr>
+          <p:cNvPr id="19" name="TextBox 18"/>
+          <p:cNvSpPr txBox="1"/>
+          <p:nvPr/>
+        </p:nvSpPr>
+        <p:spPr>
+          <a:xfrm>
+            <a:off x="2286000" y="4183380"/>
+            <a:ext cx="8686800" cy="777240"/>
+          </a:xfrm>
+          <a:prstGeom prst="rect">
+            <a:avLst/>
+          </a:prstGeom>
+          <a:noFill/>
+        </p:spPr>
+        <p:txBody>
+          <a:bodyPr wrap="square" lIns="45720" rIns="45720" tIns="18288" bIns="18288" anchor="ctr">
+            <a:spAutoFit/>
+          </a:bodyPr>
+          <a:lstStyle/>
+          <a:p>
+            <a:pPr algn="l"/>
+            <a:r>
+              <a:rPr sz="1800" b="0" i="0">
+                <a:solidFill>
+                  <a:srgbClr val="1A1A2E"/>
+                </a:solidFill>
+                <a:latin typeface="Calibri"/>
+              </a:rPr>
+              <a:t>Path traversal: 3 controlli obbligatori (whitelist, ext, realpath)</a:t>
+            </a:r>
+          </a:p>
+        </p:txBody>
+      </p:sp>
+      <p:sp>
+        <p:nvSpPr>
+          <p:cNvPr id="20" name="Oval 19"/>
+          <p:cNvSpPr/>
+          <p:nvPr/>
+        </p:nvSpPr>
+        <p:spPr>
+          <a:xfrm>
+            <a:off x="914400" y="5097780"/>
+            <a:ext cx="777240" cy="777240"/>
+          </a:xfrm>
+          <a:prstGeom prst="ellipse">
+            <a:avLst/>
+          </a:prstGeom>
+          <a:solidFill>
+            <a:srgbClr val="00A0B0"/>
+          </a:solidFill>
+          <a:ln>
+            <a:noFill/>
+          </a:ln>
+        </p:spPr>
+        <p:style>
+          <a:lnRef idx="1">
+            <a:schemeClr val="accent1"/>
+          </a:lnRef>
+          <a:fillRef idx="3">
+            <a:schemeClr val="accent1"/>
+          </a:fillRef>
+          <a:effectRef idx="2">
+            <a:schemeClr val="accent1"/>
+          </a:effectRef>
+          <a:fontRef idx="minor">
+            <a:schemeClr val="lt1"/>
+          </a:fontRef>
+        </p:style>
+        <p:txBody>
+          <a:bodyPr rtlCol="0" anchor="ctr"/>
+          <a:lstStyle/>
+          <a:p>
+            <a:pPr algn="ctr"/>
+          </a:p>
+        </p:txBody>
+      </p:sp>
+      <p:sp>
+        <p:nvSpPr>
+          <p:cNvPr id="21" name="TextBox 20"/>
+          <p:cNvSpPr txBox="1"/>
+          <p:nvPr/>
+        </p:nvSpPr>
+        <p:spPr>
+          <a:xfrm>
+            <a:off x="914400" y="5097780"/>
+            <a:ext cx="777240" cy="777240"/>
+          </a:xfrm>
+          <a:prstGeom prst="rect">
+            <a:avLst/>
+          </a:prstGeom>
+          <a:noFill/>
+        </p:spPr>
+        <p:txBody>
+          <a:bodyPr wrap="square" lIns="45720" rIns="45720" tIns="18288" bIns="18288" anchor="ctr">
+            <a:spAutoFit/>
+          </a:bodyPr>
+          <a:lstStyle/>
+          <a:p>
+            <a:pPr algn="ctr"/>
+            <a:r>
+              <a:rPr sz="2800" b="1" i="0">
+                <a:solidFill>
+                  <a:srgbClr val="FFFFFF"/>
+                </a:solidFill>
+                <a:latin typeface="Calibri"/>
+              </a:rPr>
+              <a:t>5</a:t>
+            </a:r>
+          </a:p>
+        </p:txBody>
+      </p:sp>
+      <p:sp>
+        <p:nvSpPr>
+          <p:cNvPr id="22" name="Rounded Rectangle 21"/>
+          <p:cNvSpPr/>
+          <p:nvPr/>
+        </p:nvSpPr>
+        <p:spPr>
+          <a:xfrm>
+            <a:off x="2011680" y="5097780"/>
+            <a:ext cx="9144000" cy="777240"/>
+          </a:xfrm>
+          <a:prstGeom prst="roundRect">
+            <a:avLst>
+              <a:gd name="adj" fmla="val 8000"/>
+            </a:avLst>
+          </a:prstGeom>
+          <a:solidFill>
+            <a:srgbClr val="FBFBFD"/>
+          </a:solidFill>
+          <a:ln w="19050">
+            <a:solidFill>
+              <a:srgbClr val="00A0B0"/>
+            </a:solidFill>
+          </a:ln>
+        </p:spPr>
+        <p:style>
+          <a:lnRef idx="1">
+            <a:schemeClr val="accent1"/>
+          </a:lnRef>
+          <a:fillRef idx="3">
+            <a:schemeClr val="accent1"/>
+          </a:fillRef>
+          <a:effectRef idx="2">
+            <a:schemeClr val="accent1"/>
+          </a:effectRef>
+          <a:fontRef idx="minor">
+            <a:schemeClr val="lt1"/>
+          </a:fontRef>
+        </p:style>
+        <p:txBody>
+          <a:bodyPr rtlCol="0" anchor="ctr"/>
+          <a:lstStyle/>
+          <a:p>
+            <a:pPr algn="ctr"/>
+          </a:p>
+        </p:txBody>
+      </p:sp>
+      <p:sp>
+        <p:nvSpPr>
+          <p:cNvPr id="23" name="TextBox 22"/>
+          <p:cNvSpPr txBox="1"/>
+          <p:nvPr/>
+        </p:nvSpPr>
+        <p:spPr>
+          <a:xfrm>
+            <a:off x="2286000" y="5097780"/>
+            <a:ext cx="8686800" cy="777240"/>
+          </a:xfrm>
+          <a:prstGeom prst="rect">
+            <a:avLst/>
+          </a:prstGeom>
+          <a:noFill/>
+        </p:spPr>
+        <p:txBody>
+          <a:bodyPr wrap="square" lIns="45720" rIns="45720" tIns="18288" bIns="18288" anchor="ctr">
+            <a:spAutoFit/>
+          </a:bodyPr>
+          <a:lstStyle/>
+          <a:p>
+            <a:pPr algn="l"/>
+            <a:r>
+              <a:rPr sz="1800" b="0" i="0">
+                <a:solidFill>
+                  <a:srgbClr val="1A1A2E"/>
+                </a:solidFill>
+                <a:latin typeface="Calibri"/>
+              </a:rPr>
+              <a:t>pip-audit + SBOM obbligatori dal 2027 (CRA)</a:t>
+            </a:r>
+          </a:p>
+        </p:txBody>
+      </p:sp>
+      <p:cxnSp>
+        <p:nvCxnSpPr>
+          <p:cNvPr id="24" name="Connector 23"/>
+          <p:cNvCxnSpPr/>
+          <p:nvPr/>
+        </p:nvCxnSpPr>
+        <p:spPr>
+          <a:xfrm>
+            <a:off x="457200" y="6446520"/>
+            <a:ext cx="11274552" cy="0"/>
+          </a:xfrm>
+          <a:prstGeom prst="line">
+            <a:avLst/>
+          </a:prstGeom>
+          <a:ln w="19050">
+            <a:solidFill>
+              <a:srgbClr val="00A0B0"/>
+            </a:solidFill>
+          </a:ln>
+        </p:spPr>
+        <p:style>
+          <a:lnRef idx="2">
+            <a:schemeClr val="accent1"/>
+          </a:lnRef>
+          <a:fillRef idx="0">
+            <a:schemeClr val="accent1"/>
+          </a:fillRef>
+          <a:effectRef idx="1">
+            <a:schemeClr val="accent1"/>
+          </a:effectRef>
+          <a:fontRef idx="minor">
+            <a:schemeClr val="tx1"/>
+          </a:fontRef>
+        </p:style>
+      </p:cxnSp>
+      <p:sp>
+        <p:nvSpPr>
+          <p:cNvPr id="25" name="TextBox 24"/>
+          <p:cNvSpPr txBox="1"/>
+          <p:nvPr/>
+        </p:nvSpPr>
+        <p:spPr>
+          <a:xfrm>
+            <a:off x="457200" y="6473952"/>
+            <a:ext cx="7315200" cy="292608"/>
+          </a:xfrm>
+          <a:prstGeom prst="rect">
+            <a:avLst/>
+          </a:prstGeom>
+          <a:noFill/>
+        </p:spPr>
+        <p:txBody>
+          <a:bodyPr wrap="square" lIns="45720" rIns="45720" tIns="18288" bIns="18288" anchor="t">
+            <a:spAutoFit/>
+          </a:bodyPr>
+          <a:lstStyle/>
+          <a:p>
+            <a:pPr algn="l"/>
+            <a:r>
+              <a:rPr sz="1000" b="0" i="0">
+                <a:solidFill>
+                  <a:srgbClr val="6B7280"/>
+                </a:solidFill>
+                <a:latin typeface="Calibri"/>
+              </a:rPr>
+              <a:t>Secure Coding · Corso IFTS STEM · A. Manneschi · 2024/2025</a:t>
+            </a:r>
+          </a:p>
+        </p:txBody>
+      </p:sp>
+      <p:sp>
+        <p:nvSpPr>
+          <p:cNvPr id="26" name="TextBox 25"/>
+          <p:cNvSpPr txBox="1"/>
+          <p:nvPr/>
+        </p:nvSpPr>
+        <p:spPr>
+          <a:xfrm>
+            <a:off x="10515600" y="6473952"/>
+            <a:ext cx="1188720" cy="292608"/>
+          </a:xfrm>
+          <a:prstGeom prst="rect">
+            <a:avLst/>
+          </a:prstGeom>
+          <a:noFill/>
+        </p:spPr>
+        <p:txBody>
+          <a:bodyPr wrap="square" lIns="45720" rIns="45720" tIns="18288" bIns="18288" anchor="t">
+            <a:spAutoFit/>
+          </a:bodyPr>
+          <a:lstStyle/>
+          <a:p>
+            <a:pPr algn="r"/>
+            <a:r>
+              <a:rPr sz="1000" b="1" i="0">
+                <a:solidFill>
+                  <a:srgbClr val="6B7280"/>
+                </a:solidFill>
+                <a:latin typeface="Calibri"/>
+              </a:rPr>
+              <a:t>L6  ·  14/15</a:t>
+            </a:r>
+          </a:p>
+        </p:txBody>
+      </p:sp>
+    </p:spTree>
+  </p:cSld>
+  <p:clrMapOvr>
+    <a:masterClrMapping/>
+  </p:clrMapOvr>
+</p:sld>
+</file>
+
+<file path=ppt/slides/slide15.xml><?xml version="1.0" encoding="utf-8"?>
+<p:sld xmlns:a="http://schemas.openxmlformats.org/drawingml/2006/main" xmlns:p="http://schemas.openxmlformats.org/presentationml/2006/main" xmlns:r="http://schemas.openxmlformats.org/officeDocument/2006/relationships">
+  <p:cSld>
+    <p:spTree>
+      <p:nvGrpSpPr>
+        <p:cNvPr id="1" name=""/>
+        <p:cNvGrpSpPr/>
+        <p:nvPr/>
+      </p:nvGrpSpPr>
+      <p:grpSpPr/>
+      <p:sp>
+        <p:nvSpPr>
+          <p:cNvPr id="2" name="Rectangle 1"/>
+          <p:cNvSpPr/>
+          <p:nvPr/>
+        </p:nvSpPr>
+        <p:spPr>
+          <a:xfrm>
+            <a:off x="0" y="0"/>
             <a:ext cx="12191695" cy="6858000"/>
           </a:xfrm>
           <a:prstGeom prst="rect">
@@ -6155,7 +6723,7 @@
                 </a:solidFill>
                 <a:latin typeface="Calibri"/>
               </a:rPr>
-              <a:t>L6  ·  14/14</a:t>
+              <a:t>L6  ·  15/15</a:t>
             </a:r>
           </a:p>
         </p:txBody>
@@ -7104,7 +7672,7 @@
                 </a:solidFill>
                 <a:latin typeface="Calibri"/>
               </a:rPr>
-              <a:t>L6  ·  2/14</a:t>
+              <a:t>L6  ·  2/15</a:t>
             </a:r>
           </a:p>
         </p:txBody>
@@ -7607,7 +8175,7 @@
                 </a:solidFill>
                 <a:latin typeface="Calibri"/>
               </a:rPr>
-              <a:t>L6  ·  3/14</a:t>
+              <a:t>L6  ·  3/15</a:t>
             </a:r>
           </a:p>
         </p:txBody>
@@ -8668,7 +9236,7 @@
                 </a:solidFill>
                 <a:latin typeface="Calibri"/>
               </a:rPr>
-              <a:t>L6  ·  4/14</a:t>
+              <a:t>L6  ·  4/15</a:t>
             </a:r>
           </a:p>
         </p:txBody>
@@ -9060,7 +9628,7 @@
                 </a:solidFill>
                 <a:latin typeface="Calibri"/>
               </a:rPr>
-              <a:t>L6  ·  5/14</a:t>
+              <a:t>L6  ·  5/15</a:t>
             </a:r>
           </a:p>
         </p:txBody>
@@ -9320,7 +9888,7 @@
                 </a:solidFill>
                 <a:latin typeface="Calibri"/>
               </a:rPr>
-              <a:t>L6  ·  6/14</a:t>
+              <a:t>L6  ·  6/15</a:t>
             </a:r>
           </a:p>
         </p:txBody>
@@ -9712,7 +10280,7 @@
                 </a:solidFill>
                 <a:latin typeface="Calibri"/>
               </a:rPr>
-              <a:t>L6  ·  7/14</a:t>
+              <a:t>L6  ·  7/15</a:t>
             </a:r>
           </a:p>
         </p:txBody>
@@ -10901,7 +11469,7 @@
                 </a:solidFill>
                 <a:latin typeface="Calibri"/>
               </a:rPr>
-              <a:t>L6  ·  8/14</a:t>
+              <a:t>L6  ·  8/15</a:t>
             </a:r>
           </a:p>
         </p:txBody>
@@ -12356,7 +12924,7 @@
                 </a:solidFill>
                 <a:latin typeface="Calibri"/>
               </a:rPr>
-              <a:t>L6  ·  9/14</a:t>
+              <a:t>L6  ·  9/15</a:t>
             </a:r>
           </a:p>
         </p:txBody>
